--- a/documents/Transformers as generative models for neural activity.pptx
+++ b/documents/Transformers as generative models for neural activity.pptx
@@ -5,10 +5,10 @@
     <p:sldMasterId id="2147483671" r:id="rId4"/>
   </p:sldMasterIdLst>
   <p:notesMasterIdLst>
-    <p:notesMasterId r:id="rId22"/>
+    <p:notesMasterId r:id="rId27"/>
   </p:notesMasterIdLst>
   <p:handoutMasterIdLst>
-    <p:handoutMasterId r:id="rId23"/>
+    <p:handoutMasterId r:id="rId28"/>
   </p:handoutMasterIdLst>
   <p:sldIdLst>
     <p:sldId id="539" r:id="rId5"/>
@@ -28,6 +28,11 @@
     <p:sldId id="578" r:id="rId19"/>
     <p:sldId id="579" r:id="rId20"/>
     <p:sldId id="580" r:id="rId21"/>
+    <p:sldId id="581" r:id="rId22"/>
+    <p:sldId id="582" r:id="rId23"/>
+    <p:sldId id="583" r:id="rId24"/>
+    <p:sldId id="584" r:id="rId25"/>
+    <p:sldId id="585" r:id="rId26"/>
   </p:sldIdLst>
   <p:sldSz cx="12192000" cy="6858000"/>
   <p:notesSz cx="6858000" cy="9144000"/>
@@ -468,7 +473,7 @@
               </a:defRPr>
             </a:pPr>
             <a:r>
-              <a:rPr lang="de-DE"/>
+              <a:rPr lang="en-GB" noProof="0" dirty="0"/>
               <a:t>FID(Session)</a:t>
             </a:r>
           </a:p>
@@ -1541,7 +1546,7 @@
             <a:pPr rtl="0"/>
             <a:fld id="{A54DA340-CA88-40FE-8D9F-FB95A67E2ACC}" type="datetimeFigureOut">
               <a:rPr lang="en-US" smtClean="0"/>
-              <a:t>5/24/2026</a:t>
+              <a:t>5/25/2026</a:t>
             </a:fld>
             <a:endParaRPr lang="en-US"/>
           </a:p>
@@ -1722,7 +1727,7 @@
             <a:pPr rtl="0"/>
             <a:fld id="{A90BC4F2-6A87-450D-AD53-D2188421BC53}" type="datetimeFigureOut">
               <a:rPr lang="en-US" smtClean="0"/>
-              <a:t>5/24/2026</a:t>
+              <a:t>5/25/2026</a:t>
             </a:fld>
             <a:endParaRPr lang="en-US" dirty="0"/>
           </a:p>
@@ -2094,6 +2099,3154 @@
 </p:notes>
 </file>
 
+<file path=ppt/notesSlides/notesSlide10.xml><?xml version="1.0" encoding="utf-8"?>
+<p:notes xmlns:a="http://schemas.openxmlformats.org/drawingml/2006/main" xmlns:r="http://schemas.openxmlformats.org/officeDocument/2006/relationships" xmlns:p="http://schemas.openxmlformats.org/presentationml/2006/main">
+  <p:cSld>
+    <p:spTree>
+      <p:nvGrpSpPr>
+        <p:cNvPr id="1" name=""/>
+        <p:cNvGrpSpPr/>
+        <p:nvPr/>
+      </p:nvGrpSpPr>
+      <p:grpSpPr>
+        <a:xfrm>
+          <a:off x="0" y="0"/>
+          <a:ext cx="0" cy="0"/>
+          <a:chOff x="0" y="0"/>
+          <a:chExt cx="0" cy="0"/>
+        </a:xfrm>
+      </p:grpSpPr>
+      <p:sp>
+        <p:nvSpPr>
+          <p:cNvPr id="2" name="Folienbildplatzhalter 1"/>
+          <p:cNvSpPr>
+            <a:spLocks noGrp="1" noRot="1" noChangeAspect="1"/>
+          </p:cNvSpPr>
+          <p:nvPr>
+            <p:ph type="sldImg"/>
+          </p:nvPr>
+        </p:nvSpPr>
+        <p:spPr/>
+      </p:sp>
+      <p:sp>
+        <p:nvSpPr>
+          <p:cNvPr id="3" name="Notizenplatzhalter 2"/>
+          <p:cNvSpPr>
+            <a:spLocks noGrp="1"/>
+          </p:cNvSpPr>
+          <p:nvPr>
+            <p:ph type="body" idx="1"/>
+          </p:nvPr>
+        </p:nvSpPr>
+        <p:spPr/>
+        <p:txBody>
+          <a:bodyPr/>
+          <a:lstStyle/>
+          <a:p>
+            <a:pPr marL="0" marR="0" lvl="0" indent="0" algn="l" defTabSz="914400" rtl="0" eaLnBrk="1" fontAlgn="auto" latinLnBrk="0" hangingPunct="1">
+              <a:lnSpc>
+                <a:spcPct val="100000"/>
+              </a:lnSpc>
+              <a:spcBef>
+                <a:spcPts val="0"/>
+              </a:spcBef>
+              <a:spcAft>
+                <a:spcPts val="0"/>
+              </a:spcAft>
+              <a:buClrTx/>
+              <a:buSzTx/>
+              <a:buFontTx/>
+              <a:buNone/>
+              <a:tabLst/>
+              <a:defRPr/>
+            </a:pPr>
+            <a:r>
+              <a:rPr lang="en-US" dirty="0"/>
+              <a:t>Potential fix: Instead of only looking at rhythm, it splits the sequence into time blocks and keeps each block as its own feature — so shuffling the time order scrambles the blocks and the score finally reacts.</a:t>
+            </a:r>
+          </a:p>
+          <a:p>
+            <a:endParaRPr lang="de-DE" dirty="0"/>
+          </a:p>
+          <a:p>
+            <a:r>
+              <a:rPr lang="en-US" dirty="0"/>
+              <a:t>I already found that Brain FID is weak on temporal structure (the time-shuffle problem). Trial-matched R² measures something different — it matches each generated trial to its closest real trial via optimal transport and asks how well they line up. Two metrics that fail differently are much more convincing than one.</a:t>
+            </a:r>
+            <a:endParaRPr lang="de-DE" dirty="0"/>
+          </a:p>
+        </p:txBody>
+      </p:sp>
+      <p:sp>
+        <p:nvSpPr>
+          <p:cNvPr id="4" name="Foliennummernplatzhalter 3"/>
+          <p:cNvSpPr>
+            <a:spLocks noGrp="1"/>
+          </p:cNvSpPr>
+          <p:nvPr>
+            <p:ph type="sldNum" sz="quarter" idx="5"/>
+          </p:nvPr>
+        </p:nvSpPr>
+        <p:spPr/>
+        <p:txBody>
+          <a:bodyPr/>
+          <a:lstStyle/>
+          <a:p>
+            <a:pPr rtl="0"/>
+            <a:fld id="{4C3B2649-7BD8-4005-A99E-30D13769A8BD}" type="slidenum">
+              <a:rPr lang="en-US" smtClean="0"/>
+              <a:t>19</a:t>
+            </a:fld>
+            <a:endParaRPr lang="en-US" dirty="0"/>
+          </a:p>
+        </p:txBody>
+      </p:sp>
+    </p:spTree>
+    <p:extLst>
+      <p:ext uri="{BB962C8B-B14F-4D97-AF65-F5344CB8AC3E}">
+        <p14:creationId xmlns:p14="http://schemas.microsoft.com/office/powerpoint/2010/main" val="2428960971"/>
+      </p:ext>
+    </p:extLst>
+  </p:cSld>
+  <p:clrMapOvr>
+    <a:masterClrMapping/>
+  </p:clrMapOvr>
+</p:notes>
+</file>
+
+<file path=ppt/notesSlides/notesSlide2.xml><?xml version="1.0" encoding="utf-8"?>
+<p:notes xmlns:a="http://schemas.openxmlformats.org/drawingml/2006/main" xmlns:r="http://schemas.openxmlformats.org/officeDocument/2006/relationships" xmlns:p="http://schemas.openxmlformats.org/presentationml/2006/main">
+  <p:cSld>
+    <p:spTree>
+      <p:nvGrpSpPr>
+        <p:cNvPr id="1" name=""/>
+        <p:cNvGrpSpPr/>
+        <p:nvPr/>
+      </p:nvGrpSpPr>
+      <p:grpSpPr>
+        <a:xfrm>
+          <a:off x="0" y="0"/>
+          <a:ext cx="0" cy="0"/>
+          <a:chOff x="0" y="0"/>
+          <a:chExt cx="0" cy="0"/>
+        </a:xfrm>
+      </p:grpSpPr>
+      <p:sp>
+        <p:nvSpPr>
+          <p:cNvPr id="2" name="Folienbildplatzhalter 1"/>
+          <p:cNvSpPr>
+            <a:spLocks noGrp="1" noRot="1" noChangeAspect="1"/>
+          </p:cNvSpPr>
+          <p:nvPr>
+            <p:ph type="sldImg"/>
+          </p:nvPr>
+        </p:nvSpPr>
+        <p:spPr/>
+      </p:sp>
+      <p:sp>
+        <p:nvSpPr>
+          <p:cNvPr id="3" name="Notizenplatzhalter 2"/>
+          <p:cNvSpPr>
+            <a:spLocks noGrp="1"/>
+          </p:cNvSpPr>
+          <p:nvPr>
+            <p:ph type="body" idx="1"/>
+          </p:nvPr>
+        </p:nvSpPr>
+        <p:spPr/>
+        <p:txBody>
+          <a:bodyPr/>
+          <a:lstStyle/>
+          <a:p>
+            <a:r>
+              <a:rPr lang="en-US" b="1" dirty="0"/>
+              <a:t>Bellec et al. (2021), </a:t>
+            </a:r>
+            <a:r>
+              <a:rPr lang="en-US" b="1" dirty="0" err="1"/>
+              <a:t>NeurIPS</a:t>
+            </a:r>
+            <a:r>
+              <a:rPr lang="en-US" dirty="0"/>
+              <a:t> - "Showed that spiking nets trained on likelihood alone generate unrealistic activity, and that adding a term matching real activity statistics fixes it.“</a:t>
+            </a:r>
+          </a:p>
+          <a:p>
+            <a:r>
+              <a:rPr lang="en-US" b="1" dirty="0" err="1"/>
+              <a:t>Sourmpis</a:t>
+            </a:r>
+            <a:r>
+              <a:rPr lang="en-US" b="1" dirty="0"/>
+              <a:t> et al. (2023), </a:t>
+            </a:r>
+            <a:r>
+              <a:rPr lang="en-US" b="1" dirty="0" err="1"/>
+              <a:t>NeurIPS</a:t>
+            </a:r>
+            <a:r>
+              <a:rPr lang="en-US" dirty="0"/>
+              <a:t> - "Introduced trial matching: comparing the </a:t>
+            </a:r>
+            <a:r>
+              <a:rPr lang="en-US" i="1" dirty="0"/>
+              <a:t>distributions</a:t>
+            </a:r>
+            <a:r>
+              <a:rPr lang="en-US" dirty="0"/>
+              <a:t> of generated and real trials to capture trial-to-trial variability."</a:t>
+            </a:r>
+          </a:p>
+          <a:p>
+            <a:r>
+              <a:rPr lang="en-US" b="1" dirty="0" err="1"/>
+              <a:t>Sourmpis</a:t>
+            </a:r>
+            <a:r>
+              <a:rPr lang="en-US" b="1" dirty="0"/>
+              <a:t>, Bellec et al. (2025), </a:t>
+            </a:r>
+            <a:r>
+              <a:rPr lang="en-US" b="1" dirty="0" err="1"/>
+              <a:t>eLife</a:t>
+            </a:r>
+            <a:r>
+              <a:rPr lang="en-US" dirty="0"/>
+              <a:t> - "Proposed a perturbation test: good models predict how the brain reacts to interventions, even when they score worse on standard test data."</a:t>
+            </a:r>
+          </a:p>
+          <a:p>
+            <a:r>
+              <a:rPr lang="en-US" b="1" dirty="0"/>
+              <a:t>Ye et al. (2025), ICLR (NDT3)</a:t>
+            </a:r>
+            <a:r>
+              <a:rPr lang="en-US" dirty="0"/>
+              <a:t> - "A large transformer for motor decoding from 2000h of data, finding that scaling saturates — more data isn't enough."</a:t>
+            </a:r>
+          </a:p>
+          <a:p>
+            <a:r>
+              <a:rPr lang="en-US" b="1" dirty="0"/>
+              <a:t>The thread to say out loud</a:t>
+            </a:r>
+            <a:r>
+              <a:rPr lang="en-US" dirty="0"/>
+              <a:t>: "The first three are my lab's own line of work on generatively evaluating neural models — that's what I build on. The last shows why it matters: scaling alone doesn't solve it.“ I did it on transformer not RNN, LSTM and so on </a:t>
+            </a:r>
+          </a:p>
+          <a:p>
+            <a:endParaRPr lang="de-DE" dirty="0"/>
+          </a:p>
+        </p:txBody>
+      </p:sp>
+      <p:sp>
+        <p:nvSpPr>
+          <p:cNvPr id="4" name="Foliennummernplatzhalter 3"/>
+          <p:cNvSpPr>
+            <a:spLocks noGrp="1"/>
+          </p:cNvSpPr>
+          <p:nvPr>
+            <p:ph type="sldNum" sz="quarter" idx="5"/>
+          </p:nvPr>
+        </p:nvSpPr>
+        <p:spPr/>
+        <p:txBody>
+          <a:bodyPr/>
+          <a:lstStyle/>
+          <a:p>
+            <a:pPr rtl="0"/>
+            <a:fld id="{4C3B2649-7BD8-4005-A99E-30D13769A8BD}" type="slidenum">
+              <a:rPr lang="en-US" smtClean="0"/>
+              <a:t>5</a:t>
+            </a:fld>
+            <a:endParaRPr lang="en-US" dirty="0"/>
+          </a:p>
+        </p:txBody>
+      </p:sp>
+    </p:spTree>
+    <p:extLst>
+      <p:ext uri="{BB962C8B-B14F-4D97-AF65-F5344CB8AC3E}">
+        <p14:creationId xmlns:p14="http://schemas.microsoft.com/office/powerpoint/2010/main" val="17391959"/>
+      </p:ext>
+    </p:extLst>
+  </p:cSld>
+  <p:clrMapOvr>
+    <a:masterClrMapping/>
+  </p:clrMapOvr>
+</p:notes>
+</file>
+
+<file path=ppt/notesSlides/notesSlide3.xml><?xml version="1.0" encoding="utf-8"?>
+<p:notes xmlns:a="http://schemas.openxmlformats.org/drawingml/2006/main" xmlns:r="http://schemas.openxmlformats.org/officeDocument/2006/relationships" xmlns:p="http://schemas.openxmlformats.org/presentationml/2006/main">
+  <p:cSld>
+    <p:spTree>
+      <p:nvGrpSpPr>
+        <p:cNvPr id="1" name=""/>
+        <p:cNvGrpSpPr/>
+        <p:nvPr/>
+      </p:nvGrpSpPr>
+      <p:grpSpPr>
+        <a:xfrm>
+          <a:off x="0" y="0"/>
+          <a:ext cx="0" cy="0"/>
+          <a:chOff x="0" y="0"/>
+          <a:chExt cx="0" cy="0"/>
+        </a:xfrm>
+      </p:grpSpPr>
+      <p:sp>
+        <p:nvSpPr>
+          <p:cNvPr id="2" name="Folienbildplatzhalter 1"/>
+          <p:cNvSpPr>
+            <a:spLocks noGrp="1" noRot="1" noChangeAspect="1"/>
+          </p:cNvSpPr>
+          <p:nvPr>
+            <p:ph type="sldImg"/>
+          </p:nvPr>
+        </p:nvSpPr>
+        <p:spPr/>
+      </p:sp>
+      <p:sp>
+        <p:nvSpPr>
+          <p:cNvPr id="3" name="Notizenplatzhalter 2"/>
+          <p:cNvSpPr>
+            <a:spLocks noGrp="1"/>
+          </p:cNvSpPr>
+          <p:nvPr>
+            <p:ph type="body" idx="1"/>
+          </p:nvPr>
+        </p:nvSpPr>
+        <p:spPr/>
+        <p:txBody>
+          <a:bodyPr/>
+          <a:lstStyle/>
+          <a:p>
+            <a:r>
+              <a:rPr lang="de-DE" dirty="0"/>
+              <a:t>Spike F1: Model </a:t>
+            </a:r>
+            <a:r>
+              <a:rPr lang="de-DE" dirty="0" err="1"/>
+              <a:t>predicts</a:t>
+            </a:r>
+            <a:r>
+              <a:rPr lang="de-DE" dirty="0"/>
+              <a:t> </a:t>
+            </a:r>
+            <a:r>
+              <a:rPr lang="de-DE" dirty="0" err="1"/>
+              <a:t>for</a:t>
+            </a:r>
+            <a:r>
+              <a:rPr lang="de-DE" dirty="0"/>
+              <a:t> </a:t>
+            </a:r>
+            <a:r>
+              <a:rPr lang="de-DE" dirty="0" err="1"/>
+              <a:t>hidden</a:t>
+            </a:r>
+            <a:r>
+              <a:rPr lang="de-DE" dirty="0"/>
+              <a:t> </a:t>
+            </a:r>
+            <a:r>
+              <a:rPr lang="de-DE" dirty="0" err="1"/>
+              <a:t>neurons</a:t>
+            </a:r>
+            <a:r>
+              <a:rPr lang="de-DE" dirty="0"/>
+              <a:t>, </a:t>
+            </a:r>
+            <a:r>
+              <a:rPr lang="de-DE" dirty="0" err="1"/>
+              <a:t>whether</a:t>
+            </a:r>
+            <a:r>
+              <a:rPr lang="de-DE" dirty="0"/>
+              <a:t> </a:t>
+            </a:r>
+            <a:r>
+              <a:rPr lang="de-DE" dirty="0" err="1"/>
+              <a:t>they</a:t>
+            </a:r>
+            <a:r>
+              <a:rPr lang="de-DE" dirty="0"/>
+              <a:t> </a:t>
+            </a:r>
+            <a:r>
+              <a:rPr lang="de-DE" dirty="0" err="1"/>
+              <a:t>fire</a:t>
+            </a:r>
+            <a:r>
+              <a:rPr lang="de-DE" dirty="0"/>
+              <a:t> in </a:t>
+            </a:r>
+            <a:r>
+              <a:rPr lang="de-DE" dirty="0" err="1"/>
+              <a:t>the</a:t>
+            </a:r>
+            <a:r>
+              <a:rPr lang="de-DE" dirty="0"/>
+              <a:t> </a:t>
+            </a:r>
+            <a:r>
+              <a:rPr lang="de-DE" dirty="0" err="1"/>
+              <a:t>next</a:t>
+            </a:r>
+            <a:r>
+              <a:rPr lang="de-DE" dirty="0"/>
+              <a:t> </a:t>
+            </a:r>
+            <a:r>
+              <a:rPr lang="de-DE" dirty="0" err="1"/>
+              <a:t>timestep</a:t>
+            </a:r>
+            <a:r>
+              <a:rPr lang="de-DE" dirty="0"/>
+              <a:t>. F1 </a:t>
+            </a:r>
+            <a:r>
+              <a:rPr lang="de-DE" dirty="0" err="1"/>
+              <a:t>measures</a:t>
+            </a:r>
+            <a:r>
+              <a:rPr lang="de-DE" dirty="0"/>
+              <a:t> </a:t>
+            </a:r>
+            <a:r>
+              <a:rPr lang="de-DE" dirty="0" err="1"/>
+              <a:t>how</a:t>
+            </a:r>
+            <a:r>
+              <a:rPr lang="de-DE" dirty="0"/>
+              <a:t> </a:t>
+            </a:r>
+            <a:r>
+              <a:rPr lang="de-DE" dirty="0" err="1"/>
+              <a:t>good</a:t>
+            </a:r>
+            <a:r>
+              <a:rPr lang="de-DE" dirty="0"/>
+              <a:t> </a:t>
+            </a:r>
+            <a:r>
+              <a:rPr lang="de-DE" dirty="0" err="1"/>
+              <a:t>this</a:t>
+            </a:r>
+            <a:r>
+              <a:rPr lang="de-DE" dirty="0"/>
+              <a:t> </a:t>
+            </a:r>
+            <a:r>
+              <a:rPr lang="de-DE" dirty="0" err="1"/>
+              <a:t>prediction</a:t>
+            </a:r>
+            <a:r>
+              <a:rPr lang="de-DE" dirty="0"/>
+              <a:t> </a:t>
+            </a:r>
+            <a:r>
+              <a:rPr lang="de-DE" dirty="0" err="1"/>
+              <a:t>is</a:t>
+            </a:r>
+            <a:r>
+              <a:rPr lang="de-DE" dirty="0"/>
+              <a:t>.</a:t>
+            </a:r>
+          </a:p>
+          <a:p>
+            <a:r>
+              <a:rPr lang="de-DE" dirty="0" err="1"/>
+              <a:t>Accuracy</a:t>
+            </a:r>
+            <a:r>
+              <a:rPr lang="de-DE" dirty="0"/>
+              <a:t> </a:t>
+            </a:r>
+            <a:r>
+              <a:rPr lang="de-DE" dirty="0" err="1"/>
+              <a:t>would</a:t>
+            </a:r>
+            <a:r>
+              <a:rPr lang="de-DE" dirty="0"/>
+              <a:t> not </a:t>
+            </a:r>
+            <a:r>
+              <a:rPr lang="de-DE" dirty="0" err="1"/>
+              <a:t>work</a:t>
+            </a:r>
+            <a:r>
+              <a:rPr lang="de-DE" dirty="0"/>
+              <a:t> </a:t>
+            </a:r>
+            <a:r>
+              <a:rPr lang="de-DE" dirty="0" err="1"/>
+              <a:t>because</a:t>
+            </a:r>
+            <a:r>
+              <a:rPr lang="de-DE" dirty="0"/>
+              <a:t> </a:t>
+            </a:r>
+            <a:r>
+              <a:rPr lang="de-DE" dirty="0" err="1"/>
+              <a:t>neurons</a:t>
+            </a:r>
+            <a:r>
+              <a:rPr lang="de-DE" dirty="0"/>
+              <a:t> </a:t>
+            </a:r>
+            <a:r>
+              <a:rPr lang="de-DE" dirty="0" err="1"/>
+              <a:t>fire</a:t>
+            </a:r>
+            <a:r>
+              <a:rPr lang="de-DE" dirty="0"/>
+              <a:t> </a:t>
+            </a:r>
+            <a:r>
+              <a:rPr lang="de-DE" dirty="0" err="1"/>
+              <a:t>seldom</a:t>
+            </a:r>
+            <a:r>
+              <a:rPr lang="de-DE" dirty="0"/>
+              <a:t> (5% </a:t>
+            </a:r>
+            <a:r>
+              <a:rPr lang="de-DE" dirty="0" err="1"/>
+              <a:t>firerate</a:t>
+            </a:r>
+            <a:r>
+              <a:rPr lang="de-DE" dirty="0"/>
+              <a:t>, </a:t>
+            </a:r>
+            <a:r>
+              <a:rPr lang="de-DE" dirty="0" err="1"/>
+              <a:t>model</a:t>
+            </a:r>
+            <a:r>
+              <a:rPr lang="de-DE" dirty="0"/>
+              <a:t> </a:t>
+            </a:r>
+            <a:r>
+              <a:rPr lang="de-DE" dirty="0" err="1"/>
+              <a:t>that</a:t>
+            </a:r>
+            <a:r>
+              <a:rPr lang="de-DE" dirty="0"/>
+              <a:t> </a:t>
+            </a:r>
+            <a:r>
+              <a:rPr lang="de-DE" dirty="0" err="1"/>
+              <a:t>says</a:t>
+            </a:r>
+            <a:r>
+              <a:rPr lang="de-DE" dirty="0"/>
+              <a:t> 100% </a:t>
+            </a:r>
+            <a:r>
+              <a:rPr lang="de-DE" dirty="0" err="1"/>
+              <a:t>of</a:t>
+            </a:r>
+            <a:r>
+              <a:rPr lang="de-DE" dirty="0"/>
+              <a:t> time </a:t>
+            </a:r>
+            <a:r>
+              <a:rPr lang="de-DE" dirty="0" err="1"/>
+              <a:t>no</a:t>
+            </a:r>
+            <a:r>
+              <a:rPr lang="de-DE" dirty="0"/>
+              <a:t> </a:t>
+            </a:r>
+            <a:r>
+              <a:rPr lang="de-DE" dirty="0" err="1"/>
+              <a:t>fire</a:t>
+            </a:r>
+            <a:r>
+              <a:rPr lang="de-DE" dirty="0"/>
+              <a:t> </a:t>
+            </a:r>
+            <a:r>
+              <a:rPr lang="de-DE" dirty="0" err="1"/>
+              <a:t>is</a:t>
+            </a:r>
+            <a:r>
+              <a:rPr lang="de-DE" dirty="0"/>
+              <a:t> 95% </a:t>
+            </a:r>
+            <a:r>
+              <a:rPr lang="de-DE" dirty="0" err="1"/>
+              <a:t>right</a:t>
+            </a:r>
+            <a:r>
+              <a:rPr lang="de-DE" dirty="0"/>
+              <a:t> but also </a:t>
+            </a:r>
+            <a:r>
+              <a:rPr lang="de-DE" dirty="0" err="1"/>
+              <a:t>useless</a:t>
+            </a:r>
+            <a:r>
+              <a:rPr lang="de-DE" dirty="0"/>
+              <a:t>). </a:t>
+            </a:r>
+            <a:r>
+              <a:rPr lang="de-DE" dirty="0" err="1"/>
+              <a:t>Combines</a:t>
+            </a:r>
+            <a:r>
+              <a:rPr lang="de-DE" dirty="0"/>
+              <a:t> Precision (TP/(TP+FP)) + Recall (TP/(TP+FN)) </a:t>
+            </a:r>
+            <a:r>
+              <a:rPr lang="de-DE" dirty="0">
+                <a:sym typeface="Wingdings" panose="05000000000000000000" pitchFamily="2" charset="2"/>
+              </a:rPr>
+              <a:t> 2*P*R/(P+R)</a:t>
+            </a:r>
+            <a:r>
+              <a:rPr lang="de-DE" dirty="0"/>
+              <a:t>. F1=1 </a:t>
+            </a:r>
+            <a:r>
+              <a:rPr lang="de-DE" dirty="0" err="1"/>
+              <a:t>perfect</a:t>
+            </a:r>
+            <a:r>
+              <a:rPr lang="de-DE" dirty="0"/>
+              <a:t>, 0 </a:t>
+            </a:r>
+            <a:r>
+              <a:rPr lang="de-DE" dirty="0" err="1"/>
+              <a:t>bad</a:t>
+            </a:r>
+            <a:r>
+              <a:rPr lang="de-DE" dirty="0"/>
+              <a:t>.</a:t>
+            </a:r>
+          </a:p>
+          <a:p>
+            <a:endParaRPr lang="de-DE" dirty="0"/>
+          </a:p>
+          <a:p>
+            <a:r>
+              <a:rPr lang="de-DE" dirty="0" err="1"/>
+              <a:t>Behaviour</a:t>
+            </a:r>
+            <a:r>
+              <a:rPr lang="de-DE" dirty="0"/>
+              <a:t> R^2: The Model </a:t>
+            </a:r>
+            <a:r>
+              <a:rPr lang="de-DE" dirty="0" err="1"/>
+              <a:t>predicts</a:t>
+            </a:r>
+            <a:r>
+              <a:rPr lang="de-DE" dirty="0"/>
+              <a:t> a </a:t>
+            </a:r>
+            <a:r>
+              <a:rPr lang="de-DE" dirty="0" err="1"/>
+              <a:t>continous</a:t>
+            </a:r>
+            <a:r>
+              <a:rPr lang="de-DE" dirty="0"/>
+              <a:t> „</a:t>
+            </a:r>
+            <a:r>
+              <a:rPr lang="de-DE" dirty="0" err="1"/>
+              <a:t>behaviour</a:t>
+            </a:r>
+            <a:r>
+              <a:rPr lang="de-DE" dirty="0"/>
+              <a:t> </a:t>
+            </a:r>
+            <a:r>
+              <a:rPr lang="de-DE" dirty="0" err="1"/>
+              <a:t>signal</a:t>
+            </a:r>
+            <a:r>
+              <a:rPr lang="de-DE" dirty="0"/>
+              <a:t>“ </a:t>
+            </a:r>
+            <a:r>
+              <a:rPr lang="de-DE" dirty="0" err="1"/>
+              <a:t>from</a:t>
+            </a:r>
+            <a:r>
+              <a:rPr lang="de-DE" dirty="0"/>
+              <a:t> </a:t>
+            </a:r>
+            <a:r>
+              <a:rPr lang="de-DE" dirty="0" err="1"/>
+              <a:t>the</a:t>
+            </a:r>
+            <a:r>
+              <a:rPr lang="de-DE" dirty="0"/>
+              <a:t> </a:t>
+            </a:r>
+            <a:r>
+              <a:rPr lang="de-DE" dirty="0" err="1"/>
+              <a:t>neural</a:t>
+            </a:r>
+            <a:r>
+              <a:rPr lang="de-DE" dirty="0"/>
+              <a:t> </a:t>
+            </a:r>
+            <a:r>
+              <a:rPr lang="de-DE" dirty="0" err="1"/>
+              <a:t>activity</a:t>
+            </a:r>
+            <a:r>
+              <a:rPr lang="de-DE" dirty="0"/>
+              <a:t>. (</a:t>
+            </a:r>
+            <a:r>
+              <a:rPr lang="de-DE" dirty="0" err="1"/>
+              <a:t>Runningspeed</a:t>
+            </a:r>
+            <a:r>
+              <a:rPr lang="de-DE" dirty="0"/>
+              <a:t>, </a:t>
+            </a:r>
+            <a:r>
+              <a:rPr lang="de-DE" dirty="0" err="1"/>
+              <a:t>gaze</a:t>
+            </a:r>
+            <a:r>
+              <a:rPr lang="de-DE" dirty="0"/>
+              <a:t> </a:t>
+            </a:r>
+            <a:r>
+              <a:rPr lang="de-DE" dirty="0" err="1"/>
+              <a:t>direction</a:t>
+            </a:r>
+            <a:r>
+              <a:rPr lang="de-DE" dirty="0"/>
+              <a:t>, </a:t>
+            </a:r>
+            <a:r>
+              <a:rPr lang="de-DE" dirty="0" err="1"/>
+              <a:t>pupilsize</a:t>
+            </a:r>
+            <a:r>
+              <a:rPr lang="de-DE" dirty="0"/>
+              <a:t>). R^2 </a:t>
+            </a:r>
+            <a:r>
+              <a:rPr lang="de-DE" dirty="0" err="1"/>
+              <a:t>measures</a:t>
+            </a:r>
+            <a:r>
+              <a:rPr lang="de-DE" dirty="0"/>
+              <a:t> </a:t>
+            </a:r>
+            <a:r>
+              <a:rPr lang="de-DE" dirty="0" err="1"/>
+              <a:t>how</a:t>
+            </a:r>
+            <a:r>
+              <a:rPr lang="de-DE" dirty="0"/>
+              <a:t> </a:t>
+            </a:r>
+            <a:r>
+              <a:rPr lang="de-DE" dirty="0" err="1"/>
+              <a:t>much</a:t>
+            </a:r>
+            <a:r>
+              <a:rPr lang="de-DE" dirty="0"/>
+              <a:t> </a:t>
+            </a:r>
+            <a:r>
+              <a:rPr lang="de-DE" dirty="0" err="1"/>
+              <a:t>of</a:t>
+            </a:r>
+            <a:r>
+              <a:rPr lang="de-DE" dirty="0"/>
+              <a:t> </a:t>
+            </a:r>
+            <a:r>
+              <a:rPr lang="de-DE" dirty="0" err="1"/>
+              <a:t>the</a:t>
+            </a:r>
+            <a:r>
+              <a:rPr lang="de-DE" dirty="0"/>
+              <a:t> real </a:t>
+            </a:r>
+            <a:r>
+              <a:rPr lang="de-DE" dirty="0" err="1"/>
+              <a:t>fluctuation</a:t>
+            </a:r>
+            <a:r>
+              <a:rPr lang="de-DE" dirty="0"/>
+              <a:t> in </a:t>
+            </a:r>
+            <a:r>
+              <a:rPr lang="de-DE" dirty="0" err="1"/>
+              <a:t>behaviour</a:t>
+            </a:r>
+            <a:r>
+              <a:rPr lang="de-DE" dirty="0"/>
+              <a:t> </a:t>
+            </a:r>
+            <a:r>
+              <a:rPr lang="de-DE" dirty="0" err="1"/>
+              <a:t>is</a:t>
+            </a:r>
+            <a:r>
+              <a:rPr lang="de-DE" dirty="0"/>
+              <a:t> </a:t>
+            </a:r>
+            <a:r>
+              <a:rPr lang="de-DE" dirty="0" err="1"/>
+              <a:t>captured</a:t>
+            </a:r>
+            <a:r>
+              <a:rPr lang="de-DE" dirty="0"/>
+              <a:t>. R^2=1-“How </a:t>
+            </a:r>
+            <a:r>
+              <a:rPr lang="de-DE" dirty="0" err="1"/>
+              <a:t>far</a:t>
+            </a:r>
+            <a:r>
+              <a:rPr lang="de-DE" dirty="0"/>
+              <a:t> </a:t>
+            </a:r>
+            <a:r>
+              <a:rPr lang="de-DE" dirty="0" err="1"/>
+              <a:t>the</a:t>
+            </a:r>
+            <a:r>
+              <a:rPr lang="de-DE" dirty="0"/>
+              <a:t> </a:t>
+            </a:r>
+            <a:r>
+              <a:rPr lang="de-DE" dirty="0" err="1"/>
+              <a:t>prediction</a:t>
+            </a:r>
+            <a:r>
+              <a:rPr lang="de-DE" dirty="0"/>
+              <a:t> </a:t>
+            </a:r>
+            <a:r>
+              <a:rPr lang="de-DE" dirty="0" err="1"/>
+              <a:t>is</a:t>
+            </a:r>
+            <a:r>
+              <a:rPr lang="de-DE" dirty="0"/>
+              <a:t> off“/“</a:t>
+            </a:r>
+            <a:r>
+              <a:rPr lang="de-DE" dirty="0" err="1"/>
+              <a:t>how</a:t>
+            </a:r>
+            <a:r>
+              <a:rPr lang="de-DE" dirty="0"/>
+              <a:t> </a:t>
+            </a:r>
+            <a:r>
+              <a:rPr lang="de-DE" dirty="0" err="1"/>
+              <a:t>much</a:t>
+            </a:r>
+            <a:r>
+              <a:rPr lang="de-DE" dirty="0"/>
+              <a:t> </a:t>
+            </a:r>
+            <a:r>
+              <a:rPr lang="de-DE" dirty="0" err="1"/>
+              <a:t>the</a:t>
+            </a:r>
+            <a:r>
+              <a:rPr lang="de-DE" dirty="0"/>
+              <a:t> real </a:t>
+            </a:r>
+            <a:r>
+              <a:rPr lang="de-DE" dirty="0" err="1"/>
+              <a:t>signal</a:t>
+            </a:r>
+            <a:r>
+              <a:rPr lang="de-DE" dirty="0"/>
+              <a:t> </a:t>
+            </a:r>
+            <a:r>
+              <a:rPr lang="de-DE" dirty="0" err="1"/>
+              <a:t>fluctuates</a:t>
+            </a:r>
+            <a:r>
+              <a:rPr lang="de-DE" dirty="0"/>
+              <a:t>“. (1=</a:t>
+            </a:r>
+            <a:r>
+              <a:rPr lang="de-DE" dirty="0" err="1"/>
+              <a:t>perfect</a:t>
+            </a:r>
+            <a:r>
+              <a:rPr lang="de-DE" dirty="0"/>
+              <a:t>, 0=</a:t>
+            </a:r>
+            <a:r>
+              <a:rPr lang="de-DE" dirty="0" err="1"/>
+              <a:t>random</a:t>
+            </a:r>
+            <a:r>
+              <a:rPr lang="de-DE" dirty="0"/>
+              <a:t>, &lt;0=</a:t>
+            </a:r>
+            <a:r>
+              <a:rPr lang="de-DE" dirty="0" err="1"/>
+              <a:t>worse</a:t>
+            </a:r>
+            <a:r>
+              <a:rPr lang="de-DE" dirty="0"/>
+              <a:t> </a:t>
+            </a:r>
+            <a:r>
+              <a:rPr lang="de-DE" dirty="0" err="1"/>
+              <a:t>than</a:t>
+            </a:r>
+            <a:r>
+              <a:rPr lang="de-DE" dirty="0"/>
+              <a:t> </a:t>
+            </a:r>
+            <a:r>
+              <a:rPr lang="de-DE" dirty="0" err="1"/>
+              <a:t>random</a:t>
+            </a:r>
+            <a:r>
+              <a:rPr lang="de-DE" dirty="0"/>
+              <a:t>)</a:t>
+            </a:r>
+          </a:p>
+          <a:p>
+            <a:endParaRPr lang="de-DE" dirty="0"/>
+          </a:p>
+          <a:p>
+            <a:r>
+              <a:rPr lang="de-DE" dirty="0"/>
+              <a:t>Stimulus </a:t>
+            </a:r>
+            <a:r>
+              <a:rPr lang="de-DE" dirty="0" err="1"/>
+              <a:t>accuracy</a:t>
+            </a:r>
+            <a:r>
+              <a:rPr lang="de-DE" dirty="0"/>
+              <a:t>: Does </a:t>
+            </a:r>
+            <a:r>
+              <a:rPr lang="de-DE" dirty="0" err="1"/>
+              <a:t>the</a:t>
+            </a:r>
+            <a:r>
+              <a:rPr lang="de-DE" dirty="0"/>
+              <a:t> </a:t>
+            </a:r>
+            <a:r>
+              <a:rPr lang="de-DE" dirty="0" err="1"/>
+              <a:t>model</a:t>
+            </a:r>
+            <a:r>
+              <a:rPr lang="de-DE" dirty="0"/>
+              <a:t> </a:t>
+            </a:r>
+            <a:r>
+              <a:rPr lang="de-DE" dirty="0" err="1"/>
+              <a:t>get</a:t>
+            </a:r>
+            <a:r>
+              <a:rPr lang="de-DE" dirty="0"/>
+              <a:t> </a:t>
+            </a:r>
+            <a:r>
+              <a:rPr lang="de-DE" dirty="0" err="1"/>
+              <a:t>what</a:t>
+            </a:r>
+            <a:r>
+              <a:rPr lang="de-DE" dirty="0"/>
+              <a:t> </a:t>
+            </a:r>
+            <a:r>
+              <a:rPr lang="de-DE" dirty="0" err="1"/>
+              <a:t>kind</a:t>
+            </a:r>
+            <a:r>
+              <a:rPr lang="de-DE" dirty="0"/>
+              <a:t> </a:t>
+            </a:r>
+            <a:r>
+              <a:rPr lang="de-DE" dirty="0" err="1"/>
+              <a:t>of</a:t>
+            </a:r>
+            <a:r>
+              <a:rPr lang="de-DE" dirty="0"/>
+              <a:t> </a:t>
+            </a:r>
+            <a:r>
+              <a:rPr lang="de-DE" dirty="0" err="1"/>
+              <a:t>stimulus</a:t>
+            </a:r>
+            <a:r>
+              <a:rPr lang="de-DE" dirty="0"/>
+              <a:t> was </a:t>
+            </a:r>
+            <a:r>
+              <a:rPr lang="de-DE" dirty="0" err="1"/>
+              <a:t>shown</a:t>
+            </a:r>
+            <a:r>
+              <a:rPr lang="de-DE" dirty="0"/>
+              <a:t>. (</a:t>
+            </a:r>
+            <a:r>
+              <a:rPr lang="de-DE" dirty="0" err="1"/>
+              <a:t>classification</a:t>
+            </a:r>
+            <a:r>
+              <a:rPr lang="de-DE" dirty="0"/>
+              <a:t>)</a:t>
+            </a:r>
+          </a:p>
+          <a:p>
+            <a:endParaRPr lang="de-DE" dirty="0"/>
+          </a:p>
+          <a:p>
+            <a:r>
+              <a:rPr lang="de-DE" dirty="0"/>
+              <a:t>So </a:t>
+            </a:r>
+            <a:r>
+              <a:rPr lang="de-DE" dirty="0" err="1"/>
+              <a:t>they</a:t>
+            </a:r>
+            <a:r>
+              <a:rPr lang="de-DE" dirty="0"/>
+              <a:t> </a:t>
+            </a:r>
+            <a:r>
+              <a:rPr lang="de-DE" dirty="0" err="1"/>
+              <a:t>measure</a:t>
+            </a:r>
+            <a:r>
+              <a:rPr lang="de-DE" dirty="0"/>
+              <a:t> and </a:t>
+            </a:r>
+            <a:r>
+              <a:rPr lang="de-DE" dirty="0" err="1"/>
+              <a:t>evaluate</a:t>
+            </a:r>
+            <a:r>
+              <a:rPr lang="de-DE" dirty="0"/>
+              <a:t>/</a:t>
+            </a:r>
+            <a:r>
+              <a:rPr lang="de-DE" dirty="0" err="1"/>
+              <a:t>validate</a:t>
+            </a:r>
+            <a:r>
+              <a:rPr lang="de-DE" dirty="0"/>
+              <a:t> real </a:t>
+            </a:r>
+            <a:r>
+              <a:rPr lang="de-DE" dirty="0" err="1"/>
+              <a:t>data</a:t>
+            </a:r>
+            <a:r>
+              <a:rPr lang="de-DE" dirty="0"/>
+              <a:t>.</a:t>
+            </a:r>
+          </a:p>
+          <a:p>
+            <a:endParaRPr lang="de-DE" dirty="0"/>
+          </a:p>
+          <a:p>
+            <a:r>
+              <a:rPr lang="de-DE" dirty="0"/>
+              <a:t>Generative on </a:t>
+            </a:r>
+            <a:r>
+              <a:rPr lang="de-DE" dirty="0" err="1"/>
+              <a:t>the</a:t>
+            </a:r>
+            <a:r>
+              <a:rPr lang="de-DE" dirty="0"/>
+              <a:t> </a:t>
+            </a:r>
+            <a:r>
+              <a:rPr lang="de-DE" dirty="0" err="1"/>
+              <a:t>other</a:t>
+            </a:r>
+            <a:r>
+              <a:rPr lang="de-DE" dirty="0"/>
+              <a:t> </a:t>
+            </a:r>
+            <a:r>
+              <a:rPr lang="de-DE" dirty="0" err="1"/>
+              <a:t>hand</a:t>
+            </a:r>
+            <a:r>
+              <a:rPr lang="de-DE" dirty="0"/>
+              <a:t>: </a:t>
+            </a:r>
+            <a:r>
+              <a:rPr lang="de-DE" dirty="0" err="1"/>
+              <a:t>judges</a:t>
+            </a:r>
+            <a:r>
+              <a:rPr lang="de-DE" dirty="0"/>
+              <a:t> </a:t>
+            </a:r>
+            <a:r>
+              <a:rPr lang="de-DE" dirty="0" err="1"/>
+              <a:t>realism</a:t>
+            </a:r>
+            <a:r>
+              <a:rPr lang="de-DE" dirty="0"/>
+              <a:t>. „</a:t>
+            </a:r>
+            <a:r>
+              <a:rPr lang="de-DE" dirty="0" err="1"/>
+              <a:t>does</a:t>
+            </a:r>
+            <a:r>
+              <a:rPr lang="de-DE" dirty="0"/>
+              <a:t> </a:t>
+            </a:r>
+            <a:r>
+              <a:rPr lang="de-DE" dirty="0" err="1"/>
+              <a:t>the</a:t>
+            </a:r>
+            <a:r>
+              <a:rPr lang="de-DE" dirty="0"/>
+              <a:t> </a:t>
+            </a:r>
+            <a:r>
+              <a:rPr lang="de-DE" dirty="0" err="1"/>
+              <a:t>generated</a:t>
+            </a:r>
+            <a:r>
+              <a:rPr lang="de-DE" dirty="0"/>
+              <a:t> </a:t>
+            </a:r>
+            <a:r>
+              <a:rPr lang="de-DE" dirty="0" err="1"/>
+              <a:t>activity</a:t>
+            </a:r>
+            <a:r>
+              <a:rPr lang="de-DE" dirty="0"/>
+              <a:t> </a:t>
+            </a:r>
+            <a:r>
+              <a:rPr lang="de-DE" dirty="0" err="1"/>
+              <a:t>look</a:t>
+            </a:r>
+            <a:r>
+              <a:rPr lang="de-DE" dirty="0"/>
+              <a:t> real“</a:t>
+            </a:r>
+          </a:p>
+        </p:txBody>
+      </p:sp>
+      <p:sp>
+        <p:nvSpPr>
+          <p:cNvPr id="4" name="Foliennummernplatzhalter 3"/>
+          <p:cNvSpPr>
+            <a:spLocks noGrp="1"/>
+          </p:cNvSpPr>
+          <p:nvPr>
+            <p:ph type="sldNum" sz="quarter" idx="5"/>
+          </p:nvPr>
+        </p:nvSpPr>
+        <p:spPr/>
+        <p:txBody>
+          <a:bodyPr/>
+          <a:lstStyle/>
+          <a:p>
+            <a:pPr rtl="0"/>
+            <a:fld id="{4C3B2649-7BD8-4005-A99E-30D13769A8BD}" type="slidenum">
+              <a:rPr lang="en-US" smtClean="0"/>
+              <a:t>6</a:t>
+            </a:fld>
+            <a:endParaRPr lang="en-US" dirty="0"/>
+          </a:p>
+        </p:txBody>
+      </p:sp>
+    </p:spTree>
+    <p:extLst>
+      <p:ext uri="{BB962C8B-B14F-4D97-AF65-F5344CB8AC3E}">
+        <p14:creationId xmlns:p14="http://schemas.microsoft.com/office/powerpoint/2010/main" val="3311368000"/>
+      </p:ext>
+    </p:extLst>
+  </p:cSld>
+  <p:clrMapOvr>
+    <a:masterClrMapping/>
+  </p:clrMapOvr>
+</p:notes>
+</file>
+
+<file path=ppt/notesSlides/notesSlide4.xml><?xml version="1.0" encoding="utf-8"?>
+<p:notes xmlns:a="http://schemas.openxmlformats.org/drawingml/2006/main" xmlns:r="http://schemas.openxmlformats.org/officeDocument/2006/relationships" xmlns:p="http://schemas.openxmlformats.org/presentationml/2006/main">
+  <p:cSld>
+    <p:spTree>
+      <p:nvGrpSpPr>
+        <p:cNvPr id="1" name=""/>
+        <p:cNvGrpSpPr/>
+        <p:nvPr/>
+      </p:nvGrpSpPr>
+      <p:grpSpPr>
+        <a:xfrm>
+          <a:off x="0" y="0"/>
+          <a:ext cx="0" cy="0"/>
+          <a:chOff x="0" y="0"/>
+          <a:chExt cx="0" cy="0"/>
+        </a:xfrm>
+      </p:grpSpPr>
+      <p:sp>
+        <p:nvSpPr>
+          <p:cNvPr id="2" name="Folienbildplatzhalter 1"/>
+          <p:cNvSpPr>
+            <a:spLocks noGrp="1" noRot="1" noChangeAspect="1"/>
+          </p:cNvSpPr>
+          <p:nvPr>
+            <p:ph type="sldImg"/>
+          </p:nvPr>
+        </p:nvSpPr>
+        <p:spPr/>
+      </p:sp>
+      <p:sp>
+        <p:nvSpPr>
+          <p:cNvPr id="3" name="Notizenplatzhalter 2"/>
+          <p:cNvSpPr>
+            <a:spLocks noGrp="1"/>
+          </p:cNvSpPr>
+          <p:nvPr>
+            <p:ph type="body" idx="1"/>
+          </p:nvPr>
+        </p:nvSpPr>
+        <p:spPr/>
+        <p:txBody>
+          <a:bodyPr/>
+          <a:lstStyle/>
+          <a:p>
+            <a:r>
+              <a:rPr lang="de-DE" dirty="0"/>
+              <a:t>This </a:t>
+            </a:r>
+            <a:r>
+              <a:rPr lang="de-DE" dirty="0" err="1"/>
+              <a:t>is</a:t>
+            </a:r>
+            <a:r>
+              <a:rPr lang="de-DE" dirty="0"/>
+              <a:t> </a:t>
+            </a:r>
+            <a:r>
+              <a:rPr lang="de-DE" dirty="0" err="1"/>
+              <a:t>how</a:t>
+            </a:r>
+            <a:r>
+              <a:rPr lang="de-DE" dirty="0"/>
+              <a:t> Brain FID </a:t>
+            </a:r>
+            <a:r>
+              <a:rPr lang="de-DE" dirty="0" err="1"/>
+              <a:t>works</a:t>
+            </a:r>
+            <a:r>
+              <a:rPr lang="de-DE" dirty="0"/>
+              <a:t> in 4 </a:t>
+            </a:r>
+            <a:r>
+              <a:rPr lang="de-DE" dirty="0" err="1"/>
+              <a:t>steps</a:t>
+            </a:r>
+            <a:r>
+              <a:rPr lang="de-DE" dirty="0"/>
+              <a:t>:</a:t>
+            </a:r>
+          </a:p>
+          <a:p>
+            <a:endParaRPr lang="de-DE" dirty="0"/>
+          </a:p>
+          <a:p>
+            <a:r>
+              <a:rPr lang="de-DE" dirty="0"/>
+              <a:t>Spikes: </a:t>
+            </a:r>
+            <a:r>
+              <a:rPr lang="de-DE" dirty="0" err="1"/>
+              <a:t>We</a:t>
+            </a:r>
+            <a:r>
+              <a:rPr lang="de-DE" dirty="0"/>
+              <a:t> </a:t>
+            </a:r>
+            <a:r>
+              <a:rPr lang="de-DE" dirty="0" err="1"/>
+              <a:t>start</a:t>
+            </a:r>
+            <a:r>
+              <a:rPr lang="de-DE" dirty="0"/>
+              <a:t> </a:t>
+            </a:r>
+            <a:r>
+              <a:rPr lang="de-DE" dirty="0" err="1"/>
+              <a:t>with</a:t>
+            </a:r>
+            <a:r>
+              <a:rPr lang="de-DE" dirty="0"/>
+              <a:t> </a:t>
+            </a:r>
+            <a:r>
+              <a:rPr lang="de-DE" dirty="0" err="1"/>
+              <a:t>two</a:t>
+            </a:r>
+            <a:r>
+              <a:rPr lang="de-DE" dirty="0"/>
+              <a:t> stets </a:t>
+            </a:r>
+            <a:r>
+              <a:rPr lang="de-DE" dirty="0" err="1"/>
+              <a:t>of</a:t>
+            </a:r>
+            <a:r>
+              <a:rPr lang="de-DE" dirty="0"/>
+              <a:t> </a:t>
+            </a:r>
+            <a:r>
+              <a:rPr lang="de-DE" dirty="0" err="1"/>
+              <a:t>spike</a:t>
+            </a:r>
+            <a:r>
+              <a:rPr lang="de-DE" dirty="0"/>
+              <a:t> </a:t>
+            </a:r>
+            <a:r>
+              <a:rPr lang="de-DE" dirty="0" err="1"/>
+              <a:t>rasters</a:t>
+            </a:r>
+            <a:r>
+              <a:rPr lang="de-DE" dirty="0"/>
+              <a:t>: real </a:t>
+            </a:r>
+            <a:r>
+              <a:rPr lang="de-DE" dirty="0" err="1"/>
+              <a:t>recordings</a:t>
+            </a:r>
+            <a:r>
+              <a:rPr lang="de-DE" dirty="0"/>
+              <a:t>, and </a:t>
+            </a:r>
+            <a:r>
+              <a:rPr lang="de-DE" dirty="0" err="1"/>
+              <a:t>sequences</a:t>
+            </a:r>
+            <a:r>
+              <a:rPr lang="de-DE" dirty="0"/>
+              <a:t> </a:t>
+            </a:r>
+            <a:r>
+              <a:rPr lang="de-DE" dirty="0" err="1"/>
+              <a:t>the</a:t>
+            </a:r>
+            <a:r>
+              <a:rPr lang="de-DE" dirty="0"/>
+              <a:t> </a:t>
+            </a:r>
+            <a:r>
+              <a:rPr lang="de-DE" dirty="0" err="1"/>
+              <a:t>model</a:t>
+            </a:r>
+            <a:r>
+              <a:rPr lang="de-DE" dirty="0"/>
+              <a:t> </a:t>
+            </a:r>
+            <a:r>
+              <a:rPr lang="de-DE" dirty="0" err="1"/>
+              <a:t>generated</a:t>
+            </a:r>
+            <a:r>
+              <a:rPr lang="de-DE" dirty="0"/>
+              <a:t> </a:t>
+            </a:r>
+            <a:r>
+              <a:rPr lang="de-DE" dirty="0" err="1"/>
+              <a:t>autoregressively</a:t>
+            </a:r>
+            <a:r>
+              <a:rPr lang="de-DE" dirty="0"/>
+              <a:t>. The </a:t>
+            </a:r>
+            <a:r>
+              <a:rPr lang="de-DE" dirty="0" err="1"/>
+              <a:t>question</a:t>
+            </a:r>
+            <a:r>
+              <a:rPr lang="de-DE" dirty="0"/>
+              <a:t> </a:t>
+            </a:r>
+            <a:r>
+              <a:rPr lang="de-DE" dirty="0" err="1"/>
+              <a:t>is</a:t>
+            </a:r>
+            <a:r>
+              <a:rPr lang="de-DE" dirty="0"/>
+              <a:t> </a:t>
+            </a:r>
+            <a:r>
+              <a:rPr lang="de-DE" dirty="0" err="1"/>
+              <a:t>whether</a:t>
+            </a:r>
+            <a:r>
+              <a:rPr lang="de-DE" dirty="0"/>
+              <a:t> </a:t>
+            </a:r>
+            <a:r>
+              <a:rPr lang="de-DE" dirty="0" err="1"/>
+              <a:t>these</a:t>
+            </a:r>
+            <a:r>
+              <a:rPr lang="de-DE" dirty="0"/>
+              <a:t> </a:t>
+            </a:r>
+            <a:r>
+              <a:rPr lang="de-DE" dirty="0" err="1"/>
+              <a:t>two</a:t>
+            </a:r>
+            <a:r>
+              <a:rPr lang="de-DE" dirty="0"/>
+              <a:t> </a:t>
+            </a:r>
+            <a:r>
+              <a:rPr lang="de-DE" dirty="0" err="1"/>
+              <a:t>look</a:t>
+            </a:r>
+            <a:r>
+              <a:rPr lang="de-DE" dirty="0"/>
+              <a:t> </a:t>
+            </a:r>
+            <a:r>
+              <a:rPr lang="de-DE" dirty="0" err="1"/>
+              <a:t>statistically</a:t>
+            </a:r>
+            <a:r>
+              <a:rPr lang="de-DE" dirty="0"/>
+              <a:t> </a:t>
+            </a:r>
+            <a:r>
+              <a:rPr lang="de-DE" dirty="0" err="1"/>
+              <a:t>the</a:t>
+            </a:r>
+            <a:r>
+              <a:rPr lang="de-DE" dirty="0"/>
+              <a:t> same?</a:t>
+            </a:r>
+          </a:p>
+          <a:p>
+            <a:endParaRPr lang="de-DE" dirty="0"/>
+          </a:p>
+          <a:p>
+            <a:r>
+              <a:rPr lang="de-DE" dirty="0"/>
+              <a:t>Pool </a:t>
+            </a:r>
+            <a:r>
+              <a:rPr lang="de-DE" dirty="0" err="1"/>
+              <a:t>by</a:t>
+            </a:r>
+            <a:r>
+              <a:rPr lang="de-DE" dirty="0"/>
+              <a:t> </a:t>
+            </a:r>
+            <a:r>
+              <a:rPr lang="de-DE" dirty="0" err="1"/>
+              <a:t>area</a:t>
+            </a:r>
+            <a:r>
+              <a:rPr lang="de-DE" dirty="0"/>
+              <a:t>: Individual </a:t>
+            </a:r>
+            <a:r>
+              <a:rPr lang="de-DE" dirty="0" err="1"/>
+              <a:t>neurons</a:t>
+            </a:r>
+            <a:r>
+              <a:rPr lang="de-DE" dirty="0"/>
+              <a:t> </a:t>
+            </a:r>
+            <a:r>
+              <a:rPr lang="de-DE" dirty="0" err="1"/>
+              <a:t>are</a:t>
+            </a:r>
+            <a:r>
+              <a:rPr lang="de-DE" dirty="0"/>
+              <a:t> </a:t>
+            </a:r>
+            <a:r>
+              <a:rPr lang="de-DE" dirty="0" err="1"/>
+              <a:t>too</a:t>
+            </a:r>
+            <a:r>
+              <a:rPr lang="de-DE" dirty="0"/>
+              <a:t> </a:t>
+            </a:r>
+            <a:r>
+              <a:rPr lang="de-DE" dirty="0" err="1"/>
+              <a:t>noisy</a:t>
+            </a:r>
+            <a:r>
+              <a:rPr lang="de-DE" dirty="0"/>
+              <a:t> </a:t>
+            </a:r>
+            <a:r>
+              <a:rPr lang="de-DE" dirty="0" err="1"/>
+              <a:t>to</a:t>
+            </a:r>
+            <a:r>
+              <a:rPr lang="de-DE" dirty="0"/>
+              <a:t> </a:t>
+            </a:r>
+            <a:r>
+              <a:rPr lang="de-DE" dirty="0" err="1"/>
+              <a:t>compare</a:t>
+            </a:r>
+            <a:r>
+              <a:rPr lang="de-DE" dirty="0"/>
+              <a:t> </a:t>
+            </a:r>
+            <a:r>
+              <a:rPr lang="de-DE" dirty="0" err="1"/>
+              <a:t>directly</a:t>
+            </a:r>
+            <a:r>
+              <a:rPr lang="de-DE" dirty="0"/>
+              <a:t>, so </a:t>
+            </a:r>
+            <a:r>
+              <a:rPr lang="de-DE" dirty="0" err="1"/>
+              <a:t>we</a:t>
+            </a:r>
+            <a:r>
+              <a:rPr lang="de-DE" dirty="0"/>
+              <a:t> </a:t>
+            </a:r>
+            <a:r>
+              <a:rPr lang="de-DE" dirty="0" err="1"/>
+              <a:t>have</a:t>
+            </a:r>
+            <a:r>
+              <a:rPr lang="de-DE" dirty="0"/>
+              <a:t> </a:t>
+            </a:r>
+            <a:r>
+              <a:rPr lang="de-DE" dirty="0" err="1"/>
+              <a:t>to</a:t>
+            </a:r>
+            <a:r>
+              <a:rPr lang="de-DE" dirty="0"/>
+              <a:t> </a:t>
+            </a:r>
+            <a:r>
+              <a:rPr lang="de-DE" dirty="0" err="1"/>
+              <a:t>average</a:t>
+            </a:r>
+            <a:r>
+              <a:rPr lang="de-DE" dirty="0"/>
+              <a:t> </a:t>
+            </a:r>
+            <a:r>
+              <a:rPr lang="de-DE" dirty="0" err="1"/>
+              <a:t>them</a:t>
+            </a:r>
+            <a:r>
+              <a:rPr lang="de-DE" dirty="0"/>
+              <a:t> per </a:t>
+            </a:r>
+            <a:r>
+              <a:rPr lang="de-DE" dirty="0" err="1"/>
+              <a:t>brain</a:t>
+            </a:r>
+            <a:r>
+              <a:rPr lang="de-DE" dirty="0"/>
+              <a:t> </a:t>
+            </a:r>
+            <a:r>
+              <a:rPr lang="de-DE" dirty="0" err="1"/>
+              <a:t>region</a:t>
+            </a:r>
+            <a:r>
+              <a:rPr lang="de-DE" dirty="0"/>
+              <a:t> </a:t>
+            </a:r>
+            <a:r>
+              <a:rPr lang="de-DE" dirty="0" err="1"/>
+              <a:t>using</a:t>
+            </a:r>
+            <a:r>
+              <a:rPr lang="de-DE" dirty="0"/>
+              <a:t> </a:t>
+            </a:r>
+            <a:r>
+              <a:rPr lang="de-DE" dirty="0" err="1"/>
+              <a:t>the</a:t>
+            </a:r>
+            <a:r>
+              <a:rPr lang="de-DE" dirty="0"/>
+              <a:t> </a:t>
+            </a:r>
+            <a:r>
+              <a:rPr lang="de-DE" dirty="0" err="1"/>
+              <a:t>atlas</a:t>
+            </a:r>
+            <a:r>
+              <a:rPr lang="de-DE" dirty="0"/>
+              <a:t> </a:t>
+            </a:r>
+            <a:r>
+              <a:rPr lang="de-DE" dirty="0" err="1"/>
+              <a:t>labels</a:t>
+            </a:r>
+            <a:r>
+              <a:rPr lang="de-DE" dirty="0"/>
+              <a:t> </a:t>
+            </a:r>
+            <a:r>
+              <a:rPr lang="de-DE" dirty="0" err="1"/>
+              <a:t>from</a:t>
+            </a:r>
+            <a:r>
+              <a:rPr lang="de-DE" dirty="0"/>
+              <a:t> </a:t>
+            </a:r>
+            <a:r>
+              <a:rPr lang="de-DE" dirty="0" err="1"/>
+              <a:t>the</a:t>
+            </a:r>
+            <a:r>
+              <a:rPr lang="de-DE" dirty="0"/>
+              <a:t> Allen </a:t>
+            </a:r>
+            <a:r>
+              <a:rPr lang="de-DE" dirty="0" err="1"/>
+              <a:t>institute</a:t>
+            </a:r>
+            <a:r>
+              <a:rPr lang="de-DE" dirty="0"/>
+              <a:t>. This </a:t>
+            </a:r>
+            <a:r>
+              <a:rPr lang="de-DE" dirty="0" err="1"/>
+              <a:t>turns</a:t>
+            </a:r>
+            <a:r>
+              <a:rPr lang="de-DE" dirty="0"/>
+              <a:t> 100+ </a:t>
+            </a:r>
+            <a:r>
+              <a:rPr lang="de-DE" dirty="0" err="1"/>
+              <a:t>neurons</a:t>
+            </a:r>
+            <a:r>
+              <a:rPr lang="de-DE" dirty="0"/>
+              <a:t> </a:t>
+            </a:r>
+            <a:r>
+              <a:rPr lang="de-DE" dirty="0" err="1"/>
+              <a:t>into</a:t>
+            </a:r>
+            <a:r>
+              <a:rPr lang="de-DE" dirty="0"/>
+              <a:t> a </a:t>
+            </a:r>
+            <a:r>
+              <a:rPr lang="de-DE" dirty="0" err="1"/>
+              <a:t>handful</a:t>
+            </a:r>
+            <a:r>
+              <a:rPr lang="de-DE" dirty="0"/>
+              <a:t> </a:t>
+            </a:r>
+            <a:r>
+              <a:rPr lang="de-DE" dirty="0" err="1"/>
+              <a:t>of</a:t>
+            </a:r>
+            <a:r>
+              <a:rPr lang="de-DE" dirty="0"/>
+              <a:t> </a:t>
+            </a:r>
+            <a:r>
+              <a:rPr lang="de-DE" dirty="0" err="1"/>
+              <a:t>population</a:t>
+            </a:r>
+            <a:r>
+              <a:rPr lang="de-DE" dirty="0"/>
+              <a:t> </a:t>
+            </a:r>
+            <a:r>
+              <a:rPr lang="de-DE" dirty="0" err="1"/>
+              <a:t>signals</a:t>
+            </a:r>
+            <a:r>
+              <a:rPr lang="de-DE" dirty="0"/>
+              <a:t>.</a:t>
+            </a:r>
+          </a:p>
+          <a:p>
+            <a:endParaRPr lang="de-DE" dirty="0"/>
+          </a:p>
+          <a:p>
+            <a:r>
+              <a:rPr lang="de-DE" dirty="0" err="1"/>
+              <a:t>Frequency</a:t>
+            </a:r>
+            <a:r>
+              <a:rPr lang="de-DE" dirty="0"/>
+              <a:t> </a:t>
+            </a:r>
+            <a:r>
+              <a:rPr lang="de-DE" dirty="0" err="1"/>
+              <a:t>features</a:t>
+            </a:r>
+            <a:r>
+              <a:rPr lang="de-DE" dirty="0"/>
+              <a:t>: </a:t>
+            </a:r>
+            <a:r>
+              <a:rPr lang="de-DE" dirty="0" err="1"/>
+              <a:t>For</a:t>
+            </a:r>
+            <a:r>
+              <a:rPr lang="de-DE" dirty="0"/>
+              <a:t> </a:t>
+            </a:r>
+            <a:r>
+              <a:rPr lang="de-DE" dirty="0" err="1"/>
+              <a:t>each</a:t>
+            </a:r>
+            <a:r>
+              <a:rPr lang="de-DE" dirty="0"/>
+              <a:t> </a:t>
+            </a:r>
+            <a:r>
+              <a:rPr lang="de-DE" dirty="0" err="1"/>
+              <a:t>region</a:t>
+            </a:r>
+            <a:r>
+              <a:rPr lang="de-DE" dirty="0"/>
+              <a:t> </a:t>
+            </a:r>
+            <a:r>
+              <a:rPr lang="de-DE" dirty="0" err="1"/>
+              <a:t>then</a:t>
+            </a:r>
+            <a:r>
+              <a:rPr lang="de-DE" dirty="0"/>
+              <a:t> I </a:t>
+            </a:r>
+            <a:r>
+              <a:rPr lang="de-DE" dirty="0" err="1"/>
+              <a:t>extracted</a:t>
+            </a:r>
+            <a:r>
+              <a:rPr lang="de-DE" dirty="0"/>
+              <a:t> </a:t>
+            </a:r>
+            <a:r>
+              <a:rPr lang="de-DE" dirty="0" err="1"/>
+              <a:t>how</a:t>
+            </a:r>
+            <a:r>
+              <a:rPr lang="de-DE" dirty="0"/>
+              <a:t> </a:t>
+            </a:r>
+            <a:r>
+              <a:rPr lang="de-DE" dirty="0" err="1"/>
+              <a:t>much</a:t>
+            </a:r>
+            <a:r>
+              <a:rPr lang="de-DE" dirty="0"/>
+              <a:t> </a:t>
+            </a:r>
+            <a:r>
+              <a:rPr lang="de-DE" dirty="0" err="1"/>
+              <a:t>oscillation</a:t>
+            </a:r>
+            <a:r>
+              <a:rPr lang="de-DE" dirty="0"/>
+              <a:t> power </a:t>
+            </a:r>
+            <a:r>
+              <a:rPr lang="de-DE" dirty="0" err="1"/>
+              <a:t>sits</a:t>
+            </a:r>
+            <a:r>
+              <a:rPr lang="de-DE" dirty="0"/>
+              <a:t> in different </a:t>
+            </a:r>
+            <a:r>
+              <a:rPr lang="de-DE" dirty="0" err="1"/>
+              <a:t>frequency</a:t>
+            </a:r>
+            <a:r>
+              <a:rPr lang="de-DE" dirty="0"/>
+              <a:t> bands, </a:t>
+            </a:r>
+            <a:r>
+              <a:rPr lang="de-DE" dirty="0" err="1"/>
+              <a:t>from</a:t>
+            </a:r>
+            <a:r>
+              <a:rPr lang="de-DE" dirty="0"/>
+              <a:t> 2 </a:t>
+            </a:r>
+            <a:r>
+              <a:rPr lang="de-DE" dirty="0" err="1"/>
+              <a:t>to</a:t>
+            </a:r>
+            <a:r>
+              <a:rPr lang="de-DE" dirty="0"/>
+              <a:t> 30Hz. (2–30 Hz deckt die für kortikale Aktivität relevanten Rhythmen ab (</a:t>
+            </a:r>
+            <a:r>
+              <a:rPr lang="de-DE" dirty="0" err="1"/>
+              <a:t>theta</a:t>
+            </a:r>
+            <a:r>
+              <a:rPr lang="de-DE" dirty="0"/>
+              <a:t> ~4–8, </a:t>
+            </a:r>
+            <a:r>
+              <a:rPr lang="de-DE" dirty="0" err="1"/>
+              <a:t>alpha</a:t>
+            </a:r>
+            <a:r>
+              <a:rPr lang="de-DE" dirty="0"/>
+              <a:t> ~8–12, </a:t>
+            </a:r>
+            <a:r>
+              <a:rPr lang="de-DE" dirty="0" err="1"/>
+              <a:t>beta</a:t>
+            </a:r>
+            <a:r>
+              <a:rPr lang="de-DE" dirty="0"/>
+              <a:t> ~13–30 Hz). Unter 2 Hz ist quasi statisch, über 30 Hz brauchst du feinere Zeitauflösung als dein </a:t>
+            </a:r>
+            <a:r>
+              <a:rPr lang="de-DE" sz="1200" kern="1200" dirty="0" err="1">
+                <a:solidFill>
+                  <a:schemeClr val="tx1"/>
+                </a:solidFill>
+                <a:latin typeface="+mn-lt"/>
+                <a:ea typeface="+mn-ea"/>
+                <a:cs typeface="+mn-cs"/>
+              </a:rPr>
+              <a:t>dt</a:t>
+            </a:r>
+            <a:r>
+              <a:rPr lang="de-DE" sz="1200" kern="1200" dirty="0">
+                <a:solidFill>
+                  <a:schemeClr val="tx1"/>
+                </a:solidFill>
+                <a:latin typeface="+mn-lt"/>
+                <a:ea typeface="+mn-ea"/>
+                <a:cs typeface="+mn-cs"/>
+              </a:rPr>
+              <a:t>=0.02</a:t>
+            </a:r>
+            <a:r>
+              <a:rPr lang="de-DE" dirty="0"/>
+              <a:t> (Nyquist-Grenze = 25 Hz) überhaupt hergibt. </a:t>
+            </a:r>
+          </a:p>
+          <a:p>
+            <a:endParaRPr lang="de-DE" dirty="0"/>
+          </a:p>
+          <a:p>
+            <a:r>
+              <a:rPr lang="en-US" dirty="0"/>
+              <a:t>Fréchet distance — Finally I compare the feature distributions of real versus generated data. </a:t>
+            </a:r>
+            <a:endParaRPr lang="de-DE" dirty="0"/>
+          </a:p>
+        </p:txBody>
+      </p:sp>
+      <p:sp>
+        <p:nvSpPr>
+          <p:cNvPr id="4" name="Foliennummernplatzhalter 3"/>
+          <p:cNvSpPr>
+            <a:spLocks noGrp="1"/>
+          </p:cNvSpPr>
+          <p:nvPr>
+            <p:ph type="sldNum" sz="quarter" idx="5"/>
+          </p:nvPr>
+        </p:nvSpPr>
+        <p:spPr/>
+        <p:txBody>
+          <a:bodyPr/>
+          <a:lstStyle/>
+          <a:p>
+            <a:pPr rtl="0"/>
+            <a:fld id="{4C3B2649-7BD8-4005-A99E-30D13769A8BD}" type="slidenum">
+              <a:rPr lang="en-US" smtClean="0"/>
+              <a:t>8</a:t>
+            </a:fld>
+            <a:endParaRPr lang="en-US" dirty="0"/>
+          </a:p>
+        </p:txBody>
+      </p:sp>
+    </p:spTree>
+    <p:extLst>
+      <p:ext uri="{BB962C8B-B14F-4D97-AF65-F5344CB8AC3E}">
+        <p14:creationId xmlns:p14="http://schemas.microsoft.com/office/powerpoint/2010/main" val="2979920801"/>
+      </p:ext>
+    </p:extLst>
+  </p:cSld>
+  <p:clrMapOvr>
+    <a:masterClrMapping/>
+  </p:clrMapOvr>
+</p:notes>
+</file>
+
+<file path=ppt/notesSlides/notesSlide5.xml><?xml version="1.0" encoding="utf-8"?>
+<p:notes xmlns:a="http://schemas.openxmlformats.org/drawingml/2006/main" xmlns:r="http://schemas.openxmlformats.org/officeDocument/2006/relationships" xmlns:p="http://schemas.openxmlformats.org/presentationml/2006/main">
+  <p:cSld>
+    <p:spTree>
+      <p:nvGrpSpPr>
+        <p:cNvPr id="1" name=""/>
+        <p:cNvGrpSpPr/>
+        <p:nvPr/>
+      </p:nvGrpSpPr>
+      <p:grpSpPr>
+        <a:xfrm>
+          <a:off x="0" y="0"/>
+          <a:ext cx="0" cy="0"/>
+          <a:chOff x="0" y="0"/>
+          <a:chExt cx="0" cy="0"/>
+        </a:xfrm>
+      </p:grpSpPr>
+      <p:sp>
+        <p:nvSpPr>
+          <p:cNvPr id="2" name="Folienbildplatzhalter 1"/>
+          <p:cNvSpPr>
+            <a:spLocks noGrp="1" noRot="1" noChangeAspect="1"/>
+          </p:cNvSpPr>
+          <p:nvPr>
+            <p:ph type="sldImg"/>
+          </p:nvPr>
+        </p:nvSpPr>
+        <p:spPr/>
+      </p:sp>
+      <p:sp>
+        <p:nvSpPr>
+          <p:cNvPr id="3" name="Notizenplatzhalter 2"/>
+          <p:cNvSpPr>
+            <a:spLocks noGrp="1"/>
+          </p:cNvSpPr>
+          <p:nvPr>
+            <p:ph type="body" idx="1"/>
+          </p:nvPr>
+        </p:nvSpPr>
+        <p:spPr/>
+        <p:txBody>
+          <a:bodyPr/>
+          <a:lstStyle/>
+          <a:p>
+            <a:r>
+              <a:rPr lang="de-DE" dirty="0"/>
+              <a:t>A </a:t>
+            </a:r>
+            <a:r>
+              <a:rPr lang="de-DE" dirty="0" err="1"/>
+              <a:t>motivates</a:t>
+            </a:r>
+            <a:r>
+              <a:rPr lang="de-DE" dirty="0"/>
+              <a:t> B was </a:t>
+            </a:r>
+            <a:r>
+              <a:rPr lang="de-DE" dirty="0" err="1"/>
+              <a:t>my</a:t>
+            </a:r>
+            <a:r>
+              <a:rPr lang="de-DE" dirty="0"/>
+              <a:t> </a:t>
+            </a:r>
+            <a:r>
+              <a:rPr lang="de-DE" dirty="0" err="1"/>
+              <a:t>thought</a:t>
+            </a:r>
+            <a:r>
+              <a:rPr lang="de-DE" dirty="0"/>
+              <a:t> at </a:t>
+            </a:r>
+            <a:r>
+              <a:rPr lang="de-DE" b="1" dirty="0" err="1"/>
+              <a:t>first</a:t>
+            </a:r>
+            <a:endParaRPr lang="de-DE" b="1" dirty="0"/>
+          </a:p>
+        </p:txBody>
+      </p:sp>
+      <p:sp>
+        <p:nvSpPr>
+          <p:cNvPr id="4" name="Foliennummernplatzhalter 3"/>
+          <p:cNvSpPr>
+            <a:spLocks noGrp="1"/>
+          </p:cNvSpPr>
+          <p:nvPr>
+            <p:ph type="sldNum" sz="quarter" idx="5"/>
+          </p:nvPr>
+        </p:nvSpPr>
+        <p:spPr/>
+        <p:txBody>
+          <a:bodyPr/>
+          <a:lstStyle/>
+          <a:p>
+            <a:pPr rtl="0"/>
+            <a:fld id="{4C3B2649-7BD8-4005-A99E-30D13769A8BD}" type="slidenum">
+              <a:rPr lang="en-US" smtClean="0"/>
+              <a:t>10</a:t>
+            </a:fld>
+            <a:endParaRPr lang="en-US" dirty="0"/>
+          </a:p>
+        </p:txBody>
+      </p:sp>
+    </p:spTree>
+    <p:extLst>
+      <p:ext uri="{BB962C8B-B14F-4D97-AF65-F5344CB8AC3E}">
+        <p14:creationId xmlns:p14="http://schemas.microsoft.com/office/powerpoint/2010/main" val="3154127366"/>
+      </p:ext>
+    </p:extLst>
+  </p:cSld>
+  <p:clrMapOvr>
+    <a:masterClrMapping/>
+  </p:clrMapOvr>
+</p:notes>
+</file>
+
+<file path=ppt/notesSlides/notesSlide6.xml><?xml version="1.0" encoding="utf-8"?>
+<p:notes xmlns:a="http://schemas.openxmlformats.org/drawingml/2006/main" xmlns:r="http://schemas.openxmlformats.org/officeDocument/2006/relationships" xmlns:p="http://schemas.openxmlformats.org/presentationml/2006/main">
+  <p:cSld>
+    <p:spTree>
+      <p:nvGrpSpPr>
+        <p:cNvPr id="1" name=""/>
+        <p:cNvGrpSpPr/>
+        <p:nvPr/>
+      </p:nvGrpSpPr>
+      <p:grpSpPr>
+        <a:xfrm>
+          <a:off x="0" y="0"/>
+          <a:ext cx="0" cy="0"/>
+          <a:chOff x="0" y="0"/>
+          <a:chExt cx="0" cy="0"/>
+        </a:xfrm>
+      </p:grpSpPr>
+      <p:sp>
+        <p:nvSpPr>
+          <p:cNvPr id="2" name="Folienbildplatzhalter 1"/>
+          <p:cNvSpPr>
+            <a:spLocks noGrp="1" noRot="1" noChangeAspect="1"/>
+          </p:cNvSpPr>
+          <p:nvPr>
+            <p:ph type="sldImg"/>
+          </p:nvPr>
+        </p:nvSpPr>
+        <p:spPr/>
+      </p:sp>
+      <p:sp>
+        <p:nvSpPr>
+          <p:cNvPr id="3" name="Notizenplatzhalter 2"/>
+          <p:cNvSpPr>
+            <a:spLocks noGrp="1"/>
+          </p:cNvSpPr>
+          <p:nvPr>
+            <p:ph type="body" idx="1"/>
+          </p:nvPr>
+        </p:nvSpPr>
+        <p:spPr/>
+        <p:txBody>
+          <a:bodyPr/>
+          <a:lstStyle/>
+          <a:p>
+            <a:r>
+              <a:rPr lang="de-DE" dirty="0"/>
+              <a:t>My </a:t>
+            </a:r>
+            <a:r>
+              <a:rPr lang="de-DE" dirty="0" err="1"/>
+              <a:t>thought</a:t>
+            </a:r>
+            <a:r>
+              <a:rPr lang="de-DE" dirty="0"/>
+              <a:t> was: i </a:t>
+            </a:r>
+            <a:r>
+              <a:rPr lang="de-DE" dirty="0" err="1"/>
+              <a:t>dont</a:t>
+            </a:r>
+            <a:r>
+              <a:rPr lang="de-DE" dirty="0"/>
+              <a:t> </a:t>
+            </a:r>
+            <a:r>
+              <a:rPr lang="de-DE" dirty="0" err="1"/>
+              <a:t>neccessarily</a:t>
+            </a:r>
+            <a:r>
+              <a:rPr lang="de-DE" dirty="0"/>
+              <a:t> </a:t>
+            </a:r>
+            <a:r>
+              <a:rPr lang="de-DE" dirty="0" err="1"/>
+              <a:t>want</a:t>
+            </a:r>
+            <a:r>
+              <a:rPr lang="de-DE" dirty="0"/>
+              <a:t> </a:t>
+            </a:r>
+            <a:r>
+              <a:rPr lang="de-DE" dirty="0" err="1"/>
+              <a:t>to</a:t>
+            </a:r>
+            <a:r>
+              <a:rPr lang="de-DE" dirty="0"/>
+              <a:t> </a:t>
+            </a:r>
+            <a:r>
+              <a:rPr lang="de-DE" dirty="0" err="1"/>
+              <a:t>improve</a:t>
+            </a:r>
+            <a:r>
+              <a:rPr lang="de-DE" dirty="0"/>
+              <a:t> </a:t>
+            </a:r>
+            <a:r>
+              <a:rPr lang="de-DE" dirty="0" err="1"/>
+              <a:t>the</a:t>
+            </a:r>
+            <a:r>
+              <a:rPr lang="de-DE" dirty="0"/>
+              <a:t> </a:t>
+            </a:r>
+            <a:r>
+              <a:rPr lang="de-DE" dirty="0" err="1"/>
+              <a:t>training</a:t>
+            </a:r>
+            <a:r>
+              <a:rPr lang="de-DE" dirty="0"/>
+              <a:t> </a:t>
+            </a:r>
+            <a:r>
+              <a:rPr lang="de-DE" dirty="0" err="1"/>
+              <a:t>setup</a:t>
+            </a:r>
+            <a:r>
+              <a:rPr lang="de-DE" dirty="0"/>
+              <a:t> </a:t>
+            </a:r>
+            <a:r>
+              <a:rPr lang="de-DE" dirty="0" err="1"/>
+              <a:t>or</a:t>
+            </a:r>
+            <a:r>
+              <a:rPr lang="de-DE" dirty="0"/>
+              <a:t> </a:t>
+            </a:r>
+            <a:r>
+              <a:rPr lang="de-DE" dirty="0" err="1"/>
+              <a:t>the</a:t>
+            </a:r>
+            <a:r>
+              <a:rPr lang="de-DE" dirty="0"/>
+              <a:t> </a:t>
+            </a:r>
+            <a:r>
+              <a:rPr lang="de-DE" dirty="0" err="1"/>
+              <a:t>hyperparameters</a:t>
+            </a:r>
+            <a:r>
+              <a:rPr lang="de-DE" dirty="0"/>
+              <a:t> </a:t>
+            </a:r>
+            <a:r>
+              <a:rPr lang="de-DE" dirty="0" err="1"/>
+              <a:t>those</a:t>
+            </a:r>
+            <a:r>
+              <a:rPr lang="de-DE" dirty="0"/>
+              <a:t> </a:t>
+            </a:r>
+            <a:r>
+              <a:rPr lang="de-DE" dirty="0" err="1"/>
+              <a:t>should</a:t>
+            </a:r>
+            <a:r>
+              <a:rPr lang="de-DE" dirty="0"/>
+              <a:t> </a:t>
+            </a:r>
+            <a:r>
+              <a:rPr lang="de-DE" dirty="0" err="1"/>
+              <a:t>stay</a:t>
+            </a:r>
+            <a:r>
+              <a:rPr lang="de-DE" dirty="0"/>
+              <a:t> </a:t>
+            </a:r>
+            <a:r>
+              <a:rPr lang="de-DE" dirty="0" err="1"/>
+              <a:t>the</a:t>
+            </a:r>
+            <a:r>
+              <a:rPr lang="de-DE" dirty="0"/>
+              <a:t> same. Only </a:t>
+            </a:r>
+            <a:r>
+              <a:rPr lang="de-DE" dirty="0" err="1"/>
+              <a:t>the</a:t>
+            </a:r>
+            <a:r>
+              <a:rPr lang="de-DE" dirty="0"/>
+              <a:t> </a:t>
+            </a:r>
+            <a:r>
+              <a:rPr lang="de-DE" dirty="0" err="1"/>
+              <a:t>architecture</a:t>
+            </a:r>
+            <a:r>
+              <a:rPr lang="de-DE" dirty="0"/>
+              <a:t> </a:t>
+            </a:r>
+            <a:r>
+              <a:rPr lang="de-DE" dirty="0" err="1"/>
+              <a:t>differs</a:t>
+            </a:r>
+            <a:r>
+              <a:rPr lang="de-DE" dirty="0"/>
+              <a:t>. My </a:t>
+            </a:r>
+            <a:r>
+              <a:rPr lang="de-DE" dirty="0" err="1"/>
+              <a:t>baseline</a:t>
+            </a:r>
+            <a:r>
+              <a:rPr lang="de-DE" dirty="0"/>
+              <a:t> </a:t>
+            </a:r>
+            <a:r>
+              <a:rPr lang="de-DE" dirty="0" err="1"/>
+              <a:t>is</a:t>
+            </a:r>
+            <a:r>
+              <a:rPr lang="de-DE" dirty="0"/>
+              <a:t> a </a:t>
+            </a:r>
+            <a:r>
+              <a:rPr lang="de-DE" dirty="0" err="1"/>
+              <a:t>textbook</a:t>
+            </a:r>
+            <a:r>
+              <a:rPr lang="de-DE" dirty="0"/>
+              <a:t> GPT and </a:t>
+            </a:r>
+            <a:r>
+              <a:rPr lang="de-DE" dirty="0" err="1"/>
+              <a:t>the</a:t>
+            </a:r>
+            <a:r>
+              <a:rPr lang="de-DE" dirty="0"/>
+              <a:t> </a:t>
+            </a:r>
+            <a:r>
+              <a:rPr lang="de-DE" dirty="0" err="1"/>
+              <a:t>professor‘s</a:t>
+            </a:r>
+            <a:r>
+              <a:rPr lang="de-DE" dirty="0"/>
+              <a:t> </a:t>
+            </a:r>
+            <a:r>
+              <a:rPr lang="de-DE" dirty="0" err="1"/>
+              <a:t>SpikeGPT</a:t>
+            </a:r>
+            <a:r>
+              <a:rPr lang="de-DE" dirty="0"/>
+              <a:t> </a:t>
+            </a:r>
+            <a:r>
+              <a:rPr lang="de-DE" dirty="0" err="1"/>
+              <a:t>adds</a:t>
+            </a:r>
+            <a:r>
+              <a:rPr lang="de-DE" dirty="0"/>
+              <a:t> multiple </a:t>
+            </a:r>
+            <a:r>
+              <a:rPr lang="de-DE" dirty="0" err="1"/>
+              <a:t>refinements</a:t>
+            </a:r>
+            <a:r>
+              <a:rPr lang="de-DE" dirty="0"/>
+              <a:t>. </a:t>
+            </a:r>
+            <a:r>
+              <a:rPr lang="en-US" dirty="0"/>
+              <a:t>They of course all make sense and are SOTA choices — the question I also had then was how much do they actually matter? </a:t>
+            </a:r>
+          </a:p>
+          <a:p>
+            <a:endParaRPr lang="de-DE" dirty="0"/>
+          </a:p>
+          <a:p>
+            <a:r>
+              <a:rPr lang="en-US" b="1" dirty="0"/>
+              <a:t>Positional encoding</a:t>
+            </a:r>
+            <a:r>
+              <a:rPr lang="en-US" dirty="0"/>
+              <a:t> — "How the model knows the order of timesteps: I add a fixed sinusoidal signal once at the input; </a:t>
+            </a:r>
+            <a:r>
+              <a:rPr lang="en-US" dirty="0" err="1"/>
+              <a:t>SpikeGPT</a:t>
+            </a:r>
+            <a:r>
+              <a:rPr lang="en-US" dirty="0"/>
+              <a:t> rotates the representations inside every attention layer (</a:t>
+            </a:r>
+            <a:r>
+              <a:rPr lang="en-US" dirty="0" err="1"/>
+              <a:t>RoPE</a:t>
+            </a:r>
+            <a:r>
+              <a:rPr lang="en-US" dirty="0"/>
+              <a:t>), which generalizes better to position."</a:t>
+            </a:r>
+          </a:p>
+          <a:p>
+            <a:r>
+              <a:rPr lang="en-US" b="1" dirty="0"/>
+              <a:t>Attention</a:t>
+            </a:r>
+            <a:r>
+              <a:rPr lang="en-US" dirty="0"/>
+              <a:t> — "Both compute attention — mine the standard textbook way, </a:t>
+            </a:r>
+            <a:r>
+              <a:rPr lang="en-US" dirty="0" err="1"/>
+              <a:t>SpikeGPT</a:t>
+            </a:r>
+            <a:r>
+              <a:rPr lang="en-US" dirty="0"/>
+              <a:t> uses </a:t>
+            </a:r>
+            <a:r>
+              <a:rPr lang="en-US" dirty="0" err="1"/>
+              <a:t>FlexAttention</a:t>
+            </a:r>
+            <a:r>
+              <a:rPr lang="en-US" dirty="0"/>
+              <a:t>, an optimized GPU implementation."</a:t>
+            </a:r>
+          </a:p>
+          <a:p>
+            <a:r>
+              <a:rPr lang="en-US" b="1" dirty="0"/>
+              <a:t>Normalization</a:t>
+            </a:r>
+            <a:r>
+              <a:rPr lang="en-US" dirty="0"/>
+              <a:t> — "How activations are kept stable during training: I use </a:t>
+            </a:r>
+            <a:r>
+              <a:rPr lang="en-US" dirty="0" err="1"/>
+              <a:t>LayerNorm</a:t>
+            </a:r>
+            <a:r>
+              <a:rPr lang="en-US" dirty="0"/>
+              <a:t>, </a:t>
+            </a:r>
+            <a:r>
+              <a:rPr lang="en-US" dirty="0" err="1"/>
+              <a:t>SpikeGPT</a:t>
+            </a:r>
+            <a:r>
+              <a:rPr lang="en-US" dirty="0"/>
+              <a:t> uses </a:t>
+            </a:r>
+            <a:r>
+              <a:rPr lang="en-US" dirty="0" err="1"/>
+              <a:t>RMSNorm</a:t>
+            </a:r>
+            <a:r>
+              <a:rPr lang="en-US" dirty="0"/>
+              <a:t>, a slightly simpler and faster variant."</a:t>
+            </a:r>
+          </a:p>
+          <a:p>
+            <a:r>
+              <a:rPr lang="en-US" b="1" dirty="0"/>
+              <a:t>QK normalization</a:t>
+            </a:r>
+            <a:r>
+              <a:rPr lang="en-US" dirty="0"/>
+              <a:t> — "</a:t>
+            </a:r>
+            <a:r>
+              <a:rPr lang="en-US" dirty="0" err="1"/>
+              <a:t>SpikeGPT</a:t>
+            </a:r>
+            <a:r>
+              <a:rPr lang="en-US" dirty="0"/>
+              <a:t> additionally normalizes the queries and keys before attention for extra training stability — mine doesn't."</a:t>
+            </a:r>
+          </a:p>
+          <a:p>
+            <a:r>
+              <a:rPr lang="en-US" b="1" dirty="0"/>
+              <a:t>Output projection</a:t>
+            </a:r>
+            <a:r>
+              <a:rPr lang="en-US" dirty="0"/>
+              <a:t> — "A small initialization trick: </a:t>
+            </a:r>
+            <a:r>
+              <a:rPr lang="en-US" dirty="0" err="1"/>
+              <a:t>SpikeGPT</a:t>
+            </a:r>
+            <a:r>
+              <a:rPr lang="en-US" dirty="0"/>
+              <a:t> starts the attention output at zero so each layer begins as a no-op, which can stabilize early training."</a:t>
+            </a:r>
+          </a:p>
+          <a:p>
+            <a:endParaRPr lang="de-DE" dirty="0"/>
+          </a:p>
+        </p:txBody>
+      </p:sp>
+      <p:sp>
+        <p:nvSpPr>
+          <p:cNvPr id="4" name="Foliennummernplatzhalter 3"/>
+          <p:cNvSpPr>
+            <a:spLocks noGrp="1"/>
+          </p:cNvSpPr>
+          <p:nvPr>
+            <p:ph type="sldNum" sz="quarter" idx="5"/>
+          </p:nvPr>
+        </p:nvSpPr>
+        <p:spPr/>
+        <p:txBody>
+          <a:bodyPr/>
+          <a:lstStyle/>
+          <a:p>
+            <a:pPr rtl="0"/>
+            <a:fld id="{4C3B2649-7BD8-4005-A99E-30D13769A8BD}" type="slidenum">
+              <a:rPr lang="en-US" smtClean="0"/>
+              <a:t>11</a:t>
+            </a:fld>
+            <a:endParaRPr lang="en-US" dirty="0"/>
+          </a:p>
+        </p:txBody>
+      </p:sp>
+    </p:spTree>
+    <p:extLst>
+      <p:ext uri="{BB962C8B-B14F-4D97-AF65-F5344CB8AC3E}">
+        <p14:creationId xmlns:p14="http://schemas.microsoft.com/office/powerpoint/2010/main" val="1225185899"/>
+      </p:ext>
+    </p:extLst>
+  </p:cSld>
+  <p:clrMapOvr>
+    <a:masterClrMapping/>
+  </p:clrMapOvr>
+</p:notes>
+</file>
+
+<file path=ppt/notesSlides/notesSlide7.xml><?xml version="1.0" encoding="utf-8"?>
+<p:notes xmlns:a="http://schemas.openxmlformats.org/drawingml/2006/main" xmlns:r="http://schemas.openxmlformats.org/officeDocument/2006/relationships" xmlns:p="http://schemas.openxmlformats.org/presentationml/2006/main">
+  <p:cSld>
+    <p:spTree>
+      <p:nvGrpSpPr>
+        <p:cNvPr id="1" name=""/>
+        <p:cNvGrpSpPr/>
+        <p:nvPr/>
+      </p:nvGrpSpPr>
+      <p:grpSpPr>
+        <a:xfrm>
+          <a:off x="0" y="0"/>
+          <a:ext cx="0" cy="0"/>
+          <a:chOff x="0" y="0"/>
+          <a:chExt cx="0" cy="0"/>
+        </a:xfrm>
+      </p:grpSpPr>
+      <p:sp>
+        <p:nvSpPr>
+          <p:cNvPr id="2" name="Folienbildplatzhalter 1"/>
+          <p:cNvSpPr>
+            <a:spLocks noGrp="1" noRot="1" noChangeAspect="1"/>
+          </p:cNvSpPr>
+          <p:nvPr>
+            <p:ph type="sldImg"/>
+          </p:nvPr>
+        </p:nvSpPr>
+        <p:spPr/>
+      </p:sp>
+      <p:sp>
+        <p:nvSpPr>
+          <p:cNvPr id="3" name="Notizenplatzhalter 2"/>
+          <p:cNvSpPr>
+            <a:spLocks noGrp="1"/>
+          </p:cNvSpPr>
+          <p:nvPr>
+            <p:ph type="body" idx="1"/>
+          </p:nvPr>
+        </p:nvSpPr>
+        <p:spPr/>
+        <p:txBody>
+          <a:bodyPr/>
+          <a:lstStyle/>
+          <a:p>
+            <a:r>
+              <a:rPr lang="en-US" b="1" dirty="0"/>
+              <a:t>two reasons:</a:t>
+            </a:r>
+            <a:endParaRPr lang="en-US" dirty="0"/>
+          </a:p>
+          <a:p>
+            <a:r>
+              <a:rPr lang="en-US" b="1" dirty="0"/>
+              <a:t>Reason 1:</a:t>
+            </a:r>
+            <a:r>
+              <a:rPr lang="en-US" dirty="0"/>
+              <a:t> One of the features is just the average firing rate over time. If you shuffle the time order, the average doesn't change at all — so this feature can't tell the difference.</a:t>
+            </a:r>
+          </a:p>
+          <a:p>
+            <a:r>
+              <a:rPr lang="en-US" b="1" dirty="0"/>
+              <a:t>Reason 2:</a:t>
+            </a:r>
+            <a:r>
+              <a:rPr lang="en-US" dirty="0"/>
+              <a:t> When you average a whole brain region together, the signal becomes slow and smooth. The features mostly capture this slow part — and shuffling time barely changes slow signals. It's the fast, moment-to-moment detail that shuffling destroys, and that's exactly what these features ignore.</a:t>
+            </a:r>
+          </a:p>
+          <a:p>
+            <a:endParaRPr lang="en-US" dirty="0"/>
+          </a:p>
+          <a:p>
+            <a:r>
+              <a:rPr lang="en-US" dirty="0"/>
+              <a:t>"The features mostly capture </a:t>
+            </a:r>
+            <a:r>
+              <a:rPr lang="en-US" i="1" dirty="0"/>
+              <a:t>how much</a:t>
+            </a:r>
+            <a:r>
+              <a:rPr lang="en-US" dirty="0"/>
+              <a:t> and </a:t>
+            </a:r>
+            <a:r>
+              <a:rPr lang="en-US" i="1" dirty="0"/>
+              <a:t>how slow</a:t>
+            </a:r>
+            <a:r>
+              <a:rPr lang="en-US" dirty="0"/>
+              <a:t> each region fires — not the fine temporal order — so shuffling time barely moves them.“</a:t>
+            </a:r>
+          </a:p>
+          <a:p>
+            <a:endParaRPr lang="en-US" dirty="0"/>
+          </a:p>
+          <a:p>
+            <a:r>
+              <a:rPr lang="en-US" dirty="0"/>
+              <a:t>Potential fix: Instead of only looking at rhythm, it splits the sequence into time blocks and keeps each block as its own feature — so shuffling the time order scrambles the blocks and the score finally reacts.</a:t>
+            </a:r>
+          </a:p>
+        </p:txBody>
+      </p:sp>
+      <p:sp>
+        <p:nvSpPr>
+          <p:cNvPr id="4" name="Foliennummernplatzhalter 3"/>
+          <p:cNvSpPr>
+            <a:spLocks noGrp="1"/>
+          </p:cNvSpPr>
+          <p:nvPr>
+            <p:ph type="sldNum" sz="quarter" idx="5"/>
+          </p:nvPr>
+        </p:nvSpPr>
+        <p:spPr/>
+        <p:txBody>
+          <a:bodyPr/>
+          <a:lstStyle/>
+          <a:p>
+            <a:pPr rtl="0"/>
+            <a:fld id="{4C3B2649-7BD8-4005-A99E-30D13769A8BD}" type="slidenum">
+              <a:rPr lang="en-US" smtClean="0"/>
+              <a:t>15</a:t>
+            </a:fld>
+            <a:endParaRPr lang="en-US" dirty="0"/>
+          </a:p>
+        </p:txBody>
+      </p:sp>
+    </p:spTree>
+    <p:extLst>
+      <p:ext uri="{BB962C8B-B14F-4D97-AF65-F5344CB8AC3E}">
+        <p14:creationId xmlns:p14="http://schemas.microsoft.com/office/powerpoint/2010/main" val="1973885232"/>
+      </p:ext>
+    </p:extLst>
+  </p:cSld>
+  <p:clrMapOvr>
+    <a:masterClrMapping/>
+  </p:clrMapOvr>
+</p:notes>
+</file>
+
+<file path=ppt/notesSlides/notesSlide8.xml><?xml version="1.0" encoding="utf-8"?>
+<p:notes xmlns:a="http://schemas.openxmlformats.org/drawingml/2006/main" xmlns:r="http://schemas.openxmlformats.org/officeDocument/2006/relationships" xmlns:p="http://schemas.openxmlformats.org/presentationml/2006/main">
+  <p:cSld>
+    <p:spTree>
+      <p:nvGrpSpPr>
+        <p:cNvPr id="1" name=""/>
+        <p:cNvGrpSpPr/>
+        <p:nvPr/>
+      </p:nvGrpSpPr>
+      <p:grpSpPr>
+        <a:xfrm>
+          <a:off x="0" y="0"/>
+          <a:ext cx="0" cy="0"/>
+          <a:chOff x="0" y="0"/>
+          <a:chExt cx="0" cy="0"/>
+        </a:xfrm>
+      </p:grpSpPr>
+      <p:sp>
+        <p:nvSpPr>
+          <p:cNvPr id="2" name="Folienbildplatzhalter 1"/>
+          <p:cNvSpPr>
+            <a:spLocks noGrp="1" noRot="1" noChangeAspect="1"/>
+          </p:cNvSpPr>
+          <p:nvPr>
+            <p:ph type="sldImg"/>
+          </p:nvPr>
+        </p:nvSpPr>
+        <p:spPr/>
+      </p:sp>
+      <p:sp>
+        <p:nvSpPr>
+          <p:cNvPr id="3" name="Notizenplatzhalter 2"/>
+          <p:cNvSpPr>
+            <a:spLocks noGrp="1"/>
+          </p:cNvSpPr>
+          <p:nvPr>
+            <p:ph type="body" idx="1"/>
+          </p:nvPr>
+        </p:nvSpPr>
+        <p:spPr/>
+        <p:txBody>
+          <a:bodyPr/>
+          <a:lstStyle/>
+          <a:p>
+            <a:r>
+              <a:rPr lang="de-DE" dirty="0"/>
+              <a:t>PCA: </a:t>
+            </a:r>
+            <a:r>
+              <a:rPr lang="de-DE" dirty="0" err="1"/>
+              <a:t>Finds</a:t>
+            </a:r>
+            <a:r>
+              <a:rPr lang="de-DE" dirty="0"/>
+              <a:t> </a:t>
+            </a:r>
+            <a:r>
+              <a:rPr lang="de-DE" dirty="0" err="1"/>
+              <a:t>the</a:t>
+            </a:r>
+            <a:r>
+              <a:rPr lang="de-DE" dirty="0"/>
+              <a:t> </a:t>
+            </a:r>
+            <a:r>
+              <a:rPr lang="de-DE" dirty="0" err="1"/>
+              <a:t>directions</a:t>
+            </a:r>
+            <a:r>
+              <a:rPr lang="de-DE" dirty="0"/>
+              <a:t> </a:t>
+            </a:r>
+            <a:r>
+              <a:rPr lang="de-DE" dirty="0" err="1"/>
+              <a:t>of</a:t>
+            </a:r>
+            <a:r>
+              <a:rPr lang="de-DE" dirty="0"/>
+              <a:t> </a:t>
+            </a:r>
+            <a:r>
+              <a:rPr lang="de-DE" dirty="0" err="1"/>
+              <a:t>the</a:t>
+            </a:r>
+            <a:r>
+              <a:rPr lang="de-DE" dirty="0"/>
+              <a:t> </a:t>
+            </a:r>
+            <a:r>
+              <a:rPr lang="de-DE" dirty="0" err="1"/>
+              <a:t>biggest</a:t>
+            </a:r>
+            <a:r>
+              <a:rPr lang="de-DE" dirty="0"/>
+              <a:t> </a:t>
+            </a:r>
+            <a:r>
+              <a:rPr lang="de-DE" dirty="0" err="1"/>
+              <a:t>variation</a:t>
+            </a:r>
+            <a:r>
+              <a:rPr lang="de-DE" dirty="0"/>
+              <a:t> and </a:t>
+            </a:r>
+            <a:r>
+              <a:rPr lang="de-DE" dirty="0" err="1"/>
+              <a:t>flattens</a:t>
+            </a:r>
+            <a:r>
+              <a:rPr lang="de-DE" dirty="0"/>
+              <a:t> </a:t>
+            </a:r>
+            <a:r>
+              <a:rPr lang="de-DE" dirty="0" err="1"/>
+              <a:t>everything</a:t>
+            </a:r>
+            <a:r>
+              <a:rPr lang="de-DE" dirty="0"/>
+              <a:t> </a:t>
+            </a:r>
+            <a:r>
+              <a:rPr lang="de-DE" dirty="0" err="1"/>
+              <a:t>into</a:t>
+            </a:r>
+            <a:r>
+              <a:rPr lang="de-DE" dirty="0"/>
+              <a:t> 2D </a:t>
+            </a:r>
+            <a:r>
+              <a:rPr lang="de-DE" dirty="0" err="1"/>
+              <a:t>linearly</a:t>
+            </a:r>
+            <a:r>
+              <a:rPr lang="de-DE" dirty="0"/>
+              <a:t>. Strength: </a:t>
+            </a:r>
+            <a:r>
+              <a:rPr lang="de-DE" dirty="0" err="1"/>
+              <a:t>does</a:t>
+            </a:r>
+            <a:r>
+              <a:rPr lang="de-DE" dirty="0"/>
+              <a:t> not </a:t>
+            </a:r>
+            <a:r>
+              <a:rPr lang="de-DE" dirty="0" err="1"/>
+              <a:t>distort</a:t>
+            </a:r>
+            <a:r>
+              <a:rPr lang="de-DE" dirty="0"/>
+              <a:t> </a:t>
+            </a:r>
+            <a:r>
+              <a:rPr lang="de-DE" dirty="0" err="1"/>
+              <a:t>distances</a:t>
+            </a:r>
+            <a:r>
+              <a:rPr lang="de-DE" dirty="0"/>
+              <a:t> </a:t>
+            </a:r>
+            <a:r>
+              <a:rPr lang="de-DE" dirty="0">
+                <a:sym typeface="Wingdings" panose="05000000000000000000" pitchFamily="2" charset="2"/>
+              </a:rPr>
+              <a:t> </a:t>
+            </a:r>
+            <a:r>
+              <a:rPr lang="de-DE" dirty="0" err="1">
+                <a:sym typeface="Wingdings" panose="05000000000000000000" pitchFamily="2" charset="2"/>
+              </a:rPr>
+              <a:t>if</a:t>
+            </a:r>
+            <a:r>
+              <a:rPr lang="de-DE" dirty="0">
+                <a:sym typeface="Wingdings" panose="05000000000000000000" pitchFamily="2" charset="2"/>
+              </a:rPr>
+              <a:t> real/</a:t>
+            </a:r>
+            <a:r>
+              <a:rPr lang="de-DE" dirty="0" err="1">
+                <a:sym typeface="Wingdings" panose="05000000000000000000" pitchFamily="2" charset="2"/>
+              </a:rPr>
+              <a:t>generated</a:t>
+            </a:r>
+            <a:r>
+              <a:rPr lang="de-DE" dirty="0">
+                <a:sym typeface="Wingdings" panose="05000000000000000000" pitchFamily="2" charset="2"/>
+              </a:rPr>
+              <a:t> </a:t>
+            </a:r>
+            <a:r>
+              <a:rPr lang="de-DE" dirty="0" err="1">
+                <a:sym typeface="Wingdings" panose="05000000000000000000" pitchFamily="2" charset="2"/>
+              </a:rPr>
+              <a:t>overlap</a:t>
+            </a:r>
+            <a:r>
+              <a:rPr lang="de-DE" dirty="0">
+                <a:sym typeface="Wingdings" panose="05000000000000000000" pitchFamily="2" charset="2"/>
+              </a:rPr>
+              <a:t> </a:t>
+            </a:r>
+            <a:r>
+              <a:rPr lang="de-DE" dirty="0" err="1">
+                <a:sym typeface="Wingdings" panose="05000000000000000000" pitchFamily="2" charset="2"/>
+              </a:rPr>
+              <a:t>the</a:t>
+            </a:r>
+            <a:r>
+              <a:rPr lang="de-DE" dirty="0">
+                <a:sym typeface="Wingdings" panose="05000000000000000000" pitchFamily="2" charset="2"/>
+              </a:rPr>
+              <a:t> </a:t>
+            </a:r>
+            <a:r>
+              <a:rPr lang="de-DE" dirty="0" err="1">
+                <a:sym typeface="Wingdings" panose="05000000000000000000" pitchFamily="2" charset="2"/>
+              </a:rPr>
+              <a:t>overlap</a:t>
+            </a:r>
+            <a:r>
+              <a:rPr lang="de-DE" dirty="0">
+                <a:sym typeface="Wingdings" panose="05000000000000000000" pitchFamily="2" charset="2"/>
+              </a:rPr>
+              <a:t> </a:t>
+            </a:r>
+            <a:r>
+              <a:rPr lang="de-DE" dirty="0" err="1">
+                <a:sym typeface="Wingdings" panose="05000000000000000000" pitchFamily="2" charset="2"/>
+              </a:rPr>
+              <a:t>is</a:t>
+            </a:r>
+            <a:r>
+              <a:rPr lang="de-DE" dirty="0">
+                <a:sym typeface="Wingdings" panose="05000000000000000000" pitchFamily="2" charset="2"/>
+              </a:rPr>
+              <a:t> real. </a:t>
+            </a:r>
+            <a:r>
+              <a:rPr lang="de-DE" dirty="0" err="1">
+                <a:sym typeface="Wingdings" panose="05000000000000000000" pitchFamily="2" charset="2"/>
+              </a:rPr>
+              <a:t>Weakness</a:t>
+            </a:r>
+            <a:r>
+              <a:rPr lang="de-DE" dirty="0">
+                <a:sym typeface="Wingdings" panose="05000000000000000000" pitchFamily="2" charset="2"/>
+              </a:rPr>
+              <a:t>: </a:t>
+            </a:r>
+            <a:r>
+              <a:rPr lang="en-US" dirty="0"/>
+              <a:t>if the data has curved or complex structure, PCA can squash it into a blob and hide it.</a:t>
+            </a:r>
+          </a:p>
+          <a:p>
+            <a:endParaRPr lang="en-US" dirty="0"/>
+          </a:p>
+          <a:p>
+            <a:r>
+              <a:rPr lang="en-US" dirty="0"/>
+              <a:t>UMAP: nonlinear projection. It tries to preserve which points are neighbors </a:t>
+            </a:r>
+            <a:r>
+              <a:rPr lang="en-US" dirty="0">
+                <a:sym typeface="Wingdings" panose="05000000000000000000" pitchFamily="2" charset="2"/>
+              </a:rPr>
+              <a:t> good at revealing clusters or sub-structures. </a:t>
+            </a:r>
+            <a:r>
+              <a:rPr lang="en-US" dirty="0"/>
+              <a:t>— for example if real activity falls into several distinct states (different behaviors), UMAP tends to show them as separate groups. Its weakness: it can </a:t>
+            </a:r>
+            <a:r>
+              <a:rPr lang="en-US" i="1" dirty="0"/>
+              <a:t>invent</a:t>
+            </a:r>
+            <a:r>
+              <a:rPr lang="en-US" dirty="0"/>
+              <a:t> structure that isn't really there, and distances between clusters aren't meaningful.</a:t>
+            </a:r>
+          </a:p>
+          <a:p>
+            <a:endParaRPr lang="en-US" dirty="0"/>
+          </a:p>
+          <a:p>
+            <a:r>
+              <a:rPr lang="en-US" b="1" dirty="0"/>
+              <a:t>Why both:</a:t>
+            </a:r>
+            <a:r>
+              <a:rPr lang="en-US" dirty="0"/>
+              <a:t> they cross-check each other — PCA for spread, UMAP for structure.</a:t>
+            </a:r>
+            <a:endParaRPr lang="de-DE" dirty="0"/>
+          </a:p>
+        </p:txBody>
+      </p:sp>
+      <p:sp>
+        <p:nvSpPr>
+          <p:cNvPr id="4" name="Foliennummernplatzhalter 3"/>
+          <p:cNvSpPr>
+            <a:spLocks noGrp="1"/>
+          </p:cNvSpPr>
+          <p:nvPr>
+            <p:ph type="sldNum" sz="quarter" idx="5"/>
+          </p:nvPr>
+        </p:nvSpPr>
+        <p:spPr/>
+        <p:txBody>
+          <a:bodyPr/>
+          <a:lstStyle/>
+          <a:p>
+            <a:pPr rtl="0"/>
+            <a:fld id="{4C3B2649-7BD8-4005-A99E-30D13769A8BD}" type="slidenum">
+              <a:rPr lang="en-US" smtClean="0"/>
+              <a:t>16</a:t>
+            </a:fld>
+            <a:endParaRPr lang="en-US" dirty="0"/>
+          </a:p>
+        </p:txBody>
+      </p:sp>
+    </p:spTree>
+    <p:extLst>
+      <p:ext uri="{BB962C8B-B14F-4D97-AF65-F5344CB8AC3E}">
+        <p14:creationId xmlns:p14="http://schemas.microsoft.com/office/powerpoint/2010/main" val="1243690433"/>
+      </p:ext>
+    </p:extLst>
+  </p:cSld>
+  <p:clrMapOvr>
+    <a:masterClrMapping/>
+  </p:clrMapOvr>
+</p:notes>
+</file>
+
+<file path=ppt/notesSlides/notesSlide9.xml><?xml version="1.0" encoding="utf-8"?>
+<p:notes xmlns:a="http://schemas.openxmlformats.org/drawingml/2006/main" xmlns:r="http://schemas.openxmlformats.org/officeDocument/2006/relationships" xmlns:p="http://schemas.openxmlformats.org/presentationml/2006/main">
+  <p:cSld>
+    <p:spTree>
+      <p:nvGrpSpPr>
+        <p:cNvPr id="1" name=""/>
+        <p:cNvGrpSpPr/>
+        <p:nvPr/>
+      </p:nvGrpSpPr>
+      <p:grpSpPr>
+        <a:xfrm>
+          <a:off x="0" y="0"/>
+          <a:ext cx="0" cy="0"/>
+          <a:chOff x="0" y="0"/>
+          <a:chExt cx="0" cy="0"/>
+        </a:xfrm>
+      </p:grpSpPr>
+      <p:sp>
+        <p:nvSpPr>
+          <p:cNvPr id="2" name="Folienbildplatzhalter 1"/>
+          <p:cNvSpPr>
+            <a:spLocks noGrp="1" noRot="1" noChangeAspect="1"/>
+          </p:cNvSpPr>
+          <p:nvPr>
+            <p:ph type="sldImg"/>
+          </p:nvPr>
+        </p:nvSpPr>
+        <p:spPr/>
+      </p:sp>
+      <p:sp>
+        <p:nvSpPr>
+          <p:cNvPr id="3" name="Notizenplatzhalter 2"/>
+          <p:cNvSpPr>
+            <a:spLocks noGrp="1"/>
+          </p:cNvSpPr>
+          <p:nvPr>
+            <p:ph type="body" idx="1"/>
+          </p:nvPr>
+        </p:nvSpPr>
+        <p:spPr/>
+        <p:txBody>
+          <a:bodyPr/>
+          <a:lstStyle/>
+          <a:p>
+            <a:r>
+              <a:rPr lang="de-DE" dirty="0"/>
+              <a:t>I </a:t>
+            </a:r>
+            <a:r>
+              <a:rPr lang="de-DE" dirty="0" err="1"/>
+              <a:t>don‘t</a:t>
+            </a:r>
+            <a:r>
+              <a:rPr lang="de-DE" dirty="0"/>
+              <a:t> </a:t>
+            </a:r>
+            <a:r>
+              <a:rPr lang="de-DE" dirty="0" err="1"/>
+              <a:t>really</a:t>
+            </a:r>
+            <a:r>
+              <a:rPr lang="de-DE" dirty="0"/>
+              <a:t> </a:t>
+            </a:r>
+            <a:r>
+              <a:rPr lang="de-DE" dirty="0" err="1"/>
+              <a:t>see</a:t>
+            </a:r>
+            <a:r>
+              <a:rPr lang="de-DE" dirty="0"/>
+              <a:t> </a:t>
+            </a:r>
+            <a:r>
+              <a:rPr lang="de-DE" dirty="0" err="1"/>
+              <a:t>this</a:t>
+            </a:r>
+            <a:r>
+              <a:rPr lang="de-DE" dirty="0"/>
+              <a:t> </a:t>
+            </a:r>
+            <a:r>
+              <a:rPr lang="de-DE" dirty="0" err="1"/>
+              <a:t>as</a:t>
+            </a:r>
+            <a:r>
+              <a:rPr lang="de-DE" dirty="0"/>
+              <a:t> </a:t>
+            </a:r>
+            <a:r>
+              <a:rPr lang="de-DE" dirty="0" err="1"/>
+              <a:t>the</a:t>
+            </a:r>
+            <a:r>
+              <a:rPr lang="de-DE" dirty="0"/>
+              <a:t> </a:t>
+            </a:r>
+            <a:r>
+              <a:rPr lang="de-DE" dirty="0" err="1"/>
+              <a:t>metrics</a:t>
+            </a:r>
+            <a:r>
+              <a:rPr lang="de-DE" dirty="0"/>
+              <a:t> fault. </a:t>
+            </a:r>
+            <a:r>
+              <a:rPr lang="de-DE" dirty="0" err="1"/>
+              <a:t>There</a:t>
+            </a:r>
+            <a:r>
+              <a:rPr lang="de-DE" dirty="0"/>
+              <a:t> </a:t>
+            </a:r>
+            <a:r>
+              <a:rPr lang="de-DE" dirty="0" err="1"/>
+              <a:t>is</a:t>
+            </a:r>
+            <a:r>
+              <a:rPr lang="de-DE" dirty="0"/>
+              <a:t> just </a:t>
+            </a:r>
+            <a:r>
+              <a:rPr lang="de-DE" dirty="0" err="1"/>
+              <a:t>to</a:t>
+            </a:r>
+            <a:r>
+              <a:rPr lang="de-DE" dirty="0"/>
+              <a:t> </a:t>
+            </a:r>
+            <a:r>
+              <a:rPr lang="de-DE" dirty="0" err="1"/>
+              <a:t>little</a:t>
+            </a:r>
+            <a:r>
+              <a:rPr lang="de-DE" dirty="0"/>
+              <a:t> </a:t>
+            </a:r>
+            <a:r>
+              <a:rPr lang="de-DE" dirty="0" err="1"/>
+              <a:t>data</a:t>
+            </a:r>
+            <a:r>
+              <a:rPr lang="de-DE" dirty="0"/>
+              <a:t> per </a:t>
+            </a:r>
+            <a:r>
+              <a:rPr lang="de-DE" dirty="0" err="1"/>
+              <a:t>session</a:t>
+            </a:r>
+            <a:r>
+              <a:rPr lang="de-DE" dirty="0"/>
+              <a:t> (~50 Samples </a:t>
+            </a:r>
+            <a:r>
+              <a:rPr lang="de-DE" dirty="0" err="1"/>
+              <a:t>vs</a:t>
+            </a:r>
+            <a:r>
+              <a:rPr lang="de-DE" dirty="0"/>
+              <a:t> 1000 Samples </a:t>
+            </a:r>
+            <a:r>
+              <a:rPr lang="de-DE" dirty="0" err="1"/>
+              <a:t>globally</a:t>
+            </a:r>
+            <a:r>
+              <a:rPr lang="de-DE" dirty="0"/>
+              <a:t>).</a:t>
+            </a:r>
+          </a:p>
+        </p:txBody>
+      </p:sp>
+      <p:sp>
+        <p:nvSpPr>
+          <p:cNvPr id="4" name="Foliennummernplatzhalter 3"/>
+          <p:cNvSpPr>
+            <a:spLocks noGrp="1"/>
+          </p:cNvSpPr>
+          <p:nvPr>
+            <p:ph type="sldNum" sz="quarter" idx="5"/>
+          </p:nvPr>
+        </p:nvSpPr>
+        <p:spPr/>
+        <p:txBody>
+          <a:bodyPr/>
+          <a:lstStyle/>
+          <a:p>
+            <a:pPr rtl="0"/>
+            <a:fld id="{4C3B2649-7BD8-4005-A99E-30D13769A8BD}" type="slidenum">
+              <a:rPr lang="en-US" smtClean="0"/>
+              <a:t>17</a:t>
+            </a:fld>
+            <a:endParaRPr lang="en-US" dirty="0"/>
+          </a:p>
+        </p:txBody>
+      </p:sp>
+    </p:spTree>
+    <p:extLst>
+      <p:ext uri="{BB962C8B-B14F-4D97-AF65-F5344CB8AC3E}">
+        <p14:creationId xmlns:p14="http://schemas.microsoft.com/office/powerpoint/2010/main" val="3646035373"/>
+      </p:ext>
+    </p:extLst>
+  </p:cSld>
+  <p:clrMapOvr>
+    <a:masterClrMapping/>
+  </p:clrMapOvr>
+</p:notes>
+</file>
+
 <file path=ppt/slideLayouts/slideLayout1.xml><?xml version="1.0" encoding="utf-8"?>
 <p:sldLayout xmlns:a="http://schemas.openxmlformats.org/drawingml/2006/main" xmlns:r="http://schemas.openxmlformats.org/officeDocument/2006/relationships" xmlns:p="http://schemas.openxmlformats.org/presentationml/2006/main" userDrawn="1">
   <p:cSld name="Titel">
@@ -2729,6 +5882,10 @@
           <a:lstStyle/>
           <a:p>
             <a:pPr rtl="0"/>
+            <a:r>
+              <a:rPr lang="en-US"/>
+              <a:t>Jonas Himmetsberger | Practical Work presentation</a:t>
+            </a:r>
             <a:endParaRPr lang="en-US" dirty="0"/>
           </a:p>
         </p:txBody>
@@ -2756,9 +5913,10 @@
           <a:p>
             <a:pPr rtl="0"/>
             <a:r>
-              <a:rPr lang="de"/>
+              <a:rPr lang="de-DE"/>
               <a:t>01.03.20XX</a:t>
             </a:r>
+            <a:endParaRPr lang="de"/>
           </a:p>
         </p:txBody>
       </p:sp>
@@ -3835,6 +6993,10 @@
           <a:lstStyle/>
           <a:p>
             <a:pPr rtl="0"/>
+            <a:r>
+              <a:rPr lang="en-US"/>
+              <a:t>Jonas Himmetsberger | Practical Work presentation</a:t>
+            </a:r>
             <a:endParaRPr lang="en-US" dirty="0"/>
           </a:p>
         </p:txBody>
@@ -3862,9 +7024,10 @@
           <a:p>
             <a:pPr rtl="0"/>
             <a:r>
-              <a:rPr lang="de"/>
+              <a:rPr lang="de-DE"/>
               <a:t>01.03.20XX</a:t>
             </a:r>
+            <a:endParaRPr lang="de"/>
           </a:p>
         </p:txBody>
       </p:sp>
@@ -4161,6 +7324,10 @@
           <a:lstStyle/>
           <a:p>
             <a:pPr rtl="0"/>
+            <a:r>
+              <a:rPr lang="en-US"/>
+              <a:t>Jonas Himmetsberger | Practical Work presentation</a:t>
+            </a:r>
             <a:endParaRPr lang="en-US" dirty="0"/>
           </a:p>
         </p:txBody>
@@ -4188,9 +7355,10 @@
           <a:p>
             <a:pPr rtl="0"/>
             <a:r>
-              <a:rPr lang="de"/>
+              <a:rPr lang="de-DE"/>
               <a:t>01.03.20XX</a:t>
             </a:r>
+            <a:endParaRPr lang="de"/>
           </a:p>
         </p:txBody>
       </p:sp>
@@ -4570,6 +7738,10 @@
           <a:lstStyle/>
           <a:p>
             <a:pPr rtl="0"/>
+            <a:r>
+              <a:rPr lang="en-US"/>
+              <a:t>Jonas Himmetsberger | Practical Work presentation</a:t>
+            </a:r>
             <a:endParaRPr lang="en-US" dirty="0"/>
           </a:p>
         </p:txBody>
@@ -4597,9 +7769,10 @@
           <a:p>
             <a:pPr rtl="0"/>
             <a:r>
-              <a:rPr lang="de"/>
+              <a:rPr lang="de-DE"/>
               <a:t>01.03.20XX</a:t>
             </a:r>
+            <a:endParaRPr lang="de"/>
           </a:p>
         </p:txBody>
       </p:sp>
@@ -5085,6 +8258,10 @@
           <a:lstStyle/>
           <a:p>
             <a:pPr rtl="0"/>
+            <a:r>
+              <a:rPr lang="en-US"/>
+              <a:t>Jonas Himmetsberger | Practical Work presentation</a:t>
+            </a:r>
             <a:endParaRPr lang="en-US" dirty="0"/>
           </a:p>
         </p:txBody>
@@ -5112,9 +8289,10 @@
           <a:p>
             <a:pPr rtl="0"/>
             <a:r>
-              <a:rPr lang="de"/>
+              <a:rPr lang="de-DE"/>
               <a:t>01.03.20XX</a:t>
             </a:r>
+            <a:endParaRPr lang="de"/>
           </a:p>
         </p:txBody>
       </p:sp>
@@ -5304,6 +8482,10 @@
           <a:lstStyle/>
           <a:p>
             <a:pPr rtl="0"/>
+            <a:r>
+              <a:rPr lang="en-US"/>
+              <a:t>Jonas Himmetsberger | Practical Work presentation</a:t>
+            </a:r>
             <a:endParaRPr lang="en-US" dirty="0"/>
           </a:p>
         </p:txBody>
@@ -5331,9 +8513,10 @@
           <a:p>
             <a:pPr algn="r" rtl="0"/>
             <a:r>
-              <a:rPr lang="de"/>
+              <a:rPr lang="de-DE"/>
               <a:t>01.03.20XX</a:t>
             </a:r>
+            <a:endParaRPr lang="de"/>
           </a:p>
         </p:txBody>
       </p:sp>
@@ -5378,7 +8561,6 @@
   <p:clrMapOvr>
     <a:masterClrMapping/>
   </p:clrMapOvr>
-  <p:hf sldNum="0" hdr="0" ftr="0" dt="0"/>
 </p:sldLayout>
 </file>
 
@@ -5549,9 +8731,10 @@
           <a:p>
             <a:pPr algn="r" rtl="0"/>
             <a:r>
-              <a:rPr lang="de"/>
+              <a:rPr lang="de-DE"/>
               <a:t>01.03.20XX</a:t>
             </a:r>
+            <a:endParaRPr lang="de"/>
           </a:p>
         </p:txBody>
       </p:sp>
@@ -5593,6 +8776,10 @@
           </a:lstStyle>
           <a:p>
             <a:pPr rtl="0"/>
+            <a:r>
+              <a:rPr lang="en-US" sz="1000"/>
+              <a:t>Jonas Himmetsberger | Practical Work presentation</a:t>
+            </a:r>
             <a:endParaRPr lang="en-US" sz="1000" dirty="0"/>
           </a:p>
         </p:txBody>
@@ -5813,7 +9000,7 @@
     <p:sldLayoutId id="2147483684" r:id="rId8"/>
     <p:sldLayoutId id="2147483673" r:id="rId9"/>
   </p:sldLayoutIdLst>
-  <p:hf sldNum="0" hdr="0" ftr="0" dt="0"/>
+  <p:hf hdr="0" dt="0"/>
   <p:txStyles>
     <p:titleStyle>
       <a:lvl1pPr algn="l" defTabSz="914400" rtl="0" eaLnBrk="1" latinLnBrk="0" hangingPunct="1">
@@ -6453,7 +9640,6 @@
             </a:pPr>
             <a:r>
               <a:rPr lang="en-GB" sz="1600" b="1" noProof="0" dirty="0">
-                <a:latin typeface="Calibri" pitchFamily="34" charset="0"/>
                 <a:ea typeface="Calibri" pitchFamily="34" charset="-122"/>
                 <a:cs typeface="Calibri" pitchFamily="34" charset="-120"/>
               </a:rPr>
@@ -6461,7 +9647,6 @@
             </a:r>
             <a:r>
               <a:rPr lang="en-GB" sz="1600" noProof="0" dirty="0">
-                <a:latin typeface="Calibri" pitchFamily="34" charset="0"/>
                 <a:ea typeface="Calibri" pitchFamily="34" charset="-122"/>
                 <a:cs typeface="Calibri" pitchFamily="34" charset="-120"/>
               </a:rPr>
@@ -6469,7 +9654,6 @@
             </a:r>
             <a:r>
               <a:rPr lang="en-GB" sz="1600" noProof="0" dirty="0">
-                <a:latin typeface="Calibri" pitchFamily="34" charset="0"/>
                 <a:ea typeface="Calibri" pitchFamily="34" charset="-122"/>
                 <a:cs typeface="Calibri" pitchFamily="34" charset="-120"/>
                 <a:sym typeface="Wingdings" panose="05000000000000000000" pitchFamily="2" charset="2"/>
@@ -6567,6 +9751,65 @@
               <a:t>B</a:t>
             </a:r>
             <a:endParaRPr lang="en-GB" sz="4000" noProof="0" dirty="0"/>
+          </a:p>
+        </p:txBody>
+      </p:sp>
+      <p:sp>
+        <p:nvSpPr>
+          <p:cNvPr id="2" name="Fußzeilenplatzhalter 1">
+            <a:extLst>
+              <a:ext uri="{FF2B5EF4-FFF2-40B4-BE49-F238E27FC236}">
+                <a16:creationId xmlns:a16="http://schemas.microsoft.com/office/drawing/2014/main" id="{A10D4D93-B2CC-9F07-6A89-934D216B0A6C}"/>
+              </a:ext>
+            </a:extLst>
+          </p:cNvPr>
+          <p:cNvSpPr>
+            <a:spLocks noGrp="1"/>
+          </p:cNvSpPr>
+          <p:nvPr>
+            <p:ph type="ftr" sz="quarter" idx="11"/>
+          </p:nvPr>
+        </p:nvSpPr>
+        <p:spPr/>
+        <p:txBody>
+          <a:bodyPr/>
+          <a:lstStyle/>
+          <a:p>
+            <a:pPr rtl="0"/>
+            <a:r>
+              <a:rPr lang="en-GB" noProof="0" dirty="0"/>
+              <a:t>Jonas Himmetsberger | Practical Work presentation</a:t>
+            </a:r>
+          </a:p>
+        </p:txBody>
+      </p:sp>
+      <p:sp>
+        <p:nvSpPr>
+          <p:cNvPr id="3" name="Foliennummernplatzhalter 2">
+            <a:extLst>
+              <a:ext uri="{FF2B5EF4-FFF2-40B4-BE49-F238E27FC236}">
+                <a16:creationId xmlns:a16="http://schemas.microsoft.com/office/drawing/2014/main" id="{0BA99E71-15EA-D578-F90C-319CE7FE2F7B}"/>
+              </a:ext>
+            </a:extLst>
+          </p:cNvPr>
+          <p:cNvSpPr>
+            <a:spLocks noGrp="1"/>
+          </p:cNvSpPr>
+          <p:nvPr>
+            <p:ph type="sldNum" sz="quarter" idx="12"/>
+          </p:nvPr>
+        </p:nvSpPr>
+        <p:spPr/>
+        <p:txBody>
+          <a:bodyPr/>
+          <a:lstStyle/>
+          <a:p>
+            <a:pPr rtl="0"/>
+            <a:fld id="{CB1E4CB7-CB13-4810-BF18-BE31AFC64F93}" type="slidenum">
+              <a:rPr lang="en-GB" noProof="0" smtClean="0"/>
+              <a:t>10</a:t>
+            </a:fld>
+            <a:endParaRPr lang="en-GB" noProof="0" dirty="0"/>
           </a:p>
         </p:txBody>
       </p:sp>
@@ -6673,7 +9916,7 @@
             <p:ph sz="quarter" idx="13"/>
             <p:extLst>
               <p:ext uri="{D42A27DB-BD31-4B8C-83A1-F6EECF244321}">
-                <p14:modId xmlns:p14="http://schemas.microsoft.com/office/powerpoint/2010/main" val="278146408"/>
+                <p14:modId xmlns:p14="http://schemas.microsoft.com/office/powerpoint/2010/main" val="3761803727"/>
               </p:ext>
             </p:extLst>
           </p:nvPr>
@@ -7302,6 +10545,65 @@
           </a:graphicData>
         </a:graphic>
       </p:graphicFrame>
+      <p:sp>
+        <p:nvSpPr>
+          <p:cNvPr id="2" name="Fußzeilenplatzhalter 1">
+            <a:extLst>
+              <a:ext uri="{FF2B5EF4-FFF2-40B4-BE49-F238E27FC236}">
+                <a16:creationId xmlns:a16="http://schemas.microsoft.com/office/drawing/2014/main" id="{CE3D2F93-4954-292C-A0A0-912E7F3F507B}"/>
+              </a:ext>
+            </a:extLst>
+          </p:cNvPr>
+          <p:cNvSpPr>
+            <a:spLocks noGrp="1"/>
+          </p:cNvSpPr>
+          <p:nvPr>
+            <p:ph type="ftr" sz="quarter" idx="11"/>
+          </p:nvPr>
+        </p:nvSpPr>
+        <p:spPr/>
+        <p:txBody>
+          <a:bodyPr/>
+          <a:lstStyle/>
+          <a:p>
+            <a:pPr rtl="0"/>
+            <a:r>
+              <a:rPr lang="en-GB" noProof="0" dirty="0"/>
+              <a:t>Jonas Himmetsberger | Practical Work presentation</a:t>
+            </a:r>
+          </a:p>
+        </p:txBody>
+      </p:sp>
+      <p:sp>
+        <p:nvSpPr>
+          <p:cNvPr id="3" name="Foliennummernplatzhalter 2">
+            <a:extLst>
+              <a:ext uri="{FF2B5EF4-FFF2-40B4-BE49-F238E27FC236}">
+                <a16:creationId xmlns:a16="http://schemas.microsoft.com/office/drawing/2014/main" id="{F91AC429-89CB-E7AB-5801-9E9DC68E69EE}"/>
+              </a:ext>
+            </a:extLst>
+          </p:cNvPr>
+          <p:cNvSpPr>
+            <a:spLocks noGrp="1"/>
+          </p:cNvSpPr>
+          <p:nvPr>
+            <p:ph type="sldNum" sz="quarter" idx="12"/>
+          </p:nvPr>
+        </p:nvSpPr>
+        <p:spPr/>
+        <p:txBody>
+          <a:bodyPr/>
+          <a:lstStyle/>
+          <a:p>
+            <a:pPr rtl="0"/>
+            <a:fld id="{CB1E4CB7-CB13-4810-BF18-BE31AFC64F93}" type="slidenum">
+              <a:rPr lang="en-GB" noProof="0" smtClean="0"/>
+              <a:t>11</a:t>
+            </a:fld>
+            <a:endParaRPr lang="en-GB" noProof="0" dirty="0"/>
+          </a:p>
+        </p:txBody>
+      </p:sp>
     </p:spTree>
     <p:extLst>
       <p:ext uri="{BB962C8B-B14F-4D97-AF65-F5344CB8AC3E}">
@@ -7373,6 +10675,66 @@
           </a:p>
         </p:txBody>
       </p:sp>
+      <p:sp>
+        <p:nvSpPr>
+          <p:cNvPr id="2" name="Fußzeilenplatzhalter 1">
+            <a:extLst>
+              <a:ext uri="{FF2B5EF4-FFF2-40B4-BE49-F238E27FC236}">
+                <a16:creationId xmlns:a16="http://schemas.microsoft.com/office/drawing/2014/main" id="{ABDD7103-DF6B-2743-8A5A-4CB2ECFFD7D8}"/>
+              </a:ext>
+            </a:extLst>
+          </p:cNvPr>
+          <p:cNvSpPr>
+            <a:spLocks noGrp="1"/>
+          </p:cNvSpPr>
+          <p:nvPr>
+            <p:ph type="ftr" sz="quarter" idx="11"/>
+          </p:nvPr>
+        </p:nvSpPr>
+        <p:spPr/>
+        <p:txBody>
+          <a:bodyPr/>
+          <a:lstStyle/>
+          <a:p>
+            <a:pPr rtl="0"/>
+            <a:r>
+              <a:rPr lang="en-GB" noProof="0" dirty="0"/>
+              <a:t>Jonas Himmetsberger | Practical Work presentation</a:t>
+            </a:r>
+          </a:p>
+        </p:txBody>
+      </p:sp>
+      <p:sp>
+        <p:nvSpPr>
+          <p:cNvPr id="3" name="Foliennummernplatzhalter 2">
+            <a:extLst>
+              <a:ext uri="{FF2B5EF4-FFF2-40B4-BE49-F238E27FC236}">
+                <a16:creationId xmlns:a16="http://schemas.microsoft.com/office/drawing/2014/main" id="{D09AEA90-04B3-DAF3-1B92-CA5648858F77}"/>
+              </a:ext>
+            </a:extLst>
+          </p:cNvPr>
+          <p:cNvSpPr>
+            <a:spLocks noGrp="1"/>
+          </p:cNvSpPr>
+          <p:nvPr>
+            <p:ph type="sldNum" sz="quarter" idx="12"/>
+          </p:nvPr>
+        </p:nvSpPr>
+        <p:spPr/>
+        <p:txBody>
+          <a:bodyPr/>
+          <a:lstStyle/>
+          <a:p>
+            <a:pPr rtl="0"/>
+            <a:fld id="{CB1E4CB7-CB13-4810-BF18-BE31AFC64F93}" type="slidenum">
+              <a:rPr lang="en-GB" noProof="0" smtClean="0"/>
+              <a:pPr rtl="0"/>
+              <a:t>12</a:t>
+            </a:fld>
+            <a:endParaRPr lang="en-GB" sz="1000" noProof="0" dirty="0"/>
+          </a:p>
+        </p:txBody>
+      </p:sp>
     </p:spTree>
     <p:extLst>
       <p:ext uri="{BB962C8B-B14F-4D97-AF65-F5344CB8AC3E}">
@@ -7484,7 +10846,15 @@
           <a:p>
             <a:r>
               <a:rPr lang="en-GB" noProof="0" dirty="0"/>
-              <a:t>~ equal Behaviour R2 (0.8/0.55)</a:t>
+              <a:t>~ equal Behaviour R</a:t>
+            </a:r>
+            <a:r>
+              <a:rPr lang="en-GB" baseline="30000" noProof="0" dirty="0"/>
+              <a:t>2</a:t>
+            </a:r>
+            <a:r>
+              <a:rPr lang="en-GB" noProof="0" dirty="0"/>
+              <a:t> (0.8/0.55)</a:t>
             </a:r>
           </a:p>
           <a:p>
@@ -7571,6 +10941,65 @@
               </a:rPr>
               <a:t> Those metrics barely separate the two models =&gt; generative metric is needed</a:t>
             </a:r>
+            <a:endParaRPr lang="en-GB" noProof="0" dirty="0"/>
+          </a:p>
+        </p:txBody>
+      </p:sp>
+      <p:sp>
+        <p:nvSpPr>
+          <p:cNvPr id="2" name="Fußzeilenplatzhalter 1">
+            <a:extLst>
+              <a:ext uri="{FF2B5EF4-FFF2-40B4-BE49-F238E27FC236}">
+                <a16:creationId xmlns:a16="http://schemas.microsoft.com/office/drawing/2014/main" id="{77DAC185-C8ED-87E1-27B0-7FBF14354D15}"/>
+              </a:ext>
+            </a:extLst>
+          </p:cNvPr>
+          <p:cNvSpPr>
+            <a:spLocks noGrp="1"/>
+          </p:cNvSpPr>
+          <p:nvPr>
+            <p:ph type="ftr" sz="quarter" idx="11"/>
+          </p:nvPr>
+        </p:nvSpPr>
+        <p:spPr/>
+        <p:txBody>
+          <a:bodyPr/>
+          <a:lstStyle/>
+          <a:p>
+            <a:pPr rtl="0"/>
+            <a:r>
+              <a:rPr lang="en-GB" noProof="0" dirty="0"/>
+              <a:t>Jonas Himmetsberger | Practical Work presentation</a:t>
+            </a:r>
+          </a:p>
+        </p:txBody>
+      </p:sp>
+      <p:sp>
+        <p:nvSpPr>
+          <p:cNvPr id="3" name="Foliennummernplatzhalter 2">
+            <a:extLst>
+              <a:ext uri="{FF2B5EF4-FFF2-40B4-BE49-F238E27FC236}">
+                <a16:creationId xmlns:a16="http://schemas.microsoft.com/office/drawing/2014/main" id="{53415064-845A-A633-9241-7151AD8F9057}"/>
+              </a:ext>
+            </a:extLst>
+          </p:cNvPr>
+          <p:cNvSpPr>
+            <a:spLocks noGrp="1"/>
+          </p:cNvSpPr>
+          <p:nvPr>
+            <p:ph type="sldNum" sz="quarter" idx="12"/>
+          </p:nvPr>
+        </p:nvSpPr>
+        <p:spPr/>
+        <p:txBody>
+          <a:bodyPr/>
+          <a:lstStyle/>
+          <a:p>
+            <a:pPr rtl="0"/>
+            <a:fld id="{CB1E4CB7-CB13-4810-BF18-BE31AFC64F93}" type="slidenum">
+              <a:rPr lang="en-GB" noProof="0" smtClean="0"/>
+              <a:t>13</a:t>
+            </a:fld>
             <a:endParaRPr lang="en-GB" noProof="0" dirty="0"/>
           </a:p>
         </p:txBody>
@@ -7627,22 +11056,22 @@
           <a:lstStyle/>
           <a:p>
             <a:r>
-              <a:rPr lang="de-DE" dirty="0"/>
+              <a:rPr lang="en-GB" noProof="0" dirty="0"/>
               <a:t>Brain FID</a:t>
             </a:r>
             <a:br>
-              <a:rPr lang="de-DE" dirty="0"/>
+              <a:rPr lang="en-GB" noProof="0" dirty="0"/>
             </a:br>
             <a:r>
-              <a:rPr lang="en-GB" sz="1800" dirty="0">
+              <a:rPr lang="en-GB" sz="1800" noProof="0" dirty="0">
                 <a:latin typeface="+mn-lt"/>
               </a:rPr>
               <a:t>RESULT B: GENERATIVE</a:t>
             </a:r>
             <a:br>
-              <a:rPr lang="de-DE" dirty="0"/>
+              <a:rPr lang="en-GB" noProof="0" dirty="0"/>
             </a:br>
-            <a:endParaRPr lang="de-DE" dirty="0"/>
+            <a:endParaRPr lang="en-GB" noProof="0" dirty="0"/>
           </a:p>
         </p:txBody>
       </p:sp>
@@ -7673,7 +11102,7 @@
           <a:lstStyle/>
           <a:p>
             <a:r>
-              <a:rPr lang="en-US" dirty="0">
+              <a:rPr lang="en-GB" noProof="0" dirty="0">
                 <a:solidFill>
                   <a:srgbClr val="1A2233"/>
                 </a:solidFill>
@@ -7686,7 +11115,7 @@
           </a:p>
           <a:p>
             <a:r>
-              <a:rPr lang="en-US" dirty="0">
+              <a:rPr lang="en-GB" noProof="0" dirty="0">
                 <a:solidFill>
                   <a:srgbClr val="1A2233"/>
                 </a:solidFill>
@@ -7699,7 +11128,7 @@
           </a:p>
           <a:p>
             <a:r>
-              <a:rPr lang="en-US" dirty="0" err="1">
+              <a:rPr lang="en-GB" noProof="0" dirty="0" err="1">
                 <a:solidFill>
                   <a:srgbClr val="1A2233"/>
                 </a:solidFill>
@@ -7710,7 +11139,7 @@
               <a:t>SpikeGPT</a:t>
             </a:r>
             <a:r>
-              <a:rPr lang="en-US" dirty="0">
+              <a:rPr lang="en-GB" noProof="0" dirty="0">
                 <a:solidFill>
                   <a:srgbClr val="1A2233"/>
                 </a:solidFill>
@@ -7723,7 +11152,7 @@
           </a:p>
           <a:p>
             <a:r>
-              <a:rPr lang="en-US" dirty="0">
+              <a:rPr lang="en-GB" noProof="0" dirty="0">
                 <a:solidFill>
                   <a:srgbClr val="1A2233"/>
                 </a:solidFill>
@@ -7733,10 +11162,69 @@
               </a:rPr>
               <a:t>Similar to result A</a:t>
             </a:r>
-            <a:endParaRPr lang="en-US" dirty="0"/>
-          </a:p>
-          <a:p>
-            <a:endParaRPr lang="de-DE" dirty="0"/>
+            <a:endParaRPr lang="en-GB" noProof="0" dirty="0"/>
+          </a:p>
+          <a:p>
+            <a:endParaRPr lang="en-GB" noProof="0" dirty="0"/>
+          </a:p>
+        </p:txBody>
+      </p:sp>
+      <p:sp>
+        <p:nvSpPr>
+          <p:cNvPr id="4" name="Fußzeilenplatzhalter 3">
+            <a:extLst>
+              <a:ext uri="{FF2B5EF4-FFF2-40B4-BE49-F238E27FC236}">
+                <a16:creationId xmlns:a16="http://schemas.microsoft.com/office/drawing/2014/main" id="{DBD905D7-855C-4108-8EA9-B46453A4A921}"/>
+              </a:ext>
+            </a:extLst>
+          </p:cNvPr>
+          <p:cNvSpPr>
+            <a:spLocks noGrp="1"/>
+          </p:cNvSpPr>
+          <p:nvPr>
+            <p:ph type="ftr" sz="quarter" idx="11"/>
+          </p:nvPr>
+        </p:nvSpPr>
+        <p:spPr/>
+        <p:txBody>
+          <a:bodyPr/>
+          <a:lstStyle/>
+          <a:p>
+            <a:pPr rtl="0"/>
+            <a:r>
+              <a:rPr lang="en-GB" noProof="0" dirty="0"/>
+              <a:t>Jonas Himmetsberger | Practical Work presentation</a:t>
+            </a:r>
+          </a:p>
+        </p:txBody>
+      </p:sp>
+      <p:sp>
+        <p:nvSpPr>
+          <p:cNvPr id="5" name="Foliennummernplatzhalter 4">
+            <a:extLst>
+              <a:ext uri="{FF2B5EF4-FFF2-40B4-BE49-F238E27FC236}">
+                <a16:creationId xmlns:a16="http://schemas.microsoft.com/office/drawing/2014/main" id="{426B6F51-CB71-F4A7-0DAA-DADED3213C8A}"/>
+              </a:ext>
+            </a:extLst>
+          </p:cNvPr>
+          <p:cNvSpPr>
+            <a:spLocks noGrp="1"/>
+          </p:cNvSpPr>
+          <p:nvPr>
+            <p:ph type="sldNum" sz="quarter" idx="12"/>
+          </p:nvPr>
+        </p:nvSpPr>
+        <p:spPr/>
+        <p:txBody>
+          <a:bodyPr/>
+          <a:lstStyle/>
+          <a:p>
+            <a:pPr rtl="0"/>
+            <a:fld id="{CB1E4CB7-CB13-4810-BF18-BE31AFC64F93}" type="slidenum">
+              <a:rPr lang="en-GB" noProof="0" smtClean="0"/>
+              <a:t>14</a:t>
+            </a:fld>
+            <a:endParaRPr lang="en-GB" noProof="0" dirty="0"/>
           </a:p>
         </p:txBody>
       </p:sp>
@@ -7820,19 +11308,7 @@
               <a:rPr lang="en-GB" sz="2000" noProof="0" dirty="0">
                 <a:latin typeface="+mn-lt"/>
               </a:rPr>
-              <a:t>(destroying the </a:t>
-            </a:r>
-            <a:r>
-              <a:rPr lang="en-GB" sz="2000" noProof="0" dirty="0" err="1">
-                <a:latin typeface="+mn-lt"/>
-              </a:rPr>
-              <a:t>strucutre</a:t>
-            </a:r>
-            <a:r>
-              <a:rPr lang="en-GB" sz="2000" noProof="0" dirty="0">
-                <a:latin typeface="+mn-lt"/>
-              </a:rPr>
-              <a:t> in the real data and check how metrics react)</a:t>
+              <a:t>(destroying the structure in the real data and check how metrics react)</a:t>
             </a:r>
             <a:endParaRPr lang="en-GB" noProof="0" dirty="0">
               <a:latin typeface="+mn-lt"/>
@@ -7950,10 +11426,69 @@
         </p:xfrm>
         <a:graphic>
           <a:graphicData uri="http://schemas.openxmlformats.org/drawingml/2006/chart">
-            <c:chart xmlns:c="http://schemas.openxmlformats.org/drawingml/2006/chart" xmlns:r="http://schemas.openxmlformats.org/officeDocument/2006/relationships" r:id="rId2"/>
+            <c:chart xmlns:c="http://schemas.openxmlformats.org/drawingml/2006/chart" xmlns:r="http://schemas.openxmlformats.org/officeDocument/2006/relationships" r:id="rId3"/>
           </a:graphicData>
         </a:graphic>
       </p:graphicFrame>
+      <p:sp>
+        <p:nvSpPr>
+          <p:cNvPr id="3" name="Fußzeilenplatzhalter 2">
+            <a:extLst>
+              <a:ext uri="{FF2B5EF4-FFF2-40B4-BE49-F238E27FC236}">
+                <a16:creationId xmlns:a16="http://schemas.microsoft.com/office/drawing/2014/main" id="{2D9F5C7E-B561-2FEA-2A9F-F852EFEADE03}"/>
+              </a:ext>
+            </a:extLst>
+          </p:cNvPr>
+          <p:cNvSpPr>
+            <a:spLocks noGrp="1"/>
+          </p:cNvSpPr>
+          <p:nvPr>
+            <p:ph type="ftr" sz="quarter" idx="11"/>
+          </p:nvPr>
+        </p:nvSpPr>
+        <p:spPr/>
+        <p:txBody>
+          <a:bodyPr/>
+          <a:lstStyle/>
+          <a:p>
+            <a:pPr rtl="0"/>
+            <a:r>
+              <a:rPr lang="en-GB" noProof="0" dirty="0"/>
+              <a:t>Jonas Himmetsberger | Practical Work presentation</a:t>
+            </a:r>
+          </a:p>
+        </p:txBody>
+      </p:sp>
+      <p:sp>
+        <p:nvSpPr>
+          <p:cNvPr id="5" name="Foliennummernplatzhalter 4">
+            <a:extLst>
+              <a:ext uri="{FF2B5EF4-FFF2-40B4-BE49-F238E27FC236}">
+                <a16:creationId xmlns:a16="http://schemas.microsoft.com/office/drawing/2014/main" id="{602292F7-DD0D-86D6-5D70-BF9519370882}"/>
+              </a:ext>
+            </a:extLst>
+          </p:cNvPr>
+          <p:cNvSpPr>
+            <a:spLocks noGrp="1"/>
+          </p:cNvSpPr>
+          <p:nvPr>
+            <p:ph type="sldNum" sz="quarter" idx="12"/>
+          </p:nvPr>
+        </p:nvSpPr>
+        <p:spPr/>
+        <p:txBody>
+          <a:bodyPr/>
+          <a:lstStyle/>
+          <a:p>
+            <a:pPr rtl="0"/>
+            <a:fld id="{CB1E4CB7-CB13-4810-BF18-BE31AFC64F93}" type="slidenum">
+              <a:rPr lang="en-GB" noProof="0" smtClean="0"/>
+              <a:t>15</a:t>
+            </a:fld>
+            <a:endParaRPr lang="en-GB" noProof="0" dirty="0"/>
+          </a:p>
+        </p:txBody>
+      </p:sp>
     </p:spTree>
     <p:extLst>
       <p:ext uri="{BB962C8B-B14F-4D97-AF65-F5344CB8AC3E}">
@@ -8006,27 +11541,19 @@
           <a:lstStyle/>
           <a:p>
             <a:r>
-              <a:rPr lang="de-DE" dirty="0" err="1"/>
-              <a:t>Distributions</a:t>
-            </a:r>
-            <a:r>
-              <a:rPr lang="de-DE" dirty="0"/>
-              <a:t> </a:t>
-            </a:r>
-            <a:r>
-              <a:rPr lang="de-DE" dirty="0" err="1"/>
-              <a:t>overlapped</a:t>
+              <a:rPr lang="en-GB" noProof="0" dirty="0"/>
+              <a:t>Distributions overlapped</a:t>
             </a:r>
             <a:br>
-              <a:rPr lang="de-DE" dirty="0"/>
+              <a:rPr lang="en-GB" noProof="0" dirty="0"/>
             </a:br>
             <a:r>
-              <a:rPr lang="de-DE" sz="1800" dirty="0">
+              <a:rPr lang="en-GB" sz="1800" noProof="0" dirty="0">
                 <a:latin typeface="+mn-lt"/>
               </a:rPr>
               <a:t>VISUALIZATION</a:t>
             </a:r>
-            <a:endParaRPr lang="de-DE" dirty="0">
+            <a:endParaRPr lang="en-GB" noProof="0" dirty="0">
               <a:latin typeface="+mn-lt"/>
             </a:endParaRPr>
           </a:p>
@@ -8054,7 +11581,7 @@
           <a:lstStyle/>
           <a:p>
             <a:r>
-              <a:rPr lang="en-US" dirty="0">
+              <a:rPr lang="en-GB" noProof="0" dirty="0">
                 <a:solidFill>
                   <a:srgbClr val="1A2233"/>
                 </a:solidFill>
@@ -8067,7 +11594,7 @@
           </a:p>
           <a:p>
             <a:r>
-              <a:rPr lang="en-US" dirty="0">
+              <a:rPr lang="en-GB" noProof="0" dirty="0">
                 <a:solidFill>
                   <a:srgbClr val="1A2233"/>
                 </a:solidFill>
@@ -8080,7 +11607,7 @@
           </a:p>
           <a:p>
             <a:r>
-              <a:rPr lang="en-US" dirty="0">
+              <a:rPr lang="en-GB" noProof="0" dirty="0">
                 <a:solidFill>
                   <a:srgbClr val="1A2233"/>
                 </a:solidFill>
@@ -8090,7 +11617,7 @@
               </a:rPr>
               <a:t>separation or collapse = fail</a:t>
             </a:r>
-            <a:endParaRPr lang="en-US" dirty="0"/>
+            <a:endParaRPr lang="en-GB" noProof="0" dirty="0"/>
           </a:p>
         </p:txBody>
       </p:sp>
@@ -8109,7 +11636,7 @@
           <p:nvPr/>
         </p:nvPicPr>
         <p:blipFill>
-          <a:blip r:embed="rId2"/>
+          <a:blip r:embed="rId3"/>
           <a:stretch>
             <a:fillRect/>
           </a:stretch>
@@ -8139,7 +11666,7 @@
           <p:nvPr/>
         </p:nvPicPr>
         <p:blipFill>
-          <a:blip r:embed="rId3"/>
+          <a:blip r:embed="rId4"/>
           <a:stretch>
             <a:fillRect/>
           </a:stretch>
@@ -8154,6 +11681,65 @@
           </a:prstGeom>
         </p:spPr>
       </p:pic>
+      <p:sp>
+        <p:nvSpPr>
+          <p:cNvPr id="4" name="Fußzeilenplatzhalter 3">
+            <a:extLst>
+              <a:ext uri="{FF2B5EF4-FFF2-40B4-BE49-F238E27FC236}">
+                <a16:creationId xmlns:a16="http://schemas.microsoft.com/office/drawing/2014/main" id="{2159E217-C5DA-F221-5F95-C3FD6D3B7A75}"/>
+              </a:ext>
+            </a:extLst>
+          </p:cNvPr>
+          <p:cNvSpPr>
+            <a:spLocks noGrp="1"/>
+          </p:cNvSpPr>
+          <p:nvPr>
+            <p:ph type="ftr" sz="quarter" idx="11"/>
+          </p:nvPr>
+        </p:nvSpPr>
+        <p:spPr/>
+        <p:txBody>
+          <a:bodyPr/>
+          <a:lstStyle/>
+          <a:p>
+            <a:pPr rtl="0"/>
+            <a:r>
+              <a:rPr lang="en-GB" noProof="0" dirty="0"/>
+              <a:t>Jonas Himmetsberger | Practical Work presentation</a:t>
+            </a:r>
+          </a:p>
+        </p:txBody>
+      </p:sp>
+      <p:sp>
+        <p:nvSpPr>
+          <p:cNvPr id="5" name="Foliennummernplatzhalter 4">
+            <a:extLst>
+              <a:ext uri="{FF2B5EF4-FFF2-40B4-BE49-F238E27FC236}">
+                <a16:creationId xmlns:a16="http://schemas.microsoft.com/office/drawing/2014/main" id="{F4A4DE1F-DCE3-7C52-8793-8EF6971C19F7}"/>
+              </a:ext>
+            </a:extLst>
+          </p:cNvPr>
+          <p:cNvSpPr>
+            <a:spLocks noGrp="1"/>
+          </p:cNvSpPr>
+          <p:nvPr>
+            <p:ph type="sldNum" sz="quarter" idx="12"/>
+          </p:nvPr>
+        </p:nvSpPr>
+        <p:spPr/>
+        <p:txBody>
+          <a:bodyPr/>
+          <a:lstStyle/>
+          <a:p>
+            <a:pPr rtl="0"/>
+            <a:fld id="{CB1E4CB7-CB13-4810-BF18-BE31AFC64F93}" type="slidenum">
+              <a:rPr lang="en-GB" noProof="0" smtClean="0"/>
+              <a:t>16</a:t>
+            </a:fld>
+            <a:endParaRPr lang="en-GB" noProof="0" dirty="0"/>
+          </a:p>
+        </p:txBody>
+      </p:sp>
     </p:spTree>
     <p:extLst>
       <p:ext uri="{BB962C8B-B14F-4D97-AF65-F5344CB8AC3E}">
@@ -8213,39 +11799,27 @@
           <a:lstStyle/>
           <a:p>
             <a:r>
-              <a:rPr lang="de-DE" dirty="0"/>
+              <a:rPr lang="en-GB" noProof="0" dirty="0"/>
               <a:t>Big </a:t>
             </a:r>
             <a:r>
-              <a:rPr lang="de-DE" dirty="0" err="1"/>
+              <a:rPr lang="en-GB" noProof="0" dirty="0" err="1"/>
               <a:t>variaity</a:t>
             </a:r>
             <a:r>
-              <a:rPr lang="de-DE" dirty="0"/>
-              <a:t> </a:t>
-            </a:r>
-            <a:r>
-              <a:rPr lang="de-DE" dirty="0" err="1"/>
-              <a:t>between</a:t>
-            </a:r>
-            <a:r>
-              <a:rPr lang="de-DE" dirty="0"/>
-              <a:t> </a:t>
-            </a:r>
-            <a:r>
-              <a:rPr lang="de-DE" dirty="0" err="1"/>
-              <a:t>sessions</a:t>
+              <a:rPr lang="en-GB" noProof="0" dirty="0"/>
+              <a:t> between sessions</a:t>
             </a:r>
             <a:br>
-              <a:rPr lang="de-DE" dirty="0"/>
+              <a:rPr lang="en-GB" noProof="0" dirty="0"/>
             </a:br>
             <a:r>
-              <a:rPr lang="de-DE" sz="1800" dirty="0">
+              <a:rPr lang="en-GB" sz="1800" noProof="0" dirty="0">
                 <a:latin typeface="+mn-lt"/>
               </a:rPr>
               <a:t>PER SESSION COMPARISON</a:t>
             </a:r>
-            <a:endParaRPr lang="de-DE" dirty="0">
+            <a:endParaRPr lang="en-GB" noProof="0" dirty="0">
               <a:latin typeface="+mn-lt"/>
             </a:endParaRPr>
           </a:p>
@@ -8278,118 +11852,30 @@
           <a:lstStyle/>
           <a:p>
             <a:r>
-              <a:rPr lang="de-DE" dirty="0" err="1"/>
-              <a:t>Easiest</a:t>
-            </a:r>
-            <a:r>
-              <a:rPr lang="de-DE" dirty="0"/>
-              <a:t> </a:t>
-            </a:r>
-            <a:r>
-              <a:rPr lang="de-DE" dirty="0" err="1"/>
-              <a:t>sessions</a:t>
-            </a:r>
-            <a:r>
-              <a:rPr lang="de-DE" dirty="0"/>
-              <a:t> </a:t>
-            </a:r>
-            <a:r>
-              <a:rPr lang="de-DE" dirty="0" err="1"/>
-              <a:t>for</a:t>
-            </a:r>
-            <a:r>
-              <a:rPr lang="de-DE" dirty="0"/>
-              <a:t> </a:t>
-            </a:r>
-            <a:r>
-              <a:rPr lang="de-DE" dirty="0" err="1"/>
-              <a:t>both</a:t>
-            </a:r>
-            <a:r>
-              <a:rPr lang="de-DE" dirty="0"/>
-              <a:t> </a:t>
-            </a:r>
-            <a:r>
-              <a:rPr lang="de-DE" dirty="0" err="1"/>
-              <a:t>models</a:t>
-            </a:r>
-            <a:r>
-              <a:rPr lang="de-DE" dirty="0"/>
-              <a:t>: Session 5&amp;20</a:t>
-            </a:r>
-          </a:p>
-          <a:p>
-            <a:r>
-              <a:rPr lang="de-DE" dirty="0" err="1"/>
-              <a:t>Hardest</a:t>
-            </a:r>
-            <a:r>
-              <a:rPr lang="de-DE" dirty="0"/>
-              <a:t> Session: S16</a:t>
-            </a:r>
-          </a:p>
-          <a:p>
-            <a:r>
-              <a:rPr lang="de-DE" dirty="0"/>
-              <a:t>Why </a:t>
-            </a:r>
-            <a:r>
-              <a:rPr lang="de-DE" dirty="0" err="1"/>
-              <a:t>values</a:t>
-            </a:r>
-            <a:r>
-              <a:rPr lang="de-DE" dirty="0"/>
-              <a:t> so </a:t>
-            </a:r>
-            <a:r>
-              <a:rPr lang="de-DE" dirty="0" err="1"/>
-              <a:t>much</a:t>
-            </a:r>
-            <a:r>
-              <a:rPr lang="de-DE" dirty="0"/>
-              <a:t> </a:t>
-            </a:r>
-            <a:r>
-              <a:rPr lang="de-DE" dirty="0" err="1"/>
-              <a:t>higher</a:t>
-            </a:r>
-            <a:r>
-              <a:rPr lang="de-DE" dirty="0"/>
-              <a:t> </a:t>
-            </a:r>
-            <a:r>
-              <a:rPr lang="de-DE" dirty="0" err="1"/>
-              <a:t>than</a:t>
-            </a:r>
-            <a:r>
-              <a:rPr lang="de-DE" dirty="0"/>
-              <a:t> global FID? (~20)</a:t>
-            </a:r>
-          </a:p>
-          <a:p>
-            <a:r>
-              <a:rPr lang="de-DE" dirty="0"/>
-              <a:t>Why </a:t>
-            </a:r>
-            <a:r>
-              <a:rPr lang="de-DE" dirty="0" err="1"/>
-              <a:t>huge</a:t>
-            </a:r>
-            <a:r>
-              <a:rPr lang="de-DE" dirty="0"/>
-              <a:t> </a:t>
-            </a:r>
-            <a:r>
-              <a:rPr lang="de-DE" dirty="0" err="1"/>
-              <a:t>discrapency</a:t>
-            </a:r>
-            <a:r>
-              <a:rPr lang="de-DE" dirty="0"/>
-              <a:t>?</a:t>
-            </a:r>
-          </a:p>
-          <a:p>
-            <a:endParaRPr lang="de-DE" dirty="0"/>
+              <a:rPr lang="en-GB" noProof="0" dirty="0"/>
+              <a:t>Easiest sessions for both models: Session 5&amp;20</a:t>
+            </a:r>
+          </a:p>
+          <a:p>
+            <a:r>
+              <a:rPr lang="en-GB" noProof="0" dirty="0"/>
+              <a:t>Hardest Session: S16</a:t>
+            </a:r>
+          </a:p>
+          <a:p>
+            <a:r>
+              <a:rPr lang="en-GB" noProof="0" dirty="0"/>
+              <a:t>Why values so much higher than global FID? (~20)</a:t>
+            </a:r>
+          </a:p>
+          <a:p>
+            <a:r>
+              <a:rPr lang="en-GB" noProof="0" dirty="0"/>
+              <a:t>Why huge discrepancy?</a:t>
+            </a:r>
+          </a:p>
+          <a:p>
+            <a:endParaRPr lang="en-GB" noProof="0" dirty="0"/>
           </a:p>
         </p:txBody>
       </p:sp>
@@ -8408,7 +11894,7 @@
           <p:nvPr>
             <p:extLst>
               <p:ext uri="{D42A27DB-BD31-4B8C-83A1-F6EECF244321}">
-                <p14:modId xmlns:p14="http://schemas.microsoft.com/office/powerpoint/2010/main" val="3091611717"/>
+                <p14:modId xmlns:p14="http://schemas.microsoft.com/office/powerpoint/2010/main" val="1369751638"/>
               </p:ext>
             </p:extLst>
           </p:nvPr>
@@ -8419,14 +11905,467 @@
         </p:xfrm>
         <a:graphic>
           <a:graphicData uri="http://schemas.openxmlformats.org/drawingml/2006/chart">
-            <c:chart xmlns:c="http://schemas.openxmlformats.org/drawingml/2006/chart" xmlns:r="http://schemas.openxmlformats.org/officeDocument/2006/relationships" r:id="rId2"/>
+            <c:chart xmlns:c="http://schemas.openxmlformats.org/drawingml/2006/chart" xmlns:r="http://schemas.openxmlformats.org/officeDocument/2006/relationships" r:id="rId3"/>
           </a:graphicData>
         </a:graphic>
       </p:graphicFrame>
+      <p:sp>
+        <p:nvSpPr>
+          <p:cNvPr id="4" name="Fußzeilenplatzhalter 3">
+            <a:extLst>
+              <a:ext uri="{FF2B5EF4-FFF2-40B4-BE49-F238E27FC236}">
+                <a16:creationId xmlns:a16="http://schemas.microsoft.com/office/drawing/2014/main" id="{5E43E9A4-2D5C-234C-00D0-A63CEF49E04E}"/>
+              </a:ext>
+            </a:extLst>
+          </p:cNvPr>
+          <p:cNvSpPr>
+            <a:spLocks noGrp="1"/>
+          </p:cNvSpPr>
+          <p:nvPr>
+            <p:ph type="ftr" sz="quarter" idx="11"/>
+          </p:nvPr>
+        </p:nvSpPr>
+        <p:spPr/>
+        <p:txBody>
+          <a:bodyPr/>
+          <a:lstStyle/>
+          <a:p>
+            <a:pPr rtl="0"/>
+            <a:r>
+              <a:rPr lang="en-GB" noProof="0" dirty="0"/>
+              <a:t>Jonas Himmetsberger | Practical Work presentation</a:t>
+            </a:r>
+          </a:p>
+        </p:txBody>
+      </p:sp>
+      <p:sp>
+        <p:nvSpPr>
+          <p:cNvPr id="5" name="Foliennummernplatzhalter 4">
+            <a:extLst>
+              <a:ext uri="{FF2B5EF4-FFF2-40B4-BE49-F238E27FC236}">
+                <a16:creationId xmlns:a16="http://schemas.microsoft.com/office/drawing/2014/main" id="{1BECCB8D-7DA6-A15E-085F-C274796DB511}"/>
+              </a:ext>
+            </a:extLst>
+          </p:cNvPr>
+          <p:cNvSpPr>
+            <a:spLocks noGrp="1"/>
+          </p:cNvSpPr>
+          <p:nvPr>
+            <p:ph type="sldNum" sz="quarter" idx="12"/>
+          </p:nvPr>
+        </p:nvSpPr>
+        <p:spPr/>
+        <p:txBody>
+          <a:bodyPr/>
+          <a:lstStyle/>
+          <a:p>
+            <a:pPr rtl="0"/>
+            <a:fld id="{CB1E4CB7-CB13-4810-BF18-BE31AFC64F93}" type="slidenum">
+              <a:rPr lang="en-GB" noProof="0" smtClean="0"/>
+              <a:t>17</a:t>
+            </a:fld>
+            <a:endParaRPr lang="en-GB" noProof="0" dirty="0"/>
+          </a:p>
+        </p:txBody>
+      </p:sp>
     </p:spTree>
     <p:extLst>
       <p:ext uri="{BB962C8B-B14F-4D97-AF65-F5344CB8AC3E}">
         <p14:creationId xmlns:p14="http://schemas.microsoft.com/office/powerpoint/2010/main" val="2582797701"/>
+      </p:ext>
+    </p:extLst>
+  </p:cSld>
+  <p:clrMapOvr>
+    <a:masterClrMapping/>
+  </p:clrMapOvr>
+</p:sld>
+</file>
+
+<file path=ppt/slides/slide18.xml><?xml version="1.0" encoding="utf-8"?>
+<p:sld xmlns:a="http://schemas.openxmlformats.org/drawingml/2006/main" xmlns:r="http://schemas.openxmlformats.org/officeDocument/2006/relationships" xmlns:p="http://schemas.openxmlformats.org/presentationml/2006/main">
+  <p:cSld>
+    <p:spTree>
+      <p:nvGrpSpPr>
+        <p:cNvPr id="1" name=""/>
+        <p:cNvGrpSpPr/>
+        <p:nvPr/>
+      </p:nvGrpSpPr>
+      <p:grpSpPr>
+        <a:xfrm>
+          <a:off x="0" y="0"/>
+          <a:ext cx="0" cy="0"/>
+          <a:chOff x="0" y="0"/>
+          <a:chExt cx="0" cy="0"/>
+        </a:xfrm>
+      </p:grpSpPr>
+      <p:sp>
+        <p:nvSpPr>
+          <p:cNvPr id="2" name="Titel 1">
+            <a:extLst>
+              <a:ext uri="{FF2B5EF4-FFF2-40B4-BE49-F238E27FC236}">
+                <a16:creationId xmlns:a16="http://schemas.microsoft.com/office/drawing/2014/main" id="{B554428C-F47F-928C-A7D4-3B4FCB20A852}"/>
+              </a:ext>
+            </a:extLst>
+          </p:cNvPr>
+          <p:cNvSpPr>
+            <a:spLocks noGrp="1"/>
+          </p:cNvSpPr>
+          <p:nvPr>
+            <p:ph type="title"/>
+          </p:nvPr>
+        </p:nvSpPr>
+        <p:spPr/>
+        <p:txBody>
+          <a:bodyPr/>
+          <a:lstStyle/>
+          <a:p>
+            <a:r>
+              <a:rPr lang="en-GB" noProof="0" dirty="0"/>
+              <a:t>What this thesis contributes</a:t>
+            </a:r>
+            <a:br>
+              <a:rPr lang="en-GB" noProof="0" dirty="0"/>
+            </a:br>
+            <a:r>
+              <a:rPr lang="en-GB" sz="1800" noProof="0" dirty="0">
+                <a:latin typeface="+mn-lt"/>
+              </a:rPr>
+              <a:t>SUMMARY</a:t>
+            </a:r>
+            <a:endParaRPr lang="en-GB" noProof="0" dirty="0">
+              <a:latin typeface="+mn-lt"/>
+            </a:endParaRPr>
+          </a:p>
+        </p:txBody>
+      </p:sp>
+      <p:sp>
+        <p:nvSpPr>
+          <p:cNvPr id="7" name="Inhaltsplatzhalter 6">
+            <a:extLst>
+              <a:ext uri="{FF2B5EF4-FFF2-40B4-BE49-F238E27FC236}">
+                <a16:creationId xmlns:a16="http://schemas.microsoft.com/office/drawing/2014/main" id="{F9B90310-E7FF-EB48-2909-B74FAD60C289}"/>
+              </a:ext>
+            </a:extLst>
+          </p:cNvPr>
+          <p:cNvSpPr>
+            <a:spLocks noGrp="1"/>
+          </p:cNvSpPr>
+          <p:nvPr>
+            <p:ph idx="1"/>
+          </p:nvPr>
+        </p:nvSpPr>
+        <p:spPr/>
+        <p:txBody>
+          <a:bodyPr>
+            <a:normAutofit fontScale="92500" lnSpcReduction="10000"/>
+          </a:bodyPr>
+          <a:lstStyle/>
+          <a:p>
+            <a:r>
+              <a:rPr lang="en-GB" noProof="0" dirty="0"/>
+              <a:t>A controlled architecture comparison</a:t>
+            </a:r>
+          </a:p>
+          <a:p>
+            <a:pPr lvl="1"/>
+            <a:r>
+              <a:rPr lang="en-GB" noProof="0" dirty="0" err="1"/>
+              <a:t>SpikeGPT</a:t>
+            </a:r>
+            <a:r>
+              <a:rPr lang="en-GB" noProof="0" dirty="0"/>
+              <a:t> speeds up classification and training</a:t>
+            </a:r>
+          </a:p>
+          <a:p>
+            <a:r>
+              <a:rPr lang="en-GB" noProof="0" dirty="0"/>
+              <a:t>A generative metric for </a:t>
+            </a:r>
+            <a:r>
+              <a:rPr lang="en-GB" noProof="0" dirty="0" err="1"/>
+              <a:t>SpikeGPT</a:t>
+            </a:r>
+            <a:endParaRPr lang="en-GB" noProof="0" dirty="0"/>
+          </a:p>
+          <a:p>
+            <a:pPr lvl="1"/>
+            <a:r>
+              <a:rPr lang="en-GB" noProof="0" dirty="0"/>
+              <a:t>Brain FID adapts image FID to spikes via area-pooled frequency features</a:t>
+            </a:r>
+          </a:p>
+          <a:p>
+            <a:r>
+              <a:rPr lang="en-GB" noProof="0" dirty="0"/>
+              <a:t>Validation of the metric</a:t>
+            </a:r>
+          </a:p>
+          <a:p>
+            <a:pPr lvl="1"/>
+            <a:r>
+              <a:rPr lang="en-GB" noProof="0" dirty="0"/>
+              <a:t>Shuffling of tests shows that the metric captures population structure but not temporal structure</a:t>
+            </a:r>
+          </a:p>
+        </p:txBody>
+      </p:sp>
+      <p:sp>
+        <p:nvSpPr>
+          <p:cNvPr id="5" name="Fußzeilenplatzhalter 4">
+            <a:extLst>
+              <a:ext uri="{FF2B5EF4-FFF2-40B4-BE49-F238E27FC236}">
+                <a16:creationId xmlns:a16="http://schemas.microsoft.com/office/drawing/2014/main" id="{3A817E6F-BC3C-F482-22C7-213CF0678820}"/>
+              </a:ext>
+            </a:extLst>
+          </p:cNvPr>
+          <p:cNvSpPr>
+            <a:spLocks noGrp="1"/>
+          </p:cNvSpPr>
+          <p:nvPr>
+            <p:ph type="ftr" sz="quarter" idx="11"/>
+          </p:nvPr>
+        </p:nvSpPr>
+        <p:spPr/>
+        <p:txBody>
+          <a:bodyPr/>
+          <a:lstStyle/>
+          <a:p>
+            <a:pPr rtl="0"/>
+            <a:r>
+              <a:rPr lang="en-GB" noProof="0" dirty="0"/>
+              <a:t>Jonas Himmetsberger | Practical Work presentation</a:t>
+            </a:r>
+          </a:p>
+        </p:txBody>
+      </p:sp>
+      <p:sp>
+        <p:nvSpPr>
+          <p:cNvPr id="6" name="Foliennummernplatzhalter 5">
+            <a:extLst>
+              <a:ext uri="{FF2B5EF4-FFF2-40B4-BE49-F238E27FC236}">
+                <a16:creationId xmlns:a16="http://schemas.microsoft.com/office/drawing/2014/main" id="{5079C320-B50A-6E93-6D4C-A9FE71FD213E}"/>
+              </a:ext>
+            </a:extLst>
+          </p:cNvPr>
+          <p:cNvSpPr>
+            <a:spLocks noGrp="1"/>
+          </p:cNvSpPr>
+          <p:nvPr>
+            <p:ph type="sldNum" sz="quarter" idx="12"/>
+          </p:nvPr>
+        </p:nvSpPr>
+        <p:spPr/>
+        <p:txBody>
+          <a:bodyPr/>
+          <a:lstStyle/>
+          <a:p>
+            <a:pPr rtl="0"/>
+            <a:fld id="{CB1E4CB7-CB13-4810-BF18-BE31AFC64F93}" type="slidenum">
+              <a:rPr lang="en-GB" noProof="0" smtClean="0"/>
+              <a:t>18</a:t>
+            </a:fld>
+            <a:endParaRPr lang="en-GB" noProof="0" dirty="0"/>
+          </a:p>
+        </p:txBody>
+      </p:sp>
+    </p:spTree>
+    <p:extLst>
+      <p:ext uri="{BB962C8B-B14F-4D97-AF65-F5344CB8AC3E}">
+        <p14:creationId xmlns:p14="http://schemas.microsoft.com/office/powerpoint/2010/main" val="2803476139"/>
+      </p:ext>
+    </p:extLst>
+  </p:cSld>
+  <p:clrMapOvr>
+    <a:masterClrMapping/>
+  </p:clrMapOvr>
+</p:sld>
+</file>
+
+<file path=ppt/slides/slide19.xml><?xml version="1.0" encoding="utf-8"?>
+<p:sld xmlns:a="http://schemas.openxmlformats.org/drawingml/2006/main" xmlns:r="http://schemas.openxmlformats.org/officeDocument/2006/relationships" xmlns:p="http://schemas.openxmlformats.org/presentationml/2006/main">
+  <p:cSld>
+    <p:spTree>
+      <p:nvGrpSpPr>
+        <p:cNvPr id="1" name=""/>
+        <p:cNvGrpSpPr/>
+        <p:nvPr/>
+      </p:nvGrpSpPr>
+      <p:grpSpPr>
+        <a:xfrm>
+          <a:off x="0" y="0"/>
+          <a:ext cx="0" cy="0"/>
+          <a:chOff x="0" y="0"/>
+          <a:chExt cx="0" cy="0"/>
+        </a:xfrm>
+      </p:grpSpPr>
+      <p:sp>
+        <p:nvSpPr>
+          <p:cNvPr id="2" name="Titel 1">
+            <a:extLst>
+              <a:ext uri="{FF2B5EF4-FFF2-40B4-BE49-F238E27FC236}">
+                <a16:creationId xmlns:a16="http://schemas.microsoft.com/office/drawing/2014/main" id="{417F7C8E-3178-C810-2640-28DEB91D190C}"/>
+              </a:ext>
+            </a:extLst>
+          </p:cNvPr>
+          <p:cNvSpPr>
+            <a:spLocks noGrp="1"/>
+          </p:cNvSpPr>
+          <p:nvPr>
+            <p:ph type="title"/>
+          </p:nvPr>
+        </p:nvSpPr>
+        <p:spPr/>
+        <p:txBody>
+          <a:bodyPr/>
+          <a:lstStyle/>
+          <a:p>
+            <a:r>
+              <a:rPr lang="en-GB" noProof="0" dirty="0"/>
+              <a:t>Future Work</a:t>
+            </a:r>
+          </a:p>
+        </p:txBody>
+      </p:sp>
+      <p:sp>
+        <p:nvSpPr>
+          <p:cNvPr id="3" name="Inhaltsplatzhalter 2">
+            <a:extLst>
+              <a:ext uri="{FF2B5EF4-FFF2-40B4-BE49-F238E27FC236}">
+                <a16:creationId xmlns:a16="http://schemas.microsoft.com/office/drawing/2014/main" id="{B32645E7-07A4-1141-33D0-64AC68063F47}"/>
+              </a:ext>
+            </a:extLst>
+          </p:cNvPr>
+          <p:cNvSpPr>
+            <a:spLocks noGrp="1"/>
+          </p:cNvSpPr>
+          <p:nvPr>
+            <p:ph idx="1"/>
+          </p:nvPr>
+        </p:nvSpPr>
+        <p:spPr/>
+        <p:txBody>
+          <a:bodyPr>
+            <a:normAutofit fontScale="92500" lnSpcReduction="20000"/>
+          </a:bodyPr>
+          <a:lstStyle/>
+          <a:p>
+            <a:r>
+              <a:rPr lang="en-GB" noProof="0" dirty="0"/>
+              <a:t>Fix temporal sensitivity/Make Brain FID react to temporal shuffling</a:t>
+            </a:r>
+          </a:p>
+          <a:p>
+            <a:pPr lvl="1"/>
+            <a:r>
+              <a:rPr lang="en-GB" noProof="0" dirty="0"/>
+              <a:t>Higher frequency bands or time-resolved features?</a:t>
+            </a:r>
+          </a:p>
+          <a:p>
+            <a:r>
+              <a:rPr lang="en-GB" noProof="0" dirty="0"/>
+              <a:t>Pretrained generative transformer</a:t>
+            </a:r>
+          </a:p>
+          <a:p>
+            <a:pPr lvl="1"/>
+            <a:r>
+              <a:rPr lang="en-GB" noProof="0" dirty="0"/>
+              <a:t>Evaluate a pretrained transformer generatively with FID, starting from the Allen data</a:t>
+            </a:r>
+          </a:p>
+          <a:p>
+            <a:r>
+              <a:rPr lang="en-GB" noProof="0" dirty="0"/>
+              <a:t>Trial-matched R</a:t>
+            </a:r>
+            <a:r>
+              <a:rPr lang="en-GB" baseline="30000" noProof="0" dirty="0"/>
+              <a:t>2</a:t>
+            </a:r>
+          </a:p>
+          <a:p>
+            <a:pPr lvl="1"/>
+            <a:r>
+              <a:rPr lang="en-GB" noProof="0" dirty="0"/>
+              <a:t>Add optimal-transport  metric (</a:t>
+            </a:r>
+            <a:r>
+              <a:rPr lang="en-GB" noProof="0" dirty="0" err="1"/>
+              <a:t>Sourmpis</a:t>
+            </a:r>
+            <a:r>
+              <a:rPr lang="en-GB" noProof="0" dirty="0"/>
+              <a:t> et al. 2023) to eval metric</a:t>
+            </a:r>
+          </a:p>
+        </p:txBody>
+      </p:sp>
+      <p:sp>
+        <p:nvSpPr>
+          <p:cNvPr id="4" name="Fußzeilenplatzhalter 3">
+            <a:extLst>
+              <a:ext uri="{FF2B5EF4-FFF2-40B4-BE49-F238E27FC236}">
+                <a16:creationId xmlns:a16="http://schemas.microsoft.com/office/drawing/2014/main" id="{29B0B428-233E-970F-6C22-4EABC3F2BF96}"/>
+              </a:ext>
+            </a:extLst>
+          </p:cNvPr>
+          <p:cNvSpPr>
+            <a:spLocks noGrp="1"/>
+          </p:cNvSpPr>
+          <p:nvPr>
+            <p:ph type="ftr" sz="quarter" idx="11"/>
+          </p:nvPr>
+        </p:nvSpPr>
+        <p:spPr/>
+        <p:txBody>
+          <a:bodyPr/>
+          <a:lstStyle/>
+          <a:p>
+            <a:pPr rtl="0"/>
+            <a:r>
+              <a:rPr lang="en-GB" noProof="0" dirty="0"/>
+              <a:t>Jonas Himmetsberger | Practical Work presentation</a:t>
+            </a:r>
+          </a:p>
+        </p:txBody>
+      </p:sp>
+      <p:sp>
+        <p:nvSpPr>
+          <p:cNvPr id="5" name="Foliennummernplatzhalter 4">
+            <a:extLst>
+              <a:ext uri="{FF2B5EF4-FFF2-40B4-BE49-F238E27FC236}">
+                <a16:creationId xmlns:a16="http://schemas.microsoft.com/office/drawing/2014/main" id="{AA47F315-0DF7-DAC7-82DE-E0CBEE9D5E02}"/>
+              </a:ext>
+            </a:extLst>
+          </p:cNvPr>
+          <p:cNvSpPr>
+            <a:spLocks noGrp="1"/>
+          </p:cNvSpPr>
+          <p:nvPr>
+            <p:ph type="sldNum" sz="quarter" idx="12"/>
+          </p:nvPr>
+        </p:nvSpPr>
+        <p:spPr/>
+        <p:txBody>
+          <a:bodyPr/>
+          <a:lstStyle/>
+          <a:p>
+            <a:pPr rtl="0"/>
+            <a:fld id="{CB1E4CB7-CB13-4810-BF18-BE31AFC64F93}" type="slidenum">
+              <a:rPr lang="en-GB" noProof="0" smtClean="0"/>
+              <a:pPr rtl="0"/>
+              <a:t>19</a:t>
+            </a:fld>
+            <a:endParaRPr lang="en-GB" sz="1000" noProof="0" dirty="0"/>
+          </a:p>
+        </p:txBody>
+      </p:sp>
+    </p:spTree>
+    <p:extLst>
+      <p:ext uri="{BB962C8B-B14F-4D97-AF65-F5344CB8AC3E}">
+        <p14:creationId xmlns:p14="http://schemas.microsoft.com/office/powerpoint/2010/main" val="353343199"/>
       </p:ext>
     </p:extLst>
   </p:cSld>
@@ -8548,15 +12487,7 @@
             </a:pPr>
             <a:r>
               <a:rPr lang="en-GB" noProof="0" dirty="0"/>
-              <a:t>Two </a:t>
-            </a:r>
-            <a:r>
-              <a:rPr lang="en-GB" noProof="0" dirty="0" err="1"/>
-              <a:t>scirentific</a:t>
-            </a:r>
-            <a:r>
-              <a:rPr lang="en-GB" noProof="0" dirty="0"/>
-              <a:t> questions</a:t>
+              <a:t>Two scientific questions</a:t>
             </a:r>
             <a:br>
               <a:rPr lang="en-GB" noProof="0" dirty="0"/>
@@ -8596,6 +12527,65 @@
               <a:rPr lang="en-GB" sz="1600" noProof="0" dirty="0"/>
               <a:t>Architecture comparison, Brain FID, metric validation, limitations</a:t>
             </a:r>
+          </a:p>
+        </p:txBody>
+      </p:sp>
+      <p:sp>
+        <p:nvSpPr>
+          <p:cNvPr id="4" name="Fußzeilenplatzhalter 3">
+            <a:extLst>
+              <a:ext uri="{FF2B5EF4-FFF2-40B4-BE49-F238E27FC236}">
+                <a16:creationId xmlns:a16="http://schemas.microsoft.com/office/drawing/2014/main" id="{1CD17E29-2E98-8547-1DDA-A9991D6B026C}"/>
+              </a:ext>
+            </a:extLst>
+          </p:cNvPr>
+          <p:cNvSpPr>
+            <a:spLocks noGrp="1"/>
+          </p:cNvSpPr>
+          <p:nvPr>
+            <p:ph type="ftr" sz="quarter" idx="11"/>
+          </p:nvPr>
+        </p:nvSpPr>
+        <p:spPr/>
+        <p:txBody>
+          <a:bodyPr/>
+          <a:lstStyle/>
+          <a:p>
+            <a:pPr rtl="0"/>
+            <a:r>
+              <a:rPr lang="en-GB" noProof="0" dirty="0"/>
+              <a:t>Jonas Himmetsberger | Practical Work presentation</a:t>
+            </a:r>
+          </a:p>
+        </p:txBody>
+      </p:sp>
+      <p:sp>
+        <p:nvSpPr>
+          <p:cNvPr id="5" name="Foliennummernplatzhalter 4">
+            <a:extLst>
+              <a:ext uri="{FF2B5EF4-FFF2-40B4-BE49-F238E27FC236}">
+                <a16:creationId xmlns:a16="http://schemas.microsoft.com/office/drawing/2014/main" id="{1FD6867D-F53C-C40C-8047-FA0CC987BDF9}"/>
+              </a:ext>
+            </a:extLst>
+          </p:cNvPr>
+          <p:cNvSpPr>
+            <a:spLocks noGrp="1"/>
+          </p:cNvSpPr>
+          <p:nvPr>
+            <p:ph type="sldNum" sz="quarter" idx="12"/>
+          </p:nvPr>
+        </p:nvSpPr>
+        <p:spPr/>
+        <p:txBody>
+          <a:bodyPr/>
+          <a:lstStyle/>
+          <a:p>
+            <a:pPr rtl="0"/>
+            <a:fld id="{CB1E4CB7-CB13-4810-BF18-BE31AFC64F93}" type="slidenum">
+              <a:rPr lang="en-GB" noProof="0" smtClean="0"/>
+              <a:t>2</a:t>
+            </a:fld>
+            <a:endParaRPr lang="en-GB" noProof="0" dirty="0"/>
           </a:p>
         </p:txBody>
       </p:sp>
@@ -8603,6 +12593,957 @@
     <p:extLst>
       <p:ext uri="{BB962C8B-B14F-4D97-AF65-F5344CB8AC3E}">
         <p14:creationId xmlns:p14="http://schemas.microsoft.com/office/powerpoint/2010/main" val="3260502912"/>
+      </p:ext>
+    </p:extLst>
+  </p:cSld>
+  <p:clrMapOvr>
+    <a:masterClrMapping/>
+  </p:clrMapOvr>
+</p:sld>
+</file>
+
+<file path=ppt/slides/slide20.xml><?xml version="1.0" encoding="utf-8"?>
+<p:sld xmlns:a="http://schemas.openxmlformats.org/drawingml/2006/main" xmlns:r="http://schemas.openxmlformats.org/officeDocument/2006/relationships" xmlns:p="http://schemas.openxmlformats.org/presentationml/2006/main">
+  <p:cSld>
+    <p:spTree>
+      <p:nvGrpSpPr>
+        <p:cNvPr id="1" name=""/>
+        <p:cNvGrpSpPr/>
+        <p:nvPr/>
+      </p:nvGrpSpPr>
+      <p:grpSpPr>
+        <a:xfrm>
+          <a:off x="0" y="0"/>
+          <a:ext cx="0" cy="0"/>
+          <a:chOff x="0" y="0"/>
+          <a:chExt cx="0" cy="0"/>
+        </a:xfrm>
+      </p:grpSpPr>
+      <p:sp>
+        <p:nvSpPr>
+          <p:cNvPr id="6" name="Titel 5">
+            <a:extLst>
+              <a:ext uri="{FF2B5EF4-FFF2-40B4-BE49-F238E27FC236}">
+                <a16:creationId xmlns:a16="http://schemas.microsoft.com/office/drawing/2014/main" id="{5D669FF8-EE0B-337B-5CC0-035D4FF7885F}"/>
+              </a:ext>
+            </a:extLst>
+          </p:cNvPr>
+          <p:cNvSpPr>
+            <a:spLocks noGrp="1"/>
+          </p:cNvSpPr>
+          <p:nvPr>
+            <p:ph type="title"/>
+          </p:nvPr>
+        </p:nvSpPr>
+        <p:spPr/>
+        <p:txBody>
+          <a:bodyPr/>
+          <a:lstStyle/>
+          <a:p>
+            <a:r>
+              <a:rPr lang="en-GB" noProof="0" dirty="0"/>
+              <a:t>Thank you</a:t>
+            </a:r>
+          </a:p>
+        </p:txBody>
+      </p:sp>
+      <p:sp>
+        <p:nvSpPr>
+          <p:cNvPr id="8" name="Bildplatzhalter 7">
+            <a:extLst>
+              <a:ext uri="{FF2B5EF4-FFF2-40B4-BE49-F238E27FC236}">
+                <a16:creationId xmlns:a16="http://schemas.microsoft.com/office/drawing/2014/main" id="{F3416817-4ADB-CCBE-69EC-26D09C9E2B95}"/>
+              </a:ext>
+            </a:extLst>
+          </p:cNvPr>
+          <p:cNvSpPr>
+            <a:spLocks noGrp="1"/>
+          </p:cNvSpPr>
+          <p:nvPr>
+            <p:ph type="pic" sz="quarter" idx="13"/>
+          </p:nvPr>
+        </p:nvSpPr>
+        <p:spPr>
+          <a:solidFill>
+            <a:schemeClr val="bg1"/>
+          </a:solidFill>
+        </p:spPr>
+        <p:txBody>
+          <a:bodyPr/>
+          <a:lstStyle/>
+          <a:p>
+            <a:endParaRPr lang="en-GB" noProof="0" dirty="0"/>
+          </a:p>
+        </p:txBody>
+      </p:sp>
+      <p:sp>
+        <p:nvSpPr>
+          <p:cNvPr id="4" name="Fußzeilenplatzhalter 3">
+            <a:extLst>
+              <a:ext uri="{FF2B5EF4-FFF2-40B4-BE49-F238E27FC236}">
+                <a16:creationId xmlns:a16="http://schemas.microsoft.com/office/drawing/2014/main" id="{A10CC3DF-4290-2DF8-4F0F-7658F830B2C1}"/>
+              </a:ext>
+            </a:extLst>
+          </p:cNvPr>
+          <p:cNvSpPr>
+            <a:spLocks noGrp="1"/>
+          </p:cNvSpPr>
+          <p:nvPr>
+            <p:ph type="ftr" sz="quarter" idx="4294967295"/>
+          </p:nvPr>
+        </p:nvSpPr>
+        <p:spPr>
+          <a:xfrm>
+            <a:off x="0" y="6400800"/>
+            <a:ext cx="6099175" cy="365125"/>
+          </a:xfrm>
+        </p:spPr>
+        <p:txBody>
+          <a:bodyPr/>
+          <a:lstStyle/>
+          <a:p>
+            <a:pPr rtl="0"/>
+            <a:r>
+              <a:rPr lang="en-GB" noProof="0" dirty="0"/>
+              <a:t>Jonas Himmetsberger | Practical Work presentation</a:t>
+            </a:r>
+          </a:p>
+        </p:txBody>
+      </p:sp>
+      <p:sp>
+        <p:nvSpPr>
+          <p:cNvPr id="5" name="Foliennummernplatzhalter 4">
+            <a:extLst>
+              <a:ext uri="{FF2B5EF4-FFF2-40B4-BE49-F238E27FC236}">
+                <a16:creationId xmlns:a16="http://schemas.microsoft.com/office/drawing/2014/main" id="{92709AD1-CE24-9BFF-40E7-89884B11E995}"/>
+              </a:ext>
+            </a:extLst>
+          </p:cNvPr>
+          <p:cNvSpPr>
+            <a:spLocks noGrp="1"/>
+          </p:cNvSpPr>
+          <p:nvPr>
+            <p:ph type="sldNum" sz="quarter" idx="4294967295"/>
+          </p:nvPr>
+        </p:nvSpPr>
+        <p:spPr>
+          <a:xfrm>
+            <a:off x="11661775" y="6400800"/>
+            <a:ext cx="530225" cy="365125"/>
+          </a:xfrm>
+        </p:spPr>
+        <p:txBody>
+          <a:bodyPr/>
+          <a:lstStyle/>
+          <a:p>
+            <a:pPr rtl="0"/>
+            <a:fld id="{CB1E4CB7-CB13-4810-BF18-BE31AFC64F93}" type="slidenum">
+              <a:rPr lang="en-GB" noProof="0" smtClean="0"/>
+              <a:pPr rtl="0"/>
+              <a:t>20</a:t>
+            </a:fld>
+            <a:endParaRPr lang="en-GB" sz="1000" noProof="0" dirty="0"/>
+          </a:p>
+        </p:txBody>
+      </p:sp>
+      <p:sp>
+        <p:nvSpPr>
+          <p:cNvPr id="7" name="Untertitel 6">
+            <a:extLst>
+              <a:ext uri="{FF2B5EF4-FFF2-40B4-BE49-F238E27FC236}">
+                <a16:creationId xmlns:a16="http://schemas.microsoft.com/office/drawing/2014/main" id="{FFB6EF58-7B84-01A9-7E83-BEBF3E4959DF}"/>
+              </a:ext>
+            </a:extLst>
+          </p:cNvPr>
+          <p:cNvSpPr>
+            <a:spLocks noGrp="1"/>
+          </p:cNvSpPr>
+          <p:nvPr>
+            <p:ph type="subTitle" idx="1"/>
+          </p:nvPr>
+        </p:nvSpPr>
+        <p:spPr>
+          <a:xfrm>
+            <a:off x="762000" y="3429000"/>
+            <a:ext cx="10412681" cy="2665807"/>
+          </a:xfrm>
+        </p:spPr>
+        <p:txBody>
+          <a:bodyPr>
+            <a:normAutofit fontScale="47500" lnSpcReduction="20000"/>
+          </a:bodyPr>
+          <a:lstStyle/>
+          <a:p>
+            <a:r>
+              <a:rPr lang="en-GB" noProof="0" dirty="0"/>
+              <a:t>References</a:t>
+            </a:r>
+          </a:p>
+          <a:p>
+            <a:r>
+              <a:rPr lang="en-GB" noProof="0" dirty="0"/>
+              <a:t>G. Bellec, S. Wang, A. </a:t>
+            </a:r>
+            <a:r>
+              <a:rPr lang="en-GB" noProof="0" dirty="0" err="1"/>
+              <a:t>Modirshanechi</a:t>
+            </a:r>
+            <a:r>
+              <a:rPr lang="en-GB" noProof="0" dirty="0"/>
+              <a:t>, J. Brea, and W. Gerstner, "Fitting summary statistics of neural data with a differentiable spiking network simulator," Advances in Neural Information Processing Systems (</a:t>
+            </a:r>
+            <a:r>
+              <a:rPr lang="en-GB" noProof="0" dirty="0" err="1"/>
+              <a:t>NeurIPS</a:t>
+            </a:r>
+            <a:r>
+              <a:rPr lang="en-GB" noProof="0" dirty="0"/>
+              <a:t>), vol. 34, pp. 18552–18563, 2021.</a:t>
+            </a:r>
+          </a:p>
+          <a:p>
+            <a:r>
+              <a:rPr lang="en-GB" noProof="0" dirty="0"/>
+              <a:t>C. </a:t>
+            </a:r>
+            <a:r>
+              <a:rPr lang="en-GB" noProof="0" dirty="0" err="1"/>
+              <a:t>Sourmpis</a:t>
+            </a:r>
+            <a:r>
+              <a:rPr lang="en-GB" noProof="0" dirty="0"/>
+              <a:t>, C. Petersen, W. Gerstner, and G. Bellec, "Trial matching: capturing variability with data-constrained spiking neural networks," Advances in Neural Information Processing Systems (</a:t>
+            </a:r>
+            <a:r>
+              <a:rPr lang="en-GB" noProof="0" dirty="0" err="1"/>
+              <a:t>NeurIPS</a:t>
+            </a:r>
+            <a:r>
+              <a:rPr lang="en-GB" noProof="0" dirty="0"/>
+              <a:t>), vol. 36, 2023.</a:t>
+            </a:r>
+          </a:p>
+          <a:p>
+            <a:r>
+              <a:rPr lang="en-GB" noProof="0" dirty="0"/>
+              <a:t>C. </a:t>
+            </a:r>
+            <a:r>
+              <a:rPr lang="en-GB" noProof="0" dirty="0" err="1"/>
+              <a:t>Sourmpis</a:t>
+            </a:r>
+            <a:r>
+              <a:rPr lang="en-GB" noProof="0" dirty="0"/>
+              <a:t>, C. C. H. Petersen, W. Gerstner, and G. Bellec, "Biologically informed cortical models predict optogenetic perturbations," </a:t>
+            </a:r>
+            <a:r>
+              <a:rPr lang="en-GB" noProof="0" dirty="0" err="1"/>
+              <a:t>eLife</a:t>
+            </a:r>
+            <a:r>
+              <a:rPr lang="en-GB" noProof="0" dirty="0"/>
+              <a:t>, 2025, reviewed preprint.</a:t>
+            </a:r>
+          </a:p>
+          <a:p>
+            <a:r>
+              <a:rPr lang="en-GB" noProof="0" dirty="0"/>
+              <a:t>J. Ye, F. </a:t>
+            </a:r>
+            <a:r>
+              <a:rPr lang="en-GB" noProof="0" dirty="0" err="1"/>
+              <a:t>Rizzoglio</a:t>
+            </a:r>
+            <a:r>
+              <a:rPr lang="en-GB" noProof="0" dirty="0"/>
+              <a:t>, X. Ma, A. Smoulder, H. Mao, G. H. Blumenthal, et al., "A generalist intracortical motor decoder (NDT3)," International Conference on Learning Representations (ICLR), 2025.</a:t>
+            </a:r>
+          </a:p>
+          <a:p>
+            <a:r>
+              <a:rPr lang="en-GB" noProof="0" dirty="0"/>
+              <a:t>M. Heusel, H. Ramsauer, T. </a:t>
+            </a:r>
+            <a:r>
+              <a:rPr lang="en-GB" noProof="0" dirty="0" err="1"/>
+              <a:t>Unterthiner</a:t>
+            </a:r>
+            <a:r>
+              <a:rPr lang="en-GB" noProof="0" dirty="0"/>
+              <a:t>, B. Nessler, and S. Hochreiter, "GANs trained by a two time-scale update rule converge to a local Nash equilibrium," Advances in Neural Information Processing Systems (</a:t>
+            </a:r>
+            <a:r>
+              <a:rPr lang="en-GB" noProof="0" dirty="0" err="1"/>
+              <a:t>NeurIPS</a:t>
+            </a:r>
+            <a:r>
+              <a:rPr lang="en-GB" noProof="0" dirty="0"/>
+              <a:t>), vol. 30, 2017.</a:t>
+            </a:r>
+          </a:p>
+          <a:p>
+            <a:r>
+              <a:rPr lang="en-GB" noProof="0" dirty="0"/>
+              <a:t>Allen Institute for Brain Science, "Visual Coding – </a:t>
+            </a:r>
+            <a:r>
+              <a:rPr lang="en-GB" noProof="0" dirty="0" err="1"/>
+              <a:t>Neuropixels</a:t>
+            </a:r>
+            <a:r>
+              <a:rPr lang="en-GB" noProof="0" dirty="0"/>
+              <a:t> dataset," 2019. [Online]. Available: https://portal.brain-map.org/circuits-behavior/visual-coding-neuropixels</a:t>
+            </a:r>
+          </a:p>
+        </p:txBody>
+      </p:sp>
+    </p:spTree>
+    <p:extLst>
+      <p:ext uri="{BB962C8B-B14F-4D97-AF65-F5344CB8AC3E}">
+        <p14:creationId xmlns:p14="http://schemas.microsoft.com/office/powerpoint/2010/main" val="358734088"/>
+      </p:ext>
+    </p:extLst>
+  </p:cSld>
+  <p:clrMapOvr>
+    <a:masterClrMapping/>
+  </p:clrMapOvr>
+</p:sld>
+</file>
+
+<file path=ppt/slides/slide21.xml><?xml version="1.0" encoding="utf-8"?>
+<p:sld xmlns:a="http://schemas.openxmlformats.org/drawingml/2006/main" xmlns:r="http://schemas.openxmlformats.org/officeDocument/2006/relationships" xmlns:p="http://schemas.openxmlformats.org/presentationml/2006/main">
+  <p:cSld>
+    <p:spTree>
+      <p:nvGrpSpPr>
+        <p:cNvPr id="1" name=""/>
+        <p:cNvGrpSpPr/>
+        <p:nvPr/>
+      </p:nvGrpSpPr>
+      <p:grpSpPr>
+        <a:xfrm>
+          <a:off x="0" y="0"/>
+          <a:ext cx="0" cy="0"/>
+          <a:chOff x="0" y="0"/>
+          <a:chExt cx="0" cy="0"/>
+        </a:xfrm>
+      </p:grpSpPr>
+      <p:sp>
+        <p:nvSpPr>
+          <p:cNvPr id="3" name="Inhaltsplatzhalter 2">
+            <a:extLst>
+              <a:ext uri="{FF2B5EF4-FFF2-40B4-BE49-F238E27FC236}">
+                <a16:creationId xmlns:a16="http://schemas.microsoft.com/office/drawing/2014/main" id="{560DD04B-72D2-31F0-35D5-82B0B7A18416}"/>
+              </a:ext>
+            </a:extLst>
+          </p:cNvPr>
+          <p:cNvSpPr>
+            <a:spLocks noGrp="1"/>
+          </p:cNvSpPr>
+          <p:nvPr>
+            <p:ph sz="quarter" idx="13"/>
+          </p:nvPr>
+        </p:nvSpPr>
+        <p:spPr>
+          <a:xfrm>
+            <a:off x="950026" y="1517904"/>
+            <a:ext cx="10358054" cy="4572000"/>
+          </a:xfrm>
+        </p:spPr>
+        <p:txBody>
+          <a:bodyPr>
+            <a:normAutofit fontScale="85000" lnSpcReduction="20000"/>
+          </a:bodyPr>
+          <a:lstStyle/>
+          <a:p>
+            <a:pPr marL="342900" indent="-342900">
+              <a:buFont typeface="Arial" panose="020B0604020202020204" pitchFamily="34" charset="0"/>
+              <a:buChar char="•"/>
+            </a:pPr>
+            <a:r>
+              <a:rPr lang="de-DE" dirty="0"/>
+              <a:t>Wieso 2-30Hz </a:t>
+            </a:r>
+            <a:r>
+              <a:rPr lang="en-US" dirty="0"/>
+              <a:t>(2–30 Hz, grouped into 3 bands) </a:t>
+            </a:r>
+            <a:r>
+              <a:rPr lang="en-US" dirty="0" err="1"/>
+              <a:t>bzw</a:t>
+            </a:r>
+            <a:r>
+              <a:rPr lang="en-US" dirty="0"/>
+              <a:t> was </a:t>
+            </a:r>
+            <a:r>
+              <a:rPr lang="en-US" dirty="0" err="1"/>
+              <a:t>ist</a:t>
+            </a:r>
+            <a:r>
+              <a:rPr lang="en-US" dirty="0"/>
+              <a:t> der dc component</a:t>
+            </a:r>
+            <a:r>
+              <a:rPr lang="de-DE" dirty="0"/>
+              <a:t>?</a:t>
+            </a:r>
+          </a:p>
+          <a:p>
+            <a:pPr marL="342900" indent="-342900">
+              <a:buFont typeface="Arial" panose="020B0604020202020204" pitchFamily="34" charset="0"/>
+              <a:buChar char="•"/>
+            </a:pPr>
+            <a:r>
+              <a:rPr lang="de-DE" dirty="0"/>
+              <a:t>Was ist das </a:t>
+            </a:r>
+            <a:r>
+              <a:rPr lang="de-DE" dirty="0" err="1"/>
+              <a:t>problem</a:t>
+            </a:r>
+            <a:r>
+              <a:rPr lang="de-DE" dirty="0"/>
+              <a:t> warum der temporal </a:t>
+            </a:r>
+            <a:r>
+              <a:rPr lang="de-DE" dirty="0" err="1"/>
+              <a:t>shuffle</a:t>
+            </a:r>
+            <a:r>
+              <a:rPr lang="de-DE" dirty="0"/>
+              <a:t> nicht genau funktioniert hat?</a:t>
+            </a:r>
+          </a:p>
+          <a:p>
+            <a:pPr marL="342900" indent="-342900">
+              <a:buFont typeface="Arial" panose="020B0604020202020204" pitchFamily="34" charset="0"/>
+              <a:buChar char="•"/>
+            </a:pPr>
+            <a:r>
+              <a:rPr lang="de-DE" dirty="0"/>
+              <a:t>Wieso ist der globale FID score so viel niedriger wie der per </a:t>
+            </a:r>
+            <a:r>
+              <a:rPr lang="de-DE" dirty="0" err="1"/>
+              <a:t>session</a:t>
+            </a:r>
+            <a:r>
+              <a:rPr lang="de-DE" dirty="0"/>
+              <a:t>?</a:t>
+            </a:r>
+          </a:p>
+          <a:p>
+            <a:pPr marL="342900" indent="-342900">
+              <a:buFont typeface="Arial" panose="020B0604020202020204" pitchFamily="34" charset="0"/>
+              <a:buChar char="•"/>
+            </a:pPr>
+            <a:r>
+              <a:rPr lang="de-DE" dirty="0"/>
+              <a:t>Was sagen die quellen aus?</a:t>
+            </a:r>
+          </a:p>
+          <a:p>
+            <a:pPr marL="342900" indent="-342900">
+              <a:buFont typeface="Arial" panose="020B0604020202020204" pitchFamily="34" charset="0"/>
+              <a:buChar char="•"/>
+            </a:pPr>
+            <a:r>
+              <a:rPr lang="de-DE" dirty="0"/>
+              <a:t>Wieso hat das </a:t>
+            </a:r>
+            <a:r>
+              <a:rPr lang="de-DE" dirty="0" err="1"/>
+              <a:t>notebook</a:t>
+            </a:r>
+            <a:r>
+              <a:rPr lang="de-DE" dirty="0"/>
+              <a:t> hier 24*4: </a:t>
+            </a:r>
+            <a:r>
+              <a:rPr lang="en-US" dirty="0" err="1"/>
+              <a:t>feature_oscillation_frequency</a:t>
+            </a:r>
+            <a:r>
+              <a:rPr lang="en-US" dirty="0"/>
+              <a:t>(X, </a:t>
+            </a:r>
+            <a:r>
+              <a:rPr lang="en-US" dirty="0" err="1"/>
+              <a:t>f_min</a:t>
+            </a:r>
+            <a:r>
+              <a:rPr lang="en-US" b="1" dirty="0"/>
+              <a:t>=</a:t>
+            </a:r>
+            <a:r>
+              <a:rPr lang="en-US" dirty="0"/>
+              <a:t>2, </a:t>
+            </a:r>
+            <a:r>
+              <a:rPr lang="en-US" dirty="0" err="1"/>
+              <a:t>f_max</a:t>
+            </a:r>
+            <a:r>
+              <a:rPr lang="en-US" b="1" dirty="0"/>
+              <a:t>=</a:t>
+            </a:r>
+            <a:r>
+              <a:rPr lang="en-US" dirty="0"/>
+              <a:t>30, </a:t>
+            </a:r>
+            <a:r>
+              <a:rPr lang="en-US" dirty="0" err="1"/>
+              <a:t>num_f</a:t>
+            </a:r>
+            <a:r>
+              <a:rPr lang="en-US" b="1" dirty="0"/>
+              <a:t>=</a:t>
+            </a:r>
+            <a:r>
+              <a:rPr lang="en-US" dirty="0"/>
+              <a:t>24 </a:t>
+            </a:r>
+            <a:r>
+              <a:rPr lang="en-US" b="1" dirty="0"/>
+              <a:t>*</a:t>
+            </a:r>
+            <a:r>
+              <a:rPr lang="en-US" dirty="0"/>
+              <a:t> 4, </a:t>
+            </a:r>
+            <a:r>
+              <a:rPr lang="en-US" dirty="0" err="1"/>
+              <a:t>n_group</a:t>
+            </a:r>
+            <a:r>
+              <a:rPr lang="en-US" b="1" dirty="0"/>
+              <a:t>=</a:t>
+            </a:r>
+            <a:r>
+              <a:rPr lang="en-US" dirty="0"/>
+              <a:t>3)</a:t>
+            </a:r>
+          </a:p>
+          <a:p>
+            <a:pPr marL="342900" indent="-342900">
+              <a:buFont typeface="Arial" panose="020B0604020202020204" pitchFamily="34" charset="0"/>
+              <a:buChar char="•"/>
+            </a:pPr>
+            <a:r>
+              <a:rPr lang="de-DE" dirty="0"/>
+              <a:t>How </a:t>
+            </a:r>
+            <a:r>
+              <a:rPr lang="de-DE" dirty="0" err="1"/>
+              <a:t>does</a:t>
+            </a:r>
+            <a:r>
+              <a:rPr lang="de-DE" dirty="0"/>
+              <a:t> </a:t>
+            </a:r>
+            <a:r>
+              <a:rPr lang="de-DE" dirty="0" err="1"/>
+              <a:t>the</a:t>
+            </a:r>
+            <a:r>
+              <a:rPr lang="de-DE" dirty="0"/>
+              <a:t> FID </a:t>
+            </a:r>
+            <a:r>
+              <a:rPr lang="de-DE" dirty="0" err="1"/>
+              <a:t>differ</a:t>
+            </a:r>
+            <a:r>
+              <a:rPr lang="de-DE" dirty="0"/>
+              <a:t> </a:t>
+            </a:r>
+            <a:r>
+              <a:rPr lang="de-DE" dirty="0" err="1"/>
+              <a:t>from</a:t>
+            </a:r>
+            <a:r>
+              <a:rPr lang="de-DE" dirty="0"/>
+              <a:t> </a:t>
+            </a:r>
+            <a:r>
+              <a:rPr lang="de-DE" dirty="0" err="1"/>
+              <a:t>the</a:t>
+            </a:r>
+            <a:r>
+              <a:rPr lang="de-DE" dirty="0"/>
+              <a:t> FID in </a:t>
+            </a:r>
+            <a:r>
+              <a:rPr lang="de-DE" dirty="0" err="1"/>
+              <a:t>the</a:t>
+            </a:r>
+            <a:r>
+              <a:rPr lang="de-DE" dirty="0"/>
+              <a:t> Notebook2?</a:t>
+            </a:r>
+          </a:p>
+          <a:p>
+            <a:pPr marL="708660" lvl="1" indent="-342900">
+              <a:buFont typeface="Arial" panose="020B0604020202020204" pitchFamily="34" charset="0"/>
+              <a:buChar char="•"/>
+            </a:pPr>
+            <a:r>
+              <a:rPr lang="de-DE" dirty="0"/>
+              <a:t>Notebook2 </a:t>
+            </a:r>
+            <a:r>
+              <a:rPr lang="de-DE" dirty="0" err="1"/>
+              <a:t>is</a:t>
+            </a:r>
+            <a:r>
+              <a:rPr lang="de-DE" dirty="0"/>
+              <a:t> a </a:t>
+            </a:r>
+            <a:r>
+              <a:rPr lang="de-DE" dirty="0" err="1"/>
+              <a:t>standalone</a:t>
+            </a:r>
+            <a:r>
+              <a:rPr lang="de-DE" dirty="0"/>
+              <a:t> </a:t>
+            </a:r>
+            <a:r>
+              <a:rPr lang="de-DE" dirty="0" err="1"/>
+              <a:t>analysis</a:t>
+            </a:r>
+            <a:r>
+              <a:rPr lang="de-DE" dirty="0"/>
+              <a:t> code </a:t>
+            </a:r>
+            <a:r>
+              <a:rPr lang="de-DE" dirty="0" err="1"/>
+              <a:t>for</a:t>
+            </a:r>
+            <a:r>
+              <a:rPr lang="de-DE" dirty="0"/>
+              <a:t> RNN. My code </a:t>
+            </a:r>
+            <a:r>
+              <a:rPr lang="de-DE" dirty="0" err="1"/>
+              <a:t>is</a:t>
+            </a:r>
+            <a:r>
+              <a:rPr lang="de-DE" dirty="0"/>
+              <a:t> </a:t>
+            </a:r>
+            <a:r>
+              <a:rPr lang="de-DE" dirty="0" err="1"/>
+              <a:t>easily</a:t>
+            </a:r>
+            <a:r>
+              <a:rPr lang="de-DE" dirty="0"/>
+              <a:t> </a:t>
+            </a:r>
+            <a:r>
+              <a:rPr lang="de-DE" dirty="0" err="1"/>
+              <a:t>fuseable</a:t>
+            </a:r>
+            <a:r>
+              <a:rPr lang="de-DE" dirty="0"/>
+              <a:t> </a:t>
+            </a:r>
+            <a:r>
+              <a:rPr lang="de-DE" dirty="0" err="1"/>
+              <a:t>with</a:t>
+            </a:r>
+            <a:r>
+              <a:rPr lang="de-DE" dirty="0"/>
+              <a:t> </a:t>
+            </a:r>
+            <a:r>
+              <a:rPr lang="de-DE" dirty="0" err="1"/>
+              <a:t>the</a:t>
+            </a:r>
+            <a:r>
+              <a:rPr lang="de-DE" dirty="0"/>
+              <a:t> </a:t>
+            </a:r>
+            <a:r>
+              <a:rPr lang="de-DE" dirty="0" err="1"/>
+              <a:t>trainings</a:t>
+            </a:r>
+            <a:r>
+              <a:rPr lang="de-DE" dirty="0"/>
+              <a:t>/</a:t>
+            </a:r>
+            <a:r>
+              <a:rPr lang="de-DE" dirty="0" err="1"/>
+              <a:t>eval</a:t>
+            </a:r>
+            <a:r>
+              <a:rPr lang="de-DE" dirty="0"/>
+              <a:t> loop </a:t>
+            </a:r>
+            <a:r>
+              <a:rPr lang="de-DE" dirty="0" err="1"/>
+              <a:t>of</a:t>
+            </a:r>
+            <a:r>
+              <a:rPr lang="de-DE" dirty="0"/>
+              <a:t> </a:t>
+            </a:r>
+            <a:r>
+              <a:rPr lang="de-DE" dirty="0" err="1"/>
+              <a:t>the</a:t>
+            </a:r>
+            <a:r>
+              <a:rPr lang="de-DE" dirty="0"/>
+              <a:t> GPT-</a:t>
+            </a:r>
+            <a:r>
+              <a:rPr lang="de-DE" dirty="0" err="1"/>
+              <a:t>codebase</a:t>
+            </a:r>
+            <a:r>
+              <a:rPr lang="de-DE" dirty="0"/>
+              <a:t>. (Adapter, SOS-Tokens, Block-Masks, Session-Handling all </a:t>
+            </a:r>
+            <a:r>
+              <a:rPr lang="de-DE" dirty="0" err="1"/>
+              <a:t>has</a:t>
+            </a:r>
+            <a:r>
+              <a:rPr lang="de-DE" dirty="0"/>
+              <a:t> </a:t>
+            </a:r>
+            <a:r>
+              <a:rPr lang="de-DE" dirty="0" err="1"/>
+              <a:t>to</a:t>
+            </a:r>
+            <a:r>
+              <a:rPr lang="de-DE" dirty="0"/>
+              <a:t> fit </a:t>
+            </a:r>
+            <a:r>
+              <a:rPr lang="de-DE" dirty="0" err="1"/>
+              <a:t>with</a:t>
+            </a:r>
+            <a:r>
+              <a:rPr lang="de-DE" dirty="0"/>
+              <a:t> </a:t>
+            </a:r>
+            <a:r>
+              <a:rPr lang="de-DE" dirty="0" err="1"/>
+              <a:t>the</a:t>
+            </a:r>
+            <a:r>
+              <a:rPr lang="de-DE" dirty="0"/>
+              <a:t> </a:t>
+            </a:r>
+            <a:r>
+              <a:rPr lang="de-DE" dirty="0" err="1"/>
+              <a:t>transformer</a:t>
+            </a:r>
+            <a:r>
+              <a:rPr lang="de-DE" dirty="0"/>
+              <a:t> </a:t>
+            </a:r>
+            <a:r>
+              <a:rPr lang="de-DE" dirty="0" err="1"/>
+              <a:t>architecture</a:t>
+            </a:r>
+            <a:r>
+              <a:rPr lang="de-DE" dirty="0"/>
+              <a:t>)</a:t>
+            </a:r>
+          </a:p>
+        </p:txBody>
+      </p:sp>
+      <p:sp>
+        <p:nvSpPr>
+          <p:cNvPr id="4" name="Fußzeilenplatzhalter 3">
+            <a:extLst>
+              <a:ext uri="{FF2B5EF4-FFF2-40B4-BE49-F238E27FC236}">
+                <a16:creationId xmlns:a16="http://schemas.microsoft.com/office/drawing/2014/main" id="{8DAF99C8-3664-FF3C-E664-48D35D050C3E}"/>
+              </a:ext>
+            </a:extLst>
+          </p:cNvPr>
+          <p:cNvSpPr>
+            <a:spLocks noGrp="1"/>
+          </p:cNvSpPr>
+          <p:nvPr>
+            <p:ph type="ftr" sz="quarter" idx="11"/>
+          </p:nvPr>
+        </p:nvSpPr>
+        <p:spPr/>
+        <p:txBody>
+          <a:bodyPr/>
+          <a:lstStyle/>
+          <a:p>
+            <a:pPr rtl="0"/>
+            <a:r>
+              <a:rPr lang="en-US"/>
+              <a:t>Jonas Himmetsberger | Practical Work presentation</a:t>
+            </a:r>
+            <a:endParaRPr lang="en-US" dirty="0"/>
+          </a:p>
+        </p:txBody>
+      </p:sp>
+      <p:sp>
+        <p:nvSpPr>
+          <p:cNvPr id="5" name="Foliennummernplatzhalter 4">
+            <a:extLst>
+              <a:ext uri="{FF2B5EF4-FFF2-40B4-BE49-F238E27FC236}">
+                <a16:creationId xmlns:a16="http://schemas.microsoft.com/office/drawing/2014/main" id="{6AFDB41B-FF65-07D5-10C3-B58EA3C511C7}"/>
+              </a:ext>
+            </a:extLst>
+          </p:cNvPr>
+          <p:cNvSpPr>
+            <a:spLocks noGrp="1"/>
+          </p:cNvSpPr>
+          <p:nvPr>
+            <p:ph type="sldNum" sz="quarter" idx="12"/>
+          </p:nvPr>
+        </p:nvSpPr>
+        <p:spPr/>
+        <p:txBody>
+          <a:bodyPr/>
+          <a:lstStyle/>
+          <a:p>
+            <a:pPr rtl="0"/>
+            <a:fld id="{CB1E4CB7-CB13-4810-BF18-BE31AFC64F93}" type="slidenum">
+              <a:rPr lang="en-US" smtClean="0"/>
+              <a:t>21</a:t>
+            </a:fld>
+            <a:endParaRPr lang="en-US" dirty="0"/>
+          </a:p>
+        </p:txBody>
+      </p:sp>
+    </p:spTree>
+    <p:extLst>
+      <p:ext uri="{BB962C8B-B14F-4D97-AF65-F5344CB8AC3E}">
+        <p14:creationId xmlns:p14="http://schemas.microsoft.com/office/powerpoint/2010/main" val="1885718935"/>
+      </p:ext>
+    </p:extLst>
+  </p:cSld>
+  <p:clrMapOvr>
+    <a:masterClrMapping/>
+  </p:clrMapOvr>
+</p:sld>
+</file>
+
+<file path=ppt/slides/slide22.xml><?xml version="1.0" encoding="utf-8"?>
+<p:sld xmlns:a="http://schemas.openxmlformats.org/drawingml/2006/main" xmlns:r="http://schemas.openxmlformats.org/officeDocument/2006/relationships" xmlns:p="http://schemas.openxmlformats.org/presentationml/2006/main">
+  <p:cSld>
+    <p:spTree>
+      <p:nvGrpSpPr>
+        <p:cNvPr id="1" name=""/>
+        <p:cNvGrpSpPr/>
+        <p:nvPr/>
+      </p:nvGrpSpPr>
+      <p:grpSpPr>
+        <a:xfrm>
+          <a:off x="0" y="0"/>
+          <a:ext cx="0" cy="0"/>
+          <a:chOff x="0" y="0"/>
+          <a:chExt cx="0" cy="0"/>
+        </a:xfrm>
+      </p:grpSpPr>
+      <p:sp>
+        <p:nvSpPr>
+          <p:cNvPr id="3" name="Inhaltsplatzhalter 2">
+            <a:extLst>
+              <a:ext uri="{FF2B5EF4-FFF2-40B4-BE49-F238E27FC236}">
+                <a16:creationId xmlns:a16="http://schemas.microsoft.com/office/drawing/2014/main" id="{0C9B74CB-A3C6-78EE-2608-A7C604409654}"/>
+              </a:ext>
+            </a:extLst>
+          </p:cNvPr>
+          <p:cNvSpPr>
+            <a:spLocks noGrp="1"/>
+          </p:cNvSpPr>
+          <p:nvPr>
+            <p:ph sz="quarter" idx="13"/>
+          </p:nvPr>
+        </p:nvSpPr>
+        <p:spPr>
+          <a:xfrm>
+            <a:off x="1223158" y="1517904"/>
+            <a:ext cx="10084922" cy="4572000"/>
+          </a:xfrm>
+        </p:spPr>
+        <p:txBody>
+          <a:bodyPr/>
+          <a:lstStyle/>
+          <a:p>
+            <a:pPr marL="342900" indent="-342900">
+              <a:buFont typeface="Arial" panose="020B0604020202020204" pitchFamily="34" charset="0"/>
+              <a:buChar char="•"/>
+            </a:pPr>
+            <a:r>
+              <a:rPr lang="de-DE" dirty="0"/>
+              <a:t>Was ist nochmal Hebel 3</a:t>
+            </a:r>
+          </a:p>
+        </p:txBody>
+      </p:sp>
+      <p:sp>
+        <p:nvSpPr>
+          <p:cNvPr id="4" name="Fußzeilenplatzhalter 3">
+            <a:extLst>
+              <a:ext uri="{FF2B5EF4-FFF2-40B4-BE49-F238E27FC236}">
+                <a16:creationId xmlns:a16="http://schemas.microsoft.com/office/drawing/2014/main" id="{E44ECC3B-C92F-951C-621A-685AEE4B3358}"/>
+              </a:ext>
+            </a:extLst>
+          </p:cNvPr>
+          <p:cNvSpPr>
+            <a:spLocks noGrp="1"/>
+          </p:cNvSpPr>
+          <p:nvPr>
+            <p:ph type="ftr" sz="quarter" idx="11"/>
+          </p:nvPr>
+        </p:nvSpPr>
+        <p:spPr/>
+        <p:txBody>
+          <a:bodyPr/>
+          <a:lstStyle/>
+          <a:p>
+            <a:pPr rtl="0"/>
+            <a:r>
+              <a:rPr lang="en-US" dirty="0"/>
+              <a:t>Jonas Himmetsberger | Practical Work presentation</a:t>
+            </a:r>
+          </a:p>
+        </p:txBody>
+      </p:sp>
+      <p:sp>
+        <p:nvSpPr>
+          <p:cNvPr id="5" name="Foliennummernplatzhalter 4">
+            <a:extLst>
+              <a:ext uri="{FF2B5EF4-FFF2-40B4-BE49-F238E27FC236}">
+                <a16:creationId xmlns:a16="http://schemas.microsoft.com/office/drawing/2014/main" id="{1F2F1CD9-C62E-C97C-9586-D250D63FFC35}"/>
+              </a:ext>
+            </a:extLst>
+          </p:cNvPr>
+          <p:cNvSpPr>
+            <a:spLocks noGrp="1"/>
+          </p:cNvSpPr>
+          <p:nvPr>
+            <p:ph type="sldNum" sz="quarter" idx="12"/>
+          </p:nvPr>
+        </p:nvSpPr>
+        <p:spPr/>
+        <p:txBody>
+          <a:bodyPr/>
+          <a:lstStyle/>
+          <a:p>
+            <a:pPr rtl="0"/>
+            <a:fld id="{CB1E4CB7-CB13-4810-BF18-BE31AFC64F93}" type="slidenum">
+              <a:rPr lang="en-US" smtClean="0"/>
+              <a:t>22</a:t>
+            </a:fld>
+            <a:endParaRPr lang="en-US" dirty="0"/>
+          </a:p>
+        </p:txBody>
+      </p:sp>
+    </p:spTree>
+    <p:extLst>
+      <p:ext uri="{BB962C8B-B14F-4D97-AF65-F5344CB8AC3E}">
+        <p14:creationId xmlns:p14="http://schemas.microsoft.com/office/powerpoint/2010/main" val="686655666"/>
       </p:ext>
     </p:extLst>
   </p:cSld>
@@ -8668,6 +13609,66 @@
               <a:rPr lang="en-GB" sz="6000" noProof="0" dirty="0"/>
               <a:t>&amp; state of the art</a:t>
             </a:r>
+          </a:p>
+        </p:txBody>
+      </p:sp>
+      <p:sp>
+        <p:nvSpPr>
+          <p:cNvPr id="2" name="Fußzeilenplatzhalter 1">
+            <a:extLst>
+              <a:ext uri="{FF2B5EF4-FFF2-40B4-BE49-F238E27FC236}">
+                <a16:creationId xmlns:a16="http://schemas.microsoft.com/office/drawing/2014/main" id="{CDBE7650-9EE9-65D3-38CC-5F1CDEFB1298}"/>
+              </a:ext>
+            </a:extLst>
+          </p:cNvPr>
+          <p:cNvSpPr>
+            <a:spLocks noGrp="1"/>
+          </p:cNvSpPr>
+          <p:nvPr>
+            <p:ph type="ftr" sz="quarter" idx="11"/>
+          </p:nvPr>
+        </p:nvSpPr>
+        <p:spPr/>
+        <p:txBody>
+          <a:bodyPr/>
+          <a:lstStyle/>
+          <a:p>
+            <a:pPr rtl="0"/>
+            <a:r>
+              <a:rPr lang="en-GB" noProof="0" dirty="0"/>
+              <a:t>Jonas Himmetsberger | Practical Work presentation</a:t>
+            </a:r>
+          </a:p>
+        </p:txBody>
+      </p:sp>
+      <p:sp>
+        <p:nvSpPr>
+          <p:cNvPr id="3" name="Foliennummernplatzhalter 2">
+            <a:extLst>
+              <a:ext uri="{FF2B5EF4-FFF2-40B4-BE49-F238E27FC236}">
+                <a16:creationId xmlns:a16="http://schemas.microsoft.com/office/drawing/2014/main" id="{9F52319F-25E2-6C6D-866B-623561D2204A}"/>
+              </a:ext>
+            </a:extLst>
+          </p:cNvPr>
+          <p:cNvSpPr>
+            <a:spLocks noGrp="1"/>
+          </p:cNvSpPr>
+          <p:nvPr>
+            <p:ph type="sldNum" sz="quarter" idx="12"/>
+          </p:nvPr>
+        </p:nvSpPr>
+        <p:spPr/>
+        <p:txBody>
+          <a:bodyPr/>
+          <a:lstStyle/>
+          <a:p>
+            <a:pPr rtl="0"/>
+            <a:fld id="{CB1E4CB7-CB13-4810-BF18-BE31AFC64F93}" type="slidenum">
+              <a:rPr lang="en-GB" noProof="0" smtClean="0"/>
+              <a:pPr rtl="0"/>
+              <a:t>3</a:t>
+            </a:fld>
+            <a:endParaRPr lang="en-GB" sz="1000" noProof="0" dirty="0"/>
           </a:p>
         </p:txBody>
       </p:sp>
@@ -9195,6 +14196,65 @@
               <a:t>One model across sessions, animals, brain regions (a “foundation model” for neural data)</a:t>
             </a:r>
             <a:endParaRPr lang="en-GB" sz="1400" noProof="0" dirty="0"/>
+          </a:p>
+        </p:txBody>
+      </p:sp>
+      <p:sp>
+        <p:nvSpPr>
+          <p:cNvPr id="2" name="Fußzeilenplatzhalter 1">
+            <a:extLst>
+              <a:ext uri="{FF2B5EF4-FFF2-40B4-BE49-F238E27FC236}">
+                <a16:creationId xmlns:a16="http://schemas.microsoft.com/office/drawing/2014/main" id="{D9DCD06E-B107-90AE-C2FC-67923F8B24CE}"/>
+              </a:ext>
+            </a:extLst>
+          </p:cNvPr>
+          <p:cNvSpPr>
+            <a:spLocks noGrp="1"/>
+          </p:cNvSpPr>
+          <p:nvPr>
+            <p:ph type="ftr" sz="quarter" idx="11"/>
+          </p:nvPr>
+        </p:nvSpPr>
+        <p:spPr/>
+        <p:txBody>
+          <a:bodyPr/>
+          <a:lstStyle/>
+          <a:p>
+            <a:pPr rtl="0"/>
+            <a:r>
+              <a:rPr lang="en-GB" noProof="0" dirty="0"/>
+              <a:t>Jonas Himmetsberger | Practical Work presentation</a:t>
+            </a:r>
+          </a:p>
+        </p:txBody>
+      </p:sp>
+      <p:sp>
+        <p:nvSpPr>
+          <p:cNvPr id="3" name="Foliennummernplatzhalter 2">
+            <a:extLst>
+              <a:ext uri="{FF2B5EF4-FFF2-40B4-BE49-F238E27FC236}">
+                <a16:creationId xmlns:a16="http://schemas.microsoft.com/office/drawing/2014/main" id="{5F68CF9A-F697-8FAB-0BCA-0CB70F173E0A}"/>
+              </a:ext>
+            </a:extLst>
+          </p:cNvPr>
+          <p:cNvSpPr>
+            <a:spLocks noGrp="1"/>
+          </p:cNvSpPr>
+          <p:nvPr>
+            <p:ph type="sldNum" sz="quarter" idx="12"/>
+          </p:nvPr>
+        </p:nvSpPr>
+        <p:spPr/>
+        <p:txBody>
+          <a:bodyPr/>
+          <a:lstStyle/>
+          <a:p>
+            <a:pPr rtl="0"/>
+            <a:fld id="{CB1E4CB7-CB13-4810-BF18-BE31AFC64F93}" type="slidenum">
+              <a:rPr lang="en-GB" noProof="0" smtClean="0"/>
+              <a:t>4</a:t>
+            </a:fld>
+            <a:endParaRPr lang="en-GB" noProof="0" dirty="0"/>
           </a:p>
         </p:txBody>
       </p:sp>
@@ -9600,7 +14660,7 @@
                 <a:effectLst/>
                 <a:latin typeface="Calibri" panose="020F0502020204030204" pitchFamily="34" charset="0"/>
                 <a:cs typeface="Calibri" panose="020F0502020204030204" pitchFamily="34" charset="0"/>
-                <a:hlinkClick r:id="rId2"/>
+                <a:hlinkClick r:id="rId3"/>
               </a:rPr>
               <a:t>https://proceedings.neurips.cc/paper_files/paper/2021/hash/9a32ff36c65e8ba30915a21b7bd76506-Abstract.html</a:t>
             </a:r>
@@ -9773,7 +14833,7 @@
                 <a:effectLst/>
                 <a:latin typeface="Calibri" panose="020F0502020204030204" pitchFamily="34" charset="0"/>
                 <a:cs typeface="Calibri" panose="020F0502020204030204" pitchFamily="34" charset="0"/>
-                <a:hlinkClick r:id="rId3"/>
+                <a:hlinkClick r:id="rId4"/>
               </a:rPr>
               <a:t>https://proceedings.neurips.cc/paper_files/paper/2023/hash/ec702dd6e83b2113a43614685a7e2ac6-Abstract-Conference.html</a:t>
             </a:r>
@@ -9912,7 +14972,7 @@
                 </a:solidFill>
                 <a:latin typeface="Calibri" panose="020F0502020204030204" pitchFamily="34" charset="0"/>
                 <a:cs typeface="Calibri" panose="020F0502020204030204" pitchFamily="34" charset="0"/>
-                <a:hlinkClick r:id="rId4"/>
+                <a:hlinkClick r:id="rId5"/>
               </a:rPr>
               <a:t>https://elifesciences.org/reviewed-preprints/106827</a:t>
             </a:r>
@@ -10058,7 +15118,7 @@
                 <a:effectLst/>
                 <a:latin typeface="Calibri" panose="020F0502020204030204" pitchFamily="34" charset="0"/>
                 <a:cs typeface="Calibri" panose="020F0502020204030204" pitchFamily="34" charset="0"/>
-                <a:hlinkClick r:id="rId5"/>
+                <a:hlinkClick r:id="rId6"/>
               </a:rPr>
               <a:t>https://openreview.net/forum?id=ONOe6cAE9I</a:t>
             </a:r>
@@ -10072,6 +15132,65 @@
               <a:effectLst/>
               <a:latin typeface="Arial" panose="020B0604020202020204" pitchFamily="34" charset="0"/>
             </a:endParaRPr>
+          </a:p>
+        </p:txBody>
+      </p:sp>
+      <p:sp>
+        <p:nvSpPr>
+          <p:cNvPr id="3" name="Fußzeilenplatzhalter 2">
+            <a:extLst>
+              <a:ext uri="{FF2B5EF4-FFF2-40B4-BE49-F238E27FC236}">
+                <a16:creationId xmlns:a16="http://schemas.microsoft.com/office/drawing/2014/main" id="{BB265586-9FC1-AACD-1CAD-5E91FF221100}"/>
+              </a:ext>
+            </a:extLst>
+          </p:cNvPr>
+          <p:cNvSpPr>
+            <a:spLocks noGrp="1"/>
+          </p:cNvSpPr>
+          <p:nvPr>
+            <p:ph type="ftr" sz="quarter" idx="11"/>
+          </p:nvPr>
+        </p:nvSpPr>
+        <p:spPr/>
+        <p:txBody>
+          <a:bodyPr/>
+          <a:lstStyle/>
+          <a:p>
+            <a:pPr rtl="0"/>
+            <a:r>
+              <a:rPr lang="en-GB" noProof="0" dirty="0"/>
+              <a:t>Jonas Himmetsberger | Practical Work presentation</a:t>
+            </a:r>
+          </a:p>
+        </p:txBody>
+      </p:sp>
+      <p:sp>
+        <p:nvSpPr>
+          <p:cNvPr id="4" name="Foliennummernplatzhalter 3">
+            <a:extLst>
+              <a:ext uri="{FF2B5EF4-FFF2-40B4-BE49-F238E27FC236}">
+                <a16:creationId xmlns:a16="http://schemas.microsoft.com/office/drawing/2014/main" id="{C73A4048-90C7-88BA-669E-95C184C68F37}"/>
+              </a:ext>
+            </a:extLst>
+          </p:cNvPr>
+          <p:cNvSpPr>
+            <a:spLocks noGrp="1"/>
+          </p:cNvSpPr>
+          <p:nvPr>
+            <p:ph type="sldNum" sz="quarter" idx="12"/>
+          </p:nvPr>
+        </p:nvSpPr>
+        <p:spPr/>
+        <p:txBody>
+          <a:bodyPr/>
+          <a:lstStyle/>
+          <a:p>
+            <a:pPr rtl="0"/>
+            <a:fld id="{CB1E4CB7-CB13-4810-BF18-BE31AFC64F93}" type="slidenum">
+              <a:rPr lang="en-GB" noProof="0" smtClean="0"/>
+              <a:t>5</a:t>
+            </a:fld>
+            <a:endParaRPr lang="en-GB" noProof="0" dirty="0"/>
           </a:p>
         </p:txBody>
       </p:sp>
@@ -10274,6 +15393,65 @@
           </a:p>
         </p:txBody>
       </p:sp>
+      <p:sp>
+        <p:nvSpPr>
+          <p:cNvPr id="3" name="Fußzeilenplatzhalter 2">
+            <a:extLst>
+              <a:ext uri="{FF2B5EF4-FFF2-40B4-BE49-F238E27FC236}">
+                <a16:creationId xmlns:a16="http://schemas.microsoft.com/office/drawing/2014/main" id="{0A1D2625-9934-272D-CAF3-DC305E05B7D0}"/>
+              </a:ext>
+            </a:extLst>
+          </p:cNvPr>
+          <p:cNvSpPr>
+            <a:spLocks noGrp="1"/>
+          </p:cNvSpPr>
+          <p:nvPr>
+            <p:ph type="ftr" sz="quarter" idx="11"/>
+          </p:nvPr>
+        </p:nvSpPr>
+        <p:spPr/>
+        <p:txBody>
+          <a:bodyPr/>
+          <a:lstStyle/>
+          <a:p>
+            <a:pPr rtl="0"/>
+            <a:r>
+              <a:rPr lang="en-GB" noProof="0" dirty="0"/>
+              <a:t>Jonas Himmetsberger | Practical Work presentation</a:t>
+            </a:r>
+          </a:p>
+        </p:txBody>
+      </p:sp>
+      <p:sp>
+        <p:nvSpPr>
+          <p:cNvPr id="4" name="Foliennummernplatzhalter 3">
+            <a:extLst>
+              <a:ext uri="{FF2B5EF4-FFF2-40B4-BE49-F238E27FC236}">
+                <a16:creationId xmlns:a16="http://schemas.microsoft.com/office/drawing/2014/main" id="{1B9161DA-372C-FE83-ADEB-AA3A7DFD974A}"/>
+              </a:ext>
+            </a:extLst>
+          </p:cNvPr>
+          <p:cNvSpPr>
+            <a:spLocks noGrp="1"/>
+          </p:cNvSpPr>
+          <p:nvPr>
+            <p:ph type="sldNum" sz="quarter" idx="12"/>
+          </p:nvPr>
+        </p:nvSpPr>
+        <p:spPr/>
+        <p:txBody>
+          <a:bodyPr/>
+          <a:lstStyle/>
+          <a:p>
+            <a:pPr rtl="0"/>
+            <a:fld id="{CB1E4CB7-CB13-4810-BF18-BE31AFC64F93}" type="slidenum">
+              <a:rPr lang="en-GB" noProof="0" smtClean="0"/>
+              <a:t>6</a:t>
+            </a:fld>
+            <a:endParaRPr lang="en-GB" noProof="0" dirty="0"/>
+          </a:p>
+        </p:txBody>
+      </p:sp>
     </p:spTree>
     <p:extLst>
       <p:ext uri="{BB962C8B-B14F-4D97-AF65-F5344CB8AC3E}">
@@ -10371,8 +15549,8 @@
           </a:p>
         </p:txBody>
       </p:sp>
-      <mc:AlternateContent xmlns:mc="http://schemas.openxmlformats.org/markup-compatibility/2006">
-        <mc:Choice xmlns:a14="http://schemas.microsoft.com/office/drawing/2010/main" Requires="a14">
+      <mc:AlternateContent xmlns:mc="http://schemas.openxmlformats.org/markup-compatibility/2006" xmlns:a14="http://schemas.microsoft.com/office/drawing/2010/main">
+        <mc:Choice Requires="a14">
           <p:sp>
             <p:nvSpPr>
               <p:cNvPr id="9" name="Textfeld 8">
@@ -10696,7 +15874,7 @@
             </p:txBody>
           </p:sp>
         </mc:Choice>
-        <mc:Fallback>
+        <mc:Fallback xmlns="">
           <p:sp>
             <p:nvSpPr>
               <p:cNvPr id="9" name="Textfeld 8">
@@ -10817,6 +15995,65 @@
           </a:p>
         </p:txBody>
       </p:sp>
+      <p:sp>
+        <p:nvSpPr>
+          <p:cNvPr id="3" name="Fußzeilenplatzhalter 2">
+            <a:extLst>
+              <a:ext uri="{FF2B5EF4-FFF2-40B4-BE49-F238E27FC236}">
+                <a16:creationId xmlns:a16="http://schemas.microsoft.com/office/drawing/2014/main" id="{BD881772-9684-9504-1897-CA79FD04C8FC}"/>
+              </a:ext>
+            </a:extLst>
+          </p:cNvPr>
+          <p:cNvSpPr>
+            <a:spLocks noGrp="1"/>
+          </p:cNvSpPr>
+          <p:nvPr>
+            <p:ph type="ftr" sz="quarter" idx="11"/>
+          </p:nvPr>
+        </p:nvSpPr>
+        <p:spPr/>
+        <p:txBody>
+          <a:bodyPr/>
+          <a:lstStyle/>
+          <a:p>
+            <a:pPr rtl="0"/>
+            <a:r>
+              <a:rPr lang="en-GB" noProof="0" dirty="0"/>
+              <a:t>Jonas Himmetsberger | Practical Work presentation</a:t>
+            </a:r>
+          </a:p>
+        </p:txBody>
+      </p:sp>
+      <p:sp>
+        <p:nvSpPr>
+          <p:cNvPr id="4" name="Foliennummernplatzhalter 3">
+            <a:extLst>
+              <a:ext uri="{FF2B5EF4-FFF2-40B4-BE49-F238E27FC236}">
+                <a16:creationId xmlns:a16="http://schemas.microsoft.com/office/drawing/2014/main" id="{07775CA1-6D53-D32E-2514-6E5E3079A916}"/>
+              </a:ext>
+            </a:extLst>
+          </p:cNvPr>
+          <p:cNvSpPr>
+            <a:spLocks noGrp="1"/>
+          </p:cNvSpPr>
+          <p:nvPr>
+            <p:ph type="sldNum" sz="quarter" idx="12"/>
+          </p:nvPr>
+        </p:nvSpPr>
+        <p:spPr/>
+        <p:txBody>
+          <a:bodyPr/>
+          <a:lstStyle/>
+          <a:p>
+            <a:pPr rtl="0"/>
+            <a:fld id="{CB1E4CB7-CB13-4810-BF18-BE31AFC64F93}" type="slidenum">
+              <a:rPr lang="en-GB" noProof="0" smtClean="0"/>
+              <a:t>7</a:t>
+            </a:fld>
+            <a:endParaRPr lang="en-GB" noProof="0" dirty="0"/>
+          </a:p>
+        </p:txBody>
+      </p:sp>
     </p:spTree>
     <p:extLst>
       <p:ext uri="{BB962C8B-B14F-4D97-AF65-F5344CB8AC3E}">
@@ -11598,6 +16835,65 @@
               <a:t></a:t>
             </a:r>
             <a:endParaRPr lang="en-GB" sz="3200" noProof="0" dirty="0"/>
+          </a:p>
+        </p:txBody>
+      </p:sp>
+      <p:sp>
+        <p:nvSpPr>
+          <p:cNvPr id="4" name="Fußzeilenplatzhalter 3">
+            <a:extLst>
+              <a:ext uri="{FF2B5EF4-FFF2-40B4-BE49-F238E27FC236}">
+                <a16:creationId xmlns:a16="http://schemas.microsoft.com/office/drawing/2014/main" id="{2DEF1BF3-0B64-7727-A953-C92BCE21236F}"/>
+              </a:ext>
+            </a:extLst>
+          </p:cNvPr>
+          <p:cNvSpPr>
+            <a:spLocks noGrp="1"/>
+          </p:cNvSpPr>
+          <p:nvPr>
+            <p:ph type="ftr" sz="quarter" idx="11"/>
+          </p:nvPr>
+        </p:nvSpPr>
+        <p:spPr/>
+        <p:txBody>
+          <a:bodyPr/>
+          <a:lstStyle/>
+          <a:p>
+            <a:pPr rtl="0"/>
+            <a:r>
+              <a:rPr lang="en-GB" noProof="0" dirty="0"/>
+              <a:t>Jonas Himmetsberger | Practical Work presentation</a:t>
+            </a:r>
+          </a:p>
+        </p:txBody>
+      </p:sp>
+      <p:sp>
+        <p:nvSpPr>
+          <p:cNvPr id="11" name="Foliennummernplatzhalter 10">
+            <a:extLst>
+              <a:ext uri="{FF2B5EF4-FFF2-40B4-BE49-F238E27FC236}">
+                <a16:creationId xmlns:a16="http://schemas.microsoft.com/office/drawing/2014/main" id="{13A5AFB2-E4DA-49D9-109F-DFEA0C3A52F3}"/>
+              </a:ext>
+            </a:extLst>
+          </p:cNvPr>
+          <p:cNvSpPr>
+            <a:spLocks noGrp="1"/>
+          </p:cNvSpPr>
+          <p:nvPr>
+            <p:ph type="sldNum" sz="quarter" idx="12"/>
+          </p:nvPr>
+        </p:nvSpPr>
+        <p:spPr/>
+        <p:txBody>
+          <a:bodyPr/>
+          <a:lstStyle/>
+          <a:p>
+            <a:pPr rtl="0"/>
+            <a:fld id="{CB1E4CB7-CB13-4810-BF18-BE31AFC64F93}" type="slidenum">
+              <a:rPr lang="en-GB" noProof="0" smtClean="0"/>
+              <a:t>8</a:t>
+            </a:fld>
+            <a:endParaRPr lang="en-GB" noProof="0" dirty="0"/>
           </a:p>
         </p:txBody>
       </p:sp>
@@ -11676,6 +16972,66 @@
               <a:rPr lang="en-GB" sz="6000" noProof="0" dirty="0"/>
               <a:t>&amp; contribution</a:t>
             </a:r>
+          </a:p>
+        </p:txBody>
+      </p:sp>
+      <p:sp>
+        <p:nvSpPr>
+          <p:cNvPr id="2" name="Fußzeilenplatzhalter 1">
+            <a:extLst>
+              <a:ext uri="{FF2B5EF4-FFF2-40B4-BE49-F238E27FC236}">
+                <a16:creationId xmlns:a16="http://schemas.microsoft.com/office/drawing/2014/main" id="{4EF77E03-714C-06EF-B8EC-81DA6274CCEC}"/>
+              </a:ext>
+            </a:extLst>
+          </p:cNvPr>
+          <p:cNvSpPr>
+            <a:spLocks noGrp="1"/>
+          </p:cNvSpPr>
+          <p:nvPr>
+            <p:ph type="ftr" sz="quarter" idx="11"/>
+          </p:nvPr>
+        </p:nvSpPr>
+        <p:spPr/>
+        <p:txBody>
+          <a:bodyPr/>
+          <a:lstStyle/>
+          <a:p>
+            <a:pPr rtl="0"/>
+            <a:r>
+              <a:rPr lang="en-GB" noProof="0" dirty="0"/>
+              <a:t>Jonas Himmetsberger | Practical Work presentation</a:t>
+            </a:r>
+          </a:p>
+        </p:txBody>
+      </p:sp>
+      <p:sp>
+        <p:nvSpPr>
+          <p:cNvPr id="3" name="Foliennummernplatzhalter 2">
+            <a:extLst>
+              <a:ext uri="{FF2B5EF4-FFF2-40B4-BE49-F238E27FC236}">
+                <a16:creationId xmlns:a16="http://schemas.microsoft.com/office/drawing/2014/main" id="{70F46DDA-8C8E-3593-4BE7-7F9E9A464747}"/>
+              </a:ext>
+            </a:extLst>
+          </p:cNvPr>
+          <p:cNvSpPr>
+            <a:spLocks noGrp="1"/>
+          </p:cNvSpPr>
+          <p:nvPr>
+            <p:ph type="sldNum" sz="quarter" idx="12"/>
+          </p:nvPr>
+        </p:nvSpPr>
+        <p:spPr/>
+        <p:txBody>
+          <a:bodyPr/>
+          <a:lstStyle/>
+          <a:p>
+            <a:pPr rtl="0"/>
+            <a:fld id="{CB1E4CB7-CB13-4810-BF18-BE31AFC64F93}" type="slidenum">
+              <a:rPr lang="en-GB" noProof="0" smtClean="0"/>
+              <a:pPr rtl="0"/>
+              <a:t>9</a:t>
+            </a:fld>
+            <a:endParaRPr lang="en-GB" sz="1000" noProof="0" dirty="0"/>
           </a:p>
         </p:txBody>
       </p:sp>

--- a/documents/Transformers as generative models for neural activity.pptx
+++ b/documents/Transformers as generative models for neural activity.pptx
@@ -1546,7 +1546,7 @@
             <a:pPr rtl="0"/>
             <a:fld id="{A54DA340-CA88-40FE-8D9F-FB95A67E2ACC}" type="datetimeFigureOut">
               <a:rPr lang="en-US" smtClean="0"/>
-              <a:t>5/25/2026</a:t>
+              <a:t>5/26/2026</a:t>
             </a:fld>
             <a:endParaRPr lang="en-US"/>
           </a:p>
@@ -1727,7 +1727,7 @@
             <a:pPr rtl="0"/>
             <a:fld id="{A90BC4F2-6A87-450D-AD53-D2188421BC53}" type="datetimeFigureOut">
               <a:rPr lang="en-US" smtClean="0"/>
-              <a:t>5/25/2026</a:t>
+              <a:t>5/26/2026</a:t>
             </a:fld>
             <a:endParaRPr lang="en-US" dirty="0"/>
           </a:p>
@@ -2143,6 +2143,214 @@
           <a:bodyPr/>
           <a:lstStyle/>
           <a:p>
+            <a:r>
+              <a:rPr lang="de-DE" dirty="0"/>
+              <a:t>I </a:t>
+            </a:r>
+            <a:r>
+              <a:rPr lang="de-DE" dirty="0" err="1"/>
+              <a:t>don‘t</a:t>
+            </a:r>
+            <a:r>
+              <a:rPr lang="de-DE" dirty="0"/>
+              <a:t> </a:t>
+            </a:r>
+            <a:r>
+              <a:rPr lang="de-DE" dirty="0" err="1"/>
+              <a:t>really</a:t>
+            </a:r>
+            <a:r>
+              <a:rPr lang="de-DE" dirty="0"/>
+              <a:t> </a:t>
+            </a:r>
+            <a:r>
+              <a:rPr lang="de-DE" dirty="0" err="1"/>
+              <a:t>see</a:t>
+            </a:r>
+            <a:r>
+              <a:rPr lang="de-DE" dirty="0"/>
+              <a:t> </a:t>
+            </a:r>
+            <a:r>
+              <a:rPr lang="de-DE" dirty="0" err="1"/>
+              <a:t>this</a:t>
+            </a:r>
+            <a:r>
+              <a:rPr lang="de-DE" dirty="0"/>
+              <a:t> </a:t>
+            </a:r>
+            <a:r>
+              <a:rPr lang="de-DE" dirty="0" err="1"/>
+              <a:t>as</a:t>
+            </a:r>
+            <a:r>
+              <a:rPr lang="de-DE" dirty="0"/>
+              <a:t> </a:t>
+            </a:r>
+            <a:r>
+              <a:rPr lang="de-DE" dirty="0" err="1"/>
+              <a:t>the</a:t>
+            </a:r>
+            <a:r>
+              <a:rPr lang="de-DE" dirty="0"/>
+              <a:t> </a:t>
+            </a:r>
+            <a:r>
+              <a:rPr lang="de-DE" dirty="0" err="1"/>
+              <a:t>metrics</a:t>
+            </a:r>
+            <a:r>
+              <a:rPr lang="de-DE" dirty="0"/>
+              <a:t> fault. </a:t>
+            </a:r>
+            <a:r>
+              <a:rPr lang="de-DE" dirty="0" err="1"/>
+              <a:t>There</a:t>
+            </a:r>
+            <a:r>
+              <a:rPr lang="de-DE" dirty="0"/>
+              <a:t> </a:t>
+            </a:r>
+            <a:r>
+              <a:rPr lang="de-DE" dirty="0" err="1"/>
+              <a:t>is</a:t>
+            </a:r>
+            <a:r>
+              <a:rPr lang="de-DE" dirty="0"/>
+              <a:t> just </a:t>
+            </a:r>
+            <a:r>
+              <a:rPr lang="de-DE" dirty="0" err="1"/>
+              <a:t>to</a:t>
+            </a:r>
+            <a:r>
+              <a:rPr lang="de-DE" dirty="0"/>
+              <a:t> </a:t>
+            </a:r>
+            <a:r>
+              <a:rPr lang="de-DE" dirty="0" err="1"/>
+              <a:t>little</a:t>
+            </a:r>
+            <a:r>
+              <a:rPr lang="de-DE" dirty="0"/>
+              <a:t> </a:t>
+            </a:r>
+            <a:r>
+              <a:rPr lang="de-DE" dirty="0" err="1"/>
+              <a:t>data</a:t>
+            </a:r>
+            <a:r>
+              <a:rPr lang="de-DE" dirty="0"/>
+              <a:t> per </a:t>
+            </a:r>
+            <a:r>
+              <a:rPr lang="de-DE" dirty="0" err="1"/>
+              <a:t>session</a:t>
+            </a:r>
+            <a:r>
+              <a:rPr lang="de-DE" dirty="0"/>
+              <a:t> (~50 Samples </a:t>
+            </a:r>
+            <a:r>
+              <a:rPr lang="de-DE" dirty="0" err="1"/>
+              <a:t>vs</a:t>
+            </a:r>
+            <a:r>
+              <a:rPr lang="de-DE" dirty="0"/>
+              <a:t> 1000 Samples </a:t>
+            </a:r>
+            <a:r>
+              <a:rPr lang="de-DE" dirty="0" err="1"/>
+              <a:t>globally</a:t>
+            </a:r>
+            <a:r>
+              <a:rPr lang="de-DE" dirty="0"/>
+              <a:t>).</a:t>
+            </a:r>
+          </a:p>
+        </p:txBody>
+      </p:sp>
+      <p:sp>
+        <p:nvSpPr>
+          <p:cNvPr id="4" name="Foliennummernplatzhalter 3"/>
+          <p:cNvSpPr>
+            <a:spLocks noGrp="1"/>
+          </p:cNvSpPr>
+          <p:nvPr>
+            <p:ph type="sldNum" sz="quarter" idx="5"/>
+          </p:nvPr>
+        </p:nvSpPr>
+        <p:spPr/>
+        <p:txBody>
+          <a:bodyPr/>
+          <a:lstStyle/>
+          <a:p>
+            <a:pPr rtl="0"/>
+            <a:fld id="{4C3B2649-7BD8-4005-A99E-30D13769A8BD}" type="slidenum">
+              <a:rPr lang="en-US" smtClean="0"/>
+              <a:t>17</a:t>
+            </a:fld>
+            <a:endParaRPr lang="en-US" dirty="0"/>
+          </a:p>
+        </p:txBody>
+      </p:sp>
+    </p:spTree>
+    <p:extLst>
+      <p:ext uri="{BB962C8B-B14F-4D97-AF65-F5344CB8AC3E}">
+        <p14:creationId xmlns:p14="http://schemas.microsoft.com/office/powerpoint/2010/main" val="3646035373"/>
+      </p:ext>
+    </p:extLst>
+  </p:cSld>
+  <p:clrMapOvr>
+    <a:masterClrMapping/>
+  </p:clrMapOvr>
+</p:notes>
+</file>
+
+<file path=ppt/notesSlides/notesSlide11.xml><?xml version="1.0" encoding="utf-8"?>
+<p:notes xmlns:a="http://schemas.openxmlformats.org/drawingml/2006/main" xmlns:r="http://schemas.openxmlformats.org/officeDocument/2006/relationships" xmlns:p="http://schemas.openxmlformats.org/presentationml/2006/main">
+  <p:cSld>
+    <p:spTree>
+      <p:nvGrpSpPr>
+        <p:cNvPr id="1" name=""/>
+        <p:cNvGrpSpPr/>
+        <p:nvPr/>
+      </p:nvGrpSpPr>
+      <p:grpSpPr>
+        <a:xfrm>
+          <a:off x="0" y="0"/>
+          <a:ext cx="0" cy="0"/>
+          <a:chOff x="0" y="0"/>
+          <a:chExt cx="0" cy="0"/>
+        </a:xfrm>
+      </p:grpSpPr>
+      <p:sp>
+        <p:nvSpPr>
+          <p:cNvPr id="2" name="Folienbildplatzhalter 1"/>
+          <p:cNvSpPr>
+            <a:spLocks noGrp="1" noRot="1" noChangeAspect="1"/>
+          </p:cNvSpPr>
+          <p:nvPr>
+            <p:ph type="sldImg"/>
+          </p:nvPr>
+        </p:nvSpPr>
+        <p:spPr/>
+      </p:sp>
+      <p:sp>
+        <p:nvSpPr>
+          <p:cNvPr id="3" name="Notizenplatzhalter 2"/>
+          <p:cNvSpPr>
+            <a:spLocks noGrp="1"/>
+          </p:cNvSpPr>
+          <p:nvPr>
+            <p:ph type="body" idx="1"/>
+          </p:nvPr>
+        </p:nvSpPr>
+        <p:spPr/>
+        <p:txBody>
+          <a:bodyPr/>
+          <a:lstStyle/>
+          <a:p>
             <a:pPr marL="0" marR="0" lvl="0" indent="0" algn="l" defTabSz="914400" rtl="0" eaLnBrk="1" fontAlgn="auto" latinLnBrk="0" hangingPunct="1">
               <a:lnSpc>
                 <a:spcPct val="100000"/>
@@ -2171,7 +2379,16 @@
           <a:p>
             <a:r>
               <a:rPr lang="en-US" dirty="0"/>
-              <a:t>I already found that Brain FID is weak on temporal structure (the time-shuffle problem). Trial-matched R² measures something different — it matches each generated trial to its closest real trial via optimal transport and asks how well they line up. Two metrics that fail differently are much more convincing than one.</a:t>
+              <a:t>I already found that Brain FID is weak on temporal structure (the time-shuffle problem). </a:t>
+            </a:r>
+          </a:p>
+          <a:p>
+            <a:endParaRPr lang="en-US" dirty="0"/>
+          </a:p>
+          <a:p>
+            <a:r>
+              <a:rPr lang="en-US" dirty="0"/>
+              <a:t>Trial-matched R²: it matches each generated trial to its closest real trial via optimal transport and asks how well they line up. Two metrics are much more convincing than one.</a:t>
             </a:r>
             <a:endParaRPr lang="de-DE" dirty="0"/>
           </a:p>
@@ -2258,6 +2475,35 @@
           <a:bodyPr/>
           <a:lstStyle/>
           <a:p>
+            <a:pPr marL="0" marR="0" lvl="0" indent="0" algn="l" defTabSz="914400" rtl="0" eaLnBrk="1" fontAlgn="auto" latinLnBrk="0" hangingPunct="1">
+              <a:lnSpc>
+                <a:spcPct val="100000"/>
+              </a:lnSpc>
+              <a:spcBef>
+                <a:spcPts val="0"/>
+              </a:spcBef>
+              <a:spcAft>
+                <a:spcPts val="0"/>
+              </a:spcAft>
+              <a:buClrTx/>
+              <a:buSzTx/>
+              <a:buFontTx/>
+              <a:buNone/>
+              <a:tabLst/>
+              <a:defRPr/>
+            </a:pPr>
+            <a:r>
+              <a:rPr lang="en-US" dirty="0"/>
+              <a:t>"The first three are my lab's own line of work on generatively evaluating neural models — that's what I build on. The last shows why it matters: scaling alone doesn’t give a good neural model. you can't just "brute-force" your way to a good neural model by making it bigger.“ I did it on transformer not RNN, LSTM and so on </a:t>
+            </a:r>
+          </a:p>
+          <a:p>
+            <a:endParaRPr lang="en-US" b="1" dirty="0"/>
+          </a:p>
+          <a:p>
+            <a:endParaRPr lang="en-US" b="1" dirty="0"/>
+          </a:p>
+          <a:p>
             <a:r>
               <a:rPr lang="en-US" b="1" dirty="0"/>
               <a:t>Bellec et al. (2021), </a:t>
@@ -2322,21 +2568,8 @@
             </a:r>
             <a:r>
               <a:rPr lang="en-US" dirty="0"/>
-              <a:t> - "A large transformer for motor decoding from 2000h of data, finding that scaling saturates — more data isn't enough."</a:t>
-            </a:r>
-          </a:p>
-          <a:p>
-            <a:r>
-              <a:rPr lang="en-US" b="1" dirty="0"/>
-              <a:t>The thread to say out loud</a:t>
-            </a:r>
-            <a:r>
-              <a:rPr lang="en-US" dirty="0"/>
-              <a:t>: "The first three are my lab's own line of work on generatively evaluating neural models — that's what I build on. The last shows why it matters: scaling alone doesn't solve it.“ I did it on transformer not RNN, LSTM and so on </a:t>
-            </a:r>
-          </a:p>
-          <a:p>
-            <a:endParaRPr lang="de-DE" dirty="0"/>
+              <a:t> - "A large transformer for motor decoding from 2000h of data, finding that scaling saturates — more data isn't enough.”</a:t>
+            </a:r>
           </a:p>
         </p:txBody>
       </p:sp>
@@ -3314,663 +3547,5235 @@
         </p:nvSpPr>
         <p:spPr/>
       </p:sp>
-      <p:sp>
-        <p:nvSpPr>
-          <p:cNvPr id="3" name="Notizenplatzhalter 2"/>
-          <p:cNvSpPr>
-            <a:spLocks noGrp="1"/>
-          </p:cNvSpPr>
-          <p:nvPr>
-            <p:ph type="body" idx="1"/>
-          </p:nvPr>
-        </p:nvSpPr>
-        <p:spPr/>
-        <p:txBody>
-          <a:bodyPr/>
-          <a:lstStyle/>
-          <a:p>
-            <a:r>
-              <a:rPr lang="de-DE" dirty="0"/>
-              <a:t>This </a:t>
-            </a:r>
-            <a:r>
-              <a:rPr lang="de-DE" dirty="0" err="1"/>
-              <a:t>is</a:t>
-            </a:r>
-            <a:r>
-              <a:rPr lang="de-DE" dirty="0"/>
-              <a:t> </a:t>
-            </a:r>
-            <a:r>
-              <a:rPr lang="de-DE" dirty="0" err="1"/>
-              <a:t>how</a:t>
-            </a:r>
-            <a:r>
-              <a:rPr lang="de-DE" dirty="0"/>
-              <a:t> Brain FID </a:t>
-            </a:r>
-            <a:r>
-              <a:rPr lang="de-DE" dirty="0" err="1"/>
-              <a:t>works</a:t>
-            </a:r>
-            <a:r>
-              <a:rPr lang="de-DE" dirty="0"/>
-              <a:t> in 4 </a:t>
-            </a:r>
-            <a:r>
-              <a:rPr lang="de-DE" dirty="0" err="1"/>
-              <a:t>steps</a:t>
-            </a:r>
-            <a:r>
-              <a:rPr lang="de-DE" dirty="0"/>
-              <a:t>:</a:t>
-            </a:r>
-          </a:p>
-          <a:p>
-            <a:endParaRPr lang="de-DE" dirty="0"/>
-          </a:p>
-          <a:p>
-            <a:r>
-              <a:rPr lang="de-DE" dirty="0"/>
-              <a:t>Spikes: </a:t>
-            </a:r>
-            <a:r>
-              <a:rPr lang="de-DE" dirty="0" err="1"/>
-              <a:t>We</a:t>
-            </a:r>
-            <a:r>
-              <a:rPr lang="de-DE" dirty="0"/>
-              <a:t> </a:t>
-            </a:r>
-            <a:r>
-              <a:rPr lang="de-DE" dirty="0" err="1"/>
-              <a:t>start</a:t>
-            </a:r>
-            <a:r>
-              <a:rPr lang="de-DE" dirty="0"/>
-              <a:t> </a:t>
-            </a:r>
-            <a:r>
-              <a:rPr lang="de-DE" dirty="0" err="1"/>
-              <a:t>with</a:t>
-            </a:r>
-            <a:r>
-              <a:rPr lang="de-DE" dirty="0"/>
-              <a:t> </a:t>
-            </a:r>
-            <a:r>
-              <a:rPr lang="de-DE" dirty="0" err="1"/>
-              <a:t>two</a:t>
-            </a:r>
-            <a:r>
-              <a:rPr lang="de-DE" dirty="0"/>
-              <a:t> stets </a:t>
-            </a:r>
-            <a:r>
-              <a:rPr lang="de-DE" dirty="0" err="1"/>
-              <a:t>of</a:t>
-            </a:r>
-            <a:r>
-              <a:rPr lang="de-DE" dirty="0"/>
-              <a:t> </a:t>
-            </a:r>
-            <a:r>
-              <a:rPr lang="de-DE" dirty="0" err="1"/>
-              <a:t>spike</a:t>
-            </a:r>
-            <a:r>
-              <a:rPr lang="de-DE" dirty="0"/>
-              <a:t> </a:t>
-            </a:r>
-            <a:r>
-              <a:rPr lang="de-DE" dirty="0" err="1"/>
-              <a:t>rasters</a:t>
-            </a:r>
-            <a:r>
-              <a:rPr lang="de-DE" dirty="0"/>
-              <a:t>: real </a:t>
-            </a:r>
-            <a:r>
-              <a:rPr lang="de-DE" dirty="0" err="1"/>
-              <a:t>recordings</a:t>
-            </a:r>
-            <a:r>
-              <a:rPr lang="de-DE" dirty="0"/>
-              <a:t>, and </a:t>
-            </a:r>
-            <a:r>
-              <a:rPr lang="de-DE" dirty="0" err="1"/>
-              <a:t>sequences</a:t>
-            </a:r>
-            <a:r>
-              <a:rPr lang="de-DE" dirty="0"/>
-              <a:t> </a:t>
-            </a:r>
-            <a:r>
-              <a:rPr lang="de-DE" dirty="0" err="1"/>
-              <a:t>the</a:t>
-            </a:r>
-            <a:r>
-              <a:rPr lang="de-DE" dirty="0"/>
-              <a:t> </a:t>
-            </a:r>
-            <a:r>
-              <a:rPr lang="de-DE" dirty="0" err="1"/>
-              <a:t>model</a:t>
-            </a:r>
-            <a:r>
-              <a:rPr lang="de-DE" dirty="0"/>
-              <a:t> </a:t>
-            </a:r>
-            <a:r>
-              <a:rPr lang="de-DE" dirty="0" err="1"/>
-              <a:t>generated</a:t>
-            </a:r>
-            <a:r>
-              <a:rPr lang="de-DE" dirty="0"/>
-              <a:t> </a:t>
-            </a:r>
-            <a:r>
-              <a:rPr lang="de-DE" dirty="0" err="1"/>
-              <a:t>autoregressively</a:t>
-            </a:r>
-            <a:r>
-              <a:rPr lang="de-DE" dirty="0"/>
-              <a:t>. The </a:t>
-            </a:r>
-            <a:r>
-              <a:rPr lang="de-DE" dirty="0" err="1"/>
-              <a:t>question</a:t>
-            </a:r>
-            <a:r>
-              <a:rPr lang="de-DE" dirty="0"/>
-              <a:t> </a:t>
-            </a:r>
-            <a:r>
-              <a:rPr lang="de-DE" dirty="0" err="1"/>
-              <a:t>is</a:t>
-            </a:r>
-            <a:r>
-              <a:rPr lang="de-DE" dirty="0"/>
-              <a:t> </a:t>
-            </a:r>
-            <a:r>
-              <a:rPr lang="de-DE" dirty="0" err="1"/>
-              <a:t>whether</a:t>
-            </a:r>
-            <a:r>
-              <a:rPr lang="de-DE" dirty="0"/>
-              <a:t> </a:t>
-            </a:r>
-            <a:r>
-              <a:rPr lang="de-DE" dirty="0" err="1"/>
-              <a:t>these</a:t>
-            </a:r>
-            <a:r>
-              <a:rPr lang="de-DE" dirty="0"/>
-              <a:t> </a:t>
-            </a:r>
-            <a:r>
-              <a:rPr lang="de-DE" dirty="0" err="1"/>
-              <a:t>two</a:t>
-            </a:r>
-            <a:r>
-              <a:rPr lang="de-DE" dirty="0"/>
-              <a:t> </a:t>
-            </a:r>
-            <a:r>
-              <a:rPr lang="de-DE" dirty="0" err="1"/>
-              <a:t>look</a:t>
-            </a:r>
-            <a:r>
-              <a:rPr lang="de-DE" dirty="0"/>
-              <a:t> </a:t>
-            </a:r>
-            <a:r>
-              <a:rPr lang="de-DE" dirty="0" err="1"/>
-              <a:t>statistically</a:t>
-            </a:r>
-            <a:r>
-              <a:rPr lang="de-DE" dirty="0"/>
-              <a:t> </a:t>
-            </a:r>
-            <a:r>
-              <a:rPr lang="de-DE" dirty="0" err="1"/>
-              <a:t>the</a:t>
-            </a:r>
-            <a:r>
-              <a:rPr lang="de-DE" dirty="0"/>
-              <a:t> same?</a:t>
-            </a:r>
-          </a:p>
-          <a:p>
-            <a:endParaRPr lang="de-DE" dirty="0"/>
-          </a:p>
-          <a:p>
-            <a:r>
-              <a:rPr lang="de-DE" dirty="0"/>
-              <a:t>Pool </a:t>
-            </a:r>
-            <a:r>
-              <a:rPr lang="de-DE" dirty="0" err="1"/>
-              <a:t>by</a:t>
-            </a:r>
-            <a:r>
-              <a:rPr lang="de-DE" dirty="0"/>
-              <a:t> </a:t>
-            </a:r>
-            <a:r>
-              <a:rPr lang="de-DE" dirty="0" err="1"/>
-              <a:t>area</a:t>
-            </a:r>
-            <a:r>
-              <a:rPr lang="de-DE" dirty="0"/>
-              <a:t>: Individual </a:t>
-            </a:r>
-            <a:r>
-              <a:rPr lang="de-DE" dirty="0" err="1"/>
-              <a:t>neurons</a:t>
-            </a:r>
-            <a:r>
-              <a:rPr lang="de-DE" dirty="0"/>
-              <a:t> </a:t>
-            </a:r>
-            <a:r>
-              <a:rPr lang="de-DE" dirty="0" err="1"/>
-              <a:t>are</a:t>
-            </a:r>
-            <a:r>
-              <a:rPr lang="de-DE" dirty="0"/>
-              <a:t> </a:t>
-            </a:r>
-            <a:r>
-              <a:rPr lang="de-DE" dirty="0" err="1"/>
-              <a:t>too</a:t>
-            </a:r>
-            <a:r>
-              <a:rPr lang="de-DE" dirty="0"/>
-              <a:t> </a:t>
-            </a:r>
-            <a:r>
-              <a:rPr lang="de-DE" dirty="0" err="1"/>
-              <a:t>noisy</a:t>
-            </a:r>
-            <a:r>
-              <a:rPr lang="de-DE" dirty="0"/>
-              <a:t> </a:t>
-            </a:r>
-            <a:r>
-              <a:rPr lang="de-DE" dirty="0" err="1"/>
-              <a:t>to</a:t>
-            </a:r>
-            <a:r>
-              <a:rPr lang="de-DE" dirty="0"/>
-              <a:t> </a:t>
-            </a:r>
-            <a:r>
-              <a:rPr lang="de-DE" dirty="0" err="1"/>
-              <a:t>compare</a:t>
-            </a:r>
-            <a:r>
-              <a:rPr lang="de-DE" dirty="0"/>
-              <a:t> </a:t>
-            </a:r>
-            <a:r>
-              <a:rPr lang="de-DE" dirty="0" err="1"/>
-              <a:t>directly</a:t>
-            </a:r>
-            <a:r>
-              <a:rPr lang="de-DE" dirty="0"/>
-              <a:t>, so </a:t>
-            </a:r>
-            <a:r>
-              <a:rPr lang="de-DE" dirty="0" err="1"/>
-              <a:t>we</a:t>
-            </a:r>
-            <a:r>
-              <a:rPr lang="de-DE" dirty="0"/>
-              <a:t> </a:t>
-            </a:r>
-            <a:r>
-              <a:rPr lang="de-DE" dirty="0" err="1"/>
-              <a:t>have</a:t>
-            </a:r>
-            <a:r>
-              <a:rPr lang="de-DE" dirty="0"/>
-              <a:t> </a:t>
-            </a:r>
-            <a:r>
-              <a:rPr lang="de-DE" dirty="0" err="1"/>
-              <a:t>to</a:t>
-            </a:r>
-            <a:r>
-              <a:rPr lang="de-DE" dirty="0"/>
-              <a:t> </a:t>
-            </a:r>
-            <a:r>
-              <a:rPr lang="de-DE" dirty="0" err="1"/>
-              <a:t>average</a:t>
-            </a:r>
-            <a:r>
-              <a:rPr lang="de-DE" dirty="0"/>
-              <a:t> </a:t>
-            </a:r>
-            <a:r>
-              <a:rPr lang="de-DE" dirty="0" err="1"/>
-              <a:t>them</a:t>
-            </a:r>
-            <a:r>
-              <a:rPr lang="de-DE" dirty="0"/>
-              <a:t> per </a:t>
-            </a:r>
-            <a:r>
-              <a:rPr lang="de-DE" dirty="0" err="1"/>
-              <a:t>brain</a:t>
-            </a:r>
-            <a:r>
-              <a:rPr lang="de-DE" dirty="0"/>
-              <a:t> </a:t>
-            </a:r>
-            <a:r>
-              <a:rPr lang="de-DE" dirty="0" err="1"/>
-              <a:t>region</a:t>
-            </a:r>
-            <a:r>
-              <a:rPr lang="de-DE" dirty="0"/>
-              <a:t> </a:t>
-            </a:r>
-            <a:r>
-              <a:rPr lang="de-DE" dirty="0" err="1"/>
-              <a:t>using</a:t>
-            </a:r>
-            <a:r>
-              <a:rPr lang="de-DE" dirty="0"/>
-              <a:t> </a:t>
-            </a:r>
-            <a:r>
-              <a:rPr lang="de-DE" dirty="0" err="1"/>
-              <a:t>the</a:t>
-            </a:r>
-            <a:r>
-              <a:rPr lang="de-DE" dirty="0"/>
-              <a:t> </a:t>
-            </a:r>
-            <a:r>
-              <a:rPr lang="de-DE" dirty="0" err="1"/>
-              <a:t>atlas</a:t>
-            </a:r>
-            <a:r>
-              <a:rPr lang="de-DE" dirty="0"/>
-              <a:t> </a:t>
-            </a:r>
-            <a:r>
-              <a:rPr lang="de-DE" dirty="0" err="1"/>
-              <a:t>labels</a:t>
-            </a:r>
-            <a:r>
-              <a:rPr lang="de-DE" dirty="0"/>
-              <a:t> </a:t>
-            </a:r>
-            <a:r>
-              <a:rPr lang="de-DE" dirty="0" err="1"/>
-              <a:t>from</a:t>
-            </a:r>
-            <a:r>
-              <a:rPr lang="de-DE" dirty="0"/>
-              <a:t> </a:t>
-            </a:r>
-            <a:r>
-              <a:rPr lang="de-DE" dirty="0" err="1"/>
-              <a:t>the</a:t>
-            </a:r>
-            <a:r>
-              <a:rPr lang="de-DE" dirty="0"/>
-              <a:t> Allen </a:t>
-            </a:r>
-            <a:r>
-              <a:rPr lang="de-DE" dirty="0" err="1"/>
-              <a:t>institute</a:t>
-            </a:r>
-            <a:r>
-              <a:rPr lang="de-DE" dirty="0"/>
-              <a:t>. This </a:t>
-            </a:r>
-            <a:r>
-              <a:rPr lang="de-DE" dirty="0" err="1"/>
-              <a:t>turns</a:t>
-            </a:r>
-            <a:r>
-              <a:rPr lang="de-DE" dirty="0"/>
-              <a:t> 100+ </a:t>
-            </a:r>
-            <a:r>
-              <a:rPr lang="de-DE" dirty="0" err="1"/>
-              <a:t>neurons</a:t>
-            </a:r>
-            <a:r>
-              <a:rPr lang="de-DE" dirty="0"/>
-              <a:t> </a:t>
-            </a:r>
-            <a:r>
-              <a:rPr lang="de-DE" dirty="0" err="1"/>
-              <a:t>into</a:t>
-            </a:r>
-            <a:r>
-              <a:rPr lang="de-DE" dirty="0"/>
-              <a:t> a </a:t>
-            </a:r>
-            <a:r>
-              <a:rPr lang="de-DE" dirty="0" err="1"/>
-              <a:t>handful</a:t>
-            </a:r>
-            <a:r>
-              <a:rPr lang="de-DE" dirty="0"/>
-              <a:t> </a:t>
-            </a:r>
-            <a:r>
-              <a:rPr lang="de-DE" dirty="0" err="1"/>
-              <a:t>of</a:t>
-            </a:r>
-            <a:r>
-              <a:rPr lang="de-DE" dirty="0"/>
-              <a:t> </a:t>
-            </a:r>
-            <a:r>
-              <a:rPr lang="de-DE" dirty="0" err="1"/>
-              <a:t>population</a:t>
-            </a:r>
-            <a:r>
-              <a:rPr lang="de-DE" dirty="0"/>
-              <a:t> </a:t>
-            </a:r>
-            <a:r>
-              <a:rPr lang="de-DE" dirty="0" err="1"/>
-              <a:t>signals</a:t>
-            </a:r>
-            <a:r>
-              <a:rPr lang="de-DE" dirty="0"/>
-              <a:t>.</a:t>
-            </a:r>
-          </a:p>
-          <a:p>
-            <a:endParaRPr lang="de-DE" dirty="0"/>
-          </a:p>
-          <a:p>
-            <a:r>
-              <a:rPr lang="de-DE" dirty="0" err="1"/>
-              <a:t>Frequency</a:t>
-            </a:r>
-            <a:r>
-              <a:rPr lang="de-DE" dirty="0"/>
-              <a:t> </a:t>
-            </a:r>
-            <a:r>
-              <a:rPr lang="de-DE" dirty="0" err="1"/>
-              <a:t>features</a:t>
-            </a:r>
-            <a:r>
-              <a:rPr lang="de-DE" dirty="0"/>
-              <a:t>: </a:t>
-            </a:r>
-            <a:r>
-              <a:rPr lang="de-DE" dirty="0" err="1"/>
-              <a:t>For</a:t>
-            </a:r>
-            <a:r>
-              <a:rPr lang="de-DE" dirty="0"/>
-              <a:t> </a:t>
-            </a:r>
-            <a:r>
-              <a:rPr lang="de-DE" dirty="0" err="1"/>
-              <a:t>each</a:t>
-            </a:r>
-            <a:r>
-              <a:rPr lang="de-DE" dirty="0"/>
-              <a:t> </a:t>
-            </a:r>
-            <a:r>
-              <a:rPr lang="de-DE" dirty="0" err="1"/>
-              <a:t>region</a:t>
-            </a:r>
-            <a:r>
-              <a:rPr lang="de-DE" dirty="0"/>
-              <a:t> </a:t>
-            </a:r>
-            <a:r>
-              <a:rPr lang="de-DE" dirty="0" err="1"/>
-              <a:t>then</a:t>
-            </a:r>
-            <a:r>
-              <a:rPr lang="de-DE" dirty="0"/>
-              <a:t> I </a:t>
-            </a:r>
-            <a:r>
-              <a:rPr lang="de-DE" dirty="0" err="1"/>
-              <a:t>extracted</a:t>
-            </a:r>
-            <a:r>
-              <a:rPr lang="de-DE" dirty="0"/>
-              <a:t> </a:t>
-            </a:r>
-            <a:r>
-              <a:rPr lang="de-DE" dirty="0" err="1"/>
-              <a:t>how</a:t>
-            </a:r>
-            <a:r>
-              <a:rPr lang="de-DE" dirty="0"/>
-              <a:t> </a:t>
-            </a:r>
-            <a:r>
-              <a:rPr lang="de-DE" dirty="0" err="1"/>
-              <a:t>much</a:t>
-            </a:r>
-            <a:r>
-              <a:rPr lang="de-DE" dirty="0"/>
-              <a:t> </a:t>
-            </a:r>
-            <a:r>
-              <a:rPr lang="de-DE" dirty="0" err="1"/>
-              <a:t>oscillation</a:t>
-            </a:r>
-            <a:r>
-              <a:rPr lang="de-DE" dirty="0"/>
-              <a:t> power </a:t>
-            </a:r>
-            <a:r>
-              <a:rPr lang="de-DE" dirty="0" err="1"/>
-              <a:t>sits</a:t>
-            </a:r>
-            <a:r>
-              <a:rPr lang="de-DE" dirty="0"/>
-              <a:t> in different </a:t>
-            </a:r>
-            <a:r>
-              <a:rPr lang="de-DE" dirty="0" err="1"/>
-              <a:t>frequency</a:t>
-            </a:r>
-            <a:r>
-              <a:rPr lang="de-DE" dirty="0"/>
-              <a:t> bands, </a:t>
-            </a:r>
-            <a:r>
-              <a:rPr lang="de-DE" dirty="0" err="1"/>
-              <a:t>from</a:t>
-            </a:r>
-            <a:r>
-              <a:rPr lang="de-DE" dirty="0"/>
-              <a:t> 2 </a:t>
-            </a:r>
-            <a:r>
-              <a:rPr lang="de-DE" dirty="0" err="1"/>
-              <a:t>to</a:t>
-            </a:r>
-            <a:r>
-              <a:rPr lang="de-DE" dirty="0"/>
-              <a:t> 30Hz. (2–30 Hz deckt die für kortikale Aktivität relevanten Rhythmen ab (</a:t>
-            </a:r>
-            <a:r>
-              <a:rPr lang="de-DE" dirty="0" err="1"/>
-              <a:t>theta</a:t>
-            </a:r>
-            <a:r>
-              <a:rPr lang="de-DE" dirty="0"/>
-              <a:t> ~4–8, </a:t>
-            </a:r>
-            <a:r>
-              <a:rPr lang="de-DE" dirty="0" err="1"/>
-              <a:t>alpha</a:t>
-            </a:r>
-            <a:r>
-              <a:rPr lang="de-DE" dirty="0"/>
-              <a:t> ~8–12, </a:t>
-            </a:r>
-            <a:r>
-              <a:rPr lang="de-DE" dirty="0" err="1"/>
-              <a:t>beta</a:t>
-            </a:r>
-            <a:r>
-              <a:rPr lang="de-DE" dirty="0"/>
-              <a:t> ~13–30 Hz). Unter 2 Hz ist quasi statisch, über 30 Hz brauchst du feinere Zeitauflösung als dein </a:t>
-            </a:r>
-            <a:r>
-              <a:rPr lang="de-DE" sz="1200" kern="1200" dirty="0" err="1">
-                <a:solidFill>
-                  <a:schemeClr val="tx1"/>
-                </a:solidFill>
-                <a:latin typeface="+mn-lt"/>
-                <a:ea typeface="+mn-ea"/>
-                <a:cs typeface="+mn-cs"/>
-              </a:rPr>
-              <a:t>dt</a:t>
-            </a:r>
-            <a:r>
-              <a:rPr lang="de-DE" sz="1200" kern="1200" dirty="0">
-                <a:solidFill>
-                  <a:schemeClr val="tx1"/>
-                </a:solidFill>
-                <a:latin typeface="+mn-lt"/>
-                <a:ea typeface="+mn-ea"/>
-                <a:cs typeface="+mn-cs"/>
-              </a:rPr>
-              <a:t>=0.02</a:t>
-            </a:r>
-            <a:r>
-              <a:rPr lang="de-DE" dirty="0"/>
-              <a:t> (Nyquist-Grenze = 25 Hz) überhaupt hergibt. </a:t>
-            </a:r>
-          </a:p>
-          <a:p>
-            <a:endParaRPr lang="de-DE" dirty="0"/>
-          </a:p>
-          <a:p>
-            <a:r>
-              <a:rPr lang="en-US" dirty="0"/>
-              <a:t>Fréchet distance — Finally I compare the feature distributions of real versus generated data. </a:t>
-            </a:r>
-            <a:endParaRPr lang="de-DE" dirty="0"/>
-          </a:p>
-        </p:txBody>
-      </p:sp>
+      <mc:AlternateContent xmlns:mc="http://schemas.openxmlformats.org/markup-compatibility/2006" xmlns:a14="http://schemas.microsoft.com/office/drawing/2010/main">
+        <mc:Choice Requires="a14">
+          <p:sp>
+            <p:nvSpPr>
+              <p:cNvPr id="3" name="Notizenplatzhalter 2"/>
+              <p:cNvSpPr>
+                <a:spLocks noGrp="1"/>
+              </p:cNvSpPr>
+              <p:nvPr>
+                <p:ph type="body" idx="1"/>
+              </p:nvPr>
+            </p:nvSpPr>
+            <p:spPr/>
+            <p:txBody>
+              <a:bodyPr/>
+              <a:lstStyle/>
+              <a:p>
+                <a:r>
+                  <a:rPr lang="el-GR" b="1" dirty="0"/>
+                  <a:t>μ</a:t>
+                </a:r>
+                <a:r>
+                  <a:rPr lang="de-AT" b="1" dirty="0">
+                    <a:effectLst/>
+                  </a:rPr>
+                  <a:t>r</a:t>
+                </a:r>
+                <a:r>
+                  <a:rPr lang="de-AT" b="1" dirty="0"/>
+                  <a:t>​</a:t>
+                </a:r>
+                <a:r>
+                  <a:rPr lang="de-AT" dirty="0"/>
+                  <a:t> (</a:t>
+                </a:r>
+                <a:r>
+                  <a:rPr lang="de-AT" dirty="0" err="1"/>
+                  <a:t>mu</a:t>
+                </a:r>
+                <a:r>
+                  <a:rPr lang="de-AT" dirty="0"/>
+                  <a:t>-r) — </a:t>
+                </a:r>
+                <a:r>
+                  <a:rPr lang="de-AT" dirty="0" err="1"/>
+                  <a:t>the</a:t>
+                </a:r>
+                <a:r>
+                  <a:rPr lang="de-AT" dirty="0"/>
+                  <a:t> </a:t>
+                </a:r>
+                <a:r>
+                  <a:rPr lang="de-AT" b="1" dirty="0" err="1"/>
+                  <a:t>mean</a:t>
+                </a:r>
+                <a:r>
+                  <a:rPr lang="de-AT" b="1" dirty="0"/>
+                  <a:t> </a:t>
+                </a:r>
+                <a:r>
+                  <a:rPr lang="de-AT" b="1" dirty="0" err="1"/>
+                  <a:t>vector</a:t>
+                </a:r>
+                <a:r>
+                  <a:rPr lang="de-AT" b="1" dirty="0"/>
+                  <a:t> </a:t>
+                </a:r>
+                <a:r>
+                  <a:rPr lang="de-AT" b="1" dirty="0" err="1"/>
+                  <a:t>of</a:t>
+                </a:r>
+                <a:r>
+                  <a:rPr lang="de-AT" b="1" dirty="0"/>
+                  <a:t> </a:t>
+                </a:r>
+                <a:r>
+                  <a:rPr lang="de-AT" b="1" dirty="0" err="1"/>
+                  <a:t>the</a:t>
+                </a:r>
+                <a:r>
+                  <a:rPr lang="de-AT" b="1" dirty="0"/>
+                  <a:t> real</a:t>
+                </a:r>
+                <a:r>
+                  <a:rPr lang="de-AT" dirty="0"/>
+                  <a:t> </a:t>
+                </a:r>
+                <a:r>
+                  <a:rPr lang="de-AT" dirty="0" err="1"/>
+                  <a:t>data</a:t>
+                </a:r>
+                <a:r>
+                  <a:rPr lang="de-AT" dirty="0"/>
+                  <a:t> ("r" = real). </a:t>
+                </a:r>
+                <a:r>
+                  <a:rPr lang="de-AT" dirty="0" err="1"/>
+                  <a:t>You</a:t>
+                </a:r>
+                <a:r>
+                  <a:rPr lang="de-AT" dirty="0"/>
+                  <a:t> </a:t>
+                </a:r>
+                <a:r>
+                  <a:rPr lang="de-AT" dirty="0" err="1"/>
+                  <a:t>have</a:t>
+                </a:r>
+                <a:r>
+                  <a:rPr lang="de-AT" dirty="0"/>
+                  <a:t> </a:t>
+                </a:r>
+                <a:r>
+                  <a:rPr lang="de-AT" dirty="0" err="1"/>
+                  <a:t>many</a:t>
+                </a:r>
+                <a:r>
+                  <a:rPr lang="de-AT" dirty="0"/>
+                  <a:t> real feature </a:t>
+                </a:r>
+                <a:r>
+                  <a:rPr lang="de-AT" dirty="0" err="1"/>
+                  <a:t>vectors</a:t>
+                </a:r>
+                <a:r>
+                  <a:rPr lang="de-AT" dirty="0"/>
+                  <a:t>; </a:t>
+                </a:r>
+                <a14:m>
+                  <m:oMath xmlns:m="http://schemas.openxmlformats.org/officeDocument/2006/math">
+                    <m:sSub>
+                      <m:sSubPr>
+                        <m:ctrlPr>
+                          <a:rPr lang="ar-AE" sz="1200" i="1" kern="1200">
+                            <a:solidFill>
+                              <a:schemeClr val="tx1"/>
+                            </a:solidFill>
+                            <a:latin typeface="Cambria Math" panose="02040503050406030204" pitchFamily="18" charset="0"/>
+                            <a:ea typeface="+mn-ea"/>
+                            <a:cs typeface="+mn-cs"/>
+                          </a:rPr>
+                        </m:ctrlPr>
+                      </m:sSubPr>
+                      <m:e>
+                        <m:r>
+                          <a:rPr lang="ar-AE" sz="1200" i="1" kern="1200">
+                            <a:solidFill>
+                              <a:schemeClr val="tx1"/>
+                            </a:solidFill>
+                            <a:latin typeface="Cambria Math" panose="02040503050406030204" pitchFamily="18" charset="0"/>
+                            <a:ea typeface="+mn-ea"/>
+                            <a:cs typeface="+mn-cs"/>
+                          </a:rPr>
+                          <m:t>𝜇</m:t>
+                        </m:r>
+                      </m:e>
+                      <m:sub>
+                        <m:r>
+                          <a:rPr lang="ar-AE" sz="1200" i="1" kern="1200">
+                            <a:solidFill>
+                              <a:schemeClr val="tx1"/>
+                            </a:solidFill>
+                            <a:latin typeface="Cambria Math" panose="02040503050406030204" pitchFamily="18" charset="0"/>
+                            <a:ea typeface="+mn-ea"/>
+                            <a:cs typeface="+mn-cs"/>
+                          </a:rPr>
+                          <m:t>𝑟</m:t>
+                        </m:r>
+                      </m:sub>
+                    </m:sSub>
+                  </m:oMath>
+                </a14:m>
+                <a:r>
+                  <a:rPr lang="de-AT" dirty="0" err="1"/>
+                  <a:t>is</a:t>
+                </a:r>
+                <a:r>
+                  <a:rPr lang="de-AT" dirty="0"/>
+                  <a:t> </a:t>
+                </a:r>
+                <a:r>
+                  <a:rPr lang="de-AT" dirty="0" err="1"/>
+                  <a:t>their</a:t>
+                </a:r>
+                <a:r>
+                  <a:rPr lang="de-AT" dirty="0"/>
+                  <a:t> </a:t>
+                </a:r>
+                <a:r>
+                  <a:rPr lang="de-AT" dirty="0" err="1"/>
+                  <a:t>average</a:t>
+                </a:r>
+                <a:r>
+                  <a:rPr lang="de-AT" dirty="0"/>
+                  <a:t>. In </a:t>
+                </a:r>
+                <a:r>
+                  <a:rPr lang="de-AT" dirty="0" err="1"/>
+                  <a:t>your</a:t>
+                </a:r>
+                <a:r>
+                  <a:rPr lang="de-AT" dirty="0"/>
+                  <a:t> </a:t>
+                </a:r>
+                <a:r>
+                  <a:rPr lang="de-AT" dirty="0" err="1"/>
+                  <a:t>case</a:t>
+                </a:r>
+                <a:r>
+                  <a:rPr lang="de-AT" dirty="0"/>
+                  <a:t> a </a:t>
+                </a:r>
+                <a:r>
+                  <a:rPr lang="de-AT" dirty="0" err="1"/>
+                  <a:t>vector</a:t>
+                </a:r>
+                <a:r>
+                  <a:rPr lang="de-AT" dirty="0"/>
+                  <a:t> </a:t>
+                </a:r>
+                <a:r>
+                  <a:rPr lang="de-AT" dirty="0" err="1"/>
+                  <a:t>with</a:t>
+                </a:r>
+                <a:r>
+                  <a:rPr lang="de-AT" dirty="0"/>
+                  <a:t> 176 </a:t>
+                </a:r>
+                <a:r>
+                  <a:rPr lang="de-AT" dirty="0" err="1"/>
+                  <a:t>entries</a:t>
+                </a:r>
+                <a:r>
+                  <a:rPr lang="de-AT" dirty="0"/>
+                  <a:t> — </a:t>
+                </a:r>
+                <a:r>
+                  <a:rPr lang="de-AT" dirty="0" err="1"/>
+                  <a:t>the</a:t>
+                </a:r>
+                <a:r>
+                  <a:rPr lang="de-AT" dirty="0"/>
+                  <a:t> "</a:t>
+                </a:r>
+                <a:r>
+                  <a:rPr lang="de-AT" dirty="0" err="1"/>
+                  <a:t>center</a:t>
+                </a:r>
+                <a:r>
+                  <a:rPr lang="de-AT" dirty="0"/>
+                  <a:t>" </a:t>
+                </a:r>
+                <a:r>
+                  <a:rPr lang="de-AT" dirty="0" err="1"/>
+                  <a:t>of</a:t>
+                </a:r>
+                <a:r>
+                  <a:rPr lang="de-AT" dirty="0"/>
+                  <a:t> </a:t>
+                </a:r>
+                <a:r>
+                  <a:rPr lang="de-AT" dirty="0" err="1"/>
+                  <a:t>the</a:t>
+                </a:r>
+                <a:r>
+                  <a:rPr lang="de-AT" dirty="0"/>
+                  <a:t> real </a:t>
+                </a:r>
+                <a:r>
+                  <a:rPr lang="de-AT" dirty="0" err="1"/>
+                  <a:t>point</a:t>
+                </a:r>
+                <a:r>
+                  <a:rPr lang="de-AT" dirty="0"/>
+                  <a:t> </a:t>
+                </a:r>
+                <a:r>
+                  <a:rPr lang="de-AT" dirty="0" err="1"/>
+                  <a:t>cloud</a:t>
+                </a:r>
+                <a:r>
+                  <a:rPr lang="de-AT" dirty="0"/>
+                  <a:t>.</a:t>
+                </a:r>
+              </a:p>
+              <a:p>
+                <a14:m>
+                  <m:oMath xmlns:m="http://schemas.openxmlformats.org/officeDocument/2006/math">
+                    <m:sSub>
+                      <m:sSubPr>
+                        <m:ctrlPr>
+                          <a:rPr lang="ar-AE" sz="1200" i="1" kern="1200">
+                            <a:solidFill>
+                              <a:schemeClr val="tx1"/>
+                            </a:solidFill>
+                            <a:latin typeface="Cambria Math" panose="02040503050406030204" pitchFamily="18" charset="0"/>
+                            <a:ea typeface="+mn-ea"/>
+                            <a:cs typeface="+mn-cs"/>
+                          </a:rPr>
+                        </m:ctrlPr>
+                      </m:sSubPr>
+                      <m:e>
+                        <m:r>
+                          <a:rPr lang="ar-AE" sz="1200" i="1" kern="1200">
+                            <a:solidFill>
+                              <a:schemeClr val="tx1"/>
+                            </a:solidFill>
+                            <a:latin typeface="Cambria Math" panose="02040503050406030204" pitchFamily="18" charset="0"/>
+                            <a:ea typeface="+mn-ea"/>
+                            <a:cs typeface="+mn-cs"/>
+                          </a:rPr>
+                          <m:t>𝜇</m:t>
+                        </m:r>
+                      </m:e>
+                      <m:sub>
+                        <m:r>
+                          <a:rPr lang="ar-AE" sz="1200" i="1" kern="1200">
+                            <a:solidFill>
+                              <a:schemeClr val="tx1"/>
+                            </a:solidFill>
+                            <a:latin typeface="Cambria Math" panose="02040503050406030204" pitchFamily="18" charset="0"/>
+                            <a:ea typeface="+mn-ea"/>
+                            <a:cs typeface="+mn-cs"/>
+                          </a:rPr>
+                          <m:t>𝑔</m:t>
+                        </m:r>
+                      </m:sub>
+                    </m:sSub>
+                  </m:oMath>
+                </a14:m>
+                <a:r>
+                  <a:rPr lang="ar-AE" dirty="0"/>
+                  <a:t>(</a:t>
+                </a:r>
+                <a:r>
+                  <a:rPr lang="de-AT" dirty="0" err="1"/>
+                  <a:t>mu</a:t>
+                </a:r>
+                <a:r>
+                  <a:rPr lang="de-AT" dirty="0"/>
+                  <a:t>-g) — </a:t>
+                </a:r>
+                <a:r>
+                  <a:rPr lang="de-AT" dirty="0" err="1"/>
+                  <a:t>the</a:t>
+                </a:r>
+                <a:r>
+                  <a:rPr lang="de-AT" dirty="0"/>
+                  <a:t> </a:t>
+                </a:r>
+                <a:r>
+                  <a:rPr lang="de-AT" b="1" dirty="0" err="1"/>
+                  <a:t>mean</a:t>
+                </a:r>
+                <a:r>
+                  <a:rPr lang="de-AT" b="1" dirty="0"/>
+                  <a:t> </a:t>
+                </a:r>
+                <a:r>
+                  <a:rPr lang="de-AT" b="1" dirty="0" err="1"/>
+                  <a:t>vector</a:t>
+                </a:r>
+                <a:r>
+                  <a:rPr lang="de-AT" b="1" dirty="0"/>
+                  <a:t> </a:t>
+                </a:r>
+                <a:r>
+                  <a:rPr lang="de-AT" b="1" dirty="0" err="1"/>
+                  <a:t>of</a:t>
+                </a:r>
+                <a:r>
+                  <a:rPr lang="de-AT" b="1" dirty="0"/>
+                  <a:t> </a:t>
+                </a:r>
+                <a:r>
+                  <a:rPr lang="de-AT" b="1" dirty="0" err="1"/>
+                  <a:t>the</a:t>
+                </a:r>
+                <a:r>
+                  <a:rPr lang="de-AT" b="1" dirty="0"/>
+                  <a:t> </a:t>
+                </a:r>
+                <a:r>
+                  <a:rPr lang="de-AT" b="1" dirty="0" err="1"/>
+                  <a:t>generated</a:t>
+                </a:r>
+                <a:r>
+                  <a:rPr lang="de-AT" dirty="0"/>
+                  <a:t> </a:t>
+                </a:r>
+                <a:r>
+                  <a:rPr lang="de-AT" dirty="0" err="1"/>
+                  <a:t>data</a:t>
+                </a:r>
+                <a:r>
+                  <a:rPr lang="de-AT" dirty="0"/>
+                  <a:t> ("g" = </a:t>
+                </a:r>
+                <a:r>
+                  <a:rPr lang="de-AT" dirty="0" err="1"/>
+                  <a:t>generated</a:t>
+                </a:r>
+                <a:r>
+                  <a:rPr lang="de-AT" dirty="0"/>
+                  <a:t>). The </a:t>
+                </a:r>
+                <a:r>
+                  <a:rPr lang="de-AT" dirty="0" err="1"/>
+                  <a:t>center</a:t>
+                </a:r>
+                <a:r>
+                  <a:rPr lang="de-AT" dirty="0"/>
+                  <a:t> </a:t>
+                </a:r>
+                <a:r>
+                  <a:rPr lang="de-AT" dirty="0" err="1"/>
+                  <a:t>of</a:t>
+                </a:r>
+                <a:r>
+                  <a:rPr lang="de-AT" dirty="0"/>
+                  <a:t> </a:t>
+                </a:r>
+                <a:r>
+                  <a:rPr lang="de-AT" dirty="0" err="1"/>
+                  <a:t>the</a:t>
+                </a:r>
+                <a:r>
+                  <a:rPr lang="de-AT" dirty="0"/>
+                  <a:t> </a:t>
+                </a:r>
+                <a:r>
+                  <a:rPr lang="de-AT" dirty="0" err="1"/>
+                  <a:t>generated</a:t>
+                </a:r>
+                <a:r>
+                  <a:rPr lang="de-AT" dirty="0"/>
+                  <a:t> </a:t>
+                </a:r>
+                <a:r>
+                  <a:rPr lang="de-AT" dirty="0" err="1"/>
+                  <a:t>point</a:t>
+                </a:r>
+                <a:r>
+                  <a:rPr lang="de-AT" dirty="0"/>
+                  <a:t> </a:t>
+                </a:r>
+                <a:r>
+                  <a:rPr lang="de-AT" dirty="0" err="1"/>
+                  <a:t>cloud</a:t>
+                </a:r>
+                <a:r>
+                  <a:rPr lang="de-AT" dirty="0"/>
+                  <a:t>.</a:t>
+                </a:r>
+              </a:p>
+              <a:p>
+                <a14:m>
+                  <m:oMath xmlns:m="http://schemas.openxmlformats.org/officeDocument/2006/math">
+                    <m:sSub>
+                      <m:sSubPr>
+                        <m:ctrlPr>
+                          <a:rPr lang="ar-AE" sz="1200" i="1" kern="1200">
+                            <a:solidFill>
+                              <a:schemeClr val="tx1"/>
+                            </a:solidFill>
+                            <a:latin typeface="Cambria Math" panose="02040503050406030204" pitchFamily="18" charset="0"/>
+                            <a:ea typeface="+mn-ea"/>
+                            <a:cs typeface="+mn-cs"/>
+                          </a:rPr>
+                        </m:ctrlPr>
+                      </m:sSubPr>
+                      <m:e>
+                        <m:r>
+                          <a:rPr lang="ar-AE" sz="1200" i="1" kern="1200">
+                            <a:solidFill>
+                              <a:schemeClr val="tx1"/>
+                            </a:solidFill>
+                            <a:latin typeface="Cambria Math" panose="02040503050406030204" pitchFamily="18" charset="0"/>
+                            <a:ea typeface="+mn-ea"/>
+                            <a:cs typeface="+mn-cs"/>
+                          </a:rPr>
+                          <m:t>𝜇</m:t>
+                        </m:r>
+                      </m:e>
+                      <m:sub>
+                        <m:r>
+                          <a:rPr lang="ar-AE" sz="1200" i="1" kern="1200">
+                            <a:solidFill>
+                              <a:schemeClr val="tx1"/>
+                            </a:solidFill>
+                            <a:latin typeface="Cambria Math" panose="02040503050406030204" pitchFamily="18" charset="0"/>
+                            <a:ea typeface="+mn-ea"/>
+                            <a:cs typeface="+mn-cs"/>
+                          </a:rPr>
+                          <m:t>𝑟</m:t>
+                        </m:r>
+                      </m:sub>
+                    </m:sSub>
+                    <m:r>
+                      <a:rPr lang="ar-AE" sz="1200" i="0" kern="1200">
+                        <a:solidFill>
+                          <a:schemeClr val="tx1"/>
+                        </a:solidFill>
+                        <a:latin typeface="Cambria Math" panose="02040503050406030204" pitchFamily="18" charset="0"/>
+                        <a:ea typeface="+mn-ea"/>
+                        <a:cs typeface="+mn-cs"/>
+                      </a:rPr>
+                      <m:t>−</m:t>
+                    </m:r>
+                    <m:sSub>
+                      <m:sSubPr>
+                        <m:ctrlPr>
+                          <a:rPr lang="ar-AE" sz="1200" i="1" kern="1200">
+                            <a:solidFill>
+                              <a:schemeClr val="tx1"/>
+                            </a:solidFill>
+                            <a:latin typeface="Cambria Math" panose="02040503050406030204" pitchFamily="18" charset="0"/>
+                            <a:ea typeface="+mn-ea"/>
+                            <a:cs typeface="+mn-cs"/>
+                          </a:rPr>
+                        </m:ctrlPr>
+                      </m:sSubPr>
+                      <m:e>
+                        <m:r>
+                          <a:rPr lang="ar-AE" sz="1200" i="1" kern="1200">
+                            <a:solidFill>
+                              <a:schemeClr val="tx1"/>
+                            </a:solidFill>
+                            <a:latin typeface="Cambria Math" panose="02040503050406030204" pitchFamily="18" charset="0"/>
+                            <a:ea typeface="+mn-ea"/>
+                            <a:cs typeface="+mn-cs"/>
+                          </a:rPr>
+                          <m:t>𝜇</m:t>
+                        </m:r>
+                      </m:e>
+                      <m:sub>
+                        <m:r>
+                          <a:rPr lang="ar-AE" sz="1200" i="1" kern="1200">
+                            <a:solidFill>
+                              <a:schemeClr val="tx1"/>
+                            </a:solidFill>
+                            <a:latin typeface="Cambria Math" panose="02040503050406030204" pitchFamily="18" charset="0"/>
+                            <a:ea typeface="+mn-ea"/>
+                            <a:cs typeface="+mn-cs"/>
+                          </a:rPr>
+                          <m:t>𝑔</m:t>
+                        </m:r>
+                      </m:sub>
+                    </m:sSub>
+                  </m:oMath>
+                </a14:m>
+                <a:r>
+                  <a:rPr lang="ar-AE" dirty="0"/>
+                  <a:t>— </a:t>
+                </a:r>
+                <a:r>
+                  <a:rPr lang="de-AT" dirty="0" err="1"/>
+                  <a:t>the</a:t>
+                </a:r>
+                <a:r>
+                  <a:rPr lang="de-AT" dirty="0"/>
+                  <a:t> </a:t>
+                </a:r>
+                <a:r>
+                  <a:rPr lang="de-AT" dirty="0" err="1"/>
+                  <a:t>difference</a:t>
+                </a:r>
+                <a:r>
+                  <a:rPr lang="de-AT" dirty="0"/>
+                  <a:t> </a:t>
+                </a:r>
+                <a:r>
+                  <a:rPr lang="de-AT" dirty="0" err="1"/>
+                  <a:t>of</a:t>
+                </a:r>
+                <a:r>
+                  <a:rPr lang="de-AT" dirty="0"/>
+                  <a:t> </a:t>
+                </a:r>
+                <a:r>
+                  <a:rPr lang="de-AT" dirty="0" err="1"/>
+                  <a:t>the</a:t>
+                </a:r>
+                <a:r>
+                  <a:rPr lang="de-AT" dirty="0"/>
+                  <a:t> </a:t>
+                </a:r>
+                <a:r>
+                  <a:rPr lang="de-AT" dirty="0" err="1"/>
+                  <a:t>two</a:t>
+                </a:r>
+                <a:r>
+                  <a:rPr lang="de-AT" dirty="0"/>
+                  <a:t> </a:t>
+                </a:r>
+                <a:r>
+                  <a:rPr lang="de-AT" dirty="0" err="1"/>
+                  <a:t>centers</a:t>
+                </a:r>
+                <a:r>
+                  <a:rPr lang="de-AT" dirty="0"/>
+                  <a:t>. A </a:t>
+                </a:r>
+                <a:r>
+                  <a:rPr lang="de-AT" dirty="0" err="1"/>
+                  <a:t>vector</a:t>
+                </a:r>
+                <a:r>
+                  <a:rPr lang="de-AT" dirty="0"/>
+                  <a:t> </a:t>
+                </a:r>
+                <a:r>
+                  <a:rPr lang="de-AT" dirty="0" err="1"/>
+                  <a:t>showing</a:t>
+                </a:r>
+                <a:r>
+                  <a:rPr lang="de-AT" dirty="0"/>
+                  <a:t> </a:t>
+                </a:r>
+                <a:r>
+                  <a:rPr lang="de-AT" dirty="0" err="1"/>
+                  <a:t>how</a:t>
+                </a:r>
+                <a:r>
+                  <a:rPr lang="de-AT" dirty="0"/>
+                  <a:t> </a:t>
+                </a:r>
+                <a:r>
+                  <a:rPr lang="de-AT" dirty="0" err="1"/>
+                  <a:t>far</a:t>
+                </a:r>
+                <a:r>
+                  <a:rPr lang="de-AT" dirty="0"/>
+                  <a:t> apart and in </a:t>
+                </a:r>
+                <a:r>
+                  <a:rPr lang="de-AT" dirty="0" err="1"/>
+                  <a:t>which</a:t>
+                </a:r>
+                <a:r>
+                  <a:rPr lang="de-AT" dirty="0"/>
+                  <a:t> </a:t>
+                </a:r>
+                <a:r>
+                  <a:rPr lang="de-AT" dirty="0" err="1"/>
+                  <a:t>direction</a:t>
+                </a:r>
+                <a:r>
+                  <a:rPr lang="de-AT" dirty="0"/>
+                  <a:t> </a:t>
+                </a:r>
+                <a:r>
+                  <a:rPr lang="de-AT" dirty="0" err="1"/>
+                  <a:t>the</a:t>
+                </a:r>
+                <a:r>
+                  <a:rPr lang="de-AT" dirty="0"/>
+                  <a:t> </a:t>
+                </a:r>
+                <a:r>
+                  <a:rPr lang="de-AT" dirty="0" err="1"/>
+                  <a:t>two</a:t>
+                </a:r>
+                <a:r>
+                  <a:rPr lang="de-AT" dirty="0"/>
+                  <a:t> </a:t>
+                </a:r>
+                <a:r>
+                  <a:rPr lang="de-AT" dirty="0" err="1"/>
+                  <a:t>cloud</a:t>
+                </a:r>
+                <a:r>
+                  <a:rPr lang="de-AT" dirty="0"/>
+                  <a:t>-centers </a:t>
+                </a:r>
+                <a:r>
+                  <a:rPr lang="de-AT" dirty="0" err="1"/>
+                  <a:t>lie</a:t>
+                </a:r>
+                <a:r>
+                  <a:rPr lang="de-AT" dirty="0"/>
+                  <a:t>.</a:t>
+                </a:r>
+              </a:p>
+              <a:p>
+                <a14:m>
+                  <m:oMath xmlns:m="http://schemas.openxmlformats.org/officeDocument/2006/math">
+                    <m:r>
+                      <a:rPr lang="de-AT" sz="1200" kern="1200">
+                        <a:solidFill>
+                          <a:schemeClr val="tx1"/>
+                        </a:solidFill>
+                        <a:latin typeface="Cambria Math" panose="02040503050406030204" pitchFamily="18" charset="0"/>
+                        <a:ea typeface="+mn-ea"/>
+                        <a:cs typeface="+mn-cs"/>
+                      </a:rPr>
+                      <m:t>∥</m:t>
+                    </m:r>
+                    <m:r>
+                      <a:rPr lang="de-AT" sz="1200" i="0" kern="1200">
+                        <a:solidFill>
+                          <a:schemeClr val="tx1"/>
+                        </a:solidFill>
+                        <a:latin typeface="Cambria Math" panose="02040503050406030204" pitchFamily="18" charset="0"/>
+                        <a:ea typeface="+mn-ea"/>
+                        <a:cs typeface="+mn-cs"/>
+                      </a:rPr>
+                      <m:t>⋯</m:t>
+                    </m:r>
+                    <m:sSubSup>
+                      <m:sSubSupPr>
+                        <m:ctrlPr>
+                          <a:rPr lang="ar-AE" sz="1200" i="1" kern="1200">
+                            <a:solidFill>
+                              <a:schemeClr val="tx1"/>
+                            </a:solidFill>
+                            <a:latin typeface="Cambria Math" panose="02040503050406030204" pitchFamily="18" charset="0"/>
+                            <a:ea typeface="+mn-ea"/>
+                            <a:cs typeface="+mn-cs"/>
+                          </a:rPr>
+                        </m:ctrlPr>
+                      </m:sSubSupPr>
+                      <m:e>
+                        <m:r>
+                          <a:rPr lang="ar-AE" sz="1200" i="0" kern="1200">
+                            <a:solidFill>
+                              <a:schemeClr val="tx1"/>
+                            </a:solidFill>
+                            <a:latin typeface="Cambria Math" panose="02040503050406030204" pitchFamily="18" charset="0"/>
+                            <a:ea typeface="+mn-ea"/>
+                            <a:cs typeface="+mn-cs"/>
+                          </a:rPr>
+                          <m:t>∥</m:t>
+                        </m:r>
+                      </m:e>
+                      <m:sub>
+                        <m:r>
+                          <a:rPr lang="ar-AE" sz="1200" i="0" kern="1200">
+                            <a:solidFill>
+                              <a:schemeClr val="tx1"/>
+                            </a:solidFill>
+                            <a:latin typeface="Cambria Math" panose="02040503050406030204" pitchFamily="18" charset="0"/>
+                            <a:ea typeface="+mn-ea"/>
+                            <a:cs typeface="+mn-cs"/>
+                          </a:rPr>
+                          <m:t>2</m:t>
+                        </m:r>
+                      </m:sub>
+                      <m:sup>
+                        <m:r>
+                          <a:rPr lang="ar-AE" sz="1200" i="0" kern="1200">
+                            <a:solidFill>
+                              <a:schemeClr val="tx1"/>
+                            </a:solidFill>
+                            <a:latin typeface="Cambria Math" panose="02040503050406030204" pitchFamily="18" charset="0"/>
+                            <a:ea typeface="+mn-ea"/>
+                            <a:cs typeface="+mn-cs"/>
+                          </a:rPr>
+                          <m:t>2</m:t>
+                        </m:r>
+                      </m:sup>
+                    </m:sSubSup>
+                  </m:oMath>
+                </a14:m>
+                <a:r>
+                  <a:rPr lang="ar-AE" dirty="0"/>
+                  <a:t>— </a:t>
+                </a:r>
+                <a:r>
+                  <a:rPr lang="de-AT" dirty="0" err="1"/>
+                  <a:t>the</a:t>
+                </a:r>
+                <a:r>
+                  <a:rPr lang="de-AT" dirty="0"/>
+                  <a:t> </a:t>
+                </a:r>
+                <a:r>
+                  <a:rPr lang="de-AT" b="1" dirty="0" err="1"/>
+                  <a:t>squared</a:t>
+                </a:r>
+                <a:r>
+                  <a:rPr lang="de-AT" b="1" dirty="0"/>
+                  <a:t> </a:t>
+                </a:r>
+                <a:r>
+                  <a:rPr lang="de-AT" b="1" dirty="0" err="1"/>
+                  <a:t>Euclidean</a:t>
+                </a:r>
+                <a:r>
+                  <a:rPr lang="de-AT" b="1" dirty="0"/>
+                  <a:t> norm</a:t>
+                </a:r>
+                <a:r>
+                  <a:rPr lang="de-AT" dirty="0"/>
+                  <a:t> (</a:t>
+                </a:r>
+                <a:r>
+                  <a:rPr lang="de-AT" dirty="0" err="1"/>
+                  <a:t>outer</a:t>
+                </a:r>
+                <a:r>
+                  <a:rPr lang="de-AT" dirty="0"/>
+                  <a:t> </a:t>
+                </a:r>
+                <a:r>
+                  <a:rPr lang="de-AT" dirty="0" err="1"/>
+                  <a:t>superscript</a:t>
+                </a:r>
+                <a:r>
+                  <a:rPr lang="de-AT" dirty="0"/>
+                  <a:t> 2 = </a:t>
+                </a:r>
+                <a:r>
+                  <a:rPr lang="de-AT" dirty="0" err="1"/>
+                  <a:t>squared</a:t>
+                </a:r>
+                <a:r>
+                  <a:rPr lang="de-AT" dirty="0"/>
+                  <a:t>, </a:t>
+                </a:r>
+                <a:r>
+                  <a:rPr lang="de-AT" dirty="0" err="1"/>
+                  <a:t>small</a:t>
+                </a:r>
+                <a:r>
+                  <a:rPr lang="de-AT" dirty="0"/>
+                  <a:t> 2 </a:t>
+                </a:r>
+                <a:r>
+                  <a:rPr lang="de-AT" dirty="0" err="1"/>
+                  <a:t>below</a:t>
+                </a:r>
+                <a:r>
+                  <a:rPr lang="de-AT" dirty="0"/>
+                  <a:t> = L2 norm). </a:t>
+                </a:r>
+                <a:r>
+                  <a:rPr lang="de-AT" dirty="0" err="1"/>
+                  <a:t>It</a:t>
+                </a:r>
+                <a:r>
+                  <a:rPr lang="de-AT" dirty="0"/>
+                  <a:t> </a:t>
+                </a:r>
+                <a:r>
+                  <a:rPr lang="de-AT" dirty="0" err="1"/>
+                  <a:t>turns</a:t>
+                </a:r>
+                <a:r>
+                  <a:rPr lang="de-AT" dirty="0"/>
+                  <a:t> </a:t>
+                </a:r>
+                <a:r>
+                  <a:rPr lang="de-AT" dirty="0" err="1"/>
+                  <a:t>the</a:t>
+                </a:r>
+                <a:r>
+                  <a:rPr lang="de-AT" dirty="0"/>
+                  <a:t> </a:t>
+                </a:r>
+                <a:r>
+                  <a:rPr lang="de-AT" dirty="0" err="1"/>
+                  <a:t>difference</a:t>
+                </a:r>
+                <a:r>
+                  <a:rPr lang="de-AT" dirty="0"/>
+                  <a:t> </a:t>
+                </a:r>
+                <a:r>
+                  <a:rPr lang="de-AT" dirty="0" err="1"/>
+                  <a:t>vector</a:t>
+                </a:r>
+                <a:r>
+                  <a:rPr lang="de-AT" dirty="0"/>
+                  <a:t> </a:t>
+                </a:r>
+                <a:r>
+                  <a:rPr lang="de-AT" dirty="0" err="1"/>
+                  <a:t>into</a:t>
+                </a:r>
+                <a:r>
+                  <a:rPr lang="de-AT" dirty="0"/>
+                  <a:t> </a:t>
+                </a:r>
+                <a:r>
+                  <a:rPr lang="de-AT" dirty="0" err="1"/>
+                  <a:t>one</a:t>
+                </a:r>
+                <a:r>
+                  <a:rPr lang="de-AT" dirty="0"/>
+                  <a:t> non-negative </a:t>
+                </a:r>
+                <a:r>
+                  <a:rPr lang="de-AT" dirty="0" err="1"/>
+                  <a:t>number</a:t>
+                </a:r>
+                <a:r>
+                  <a:rPr lang="de-AT" dirty="0"/>
+                  <a:t>: </a:t>
+                </a:r>
+                <a:r>
+                  <a:rPr lang="de-AT" dirty="0" err="1"/>
+                  <a:t>its</a:t>
+                </a:r>
+                <a:r>
+                  <a:rPr lang="de-AT" dirty="0"/>
+                  <a:t> </a:t>
+                </a:r>
+                <a:r>
+                  <a:rPr lang="de-AT" dirty="0" err="1"/>
+                  <a:t>squared</a:t>
+                </a:r>
+                <a:r>
+                  <a:rPr lang="de-AT" dirty="0"/>
+                  <a:t> </a:t>
+                </a:r>
+                <a:r>
+                  <a:rPr lang="de-AT" dirty="0" err="1"/>
+                  <a:t>length</a:t>
+                </a:r>
+                <a:r>
+                  <a:rPr lang="de-AT" dirty="0"/>
+                  <a:t>. </a:t>
+                </a:r>
+                <a:r>
+                  <a:rPr lang="de-AT" dirty="0" err="1"/>
+                  <a:t>Intuitively</a:t>
+                </a:r>
+                <a:r>
+                  <a:rPr lang="de-AT" dirty="0"/>
+                  <a:t>: "</a:t>
+                </a:r>
+                <a:r>
+                  <a:rPr lang="de-AT" dirty="0" err="1"/>
+                  <a:t>how</a:t>
+                </a:r>
+                <a:r>
+                  <a:rPr lang="de-AT" dirty="0"/>
+                  <a:t> </a:t>
+                </a:r>
+                <a:r>
+                  <a:rPr lang="de-AT" dirty="0" err="1"/>
+                  <a:t>far</a:t>
+                </a:r>
+                <a:r>
+                  <a:rPr lang="de-AT" dirty="0"/>
+                  <a:t> </a:t>
+                </a:r>
+                <a:r>
+                  <a:rPr lang="de-AT" dirty="0" err="1"/>
+                  <a:t>is</a:t>
+                </a:r>
+                <a:r>
+                  <a:rPr lang="de-AT" dirty="0"/>
+                  <a:t> </a:t>
+                </a:r>
+                <a:r>
+                  <a:rPr lang="de-AT" dirty="0" err="1"/>
+                  <a:t>center</a:t>
+                </a:r>
+                <a:r>
+                  <a:rPr lang="de-AT" dirty="0"/>
+                  <a:t> A </a:t>
+                </a:r>
+                <a:r>
+                  <a:rPr lang="de-AT" dirty="0" err="1"/>
+                  <a:t>from</a:t>
+                </a:r>
+                <a:r>
+                  <a:rPr lang="de-AT" dirty="0"/>
+                  <a:t> </a:t>
+                </a:r>
+                <a:r>
+                  <a:rPr lang="de-AT" dirty="0" err="1"/>
+                  <a:t>center</a:t>
+                </a:r>
+                <a:r>
+                  <a:rPr lang="de-AT" dirty="0"/>
+                  <a:t> B?", </a:t>
+                </a:r>
+                <a:r>
+                  <a:rPr lang="de-AT" dirty="0" err="1"/>
+                  <a:t>as</a:t>
+                </a:r>
+                <a:r>
+                  <a:rPr lang="de-AT" dirty="0"/>
+                  <a:t> a </a:t>
+                </a:r>
+                <a:r>
+                  <a:rPr lang="de-AT" dirty="0" err="1"/>
+                  <a:t>squared</a:t>
+                </a:r>
+                <a:r>
+                  <a:rPr lang="de-AT" dirty="0"/>
+                  <a:t> </a:t>
+                </a:r>
+                <a:r>
+                  <a:rPr lang="de-AT" dirty="0" err="1"/>
+                  <a:t>distance</a:t>
+                </a:r>
+                <a:r>
+                  <a:rPr lang="de-AT" dirty="0"/>
+                  <a:t>. This </a:t>
+                </a:r>
+                <a:r>
+                  <a:rPr lang="de-AT" dirty="0" err="1"/>
+                  <a:t>is</a:t>
+                </a:r>
+                <a:r>
+                  <a:rPr lang="de-AT" dirty="0"/>
+                  <a:t> </a:t>
+                </a:r>
+                <a:r>
+                  <a:rPr lang="de-AT" b="1" dirty="0"/>
+                  <a:t>Part 1: </a:t>
+                </a:r>
+                <a:r>
+                  <a:rPr lang="de-AT" b="1" dirty="0" err="1"/>
+                  <a:t>the</a:t>
+                </a:r>
+                <a:r>
+                  <a:rPr lang="de-AT" b="1" dirty="0"/>
+                  <a:t> </a:t>
+                </a:r>
+                <a:r>
+                  <a:rPr lang="de-AT" b="1" dirty="0" err="1"/>
+                  <a:t>mean</a:t>
+                </a:r>
+                <a:r>
+                  <a:rPr lang="de-AT" b="1" dirty="0"/>
+                  <a:t> </a:t>
+                </a:r>
+                <a:r>
+                  <a:rPr lang="de-AT" b="1" dirty="0" err="1"/>
+                  <a:t>distance</a:t>
+                </a:r>
+                <a:r>
+                  <a:rPr lang="de-AT" b="1" dirty="0"/>
+                  <a:t>.</a:t>
+                </a:r>
+              </a:p>
+              <a:p>
+                <a:endParaRPr lang="de-AT" dirty="0"/>
+              </a:p>
+              <a:p>
+                <a14:m>
+                  <m:oMath xmlns:m="http://schemas.openxmlformats.org/officeDocument/2006/math">
+                    <m:sSub>
+                      <m:sSubPr>
+                        <m:ctrlPr>
+                          <a:rPr lang="ar-AE" sz="1200" i="1" kern="1200">
+                            <a:solidFill>
+                              <a:schemeClr val="tx1"/>
+                            </a:solidFill>
+                            <a:latin typeface="Cambria Math" panose="02040503050406030204" pitchFamily="18" charset="0"/>
+                            <a:ea typeface="+mn-ea"/>
+                            <a:cs typeface="+mn-cs"/>
+                          </a:rPr>
+                        </m:ctrlPr>
+                      </m:sSubPr>
+                      <m:e>
+                        <m:r>
+                          <m:rPr>
+                            <m:sty m:val="p"/>
+                          </m:rPr>
+                          <a:rPr lang="el-GR" sz="1200" kern="1200">
+                            <a:solidFill>
+                              <a:schemeClr val="tx1"/>
+                            </a:solidFill>
+                            <a:latin typeface="Cambria Math" panose="02040503050406030204" pitchFamily="18" charset="0"/>
+                            <a:ea typeface="+mn-ea"/>
+                            <a:cs typeface="+mn-cs"/>
+                          </a:rPr>
+                          <m:t>Σ</m:t>
+                        </m:r>
+                      </m:e>
+                      <m:sub>
+                        <m:r>
+                          <a:rPr lang="ar-AE" sz="1200" i="1" kern="1200">
+                            <a:solidFill>
+                              <a:schemeClr val="tx1"/>
+                            </a:solidFill>
+                            <a:latin typeface="Cambria Math" panose="02040503050406030204" pitchFamily="18" charset="0"/>
+                            <a:ea typeface="+mn-ea"/>
+                            <a:cs typeface="+mn-cs"/>
+                          </a:rPr>
+                          <m:t>𝑟</m:t>
+                        </m:r>
+                      </m:sub>
+                    </m:sSub>
+                  </m:oMath>
+                </a14:m>
+                <a:r>
+                  <a:rPr lang="ar-AE" dirty="0"/>
+                  <a:t>(</a:t>
+                </a:r>
+                <a:r>
+                  <a:rPr lang="de-AT" dirty="0"/>
+                  <a:t>Sigma-r) — </a:t>
+                </a:r>
+                <a:r>
+                  <a:rPr lang="de-AT" dirty="0" err="1"/>
+                  <a:t>the</a:t>
+                </a:r>
+                <a:r>
+                  <a:rPr lang="de-AT" dirty="0"/>
+                  <a:t> </a:t>
+                </a:r>
+                <a:r>
+                  <a:rPr lang="de-AT" b="1" dirty="0" err="1"/>
+                  <a:t>covariance</a:t>
+                </a:r>
+                <a:r>
+                  <a:rPr lang="de-AT" b="1" dirty="0"/>
+                  <a:t> </a:t>
+                </a:r>
+                <a:r>
+                  <a:rPr lang="de-AT" b="1" dirty="0" err="1"/>
+                  <a:t>matrix</a:t>
+                </a:r>
+                <a:r>
+                  <a:rPr lang="de-AT" b="1" dirty="0"/>
+                  <a:t> </a:t>
+                </a:r>
+                <a:r>
+                  <a:rPr lang="de-AT" b="1" dirty="0" err="1"/>
+                  <a:t>of</a:t>
+                </a:r>
+                <a:r>
+                  <a:rPr lang="de-AT" b="1" dirty="0"/>
+                  <a:t> </a:t>
+                </a:r>
+                <a:r>
+                  <a:rPr lang="de-AT" b="1" dirty="0" err="1"/>
+                  <a:t>the</a:t>
+                </a:r>
+                <a:r>
+                  <a:rPr lang="de-AT" b="1" dirty="0"/>
+                  <a:t> real</a:t>
+                </a:r>
+                <a:r>
+                  <a:rPr lang="de-AT" dirty="0"/>
+                  <a:t> </a:t>
+                </a:r>
+                <a:r>
+                  <a:rPr lang="de-AT" dirty="0" err="1"/>
+                  <a:t>data</a:t>
+                </a:r>
+                <a:r>
+                  <a:rPr lang="de-AT" dirty="0"/>
+                  <a:t>. A 176×176 </a:t>
+                </a:r>
+                <a:r>
+                  <a:rPr lang="de-AT" dirty="0" err="1"/>
+                  <a:t>matrix</a:t>
+                </a:r>
+                <a:r>
+                  <a:rPr lang="de-AT" dirty="0"/>
+                  <a:t> </a:t>
+                </a:r>
+                <a:r>
+                  <a:rPr lang="de-AT" dirty="0" err="1"/>
+                  <a:t>describing</a:t>
+                </a:r>
+                <a:r>
+                  <a:rPr lang="de-AT" dirty="0"/>
+                  <a:t> </a:t>
+                </a:r>
+                <a:r>
+                  <a:rPr lang="de-AT" dirty="0" err="1"/>
+                  <a:t>how</a:t>
+                </a:r>
+                <a:r>
+                  <a:rPr lang="de-AT" dirty="0"/>
+                  <a:t> </a:t>
+                </a:r>
+                <a:r>
+                  <a:rPr lang="de-AT" dirty="0" err="1"/>
+                  <a:t>the</a:t>
+                </a:r>
+                <a:r>
+                  <a:rPr lang="de-AT" dirty="0"/>
+                  <a:t> </a:t>
+                </a:r>
+                <a:r>
+                  <a:rPr lang="de-AT" dirty="0" err="1"/>
+                  <a:t>features</a:t>
+                </a:r>
+                <a:r>
+                  <a:rPr lang="de-AT" dirty="0"/>
+                  <a:t> </a:t>
+                </a:r>
+                <a:r>
+                  <a:rPr lang="de-AT" dirty="0" err="1"/>
+                  <a:t>spread</a:t>
+                </a:r>
+                <a:r>
+                  <a:rPr lang="de-AT" dirty="0"/>
+                  <a:t> out and </a:t>
+                </a:r>
+                <a:r>
+                  <a:rPr lang="de-AT" dirty="0" err="1"/>
+                  <a:t>how</a:t>
+                </a:r>
+                <a:r>
+                  <a:rPr lang="de-AT" dirty="0"/>
+                  <a:t> </a:t>
+                </a:r>
+                <a:r>
+                  <a:rPr lang="de-AT" dirty="0" err="1"/>
+                  <a:t>they</a:t>
+                </a:r>
+                <a:r>
+                  <a:rPr lang="de-AT" dirty="0"/>
+                  <a:t> </a:t>
+                </a:r>
+                <a:r>
+                  <a:rPr lang="de-AT" dirty="0" err="1"/>
+                  <a:t>relate</a:t>
+                </a:r>
+                <a:r>
+                  <a:rPr lang="de-AT" dirty="0"/>
+                  <a:t> </a:t>
+                </a:r>
+                <a:r>
+                  <a:rPr lang="de-AT" dirty="0" err="1"/>
+                  <a:t>to</a:t>
+                </a:r>
+                <a:r>
+                  <a:rPr lang="de-AT" dirty="0"/>
+                  <a:t> </a:t>
+                </a:r>
+                <a:r>
+                  <a:rPr lang="de-AT" dirty="0" err="1"/>
+                  <a:t>each</a:t>
+                </a:r>
+                <a:r>
+                  <a:rPr lang="de-AT" dirty="0"/>
+                  <a:t> </a:t>
+                </a:r>
+                <a:r>
+                  <a:rPr lang="de-AT" dirty="0" err="1"/>
+                  <a:t>other</a:t>
+                </a:r>
+                <a:r>
+                  <a:rPr lang="de-AT" dirty="0"/>
+                  <a:t> — </a:t>
+                </a:r>
+                <a:r>
+                  <a:rPr lang="de-AT" dirty="0" err="1"/>
+                  <a:t>the</a:t>
+                </a:r>
+                <a:r>
+                  <a:rPr lang="de-AT" dirty="0"/>
+                  <a:t> "</a:t>
+                </a:r>
+                <a:r>
+                  <a:rPr lang="de-AT" dirty="0" err="1"/>
+                  <a:t>shape</a:t>
+                </a:r>
+                <a:r>
+                  <a:rPr lang="de-AT" dirty="0"/>
+                  <a:t> and </a:t>
+                </a:r>
+                <a:r>
+                  <a:rPr lang="de-AT" dirty="0" err="1"/>
+                  <a:t>extent</a:t>
+                </a:r>
+                <a:r>
+                  <a:rPr lang="de-AT" dirty="0"/>
+                  <a:t>" </a:t>
+                </a:r>
+                <a:r>
+                  <a:rPr lang="de-AT" dirty="0" err="1"/>
+                  <a:t>of</a:t>
+                </a:r>
+                <a:r>
+                  <a:rPr lang="de-AT" dirty="0"/>
+                  <a:t> </a:t>
+                </a:r>
+                <a:r>
+                  <a:rPr lang="de-AT" dirty="0" err="1"/>
+                  <a:t>the</a:t>
+                </a:r>
+                <a:r>
+                  <a:rPr lang="de-AT" dirty="0"/>
+                  <a:t> real </a:t>
+                </a:r>
+                <a:r>
+                  <a:rPr lang="de-AT" dirty="0" err="1"/>
+                  <a:t>point</a:t>
+                </a:r>
+                <a:r>
+                  <a:rPr lang="de-AT" dirty="0"/>
+                  <a:t> </a:t>
+                </a:r>
+                <a:r>
+                  <a:rPr lang="de-AT" dirty="0" err="1"/>
+                  <a:t>cloud</a:t>
+                </a:r>
+                <a:r>
+                  <a:rPr lang="de-AT" dirty="0"/>
+                  <a:t>.</a:t>
+                </a:r>
+              </a:p>
+              <a:p>
+                <a14:m>
+                  <m:oMath xmlns:m="http://schemas.openxmlformats.org/officeDocument/2006/math">
+                    <m:sSub>
+                      <m:sSubPr>
+                        <m:ctrlPr>
+                          <a:rPr lang="ar-AE" sz="1200" i="1" kern="1200">
+                            <a:solidFill>
+                              <a:schemeClr val="tx1"/>
+                            </a:solidFill>
+                            <a:latin typeface="Cambria Math" panose="02040503050406030204" pitchFamily="18" charset="0"/>
+                            <a:ea typeface="+mn-ea"/>
+                            <a:cs typeface="+mn-cs"/>
+                          </a:rPr>
+                        </m:ctrlPr>
+                      </m:sSubPr>
+                      <m:e>
+                        <m:r>
+                          <m:rPr>
+                            <m:sty m:val="p"/>
+                          </m:rPr>
+                          <a:rPr lang="el-GR" sz="1200" kern="1200">
+                            <a:solidFill>
+                              <a:schemeClr val="tx1"/>
+                            </a:solidFill>
+                            <a:latin typeface="Cambria Math" panose="02040503050406030204" pitchFamily="18" charset="0"/>
+                            <a:ea typeface="+mn-ea"/>
+                            <a:cs typeface="+mn-cs"/>
+                          </a:rPr>
+                          <m:t>Σ</m:t>
+                        </m:r>
+                      </m:e>
+                      <m:sub>
+                        <m:r>
+                          <a:rPr lang="ar-AE" sz="1200" i="1" kern="1200">
+                            <a:solidFill>
+                              <a:schemeClr val="tx1"/>
+                            </a:solidFill>
+                            <a:latin typeface="Cambria Math" panose="02040503050406030204" pitchFamily="18" charset="0"/>
+                            <a:ea typeface="+mn-ea"/>
+                            <a:cs typeface="+mn-cs"/>
+                          </a:rPr>
+                          <m:t>𝑔</m:t>
+                        </m:r>
+                      </m:sub>
+                    </m:sSub>
+                  </m:oMath>
+                </a14:m>
+                <a:r>
+                  <a:rPr lang="ar-AE" dirty="0"/>
+                  <a:t>(</a:t>
+                </a:r>
+                <a:r>
+                  <a:rPr lang="de-AT" dirty="0"/>
+                  <a:t>Sigma-g) — </a:t>
+                </a:r>
+                <a:r>
+                  <a:rPr lang="de-AT" dirty="0" err="1"/>
+                  <a:t>the</a:t>
+                </a:r>
+                <a:r>
+                  <a:rPr lang="de-AT" dirty="0"/>
+                  <a:t> </a:t>
+                </a:r>
+                <a:r>
+                  <a:rPr lang="de-AT" b="1" dirty="0" err="1"/>
+                  <a:t>covariance</a:t>
+                </a:r>
+                <a:r>
+                  <a:rPr lang="de-AT" b="1" dirty="0"/>
+                  <a:t> </a:t>
+                </a:r>
+                <a:r>
+                  <a:rPr lang="de-AT" b="1" dirty="0" err="1"/>
+                  <a:t>matrix</a:t>
+                </a:r>
+                <a:r>
+                  <a:rPr lang="de-AT" b="1" dirty="0"/>
+                  <a:t> </a:t>
+                </a:r>
+                <a:r>
+                  <a:rPr lang="de-AT" b="1" dirty="0" err="1"/>
+                  <a:t>of</a:t>
+                </a:r>
+                <a:r>
+                  <a:rPr lang="de-AT" b="1" dirty="0"/>
+                  <a:t> </a:t>
+                </a:r>
+                <a:r>
+                  <a:rPr lang="de-AT" b="1" dirty="0" err="1"/>
+                  <a:t>the</a:t>
+                </a:r>
+                <a:r>
+                  <a:rPr lang="de-AT" b="1" dirty="0"/>
+                  <a:t> </a:t>
+                </a:r>
+                <a:r>
+                  <a:rPr lang="de-AT" b="1" dirty="0" err="1"/>
+                  <a:t>generated</a:t>
+                </a:r>
+                <a:r>
+                  <a:rPr lang="de-AT" dirty="0"/>
+                  <a:t> </a:t>
+                </a:r>
+                <a:r>
+                  <a:rPr lang="de-AT" dirty="0" err="1"/>
+                  <a:t>data</a:t>
+                </a:r>
+                <a:r>
+                  <a:rPr lang="de-AT" dirty="0"/>
+                  <a:t>. The </a:t>
+                </a:r>
+                <a:r>
+                  <a:rPr lang="de-AT" dirty="0" err="1"/>
+                  <a:t>shape</a:t>
+                </a:r>
+                <a:r>
+                  <a:rPr lang="de-AT" dirty="0"/>
+                  <a:t>/</a:t>
+                </a:r>
+                <a:r>
+                  <a:rPr lang="de-AT" dirty="0" err="1"/>
+                  <a:t>extent</a:t>
+                </a:r>
+                <a:r>
+                  <a:rPr lang="de-AT" dirty="0"/>
+                  <a:t> </a:t>
+                </a:r>
+                <a:r>
+                  <a:rPr lang="de-AT" dirty="0" err="1"/>
+                  <a:t>of</a:t>
+                </a:r>
+                <a:r>
+                  <a:rPr lang="de-AT" dirty="0"/>
+                  <a:t> </a:t>
+                </a:r>
+                <a:r>
+                  <a:rPr lang="de-AT" dirty="0" err="1"/>
+                  <a:t>the</a:t>
+                </a:r>
+                <a:r>
+                  <a:rPr lang="de-AT" dirty="0"/>
+                  <a:t> </a:t>
+                </a:r>
+                <a:r>
+                  <a:rPr lang="de-AT" dirty="0" err="1"/>
+                  <a:t>generated</a:t>
+                </a:r>
+                <a:r>
+                  <a:rPr lang="de-AT" dirty="0"/>
+                  <a:t> </a:t>
+                </a:r>
+                <a:r>
+                  <a:rPr lang="de-AT" dirty="0" err="1"/>
+                  <a:t>cloud</a:t>
+                </a:r>
+                <a:r>
+                  <a:rPr lang="de-AT" dirty="0"/>
+                  <a:t>.</a:t>
+                </a:r>
+              </a:p>
+              <a:p>
+                <a14:m>
+                  <m:oMath xmlns:m="http://schemas.openxmlformats.org/officeDocument/2006/math">
+                    <m:sSub>
+                      <m:sSubPr>
+                        <m:ctrlPr>
+                          <a:rPr lang="ar-AE" sz="1200" i="1" kern="1200">
+                            <a:solidFill>
+                              <a:schemeClr val="tx1"/>
+                            </a:solidFill>
+                            <a:latin typeface="Cambria Math" panose="02040503050406030204" pitchFamily="18" charset="0"/>
+                            <a:ea typeface="+mn-ea"/>
+                            <a:cs typeface="+mn-cs"/>
+                          </a:rPr>
+                        </m:ctrlPr>
+                      </m:sSubPr>
+                      <m:e>
+                        <m:r>
+                          <m:rPr>
+                            <m:sty m:val="p"/>
+                          </m:rPr>
+                          <a:rPr lang="el-GR" sz="1200" kern="1200">
+                            <a:solidFill>
+                              <a:schemeClr val="tx1"/>
+                            </a:solidFill>
+                            <a:latin typeface="Cambria Math" panose="02040503050406030204" pitchFamily="18" charset="0"/>
+                            <a:ea typeface="+mn-ea"/>
+                            <a:cs typeface="+mn-cs"/>
+                          </a:rPr>
+                          <m:t>Σ</m:t>
+                        </m:r>
+                      </m:e>
+                      <m:sub>
+                        <m:r>
+                          <a:rPr lang="ar-AE" sz="1200" i="1" kern="1200">
+                            <a:solidFill>
+                              <a:schemeClr val="tx1"/>
+                            </a:solidFill>
+                            <a:latin typeface="Cambria Math" panose="02040503050406030204" pitchFamily="18" charset="0"/>
+                            <a:ea typeface="+mn-ea"/>
+                            <a:cs typeface="+mn-cs"/>
+                          </a:rPr>
+                          <m:t>𝑟</m:t>
+                        </m:r>
+                      </m:sub>
+                    </m:sSub>
+                    <m:sSub>
+                      <m:sSubPr>
+                        <m:ctrlPr>
+                          <a:rPr lang="ar-AE" sz="1200" i="1" kern="1200">
+                            <a:solidFill>
+                              <a:schemeClr val="tx1"/>
+                            </a:solidFill>
+                            <a:latin typeface="Cambria Math" panose="02040503050406030204" pitchFamily="18" charset="0"/>
+                            <a:ea typeface="+mn-ea"/>
+                            <a:cs typeface="+mn-cs"/>
+                          </a:rPr>
+                        </m:ctrlPr>
+                      </m:sSubPr>
+                      <m:e>
+                        <m:r>
+                          <m:rPr>
+                            <m:sty m:val="p"/>
+                          </m:rPr>
+                          <a:rPr lang="el-GR" sz="1200" i="0" kern="1200">
+                            <a:solidFill>
+                              <a:schemeClr val="tx1"/>
+                            </a:solidFill>
+                            <a:latin typeface="Cambria Math" panose="02040503050406030204" pitchFamily="18" charset="0"/>
+                            <a:ea typeface="+mn-ea"/>
+                            <a:cs typeface="+mn-cs"/>
+                          </a:rPr>
+                          <m:t>Σ</m:t>
+                        </m:r>
+                      </m:e>
+                      <m:sub>
+                        <m:r>
+                          <a:rPr lang="ar-AE" sz="1200" i="1" kern="1200">
+                            <a:solidFill>
+                              <a:schemeClr val="tx1"/>
+                            </a:solidFill>
+                            <a:latin typeface="Cambria Math" panose="02040503050406030204" pitchFamily="18" charset="0"/>
+                            <a:ea typeface="+mn-ea"/>
+                            <a:cs typeface="+mn-cs"/>
+                          </a:rPr>
+                          <m:t>𝑔</m:t>
+                        </m:r>
+                      </m:sub>
+                    </m:sSub>
+                  </m:oMath>
+                </a14:m>
+                <a:r>
+                  <a:rPr lang="ar-AE" dirty="0"/>
+                  <a:t>— </a:t>
+                </a:r>
+                <a:r>
+                  <a:rPr lang="de-AT" dirty="0" err="1"/>
+                  <a:t>the</a:t>
+                </a:r>
+                <a:r>
+                  <a:rPr lang="de-AT" dirty="0"/>
+                  <a:t> </a:t>
+                </a:r>
+                <a:r>
+                  <a:rPr lang="de-AT" b="1" dirty="0" err="1"/>
+                  <a:t>matrix</a:t>
+                </a:r>
+                <a:r>
+                  <a:rPr lang="de-AT" b="1" dirty="0"/>
+                  <a:t> </a:t>
+                </a:r>
+                <a:r>
+                  <a:rPr lang="de-AT" b="1" dirty="0" err="1"/>
+                  <a:t>product</a:t>
+                </a:r>
+                <a:r>
+                  <a:rPr lang="de-AT" dirty="0"/>
+                  <a:t> </a:t>
+                </a:r>
+                <a:r>
+                  <a:rPr lang="de-AT" dirty="0" err="1"/>
+                  <a:t>of</a:t>
+                </a:r>
+                <a:r>
+                  <a:rPr lang="de-AT" dirty="0"/>
+                  <a:t> </a:t>
+                </a:r>
+                <a:r>
+                  <a:rPr lang="de-AT" dirty="0" err="1"/>
+                  <a:t>the</a:t>
+                </a:r>
+                <a:r>
+                  <a:rPr lang="de-AT" dirty="0"/>
+                  <a:t> </a:t>
+                </a:r>
+                <a:r>
+                  <a:rPr lang="de-AT" dirty="0" err="1"/>
+                  <a:t>two</a:t>
+                </a:r>
+                <a:r>
+                  <a:rPr lang="de-AT" dirty="0"/>
+                  <a:t> </a:t>
+                </a:r>
+                <a:r>
+                  <a:rPr lang="de-AT" dirty="0" err="1"/>
+                  <a:t>covariance</a:t>
+                </a:r>
+                <a:r>
+                  <a:rPr lang="de-AT" dirty="0"/>
+                  <a:t> </a:t>
+                </a:r>
+                <a:r>
+                  <a:rPr lang="de-AT" dirty="0" err="1"/>
+                  <a:t>matrices</a:t>
+                </a:r>
+                <a:r>
+                  <a:rPr lang="de-AT" dirty="0"/>
+                  <a:t>. An intermediate </a:t>
+                </a:r>
+                <a:r>
+                  <a:rPr lang="de-AT" dirty="0" err="1"/>
+                  <a:t>step</a:t>
+                </a:r>
+                <a:r>
+                  <a:rPr lang="de-AT" dirty="0"/>
+                  <a:t> </a:t>
+                </a:r>
+                <a:r>
+                  <a:rPr lang="de-AT" dirty="0" err="1"/>
+                  <a:t>for</a:t>
+                </a:r>
+                <a:r>
+                  <a:rPr lang="de-AT" dirty="0"/>
+                  <a:t> </a:t>
+                </a:r>
+                <a:r>
+                  <a:rPr lang="de-AT" dirty="0" err="1"/>
+                  <a:t>comparing</a:t>
+                </a:r>
+                <a:r>
+                  <a:rPr lang="de-AT" dirty="0"/>
+                  <a:t> </a:t>
+                </a:r>
+                <a:r>
+                  <a:rPr lang="de-AT" dirty="0" err="1"/>
+                  <a:t>the</a:t>
+                </a:r>
+                <a:r>
+                  <a:rPr lang="de-AT" dirty="0"/>
+                  <a:t> </a:t>
+                </a:r>
+                <a:r>
+                  <a:rPr lang="de-AT" dirty="0" err="1"/>
+                  <a:t>two</a:t>
+                </a:r>
+                <a:r>
+                  <a:rPr lang="de-AT" dirty="0"/>
+                  <a:t> </a:t>
+                </a:r>
+                <a:r>
+                  <a:rPr lang="de-AT" dirty="0" err="1"/>
+                  <a:t>shapes</a:t>
+                </a:r>
+                <a:r>
+                  <a:rPr lang="de-AT" dirty="0"/>
+                  <a:t>.</a:t>
+                </a:r>
+              </a:p>
+              <a:p>
+                <a14:m>
+                  <m:oMath xmlns:m="http://schemas.openxmlformats.org/officeDocument/2006/math">
+                    <m:rad>
+                      <m:radPr>
+                        <m:degHide m:val="on"/>
+                        <m:ctrlPr>
+                          <a:rPr lang="ar-AE" sz="1200" i="1" kern="1200">
+                            <a:solidFill>
+                              <a:schemeClr val="tx1"/>
+                            </a:solidFill>
+                            <a:latin typeface="Cambria Math" panose="02040503050406030204" pitchFamily="18" charset="0"/>
+                            <a:ea typeface="+mn-ea"/>
+                            <a:cs typeface="+mn-cs"/>
+                          </a:rPr>
+                        </m:ctrlPr>
+                      </m:radPr>
+                      <m:deg/>
+                      <m:e>
+                        <m:sSub>
+                          <m:sSubPr>
+                            <m:ctrlPr>
+                              <a:rPr lang="ar-AE" sz="1200" i="1" kern="1200">
+                                <a:solidFill>
+                                  <a:schemeClr val="tx1"/>
+                                </a:solidFill>
+                                <a:latin typeface="Cambria Math" panose="02040503050406030204" pitchFamily="18" charset="0"/>
+                                <a:ea typeface="+mn-ea"/>
+                                <a:cs typeface="+mn-cs"/>
+                              </a:rPr>
+                            </m:ctrlPr>
+                          </m:sSubPr>
+                          <m:e>
+                            <m:r>
+                              <m:rPr>
+                                <m:sty m:val="p"/>
+                              </m:rPr>
+                              <a:rPr lang="el-GR" sz="1200" kern="1200">
+                                <a:solidFill>
+                                  <a:schemeClr val="tx1"/>
+                                </a:solidFill>
+                                <a:latin typeface="Cambria Math" panose="02040503050406030204" pitchFamily="18" charset="0"/>
+                                <a:ea typeface="+mn-ea"/>
+                                <a:cs typeface="+mn-cs"/>
+                              </a:rPr>
+                              <m:t>Σ</m:t>
+                            </m:r>
+                          </m:e>
+                          <m:sub>
+                            <m:r>
+                              <a:rPr lang="ar-AE" sz="1200" i="1" kern="1200">
+                                <a:solidFill>
+                                  <a:schemeClr val="tx1"/>
+                                </a:solidFill>
+                                <a:latin typeface="Cambria Math" panose="02040503050406030204" pitchFamily="18" charset="0"/>
+                                <a:ea typeface="+mn-ea"/>
+                                <a:cs typeface="+mn-cs"/>
+                              </a:rPr>
+                              <m:t>𝑟</m:t>
+                            </m:r>
+                          </m:sub>
+                        </m:sSub>
+                        <m:sSub>
+                          <m:sSubPr>
+                            <m:ctrlPr>
+                              <a:rPr lang="ar-AE" sz="1200" i="1" kern="1200">
+                                <a:solidFill>
+                                  <a:schemeClr val="tx1"/>
+                                </a:solidFill>
+                                <a:latin typeface="Cambria Math" panose="02040503050406030204" pitchFamily="18" charset="0"/>
+                                <a:ea typeface="+mn-ea"/>
+                                <a:cs typeface="+mn-cs"/>
+                              </a:rPr>
+                            </m:ctrlPr>
+                          </m:sSubPr>
+                          <m:e>
+                            <m:r>
+                              <m:rPr>
+                                <m:sty m:val="p"/>
+                              </m:rPr>
+                              <a:rPr lang="el-GR" sz="1200" i="0" kern="1200">
+                                <a:solidFill>
+                                  <a:schemeClr val="tx1"/>
+                                </a:solidFill>
+                                <a:latin typeface="Cambria Math" panose="02040503050406030204" pitchFamily="18" charset="0"/>
+                                <a:ea typeface="+mn-ea"/>
+                                <a:cs typeface="+mn-cs"/>
+                              </a:rPr>
+                              <m:t>Σ</m:t>
+                            </m:r>
+                          </m:e>
+                          <m:sub>
+                            <m:r>
+                              <a:rPr lang="ar-AE" sz="1200" i="1" kern="1200">
+                                <a:solidFill>
+                                  <a:schemeClr val="tx1"/>
+                                </a:solidFill>
+                                <a:latin typeface="Cambria Math" panose="02040503050406030204" pitchFamily="18" charset="0"/>
+                                <a:ea typeface="+mn-ea"/>
+                                <a:cs typeface="+mn-cs"/>
+                              </a:rPr>
+                              <m:t>𝑔</m:t>
+                            </m:r>
+                          </m:sub>
+                        </m:sSub>
+                      </m:e>
+                    </m:rad>
+                  </m:oMath>
+                </a14:m>
+                <a:r>
+                  <a:rPr lang="ar-AE" dirty="0"/>
+                  <a:t>— </a:t>
+                </a:r>
+                <a:r>
+                  <a:rPr lang="de-AT" dirty="0" err="1"/>
+                  <a:t>the</a:t>
+                </a:r>
+                <a:r>
+                  <a:rPr lang="de-AT" dirty="0"/>
+                  <a:t> </a:t>
+                </a:r>
+                <a:r>
+                  <a:rPr lang="de-AT" b="1" dirty="0" err="1"/>
+                  <a:t>matrix</a:t>
+                </a:r>
+                <a:r>
+                  <a:rPr lang="de-AT" b="1" dirty="0"/>
+                  <a:t> </a:t>
+                </a:r>
+                <a:r>
+                  <a:rPr lang="de-AT" b="1" dirty="0" err="1"/>
+                  <a:t>square</a:t>
+                </a:r>
+                <a:r>
+                  <a:rPr lang="de-AT" b="1" dirty="0"/>
+                  <a:t> root</a:t>
+                </a:r>
+                <a:r>
+                  <a:rPr lang="de-AT" dirty="0"/>
+                  <a:t> </a:t>
+                </a:r>
+                <a:r>
+                  <a:rPr lang="de-AT" dirty="0" err="1"/>
+                  <a:t>of</a:t>
+                </a:r>
+                <a:r>
+                  <a:rPr lang="de-AT" dirty="0"/>
+                  <a:t> </a:t>
+                </a:r>
+                <a:r>
+                  <a:rPr lang="de-AT" dirty="0" err="1"/>
+                  <a:t>that</a:t>
+                </a:r>
+                <a:r>
+                  <a:rPr lang="de-AT" dirty="0"/>
+                  <a:t> </a:t>
+                </a:r>
+                <a:r>
+                  <a:rPr lang="de-AT" dirty="0" err="1"/>
+                  <a:t>product</a:t>
+                </a:r>
+                <a:r>
+                  <a:rPr lang="de-AT" dirty="0"/>
+                  <a:t> (not element-</a:t>
+                </a:r>
+                <a:r>
+                  <a:rPr lang="de-AT" dirty="0" err="1"/>
+                  <a:t>wise</a:t>
+                </a:r>
+                <a:r>
+                  <a:rPr lang="de-AT" dirty="0"/>
+                  <a:t>! a </a:t>
+                </a:r>
+                <a:r>
+                  <a:rPr lang="de-AT" dirty="0" err="1"/>
+                  <a:t>matrix</a:t>
+                </a:r>
+                <a:r>
+                  <a:rPr lang="de-AT" dirty="0"/>
+                  <a:t> </a:t>
+                </a:r>
+                <a14:m>
+                  <m:oMath xmlns:m="http://schemas.openxmlformats.org/officeDocument/2006/math">
+                    <m:r>
+                      <a:rPr lang="de-AT" sz="1200" i="1" kern="1200">
+                        <a:solidFill>
+                          <a:schemeClr val="tx1"/>
+                        </a:solidFill>
+                        <a:latin typeface="Cambria Math" panose="02040503050406030204" pitchFamily="18" charset="0"/>
+                        <a:ea typeface="+mn-ea"/>
+                        <a:cs typeface="+mn-cs"/>
+                      </a:rPr>
+                      <m:t>𝑀</m:t>
+                    </m:r>
+                  </m:oMath>
+                </a14:m>
+                <a:r>
+                  <a:rPr lang="de-AT" dirty="0" err="1"/>
+                  <a:t>with</a:t>
+                </a:r>
+                <a:r>
+                  <a:rPr lang="de-AT" dirty="0"/>
+                  <a:t> </a:t>
+                </a:r>
+                <a14:m>
+                  <m:oMath xmlns:m="http://schemas.openxmlformats.org/officeDocument/2006/math">
+                    <m:r>
+                      <a:rPr lang="de-AT" sz="1200" i="1" kern="1200">
+                        <a:solidFill>
+                          <a:schemeClr val="tx1"/>
+                        </a:solidFill>
+                        <a:latin typeface="Cambria Math" panose="02040503050406030204" pitchFamily="18" charset="0"/>
+                        <a:ea typeface="+mn-ea"/>
+                        <a:cs typeface="+mn-cs"/>
+                      </a:rPr>
+                      <m:t>𝑀</m:t>
+                    </m:r>
+                    <m:r>
+                      <a:rPr lang="de-AT" sz="1200" i="0" kern="1200">
+                        <a:solidFill>
+                          <a:schemeClr val="tx1"/>
+                        </a:solidFill>
+                        <a:latin typeface="Cambria Math" panose="02040503050406030204" pitchFamily="18" charset="0"/>
+                        <a:ea typeface="+mn-ea"/>
+                        <a:cs typeface="+mn-cs"/>
+                      </a:rPr>
+                      <m:t>⋅</m:t>
+                    </m:r>
+                    <m:r>
+                      <a:rPr lang="de-AT" sz="1200" i="1" kern="1200">
+                        <a:solidFill>
+                          <a:schemeClr val="tx1"/>
+                        </a:solidFill>
+                        <a:latin typeface="Cambria Math" panose="02040503050406030204" pitchFamily="18" charset="0"/>
+                        <a:ea typeface="+mn-ea"/>
+                        <a:cs typeface="+mn-cs"/>
+                      </a:rPr>
+                      <m:t>𝑀</m:t>
+                    </m:r>
+                    <m:r>
+                      <a:rPr lang="de-AT" sz="1200" i="0" kern="1200">
+                        <a:solidFill>
+                          <a:schemeClr val="tx1"/>
+                        </a:solidFill>
+                        <a:latin typeface="Cambria Math" panose="02040503050406030204" pitchFamily="18" charset="0"/>
+                        <a:ea typeface="+mn-ea"/>
+                        <a:cs typeface="+mn-cs"/>
+                      </a:rPr>
+                      <m:t>=</m:t>
+                    </m:r>
+                    <m:sSub>
+                      <m:sSubPr>
+                        <m:ctrlPr>
+                          <a:rPr lang="ar-AE" sz="1200" i="1" kern="1200">
+                            <a:solidFill>
+                              <a:schemeClr val="tx1"/>
+                            </a:solidFill>
+                            <a:latin typeface="Cambria Math" panose="02040503050406030204" pitchFamily="18" charset="0"/>
+                            <a:ea typeface="+mn-ea"/>
+                            <a:cs typeface="+mn-cs"/>
+                          </a:rPr>
+                        </m:ctrlPr>
+                      </m:sSubPr>
+                      <m:e>
+                        <m:r>
+                          <m:rPr>
+                            <m:sty m:val="p"/>
+                          </m:rPr>
+                          <a:rPr lang="el-GR" sz="1200" i="0" kern="1200">
+                            <a:solidFill>
+                              <a:schemeClr val="tx1"/>
+                            </a:solidFill>
+                            <a:latin typeface="Cambria Math" panose="02040503050406030204" pitchFamily="18" charset="0"/>
+                            <a:ea typeface="+mn-ea"/>
+                            <a:cs typeface="+mn-cs"/>
+                          </a:rPr>
+                          <m:t>Σ</m:t>
+                        </m:r>
+                      </m:e>
+                      <m:sub>
+                        <m:r>
+                          <a:rPr lang="ar-AE" sz="1200" i="1" kern="1200">
+                            <a:solidFill>
+                              <a:schemeClr val="tx1"/>
+                            </a:solidFill>
+                            <a:latin typeface="Cambria Math" panose="02040503050406030204" pitchFamily="18" charset="0"/>
+                            <a:ea typeface="+mn-ea"/>
+                            <a:cs typeface="+mn-cs"/>
+                          </a:rPr>
+                          <m:t>𝑟</m:t>
+                        </m:r>
+                      </m:sub>
+                    </m:sSub>
+                    <m:sSub>
+                      <m:sSubPr>
+                        <m:ctrlPr>
+                          <a:rPr lang="ar-AE" sz="1200" i="1" kern="1200">
+                            <a:solidFill>
+                              <a:schemeClr val="tx1"/>
+                            </a:solidFill>
+                            <a:latin typeface="Cambria Math" panose="02040503050406030204" pitchFamily="18" charset="0"/>
+                            <a:ea typeface="+mn-ea"/>
+                            <a:cs typeface="+mn-cs"/>
+                          </a:rPr>
+                        </m:ctrlPr>
+                      </m:sSubPr>
+                      <m:e>
+                        <m:r>
+                          <m:rPr>
+                            <m:sty m:val="p"/>
+                          </m:rPr>
+                          <a:rPr lang="el-GR" sz="1200" i="0" kern="1200">
+                            <a:solidFill>
+                              <a:schemeClr val="tx1"/>
+                            </a:solidFill>
+                            <a:latin typeface="Cambria Math" panose="02040503050406030204" pitchFamily="18" charset="0"/>
+                            <a:ea typeface="+mn-ea"/>
+                            <a:cs typeface="+mn-cs"/>
+                          </a:rPr>
+                          <m:t>Σ</m:t>
+                        </m:r>
+                      </m:e>
+                      <m:sub>
+                        <m:r>
+                          <a:rPr lang="ar-AE" sz="1200" i="1" kern="1200">
+                            <a:solidFill>
+                              <a:schemeClr val="tx1"/>
+                            </a:solidFill>
+                            <a:latin typeface="Cambria Math" panose="02040503050406030204" pitchFamily="18" charset="0"/>
+                            <a:ea typeface="+mn-ea"/>
+                            <a:cs typeface="+mn-cs"/>
+                          </a:rPr>
+                          <m:t>𝑔</m:t>
+                        </m:r>
+                      </m:sub>
+                    </m:sSub>
+                  </m:oMath>
+                </a14:m>
+                <a:r>
+                  <a:rPr lang="ar-AE" dirty="0"/>
+                  <a:t>). </a:t>
+                </a:r>
+                <a:r>
+                  <a:rPr lang="de-AT" dirty="0"/>
+                  <a:t>This </a:t>
+                </a:r>
+                <a:r>
+                  <a:rPr lang="de-AT" dirty="0" err="1"/>
+                  <a:t>is</a:t>
+                </a:r>
+                <a:r>
+                  <a:rPr lang="de-AT" dirty="0"/>
+                  <a:t> </a:t>
+                </a:r>
+                <a:r>
+                  <a:rPr lang="de-AT" dirty="0" err="1"/>
+                  <a:t>the</a:t>
+                </a:r>
+                <a:r>
+                  <a:rPr lang="de-AT" dirty="0"/>
+                  <a:t> </a:t>
+                </a:r>
+                <a:r>
+                  <a:rPr lang="de-AT" dirty="0" err="1"/>
+                  <a:t>computationally</a:t>
+                </a:r>
+                <a:r>
+                  <a:rPr lang="de-AT" dirty="0"/>
+                  <a:t> </a:t>
+                </a:r>
+                <a:r>
+                  <a:rPr lang="de-AT" dirty="0" err="1"/>
+                  <a:t>heaviest</a:t>
+                </a:r>
+                <a:r>
+                  <a:rPr lang="de-AT" dirty="0"/>
+                  <a:t> </a:t>
+                </a:r>
+                <a:r>
+                  <a:rPr lang="de-AT" dirty="0" err="1"/>
+                  <a:t>part</a:t>
+                </a:r>
+                <a:r>
+                  <a:rPr lang="de-AT" dirty="0"/>
+                  <a:t> — in </a:t>
+                </a:r>
+                <a:r>
+                  <a:rPr lang="de-AT" dirty="0" err="1"/>
+                  <a:t>your</a:t>
+                </a:r>
+                <a:r>
+                  <a:rPr lang="de-AT" dirty="0"/>
+                  <a:t> code </a:t>
+                </a:r>
+                <a:r>
+                  <a:rPr lang="de-AT" dirty="0" err="1"/>
+                  <a:t>done</a:t>
+                </a:r>
+                <a:r>
+                  <a:rPr lang="de-AT" dirty="0"/>
+                  <a:t> via </a:t>
+                </a:r>
+                <a:r>
+                  <a:rPr lang="de-AT" dirty="0" err="1"/>
+                  <a:t>eigendecomposition</a:t>
+                </a:r>
+                <a:r>
+                  <a:rPr lang="de-AT" dirty="0"/>
+                  <a:t>. </a:t>
+                </a:r>
+                <a:r>
+                  <a:rPr lang="de-AT" dirty="0" err="1"/>
+                  <a:t>It</a:t>
+                </a:r>
+                <a:r>
+                  <a:rPr lang="de-AT" dirty="0"/>
+                  <a:t> </a:t>
+                </a:r>
+                <a:r>
+                  <a:rPr lang="de-AT" dirty="0" err="1"/>
+                  <a:t>measures</a:t>
+                </a:r>
+                <a:r>
+                  <a:rPr lang="de-AT" dirty="0"/>
+                  <a:t> </a:t>
+                </a:r>
+                <a:r>
+                  <a:rPr lang="de-AT" dirty="0" err="1"/>
+                  <a:t>the</a:t>
+                </a:r>
+                <a:r>
+                  <a:rPr lang="de-AT" dirty="0"/>
+                  <a:t> "</a:t>
+                </a:r>
+                <a:r>
+                  <a:rPr lang="de-AT" dirty="0" err="1"/>
+                  <a:t>geometric</a:t>
+                </a:r>
+                <a:r>
+                  <a:rPr lang="de-AT" dirty="0"/>
+                  <a:t> </a:t>
+                </a:r>
+                <a:r>
+                  <a:rPr lang="de-AT" dirty="0" err="1"/>
+                  <a:t>overlap</a:t>
+                </a:r>
+                <a:r>
+                  <a:rPr lang="de-AT" dirty="0"/>
+                  <a:t>" </a:t>
+                </a:r>
+                <a:r>
+                  <a:rPr lang="de-AT" dirty="0" err="1"/>
+                  <a:t>of</a:t>
+                </a:r>
+                <a:r>
+                  <a:rPr lang="de-AT" dirty="0"/>
+                  <a:t> </a:t>
+                </a:r>
+                <a:r>
+                  <a:rPr lang="de-AT" dirty="0" err="1"/>
+                  <a:t>the</a:t>
+                </a:r>
+                <a:r>
+                  <a:rPr lang="de-AT" dirty="0"/>
+                  <a:t> </a:t>
+                </a:r>
+                <a:r>
+                  <a:rPr lang="de-AT" dirty="0" err="1"/>
+                  <a:t>two</a:t>
+                </a:r>
+                <a:r>
+                  <a:rPr lang="de-AT" dirty="0"/>
+                  <a:t> </a:t>
+                </a:r>
+                <a:r>
+                  <a:rPr lang="de-AT" dirty="0" err="1"/>
+                  <a:t>shapes</a:t>
+                </a:r>
+                <a:r>
+                  <a:rPr lang="de-AT" dirty="0"/>
+                  <a:t>.</a:t>
+                </a:r>
+              </a:p>
+              <a:p>
+                <a14:m>
+                  <m:oMath xmlns:m="http://schemas.openxmlformats.org/officeDocument/2006/math">
+                    <m:sSub>
+                      <m:sSubPr>
+                        <m:ctrlPr>
+                          <a:rPr lang="ar-AE" sz="1200" i="1" kern="1200">
+                            <a:solidFill>
+                              <a:schemeClr val="tx1"/>
+                            </a:solidFill>
+                            <a:latin typeface="Cambria Math" panose="02040503050406030204" pitchFamily="18" charset="0"/>
+                            <a:ea typeface="+mn-ea"/>
+                            <a:cs typeface="+mn-cs"/>
+                          </a:rPr>
+                        </m:ctrlPr>
+                      </m:sSubPr>
+                      <m:e>
+                        <m:r>
+                          <m:rPr>
+                            <m:sty m:val="p"/>
+                          </m:rPr>
+                          <a:rPr lang="el-GR" sz="1200" kern="1200">
+                            <a:solidFill>
+                              <a:schemeClr val="tx1"/>
+                            </a:solidFill>
+                            <a:latin typeface="Cambria Math" panose="02040503050406030204" pitchFamily="18" charset="0"/>
+                            <a:ea typeface="+mn-ea"/>
+                            <a:cs typeface="+mn-cs"/>
+                          </a:rPr>
+                          <m:t>Σ</m:t>
+                        </m:r>
+                      </m:e>
+                      <m:sub>
+                        <m:r>
+                          <a:rPr lang="ar-AE" sz="1200" i="1" kern="1200">
+                            <a:solidFill>
+                              <a:schemeClr val="tx1"/>
+                            </a:solidFill>
+                            <a:latin typeface="Cambria Math" panose="02040503050406030204" pitchFamily="18" charset="0"/>
+                            <a:ea typeface="+mn-ea"/>
+                            <a:cs typeface="+mn-cs"/>
+                          </a:rPr>
+                          <m:t>𝑟</m:t>
+                        </m:r>
+                      </m:sub>
+                    </m:sSub>
+                    <m:r>
+                      <a:rPr lang="ar-AE" sz="1200" i="0" kern="1200">
+                        <a:solidFill>
+                          <a:schemeClr val="tx1"/>
+                        </a:solidFill>
+                        <a:latin typeface="Cambria Math" panose="02040503050406030204" pitchFamily="18" charset="0"/>
+                        <a:ea typeface="+mn-ea"/>
+                        <a:cs typeface="+mn-cs"/>
+                      </a:rPr>
+                      <m:t>+</m:t>
+                    </m:r>
+                    <m:sSub>
+                      <m:sSubPr>
+                        <m:ctrlPr>
+                          <a:rPr lang="ar-AE" sz="1200" i="1" kern="1200">
+                            <a:solidFill>
+                              <a:schemeClr val="tx1"/>
+                            </a:solidFill>
+                            <a:latin typeface="Cambria Math" panose="02040503050406030204" pitchFamily="18" charset="0"/>
+                            <a:ea typeface="+mn-ea"/>
+                            <a:cs typeface="+mn-cs"/>
+                          </a:rPr>
+                        </m:ctrlPr>
+                      </m:sSubPr>
+                      <m:e>
+                        <m:r>
+                          <m:rPr>
+                            <m:sty m:val="p"/>
+                          </m:rPr>
+                          <a:rPr lang="el-GR" sz="1200" i="0" kern="1200">
+                            <a:solidFill>
+                              <a:schemeClr val="tx1"/>
+                            </a:solidFill>
+                            <a:latin typeface="Cambria Math" panose="02040503050406030204" pitchFamily="18" charset="0"/>
+                            <a:ea typeface="+mn-ea"/>
+                            <a:cs typeface="+mn-cs"/>
+                          </a:rPr>
+                          <m:t>Σ</m:t>
+                        </m:r>
+                      </m:e>
+                      <m:sub>
+                        <m:r>
+                          <a:rPr lang="ar-AE" sz="1200" i="1" kern="1200">
+                            <a:solidFill>
+                              <a:schemeClr val="tx1"/>
+                            </a:solidFill>
+                            <a:latin typeface="Cambria Math" panose="02040503050406030204" pitchFamily="18" charset="0"/>
+                            <a:ea typeface="+mn-ea"/>
+                            <a:cs typeface="+mn-cs"/>
+                          </a:rPr>
+                          <m:t>𝑔</m:t>
+                        </m:r>
+                      </m:sub>
+                    </m:sSub>
+                    <m:r>
+                      <a:rPr lang="ar-AE" sz="1200" i="0" kern="1200">
+                        <a:solidFill>
+                          <a:schemeClr val="tx1"/>
+                        </a:solidFill>
+                        <a:latin typeface="Cambria Math" panose="02040503050406030204" pitchFamily="18" charset="0"/>
+                        <a:ea typeface="+mn-ea"/>
+                        <a:cs typeface="+mn-cs"/>
+                      </a:rPr>
+                      <m:t>−</m:t>
+                    </m:r>
+                    <m:r>
+                      <a:rPr lang="ar-AE" sz="1200" i="0" kern="1200">
+                        <a:solidFill>
+                          <a:schemeClr val="tx1"/>
+                        </a:solidFill>
+                        <a:latin typeface="Cambria Math" panose="02040503050406030204" pitchFamily="18" charset="0"/>
+                        <a:ea typeface="+mn-ea"/>
+                        <a:cs typeface="+mn-cs"/>
+                      </a:rPr>
+                      <m:t>2</m:t>
+                    </m:r>
+                    <m:rad>
+                      <m:radPr>
+                        <m:degHide m:val="on"/>
+                        <m:ctrlPr>
+                          <a:rPr lang="ar-AE" sz="1200" i="1" kern="1200">
+                            <a:solidFill>
+                              <a:schemeClr val="tx1"/>
+                            </a:solidFill>
+                            <a:latin typeface="Cambria Math" panose="02040503050406030204" pitchFamily="18" charset="0"/>
+                            <a:ea typeface="+mn-ea"/>
+                            <a:cs typeface="+mn-cs"/>
+                          </a:rPr>
+                        </m:ctrlPr>
+                      </m:radPr>
+                      <m:deg/>
+                      <m:e>
+                        <m:sSub>
+                          <m:sSubPr>
+                            <m:ctrlPr>
+                              <a:rPr lang="ar-AE" sz="1200" i="1" kern="1200">
+                                <a:solidFill>
+                                  <a:schemeClr val="tx1"/>
+                                </a:solidFill>
+                                <a:latin typeface="Cambria Math" panose="02040503050406030204" pitchFamily="18" charset="0"/>
+                                <a:ea typeface="+mn-ea"/>
+                                <a:cs typeface="+mn-cs"/>
+                              </a:rPr>
+                            </m:ctrlPr>
+                          </m:sSubPr>
+                          <m:e>
+                            <m:r>
+                              <m:rPr>
+                                <m:sty m:val="p"/>
+                              </m:rPr>
+                              <a:rPr lang="el-GR" sz="1200" i="0" kern="1200">
+                                <a:solidFill>
+                                  <a:schemeClr val="tx1"/>
+                                </a:solidFill>
+                                <a:latin typeface="Cambria Math" panose="02040503050406030204" pitchFamily="18" charset="0"/>
+                                <a:ea typeface="+mn-ea"/>
+                                <a:cs typeface="+mn-cs"/>
+                              </a:rPr>
+                              <m:t>Σ</m:t>
+                            </m:r>
+                          </m:e>
+                          <m:sub>
+                            <m:r>
+                              <a:rPr lang="ar-AE" sz="1200" i="1" kern="1200">
+                                <a:solidFill>
+                                  <a:schemeClr val="tx1"/>
+                                </a:solidFill>
+                                <a:latin typeface="Cambria Math" panose="02040503050406030204" pitchFamily="18" charset="0"/>
+                                <a:ea typeface="+mn-ea"/>
+                                <a:cs typeface="+mn-cs"/>
+                              </a:rPr>
+                              <m:t>𝑟</m:t>
+                            </m:r>
+                          </m:sub>
+                        </m:sSub>
+                        <m:sSub>
+                          <m:sSubPr>
+                            <m:ctrlPr>
+                              <a:rPr lang="ar-AE" sz="1200" i="1" kern="1200">
+                                <a:solidFill>
+                                  <a:schemeClr val="tx1"/>
+                                </a:solidFill>
+                                <a:latin typeface="Cambria Math" panose="02040503050406030204" pitchFamily="18" charset="0"/>
+                                <a:ea typeface="+mn-ea"/>
+                                <a:cs typeface="+mn-cs"/>
+                              </a:rPr>
+                            </m:ctrlPr>
+                          </m:sSubPr>
+                          <m:e>
+                            <m:r>
+                              <m:rPr>
+                                <m:sty m:val="p"/>
+                              </m:rPr>
+                              <a:rPr lang="el-GR" sz="1200" i="0" kern="1200">
+                                <a:solidFill>
+                                  <a:schemeClr val="tx1"/>
+                                </a:solidFill>
+                                <a:latin typeface="Cambria Math" panose="02040503050406030204" pitchFamily="18" charset="0"/>
+                                <a:ea typeface="+mn-ea"/>
+                                <a:cs typeface="+mn-cs"/>
+                              </a:rPr>
+                              <m:t>Σ</m:t>
+                            </m:r>
+                          </m:e>
+                          <m:sub>
+                            <m:r>
+                              <a:rPr lang="ar-AE" sz="1200" i="1" kern="1200">
+                                <a:solidFill>
+                                  <a:schemeClr val="tx1"/>
+                                </a:solidFill>
+                                <a:latin typeface="Cambria Math" panose="02040503050406030204" pitchFamily="18" charset="0"/>
+                                <a:ea typeface="+mn-ea"/>
+                                <a:cs typeface="+mn-cs"/>
+                              </a:rPr>
+                              <m:t>𝑔</m:t>
+                            </m:r>
+                          </m:sub>
+                        </m:sSub>
+                      </m:e>
+                    </m:rad>
+                  </m:oMath>
+                </a14:m>
+                <a:r>
+                  <a:rPr lang="ar-AE" dirty="0"/>
+                  <a:t>— </a:t>
+                </a:r>
+                <a:r>
+                  <a:rPr lang="de-AT" dirty="0" err="1"/>
+                  <a:t>the</a:t>
+                </a:r>
+                <a:r>
+                  <a:rPr lang="de-AT" dirty="0"/>
+                  <a:t> </a:t>
+                </a:r>
+                <a:r>
+                  <a:rPr lang="de-AT" dirty="0" err="1"/>
+                  <a:t>whole</a:t>
+                </a:r>
+                <a:r>
+                  <a:rPr lang="de-AT" dirty="0"/>
+                  <a:t> bracket. </a:t>
+                </a:r>
+                <a:r>
+                  <a:rPr lang="de-AT" dirty="0" err="1"/>
+                  <a:t>It's</a:t>
+                </a:r>
+                <a:r>
+                  <a:rPr lang="de-AT" dirty="0"/>
+                  <a:t> large </a:t>
+                </a:r>
+                <a:r>
+                  <a:rPr lang="de-AT" dirty="0" err="1"/>
+                  <a:t>when</a:t>
+                </a:r>
+                <a:r>
+                  <a:rPr lang="de-AT" dirty="0"/>
+                  <a:t> </a:t>
+                </a:r>
+                <a:r>
+                  <a:rPr lang="de-AT" dirty="0" err="1"/>
+                  <a:t>the</a:t>
+                </a:r>
+                <a:r>
+                  <a:rPr lang="de-AT" dirty="0"/>
+                  <a:t> </a:t>
+                </a:r>
+                <a:r>
+                  <a:rPr lang="de-AT" dirty="0" err="1"/>
+                  <a:t>two</a:t>
+                </a:r>
+                <a:r>
+                  <a:rPr lang="de-AT" dirty="0"/>
+                  <a:t> </a:t>
+                </a:r>
+                <a:r>
+                  <a:rPr lang="de-AT" dirty="0" err="1"/>
+                  <a:t>clouds</a:t>
+                </a:r>
+                <a:r>
+                  <a:rPr lang="de-AT" dirty="0"/>
+                  <a:t> </a:t>
+                </a:r>
+                <a:r>
+                  <a:rPr lang="de-AT" dirty="0" err="1"/>
+                  <a:t>have</a:t>
+                </a:r>
+                <a:r>
+                  <a:rPr lang="de-AT" dirty="0"/>
+                  <a:t> different </a:t>
+                </a:r>
+                <a:r>
+                  <a:rPr lang="de-AT" dirty="0" err="1"/>
+                  <a:t>shape</a:t>
+                </a:r>
+                <a:r>
+                  <a:rPr lang="de-AT" dirty="0"/>
+                  <a:t>/</a:t>
+                </a:r>
+                <a:r>
+                  <a:rPr lang="de-AT" dirty="0" err="1"/>
+                  <a:t>extent</a:t>
+                </a:r>
+                <a:r>
+                  <a:rPr lang="de-AT" dirty="0"/>
+                  <a:t>, and </a:t>
+                </a:r>
+                <a:r>
+                  <a:rPr lang="de-AT" dirty="0" err="1"/>
+                  <a:t>zero</a:t>
+                </a:r>
+                <a:r>
+                  <a:rPr lang="de-AT" dirty="0"/>
+                  <a:t> </a:t>
+                </a:r>
+                <a:r>
+                  <a:rPr lang="de-AT" dirty="0" err="1"/>
+                  <a:t>when</a:t>
+                </a:r>
+                <a:r>
+                  <a:rPr lang="de-AT" dirty="0"/>
+                  <a:t> </a:t>
+                </a:r>
+                <a:r>
+                  <a:rPr lang="de-AT" dirty="0" err="1"/>
+                  <a:t>they're</a:t>
+                </a:r>
+                <a:r>
+                  <a:rPr lang="de-AT" dirty="0"/>
+                  <a:t> </a:t>
+                </a:r>
+                <a:r>
+                  <a:rPr lang="de-AT" dirty="0" err="1"/>
+                  <a:t>identical</a:t>
+                </a:r>
+                <a:r>
+                  <a:rPr lang="de-AT" dirty="0"/>
+                  <a:t>. </a:t>
+                </a:r>
+                <a:r>
+                  <a:rPr lang="de-AT" dirty="0" err="1"/>
+                  <a:t>Conceptually</a:t>
+                </a:r>
+                <a:r>
+                  <a:rPr lang="de-AT" dirty="0"/>
+                  <a:t> </a:t>
+                </a:r>
+                <a:r>
+                  <a:rPr lang="de-AT" dirty="0" err="1"/>
+                  <a:t>the</a:t>
+                </a:r>
+                <a:r>
+                  <a:rPr lang="de-AT" dirty="0"/>
+                  <a:t> </a:t>
+                </a:r>
+                <a:r>
+                  <a:rPr lang="de-AT" dirty="0" err="1"/>
+                  <a:t>matrix</a:t>
+                </a:r>
+                <a:r>
+                  <a:rPr lang="de-AT" dirty="0"/>
+                  <a:t> analog </a:t>
+                </a:r>
+                <a:r>
+                  <a:rPr lang="de-AT" dirty="0" err="1"/>
+                  <a:t>of</a:t>
+                </a:r>
+                <a:r>
+                  <a:rPr lang="de-AT" dirty="0"/>
+                  <a:t> </a:t>
+                </a:r>
+                <a14:m>
+                  <m:oMath xmlns:m="http://schemas.openxmlformats.org/officeDocument/2006/math">
+                    <m:sSup>
+                      <m:sSupPr>
+                        <m:ctrlPr>
+                          <a:rPr lang="ar-AE" sz="1200" i="1" kern="1200">
+                            <a:solidFill>
+                              <a:schemeClr val="tx1"/>
+                            </a:solidFill>
+                            <a:latin typeface="Cambria Math" panose="02040503050406030204" pitchFamily="18" charset="0"/>
+                            <a:ea typeface="+mn-ea"/>
+                            <a:cs typeface="+mn-cs"/>
+                          </a:rPr>
+                        </m:ctrlPr>
+                      </m:sSupPr>
+                      <m:e>
+                        <m:d>
+                          <m:dPr>
+                            <m:ctrlPr>
+                              <a:rPr lang="ar-AE" sz="1200" i="1" kern="1200">
+                                <a:solidFill>
+                                  <a:schemeClr val="tx1"/>
+                                </a:solidFill>
+                                <a:latin typeface="Cambria Math" panose="02040503050406030204" pitchFamily="18" charset="0"/>
+                                <a:ea typeface="+mn-ea"/>
+                                <a:cs typeface="+mn-cs"/>
+                              </a:rPr>
+                            </m:ctrlPr>
+                          </m:dPr>
+                          <m:e>
+                            <m:r>
+                              <a:rPr lang="ar-AE" sz="1200" i="1" kern="1200">
+                                <a:solidFill>
+                                  <a:schemeClr val="tx1"/>
+                                </a:solidFill>
+                                <a:latin typeface="Cambria Math" panose="02040503050406030204" pitchFamily="18" charset="0"/>
+                                <a:ea typeface="+mn-ea"/>
+                                <a:cs typeface="+mn-cs"/>
+                              </a:rPr>
+                              <m:t>𝑎</m:t>
+                            </m:r>
+                            <m:r>
+                              <a:rPr lang="ar-AE" sz="1200" i="0" kern="1200">
+                                <a:solidFill>
+                                  <a:schemeClr val="tx1"/>
+                                </a:solidFill>
+                                <a:latin typeface="Cambria Math" panose="02040503050406030204" pitchFamily="18" charset="0"/>
+                                <a:ea typeface="+mn-ea"/>
+                                <a:cs typeface="+mn-cs"/>
+                              </a:rPr>
+                              <m:t>−</m:t>
+                            </m:r>
+                            <m:r>
+                              <a:rPr lang="ar-AE" sz="1200" i="1" kern="1200">
+                                <a:solidFill>
+                                  <a:schemeClr val="tx1"/>
+                                </a:solidFill>
+                                <a:latin typeface="Cambria Math" panose="02040503050406030204" pitchFamily="18" charset="0"/>
+                                <a:ea typeface="+mn-ea"/>
+                                <a:cs typeface="+mn-cs"/>
+                              </a:rPr>
+                              <m:t>𝑏</m:t>
+                            </m:r>
+                          </m:e>
+                        </m:d>
+                      </m:e>
+                      <m:sup>
+                        <m:r>
+                          <a:rPr lang="ar-AE" sz="1200" i="0" kern="1200">
+                            <a:solidFill>
+                              <a:schemeClr val="tx1"/>
+                            </a:solidFill>
+                            <a:latin typeface="Cambria Math" panose="02040503050406030204" pitchFamily="18" charset="0"/>
+                            <a:ea typeface="+mn-ea"/>
+                            <a:cs typeface="+mn-cs"/>
+                          </a:rPr>
+                          <m:t>2</m:t>
+                        </m:r>
+                      </m:sup>
+                    </m:sSup>
+                    <m:r>
+                      <a:rPr lang="ar-AE" sz="1200" i="0" kern="1200">
+                        <a:solidFill>
+                          <a:schemeClr val="tx1"/>
+                        </a:solidFill>
+                        <a:latin typeface="Cambria Math" panose="02040503050406030204" pitchFamily="18" charset="0"/>
+                        <a:ea typeface="+mn-ea"/>
+                        <a:cs typeface="+mn-cs"/>
+                      </a:rPr>
+                      <m:t>=</m:t>
+                    </m:r>
+                    <m:r>
+                      <a:rPr lang="ar-AE" sz="1200" i="1" kern="1200">
+                        <a:solidFill>
+                          <a:schemeClr val="tx1"/>
+                        </a:solidFill>
+                        <a:latin typeface="Cambria Math" panose="02040503050406030204" pitchFamily="18" charset="0"/>
+                        <a:ea typeface="+mn-ea"/>
+                        <a:cs typeface="+mn-cs"/>
+                      </a:rPr>
+                      <m:t>𝑎</m:t>
+                    </m:r>
+                    <m:r>
+                      <a:rPr lang="ar-AE" sz="1200" i="0" kern="1200">
+                        <a:solidFill>
+                          <a:schemeClr val="tx1"/>
+                        </a:solidFill>
+                        <a:latin typeface="Cambria Math" panose="02040503050406030204" pitchFamily="18" charset="0"/>
+                        <a:ea typeface="+mn-ea"/>
+                        <a:cs typeface="+mn-cs"/>
+                      </a:rPr>
+                      <m:t>+</m:t>
+                    </m:r>
+                    <m:r>
+                      <a:rPr lang="ar-AE" sz="1200" i="1" kern="1200">
+                        <a:solidFill>
+                          <a:schemeClr val="tx1"/>
+                        </a:solidFill>
+                        <a:latin typeface="Cambria Math" panose="02040503050406030204" pitchFamily="18" charset="0"/>
+                        <a:ea typeface="+mn-ea"/>
+                        <a:cs typeface="+mn-cs"/>
+                      </a:rPr>
+                      <m:t>𝑏</m:t>
+                    </m:r>
+                    <m:r>
+                      <a:rPr lang="ar-AE" sz="1200" i="0" kern="1200">
+                        <a:solidFill>
+                          <a:schemeClr val="tx1"/>
+                        </a:solidFill>
+                        <a:latin typeface="Cambria Math" panose="02040503050406030204" pitchFamily="18" charset="0"/>
+                        <a:ea typeface="+mn-ea"/>
+                        <a:cs typeface="+mn-cs"/>
+                      </a:rPr>
+                      <m:t>−</m:t>
+                    </m:r>
+                    <m:r>
+                      <a:rPr lang="ar-AE" sz="1200" i="0" kern="1200">
+                        <a:solidFill>
+                          <a:schemeClr val="tx1"/>
+                        </a:solidFill>
+                        <a:latin typeface="Cambria Math" panose="02040503050406030204" pitchFamily="18" charset="0"/>
+                        <a:ea typeface="+mn-ea"/>
+                        <a:cs typeface="+mn-cs"/>
+                      </a:rPr>
+                      <m:t>2</m:t>
+                    </m:r>
+                    <m:rad>
+                      <m:radPr>
+                        <m:degHide m:val="on"/>
+                        <m:ctrlPr>
+                          <a:rPr lang="ar-AE" sz="1200" i="1" kern="1200">
+                            <a:solidFill>
+                              <a:schemeClr val="tx1"/>
+                            </a:solidFill>
+                            <a:latin typeface="Cambria Math" panose="02040503050406030204" pitchFamily="18" charset="0"/>
+                            <a:ea typeface="+mn-ea"/>
+                            <a:cs typeface="+mn-cs"/>
+                          </a:rPr>
+                        </m:ctrlPr>
+                      </m:radPr>
+                      <m:deg/>
+                      <m:e>
+                        <m:r>
+                          <a:rPr lang="ar-AE" sz="1200" i="1" kern="1200">
+                            <a:solidFill>
+                              <a:schemeClr val="tx1"/>
+                            </a:solidFill>
+                            <a:latin typeface="Cambria Math" panose="02040503050406030204" pitchFamily="18" charset="0"/>
+                            <a:ea typeface="+mn-ea"/>
+                            <a:cs typeface="+mn-cs"/>
+                          </a:rPr>
+                          <m:t>𝑎𝑏</m:t>
+                        </m:r>
+                      </m:e>
+                    </m:rad>
+                  </m:oMath>
+                </a14:m>
+                <a:r>
+                  <a:rPr lang="ar-AE" dirty="0"/>
+                  <a:t>.</a:t>
+                </a:r>
+              </a:p>
+              <a:p>
+                <a14:m>
+                  <m:oMath xmlns:m="http://schemas.openxmlformats.org/officeDocument/2006/math">
+                    <m:r>
+                      <m:rPr>
+                        <m:nor/>
+                      </m:rPr>
+                      <a:rPr lang="de-AT" b="0"/>
+                      <m:t>Tr</m:t>
+                    </m:r>
+                    <m:d>
+                      <m:dPr>
+                        <m:ctrlPr>
+                          <a:rPr lang="ar-AE" sz="1200" b="0" i="1" kern="1200">
+                            <a:solidFill>
+                              <a:schemeClr val="tx1"/>
+                            </a:solidFill>
+                            <a:latin typeface="Cambria Math" panose="02040503050406030204" pitchFamily="18" charset="0"/>
+                            <a:ea typeface="+mn-ea"/>
+                            <a:cs typeface="+mn-cs"/>
+                          </a:rPr>
+                        </m:ctrlPr>
+                      </m:dPr>
+                      <m:e>
+                        <m:r>
+                          <a:rPr lang="ar-AE" sz="1200" b="0" i="0" kern="1200">
+                            <a:solidFill>
+                              <a:schemeClr val="tx1"/>
+                            </a:solidFill>
+                            <a:latin typeface="Cambria Math" panose="02040503050406030204" pitchFamily="18" charset="0"/>
+                            <a:ea typeface="+mn-ea"/>
+                            <a:cs typeface="+mn-cs"/>
+                          </a:rPr>
+                          <m:t>⋯</m:t>
+                        </m:r>
+                        <m:r>
+                          <m:rPr>
+                            <m:nor/>
+                          </m:rPr>
+                          <a:rPr lang="ar-AE" sz="1200" b="0" i="1" kern="1200">
+                            <a:solidFill>
+                              <a:schemeClr val="tx1"/>
+                            </a:solidFill>
+                            <a:latin typeface="+mn-lt"/>
+                            <a:ea typeface="+mn-ea"/>
+                            <a:cs typeface="+mn-cs"/>
+                          </a:rPr>
+                          <m:t> </m:t>
+                        </m:r>
+                      </m:e>
+                    </m:d>
+                  </m:oMath>
+                </a14:m>
+                <a:r>
+                  <a:rPr lang="ar-AE" dirty="0"/>
+                  <a:t>— </a:t>
+                </a:r>
+                <a:r>
+                  <a:rPr lang="de-AT" dirty="0" err="1"/>
+                  <a:t>the</a:t>
+                </a:r>
+                <a:r>
+                  <a:rPr lang="de-AT" dirty="0"/>
+                  <a:t> </a:t>
+                </a:r>
+                <a:r>
+                  <a:rPr lang="de-AT" b="1" dirty="0"/>
+                  <a:t>trace</a:t>
+                </a:r>
+                <a:r>
+                  <a:rPr lang="de-AT" dirty="0"/>
+                  <a:t> </a:t>
+                </a:r>
+                <a:r>
+                  <a:rPr lang="de-AT" dirty="0" err="1"/>
+                  <a:t>of</a:t>
+                </a:r>
+                <a:r>
+                  <a:rPr lang="de-AT" dirty="0"/>
+                  <a:t> </a:t>
+                </a:r>
+                <a:r>
+                  <a:rPr lang="de-AT" dirty="0" err="1"/>
+                  <a:t>the</a:t>
+                </a:r>
+                <a:r>
+                  <a:rPr lang="de-AT" dirty="0"/>
+                  <a:t> </a:t>
+                </a:r>
+                <a:r>
+                  <a:rPr lang="de-AT" dirty="0" err="1"/>
+                  <a:t>matrix</a:t>
+                </a:r>
+                <a:r>
+                  <a:rPr lang="de-AT" dirty="0"/>
+                  <a:t> in </a:t>
+                </a:r>
+                <a:r>
+                  <a:rPr lang="de-AT" dirty="0" err="1"/>
+                  <a:t>the</a:t>
+                </a:r>
+                <a:r>
+                  <a:rPr lang="de-AT" dirty="0"/>
+                  <a:t> bracket. The trace </a:t>
+                </a:r>
+                <a:r>
+                  <a:rPr lang="de-AT" dirty="0" err="1"/>
+                  <a:t>is</a:t>
+                </a:r>
+                <a:r>
+                  <a:rPr lang="de-AT" dirty="0"/>
+                  <a:t> </a:t>
+                </a:r>
+                <a:r>
+                  <a:rPr lang="de-AT" dirty="0" err="1"/>
+                  <a:t>simply</a:t>
+                </a:r>
+                <a:r>
+                  <a:rPr lang="de-AT" dirty="0"/>
+                  <a:t> </a:t>
+                </a:r>
+                <a:r>
+                  <a:rPr lang="de-AT" dirty="0" err="1"/>
+                  <a:t>the</a:t>
+                </a:r>
+                <a:r>
+                  <a:rPr lang="de-AT" dirty="0"/>
+                  <a:t> </a:t>
+                </a:r>
+                <a:r>
+                  <a:rPr lang="de-AT" b="1" dirty="0" err="1"/>
+                  <a:t>sum</a:t>
+                </a:r>
+                <a:r>
+                  <a:rPr lang="de-AT" b="1" dirty="0"/>
+                  <a:t> </a:t>
+                </a:r>
+                <a:r>
+                  <a:rPr lang="de-AT" b="1" dirty="0" err="1"/>
+                  <a:t>of</a:t>
+                </a:r>
+                <a:r>
+                  <a:rPr lang="de-AT" b="1" dirty="0"/>
+                  <a:t> </a:t>
+                </a:r>
+                <a:r>
+                  <a:rPr lang="de-AT" b="1" dirty="0" err="1"/>
+                  <a:t>the</a:t>
+                </a:r>
+                <a:r>
+                  <a:rPr lang="de-AT" b="1" dirty="0"/>
+                  <a:t> diagonal </a:t>
+                </a:r>
+                <a:r>
+                  <a:rPr lang="de-AT" b="1" dirty="0" err="1"/>
+                  <a:t>elements</a:t>
+                </a:r>
+                <a:r>
+                  <a:rPr lang="de-AT" dirty="0"/>
+                  <a:t> </a:t>
+                </a:r>
+                <a:r>
+                  <a:rPr lang="de-AT" dirty="0" err="1"/>
+                  <a:t>of</a:t>
+                </a:r>
+                <a:r>
+                  <a:rPr lang="de-AT" dirty="0"/>
+                  <a:t> a </a:t>
+                </a:r>
+                <a:r>
+                  <a:rPr lang="de-AT" dirty="0" err="1"/>
+                  <a:t>square</a:t>
+                </a:r>
+                <a:r>
+                  <a:rPr lang="de-AT" dirty="0"/>
+                  <a:t> </a:t>
+                </a:r>
+                <a:r>
+                  <a:rPr lang="de-AT" dirty="0" err="1"/>
+                  <a:t>matrix</a:t>
+                </a:r>
+                <a:r>
+                  <a:rPr lang="de-AT" dirty="0"/>
+                  <a:t>. </a:t>
+                </a:r>
+                <a:r>
+                  <a:rPr lang="de-AT" dirty="0" err="1"/>
+                  <a:t>It</a:t>
+                </a:r>
+                <a:r>
+                  <a:rPr lang="de-AT" dirty="0"/>
+                  <a:t> </a:t>
+                </a:r>
+                <a:r>
+                  <a:rPr lang="de-AT" dirty="0" err="1"/>
+                  <a:t>collapses</a:t>
+                </a:r>
+                <a:r>
+                  <a:rPr lang="de-AT" dirty="0"/>
+                  <a:t> </a:t>
+                </a:r>
+                <a:r>
+                  <a:rPr lang="de-AT" dirty="0" err="1"/>
+                  <a:t>the</a:t>
+                </a:r>
+                <a:r>
+                  <a:rPr lang="de-AT" dirty="0"/>
+                  <a:t> </a:t>
+                </a:r>
+                <a:r>
+                  <a:rPr lang="de-AT" dirty="0" err="1"/>
+                  <a:t>whole</a:t>
+                </a:r>
+                <a:r>
+                  <a:rPr lang="de-AT" dirty="0"/>
+                  <a:t> 176×176 </a:t>
+                </a:r>
+                <a:r>
+                  <a:rPr lang="de-AT" dirty="0" err="1"/>
+                  <a:t>matrix</a:t>
+                </a:r>
+                <a:r>
+                  <a:rPr lang="de-AT" dirty="0"/>
+                  <a:t> </a:t>
+                </a:r>
+                <a:r>
+                  <a:rPr lang="de-AT" dirty="0" err="1"/>
+                  <a:t>into</a:t>
+                </a:r>
+                <a:r>
+                  <a:rPr lang="de-AT" dirty="0"/>
+                  <a:t> a </a:t>
+                </a:r>
+                <a:r>
+                  <a:rPr lang="de-AT" dirty="0" err="1"/>
+                  <a:t>single</a:t>
+                </a:r>
+                <a:r>
+                  <a:rPr lang="de-AT" dirty="0"/>
+                  <a:t> </a:t>
+                </a:r>
+                <a:r>
+                  <a:rPr lang="de-AT" dirty="0" err="1"/>
+                  <a:t>number</a:t>
+                </a:r>
+                <a:r>
+                  <a:rPr lang="de-AT" dirty="0"/>
+                  <a:t>. This </a:t>
+                </a:r>
+                <a:r>
+                  <a:rPr lang="de-AT" dirty="0" err="1"/>
+                  <a:t>is</a:t>
+                </a:r>
+                <a:r>
+                  <a:rPr lang="de-AT" dirty="0"/>
+                  <a:t> </a:t>
+                </a:r>
+                <a:r>
+                  <a:rPr lang="de-AT" b="1" dirty="0"/>
+                  <a:t>Part 2: </a:t>
+                </a:r>
+                <a:r>
+                  <a:rPr lang="de-AT" b="1" dirty="0" err="1"/>
+                  <a:t>the</a:t>
+                </a:r>
+                <a:r>
+                  <a:rPr lang="de-AT" b="1" dirty="0"/>
+                  <a:t> </a:t>
+                </a:r>
+                <a:r>
+                  <a:rPr lang="de-AT" b="1" dirty="0" err="1"/>
+                  <a:t>covariance</a:t>
+                </a:r>
+                <a:r>
+                  <a:rPr lang="de-AT" b="1" dirty="0"/>
+                  <a:t> </a:t>
+                </a:r>
+                <a:r>
+                  <a:rPr lang="de-AT" b="1" dirty="0" err="1"/>
+                  <a:t>distance</a:t>
+                </a:r>
+                <a:r>
+                  <a:rPr lang="de-AT" b="1" dirty="0"/>
+                  <a:t>.</a:t>
+                </a:r>
+                <a:endParaRPr lang="de-AT" dirty="0"/>
+              </a:p>
+            </p:txBody>
+          </p:sp>
+        </mc:Choice>
+        <mc:Fallback xmlns="">
+          <p:sp>
+            <p:nvSpPr>
+              <p:cNvPr id="3" name="Notizenplatzhalter 2"/>
+              <p:cNvSpPr>
+                <a:spLocks noGrp="1"/>
+              </p:cNvSpPr>
+              <p:nvPr>
+                <p:ph type="body" idx="1"/>
+              </p:nvPr>
+            </p:nvSpPr>
+            <p:spPr/>
+            <p:txBody>
+              <a:bodyPr/>
+              <a:lstStyle/>
+              <a:p>
+                <a:r>
+                  <a:rPr lang="el-GR" b="1" dirty="0"/>
+                  <a:t>μ</a:t>
+                </a:r>
+                <a:r>
+                  <a:rPr lang="de-AT" b="1" dirty="0">
+                    <a:effectLst/>
+                  </a:rPr>
+                  <a:t>r</a:t>
+                </a:r>
+                <a:r>
+                  <a:rPr lang="de-AT" b="1" dirty="0"/>
+                  <a:t>​</a:t>
+                </a:r>
+                <a:r>
+                  <a:rPr lang="de-AT" dirty="0"/>
+                  <a:t> (</a:t>
+                </a:r>
+                <a:r>
+                  <a:rPr lang="de-AT" dirty="0" err="1"/>
+                  <a:t>mu</a:t>
+                </a:r>
+                <a:r>
+                  <a:rPr lang="de-AT" dirty="0"/>
+                  <a:t>-r) — </a:t>
+                </a:r>
+                <a:r>
+                  <a:rPr lang="de-AT" dirty="0" err="1"/>
+                  <a:t>the</a:t>
+                </a:r>
+                <a:r>
+                  <a:rPr lang="de-AT" dirty="0"/>
+                  <a:t> </a:t>
+                </a:r>
+                <a:r>
+                  <a:rPr lang="de-AT" b="1" dirty="0" err="1"/>
+                  <a:t>mean</a:t>
+                </a:r>
+                <a:r>
+                  <a:rPr lang="de-AT" b="1" dirty="0"/>
+                  <a:t> </a:t>
+                </a:r>
+                <a:r>
+                  <a:rPr lang="de-AT" b="1" dirty="0" err="1"/>
+                  <a:t>vector</a:t>
+                </a:r>
+                <a:r>
+                  <a:rPr lang="de-AT" b="1" dirty="0"/>
+                  <a:t> </a:t>
+                </a:r>
+                <a:r>
+                  <a:rPr lang="de-AT" b="1" dirty="0" err="1"/>
+                  <a:t>of</a:t>
+                </a:r>
+                <a:r>
+                  <a:rPr lang="de-AT" b="1" dirty="0"/>
+                  <a:t> </a:t>
+                </a:r>
+                <a:r>
+                  <a:rPr lang="de-AT" b="1" dirty="0" err="1"/>
+                  <a:t>the</a:t>
+                </a:r>
+                <a:r>
+                  <a:rPr lang="de-AT" b="1" dirty="0"/>
+                  <a:t> real</a:t>
+                </a:r>
+                <a:r>
+                  <a:rPr lang="de-AT" dirty="0"/>
+                  <a:t> </a:t>
+                </a:r>
+                <a:r>
+                  <a:rPr lang="de-AT" dirty="0" err="1"/>
+                  <a:t>data</a:t>
+                </a:r>
+                <a:r>
+                  <a:rPr lang="de-AT" dirty="0"/>
+                  <a:t> ("r" = real). </a:t>
+                </a:r>
+                <a:r>
+                  <a:rPr lang="de-AT" dirty="0" err="1"/>
+                  <a:t>You</a:t>
+                </a:r>
+                <a:r>
+                  <a:rPr lang="de-AT" dirty="0"/>
+                  <a:t> </a:t>
+                </a:r>
+                <a:r>
+                  <a:rPr lang="de-AT" dirty="0" err="1"/>
+                  <a:t>have</a:t>
+                </a:r>
+                <a:r>
+                  <a:rPr lang="de-AT" dirty="0"/>
+                  <a:t> </a:t>
+                </a:r>
+                <a:r>
+                  <a:rPr lang="de-AT" dirty="0" err="1"/>
+                  <a:t>many</a:t>
+                </a:r>
+                <a:r>
+                  <a:rPr lang="de-AT" dirty="0"/>
+                  <a:t> real feature </a:t>
+                </a:r>
+                <a:r>
+                  <a:rPr lang="de-AT" dirty="0" err="1"/>
+                  <a:t>vectors</a:t>
+                </a:r>
+                <a:r>
+                  <a:rPr lang="de-AT" dirty="0"/>
+                  <a:t>; </a:t>
+                </a:r>
+                <a:r>
+                  <a:rPr lang="ar-AE" sz="1200" i="0" kern="1200">
+                    <a:solidFill>
+                      <a:schemeClr val="tx1"/>
+                    </a:solidFill>
+                    <a:latin typeface="+mn-lt"/>
+                    <a:ea typeface="+mn-ea"/>
+                    <a:cs typeface="+mn-cs"/>
+                  </a:rPr>
+                  <a:t>𝜇_𝑟</a:t>
+                </a:r>
+                <a:r>
+                  <a:rPr lang="de-AT" dirty="0" err="1"/>
+                  <a:t>is</a:t>
+                </a:r>
+                <a:r>
+                  <a:rPr lang="de-AT" dirty="0"/>
+                  <a:t> </a:t>
+                </a:r>
+                <a:r>
+                  <a:rPr lang="de-AT" dirty="0" err="1"/>
+                  <a:t>their</a:t>
+                </a:r>
+                <a:r>
+                  <a:rPr lang="de-AT" dirty="0"/>
+                  <a:t> </a:t>
+                </a:r>
+                <a:r>
+                  <a:rPr lang="de-AT" dirty="0" err="1"/>
+                  <a:t>average</a:t>
+                </a:r>
+                <a:r>
+                  <a:rPr lang="de-AT" dirty="0"/>
+                  <a:t>. In </a:t>
+                </a:r>
+                <a:r>
+                  <a:rPr lang="de-AT" dirty="0" err="1"/>
+                  <a:t>your</a:t>
+                </a:r>
+                <a:r>
+                  <a:rPr lang="de-AT" dirty="0"/>
+                  <a:t> </a:t>
+                </a:r>
+                <a:r>
+                  <a:rPr lang="de-AT" dirty="0" err="1"/>
+                  <a:t>case</a:t>
+                </a:r>
+                <a:r>
+                  <a:rPr lang="de-AT" dirty="0"/>
+                  <a:t> a </a:t>
+                </a:r>
+                <a:r>
+                  <a:rPr lang="de-AT" dirty="0" err="1"/>
+                  <a:t>vector</a:t>
+                </a:r>
+                <a:r>
+                  <a:rPr lang="de-AT" dirty="0"/>
+                  <a:t> </a:t>
+                </a:r>
+                <a:r>
+                  <a:rPr lang="de-AT" dirty="0" err="1"/>
+                  <a:t>with</a:t>
+                </a:r>
+                <a:r>
+                  <a:rPr lang="de-AT" dirty="0"/>
+                  <a:t> 176 </a:t>
+                </a:r>
+                <a:r>
+                  <a:rPr lang="de-AT" dirty="0" err="1"/>
+                  <a:t>entries</a:t>
+                </a:r>
+                <a:r>
+                  <a:rPr lang="de-AT" dirty="0"/>
+                  <a:t> — </a:t>
+                </a:r>
+                <a:r>
+                  <a:rPr lang="de-AT" dirty="0" err="1"/>
+                  <a:t>the</a:t>
+                </a:r>
+                <a:r>
+                  <a:rPr lang="de-AT" dirty="0"/>
+                  <a:t> "</a:t>
+                </a:r>
+                <a:r>
+                  <a:rPr lang="de-AT" dirty="0" err="1"/>
+                  <a:t>center</a:t>
+                </a:r>
+                <a:r>
+                  <a:rPr lang="de-AT" dirty="0"/>
+                  <a:t>" </a:t>
+                </a:r>
+                <a:r>
+                  <a:rPr lang="de-AT" dirty="0" err="1"/>
+                  <a:t>of</a:t>
+                </a:r>
+                <a:r>
+                  <a:rPr lang="de-AT" dirty="0"/>
+                  <a:t> </a:t>
+                </a:r>
+                <a:r>
+                  <a:rPr lang="de-AT" dirty="0" err="1"/>
+                  <a:t>the</a:t>
+                </a:r>
+                <a:r>
+                  <a:rPr lang="de-AT" dirty="0"/>
+                  <a:t> real </a:t>
+                </a:r>
+                <a:r>
+                  <a:rPr lang="de-AT" dirty="0" err="1"/>
+                  <a:t>point</a:t>
+                </a:r>
+                <a:r>
+                  <a:rPr lang="de-AT" dirty="0"/>
+                  <a:t> </a:t>
+                </a:r>
+                <a:r>
+                  <a:rPr lang="de-AT" dirty="0" err="1"/>
+                  <a:t>cloud</a:t>
+                </a:r>
+                <a:r>
+                  <a:rPr lang="de-AT" dirty="0"/>
+                  <a:t>.</a:t>
+                </a:r>
+              </a:p>
+              <a:p>
+                <a:r>
+                  <a:rPr lang="ar-AE" sz="1200" i="0" kern="1200">
+                    <a:solidFill>
+                      <a:schemeClr val="tx1"/>
+                    </a:solidFill>
+                    <a:latin typeface="+mn-lt"/>
+                    <a:ea typeface="+mn-ea"/>
+                    <a:cs typeface="+mn-cs"/>
+                  </a:rPr>
+                  <a:t>𝜇_𝑔</a:t>
+                </a:r>
+                <a:r>
+                  <a:rPr lang="ar-AE" dirty="0"/>
+                  <a:t>(</a:t>
+                </a:r>
+                <a:r>
+                  <a:rPr lang="de-AT" dirty="0" err="1"/>
+                  <a:t>mu</a:t>
+                </a:r>
+                <a:r>
+                  <a:rPr lang="de-AT" dirty="0"/>
+                  <a:t>-g) — </a:t>
+                </a:r>
+                <a:r>
+                  <a:rPr lang="de-AT" dirty="0" err="1"/>
+                  <a:t>the</a:t>
+                </a:r>
+                <a:r>
+                  <a:rPr lang="de-AT" dirty="0"/>
+                  <a:t> </a:t>
+                </a:r>
+                <a:r>
+                  <a:rPr lang="de-AT" b="1" dirty="0" err="1"/>
+                  <a:t>mean</a:t>
+                </a:r>
+                <a:r>
+                  <a:rPr lang="de-AT" b="1" dirty="0"/>
+                  <a:t> </a:t>
+                </a:r>
+                <a:r>
+                  <a:rPr lang="de-AT" b="1" dirty="0" err="1"/>
+                  <a:t>vector</a:t>
+                </a:r>
+                <a:r>
+                  <a:rPr lang="de-AT" b="1" dirty="0"/>
+                  <a:t> </a:t>
+                </a:r>
+                <a:r>
+                  <a:rPr lang="de-AT" b="1" dirty="0" err="1"/>
+                  <a:t>of</a:t>
+                </a:r>
+                <a:r>
+                  <a:rPr lang="de-AT" b="1" dirty="0"/>
+                  <a:t> </a:t>
+                </a:r>
+                <a:r>
+                  <a:rPr lang="de-AT" b="1" dirty="0" err="1"/>
+                  <a:t>the</a:t>
+                </a:r>
+                <a:r>
+                  <a:rPr lang="de-AT" b="1" dirty="0"/>
+                  <a:t> </a:t>
+                </a:r>
+                <a:r>
+                  <a:rPr lang="de-AT" b="1" dirty="0" err="1"/>
+                  <a:t>generated</a:t>
+                </a:r>
+                <a:r>
+                  <a:rPr lang="de-AT" dirty="0"/>
+                  <a:t> </a:t>
+                </a:r>
+                <a:r>
+                  <a:rPr lang="de-AT" dirty="0" err="1"/>
+                  <a:t>data</a:t>
+                </a:r>
+                <a:r>
+                  <a:rPr lang="de-AT" dirty="0"/>
+                  <a:t> ("g" = </a:t>
+                </a:r>
+                <a:r>
+                  <a:rPr lang="de-AT" dirty="0" err="1"/>
+                  <a:t>generated</a:t>
+                </a:r>
+                <a:r>
+                  <a:rPr lang="de-AT" dirty="0"/>
+                  <a:t>). The </a:t>
+                </a:r>
+                <a:r>
+                  <a:rPr lang="de-AT" dirty="0" err="1"/>
+                  <a:t>center</a:t>
+                </a:r>
+                <a:r>
+                  <a:rPr lang="de-AT" dirty="0"/>
+                  <a:t> </a:t>
+                </a:r>
+                <a:r>
+                  <a:rPr lang="de-AT" dirty="0" err="1"/>
+                  <a:t>of</a:t>
+                </a:r>
+                <a:r>
+                  <a:rPr lang="de-AT" dirty="0"/>
+                  <a:t> </a:t>
+                </a:r>
+                <a:r>
+                  <a:rPr lang="de-AT" dirty="0" err="1"/>
+                  <a:t>the</a:t>
+                </a:r>
+                <a:r>
+                  <a:rPr lang="de-AT" dirty="0"/>
+                  <a:t> </a:t>
+                </a:r>
+                <a:r>
+                  <a:rPr lang="de-AT" dirty="0" err="1"/>
+                  <a:t>generated</a:t>
+                </a:r>
+                <a:r>
+                  <a:rPr lang="de-AT" dirty="0"/>
+                  <a:t> </a:t>
+                </a:r>
+                <a:r>
+                  <a:rPr lang="de-AT" dirty="0" err="1"/>
+                  <a:t>point</a:t>
+                </a:r>
+                <a:r>
+                  <a:rPr lang="de-AT" dirty="0"/>
+                  <a:t> </a:t>
+                </a:r>
+                <a:r>
+                  <a:rPr lang="de-AT" dirty="0" err="1"/>
+                  <a:t>cloud</a:t>
+                </a:r>
+                <a:r>
+                  <a:rPr lang="de-AT" dirty="0"/>
+                  <a:t>.</a:t>
+                </a:r>
+              </a:p>
+              <a:p>
+                <a:r>
+                  <a:rPr lang="ar-AE" sz="1200" i="0" kern="1200">
+                    <a:solidFill>
+                      <a:schemeClr val="tx1"/>
+                    </a:solidFill>
+                    <a:latin typeface="+mn-lt"/>
+                    <a:ea typeface="+mn-ea"/>
+                    <a:cs typeface="+mn-cs"/>
+                  </a:rPr>
+                  <a:t>𝜇_𝑟−𝜇_𝑔</a:t>
+                </a:r>
+                <a:r>
+                  <a:rPr lang="ar-AE" dirty="0"/>
+                  <a:t>— </a:t>
+                </a:r>
+                <a:r>
+                  <a:rPr lang="de-AT" dirty="0" err="1"/>
+                  <a:t>the</a:t>
+                </a:r>
+                <a:r>
+                  <a:rPr lang="de-AT" dirty="0"/>
+                  <a:t> </a:t>
+                </a:r>
+                <a:r>
+                  <a:rPr lang="de-AT" dirty="0" err="1"/>
+                  <a:t>difference</a:t>
+                </a:r>
+                <a:r>
+                  <a:rPr lang="de-AT" dirty="0"/>
+                  <a:t> </a:t>
+                </a:r>
+                <a:r>
+                  <a:rPr lang="de-AT" dirty="0" err="1"/>
+                  <a:t>of</a:t>
+                </a:r>
+                <a:r>
+                  <a:rPr lang="de-AT" dirty="0"/>
+                  <a:t> </a:t>
+                </a:r>
+                <a:r>
+                  <a:rPr lang="de-AT" dirty="0" err="1"/>
+                  <a:t>the</a:t>
+                </a:r>
+                <a:r>
+                  <a:rPr lang="de-AT" dirty="0"/>
+                  <a:t> </a:t>
+                </a:r>
+                <a:r>
+                  <a:rPr lang="de-AT" dirty="0" err="1"/>
+                  <a:t>two</a:t>
+                </a:r>
+                <a:r>
+                  <a:rPr lang="de-AT" dirty="0"/>
+                  <a:t> </a:t>
+                </a:r>
+                <a:r>
+                  <a:rPr lang="de-AT" dirty="0" err="1"/>
+                  <a:t>centers</a:t>
+                </a:r>
+                <a:r>
+                  <a:rPr lang="de-AT" dirty="0"/>
+                  <a:t>. A </a:t>
+                </a:r>
+                <a:r>
+                  <a:rPr lang="de-AT" dirty="0" err="1"/>
+                  <a:t>vector</a:t>
+                </a:r>
+                <a:r>
+                  <a:rPr lang="de-AT" dirty="0"/>
+                  <a:t> </a:t>
+                </a:r>
+                <a:r>
+                  <a:rPr lang="de-AT" dirty="0" err="1"/>
+                  <a:t>showing</a:t>
+                </a:r>
+                <a:r>
+                  <a:rPr lang="de-AT" dirty="0"/>
+                  <a:t> </a:t>
+                </a:r>
+                <a:r>
+                  <a:rPr lang="de-AT" dirty="0" err="1"/>
+                  <a:t>how</a:t>
+                </a:r>
+                <a:r>
+                  <a:rPr lang="de-AT" dirty="0"/>
+                  <a:t> </a:t>
+                </a:r>
+                <a:r>
+                  <a:rPr lang="de-AT" dirty="0" err="1"/>
+                  <a:t>far</a:t>
+                </a:r>
+                <a:r>
+                  <a:rPr lang="de-AT" dirty="0"/>
+                  <a:t> apart and in </a:t>
+                </a:r>
+                <a:r>
+                  <a:rPr lang="de-AT" dirty="0" err="1"/>
+                  <a:t>which</a:t>
+                </a:r>
+                <a:r>
+                  <a:rPr lang="de-AT" dirty="0"/>
+                  <a:t> </a:t>
+                </a:r>
+                <a:r>
+                  <a:rPr lang="de-AT" dirty="0" err="1"/>
+                  <a:t>direction</a:t>
+                </a:r>
+                <a:r>
+                  <a:rPr lang="de-AT" dirty="0"/>
+                  <a:t> </a:t>
+                </a:r>
+                <a:r>
+                  <a:rPr lang="de-AT" dirty="0" err="1"/>
+                  <a:t>the</a:t>
+                </a:r>
+                <a:r>
+                  <a:rPr lang="de-AT" dirty="0"/>
+                  <a:t> </a:t>
+                </a:r>
+                <a:r>
+                  <a:rPr lang="de-AT" dirty="0" err="1"/>
+                  <a:t>two</a:t>
+                </a:r>
+                <a:r>
+                  <a:rPr lang="de-AT" dirty="0"/>
+                  <a:t> </a:t>
+                </a:r>
+                <a:r>
+                  <a:rPr lang="de-AT" dirty="0" err="1"/>
+                  <a:t>cloud</a:t>
+                </a:r>
+                <a:r>
+                  <a:rPr lang="de-AT" dirty="0"/>
+                  <a:t>-centers </a:t>
+                </a:r>
+                <a:r>
+                  <a:rPr lang="de-AT" dirty="0" err="1"/>
+                  <a:t>lie</a:t>
+                </a:r>
+                <a:r>
+                  <a:rPr lang="de-AT" dirty="0"/>
+                  <a:t>.</a:t>
+                </a:r>
+              </a:p>
+              <a:p>
+                <a:r>
+                  <a:rPr lang="de-AT" sz="1200" i="0" kern="1200">
+                    <a:solidFill>
+                      <a:schemeClr val="tx1"/>
+                    </a:solidFill>
+                    <a:latin typeface="+mn-lt"/>
+                    <a:ea typeface="+mn-ea"/>
+                    <a:cs typeface="+mn-cs"/>
+                  </a:rPr>
+                  <a:t>∥⋯</a:t>
+                </a:r>
+                <a:r>
+                  <a:rPr lang="ar-AE" sz="1200" i="0" kern="1200">
+                    <a:solidFill>
+                      <a:schemeClr val="tx1"/>
+                    </a:solidFill>
+                    <a:latin typeface="+mn-lt"/>
+                    <a:ea typeface="+mn-ea"/>
+                    <a:cs typeface="+mn-cs"/>
+                  </a:rPr>
+                  <a:t>∥_2^2</a:t>
+                </a:r>
+                <a:r>
+                  <a:rPr lang="ar-AE" dirty="0"/>
+                  <a:t>— </a:t>
+                </a:r>
+                <a:r>
+                  <a:rPr lang="de-AT" dirty="0" err="1"/>
+                  <a:t>the</a:t>
+                </a:r>
+                <a:r>
+                  <a:rPr lang="de-AT" dirty="0"/>
+                  <a:t> </a:t>
+                </a:r>
+                <a:r>
+                  <a:rPr lang="de-AT" b="1" dirty="0" err="1"/>
+                  <a:t>squared</a:t>
+                </a:r>
+                <a:r>
+                  <a:rPr lang="de-AT" b="1" dirty="0"/>
+                  <a:t> </a:t>
+                </a:r>
+                <a:r>
+                  <a:rPr lang="de-AT" b="1" dirty="0" err="1"/>
+                  <a:t>Euclidean</a:t>
+                </a:r>
+                <a:r>
+                  <a:rPr lang="de-AT" b="1" dirty="0"/>
+                  <a:t> norm</a:t>
+                </a:r>
+                <a:r>
+                  <a:rPr lang="de-AT" dirty="0"/>
+                  <a:t> (</a:t>
+                </a:r>
+                <a:r>
+                  <a:rPr lang="de-AT" dirty="0" err="1"/>
+                  <a:t>outer</a:t>
+                </a:r>
+                <a:r>
+                  <a:rPr lang="de-AT" dirty="0"/>
+                  <a:t> </a:t>
+                </a:r>
+                <a:r>
+                  <a:rPr lang="de-AT" dirty="0" err="1"/>
+                  <a:t>superscript</a:t>
+                </a:r>
+                <a:r>
+                  <a:rPr lang="de-AT" dirty="0"/>
+                  <a:t> 2 = </a:t>
+                </a:r>
+                <a:r>
+                  <a:rPr lang="de-AT" dirty="0" err="1"/>
+                  <a:t>squared</a:t>
+                </a:r>
+                <a:r>
+                  <a:rPr lang="de-AT" dirty="0"/>
+                  <a:t>, </a:t>
+                </a:r>
+                <a:r>
+                  <a:rPr lang="de-AT" dirty="0" err="1"/>
+                  <a:t>small</a:t>
+                </a:r>
+                <a:r>
+                  <a:rPr lang="de-AT" dirty="0"/>
+                  <a:t> 2 </a:t>
+                </a:r>
+                <a:r>
+                  <a:rPr lang="de-AT" dirty="0" err="1"/>
+                  <a:t>below</a:t>
+                </a:r>
+                <a:r>
+                  <a:rPr lang="de-AT" dirty="0"/>
+                  <a:t> = L2 norm). </a:t>
+                </a:r>
+                <a:r>
+                  <a:rPr lang="de-AT" dirty="0" err="1"/>
+                  <a:t>It</a:t>
+                </a:r>
+                <a:r>
+                  <a:rPr lang="de-AT" dirty="0"/>
+                  <a:t> </a:t>
+                </a:r>
+                <a:r>
+                  <a:rPr lang="de-AT" dirty="0" err="1"/>
+                  <a:t>turns</a:t>
+                </a:r>
+                <a:r>
+                  <a:rPr lang="de-AT" dirty="0"/>
+                  <a:t> </a:t>
+                </a:r>
+                <a:r>
+                  <a:rPr lang="de-AT" dirty="0" err="1"/>
+                  <a:t>the</a:t>
+                </a:r>
+                <a:r>
+                  <a:rPr lang="de-AT" dirty="0"/>
+                  <a:t> </a:t>
+                </a:r>
+                <a:r>
+                  <a:rPr lang="de-AT" dirty="0" err="1"/>
+                  <a:t>difference</a:t>
+                </a:r>
+                <a:r>
+                  <a:rPr lang="de-AT" dirty="0"/>
+                  <a:t> </a:t>
+                </a:r>
+                <a:r>
+                  <a:rPr lang="de-AT" dirty="0" err="1"/>
+                  <a:t>vector</a:t>
+                </a:r>
+                <a:r>
+                  <a:rPr lang="de-AT" dirty="0"/>
+                  <a:t> </a:t>
+                </a:r>
+                <a:r>
+                  <a:rPr lang="de-AT" dirty="0" err="1"/>
+                  <a:t>into</a:t>
+                </a:r>
+                <a:r>
+                  <a:rPr lang="de-AT" dirty="0"/>
+                  <a:t> </a:t>
+                </a:r>
+                <a:r>
+                  <a:rPr lang="de-AT" dirty="0" err="1"/>
+                  <a:t>one</a:t>
+                </a:r>
+                <a:r>
+                  <a:rPr lang="de-AT" dirty="0"/>
+                  <a:t> non-negative </a:t>
+                </a:r>
+                <a:r>
+                  <a:rPr lang="de-AT" dirty="0" err="1"/>
+                  <a:t>number</a:t>
+                </a:r>
+                <a:r>
+                  <a:rPr lang="de-AT" dirty="0"/>
+                  <a:t>: </a:t>
+                </a:r>
+                <a:r>
+                  <a:rPr lang="de-AT" dirty="0" err="1"/>
+                  <a:t>its</a:t>
+                </a:r>
+                <a:r>
+                  <a:rPr lang="de-AT" dirty="0"/>
+                  <a:t> </a:t>
+                </a:r>
+                <a:r>
+                  <a:rPr lang="de-AT" dirty="0" err="1"/>
+                  <a:t>squared</a:t>
+                </a:r>
+                <a:r>
+                  <a:rPr lang="de-AT" dirty="0"/>
+                  <a:t> </a:t>
+                </a:r>
+                <a:r>
+                  <a:rPr lang="de-AT" dirty="0" err="1"/>
+                  <a:t>length</a:t>
+                </a:r>
+                <a:r>
+                  <a:rPr lang="de-AT" dirty="0"/>
+                  <a:t>. </a:t>
+                </a:r>
+                <a:r>
+                  <a:rPr lang="de-AT" dirty="0" err="1"/>
+                  <a:t>Intuitively</a:t>
+                </a:r>
+                <a:r>
+                  <a:rPr lang="de-AT" dirty="0"/>
+                  <a:t>: "</a:t>
+                </a:r>
+                <a:r>
+                  <a:rPr lang="de-AT" dirty="0" err="1"/>
+                  <a:t>how</a:t>
+                </a:r>
+                <a:r>
+                  <a:rPr lang="de-AT" dirty="0"/>
+                  <a:t> </a:t>
+                </a:r>
+                <a:r>
+                  <a:rPr lang="de-AT" dirty="0" err="1"/>
+                  <a:t>far</a:t>
+                </a:r>
+                <a:r>
+                  <a:rPr lang="de-AT" dirty="0"/>
+                  <a:t> </a:t>
+                </a:r>
+                <a:r>
+                  <a:rPr lang="de-AT" dirty="0" err="1"/>
+                  <a:t>is</a:t>
+                </a:r>
+                <a:r>
+                  <a:rPr lang="de-AT" dirty="0"/>
+                  <a:t> </a:t>
+                </a:r>
+                <a:r>
+                  <a:rPr lang="de-AT" dirty="0" err="1"/>
+                  <a:t>center</a:t>
+                </a:r>
+                <a:r>
+                  <a:rPr lang="de-AT" dirty="0"/>
+                  <a:t> A </a:t>
+                </a:r>
+                <a:r>
+                  <a:rPr lang="de-AT" dirty="0" err="1"/>
+                  <a:t>from</a:t>
+                </a:r>
+                <a:r>
+                  <a:rPr lang="de-AT" dirty="0"/>
+                  <a:t> </a:t>
+                </a:r>
+                <a:r>
+                  <a:rPr lang="de-AT" dirty="0" err="1"/>
+                  <a:t>center</a:t>
+                </a:r>
+                <a:r>
+                  <a:rPr lang="de-AT" dirty="0"/>
+                  <a:t> B?", </a:t>
+                </a:r>
+                <a:r>
+                  <a:rPr lang="de-AT" dirty="0" err="1"/>
+                  <a:t>as</a:t>
+                </a:r>
+                <a:r>
+                  <a:rPr lang="de-AT" dirty="0"/>
+                  <a:t> a </a:t>
+                </a:r>
+                <a:r>
+                  <a:rPr lang="de-AT" dirty="0" err="1"/>
+                  <a:t>squared</a:t>
+                </a:r>
+                <a:r>
+                  <a:rPr lang="de-AT" dirty="0"/>
+                  <a:t> </a:t>
+                </a:r>
+                <a:r>
+                  <a:rPr lang="de-AT" dirty="0" err="1"/>
+                  <a:t>distance</a:t>
+                </a:r>
+                <a:r>
+                  <a:rPr lang="de-AT" dirty="0"/>
+                  <a:t>. This </a:t>
+                </a:r>
+                <a:r>
+                  <a:rPr lang="de-AT" dirty="0" err="1"/>
+                  <a:t>is</a:t>
+                </a:r>
+                <a:r>
+                  <a:rPr lang="de-AT" dirty="0"/>
+                  <a:t> </a:t>
+                </a:r>
+                <a:r>
+                  <a:rPr lang="de-AT" b="1" dirty="0"/>
+                  <a:t>Part 1: </a:t>
+                </a:r>
+                <a:r>
+                  <a:rPr lang="de-AT" b="1" dirty="0" err="1"/>
+                  <a:t>the</a:t>
+                </a:r>
+                <a:r>
+                  <a:rPr lang="de-AT" b="1" dirty="0"/>
+                  <a:t> </a:t>
+                </a:r>
+                <a:r>
+                  <a:rPr lang="de-AT" b="1" dirty="0" err="1"/>
+                  <a:t>mean</a:t>
+                </a:r>
+                <a:r>
+                  <a:rPr lang="de-AT" b="1" dirty="0"/>
+                  <a:t> </a:t>
+                </a:r>
+                <a:r>
+                  <a:rPr lang="de-AT" b="1" dirty="0" err="1"/>
+                  <a:t>distance</a:t>
+                </a:r>
+                <a:r>
+                  <a:rPr lang="de-AT" b="1" dirty="0"/>
+                  <a:t>.</a:t>
+                </a:r>
+              </a:p>
+              <a:p>
+                <a:endParaRPr lang="de-AT" dirty="0"/>
+              </a:p>
+              <a:p>
+                <a:r>
+                  <a:rPr lang="el-GR" sz="1200" i="0" kern="1200">
+                    <a:solidFill>
+                      <a:schemeClr val="tx1"/>
+                    </a:solidFill>
+                    <a:latin typeface="+mn-lt"/>
+                    <a:ea typeface="+mn-ea"/>
+                    <a:cs typeface="+mn-cs"/>
+                  </a:rPr>
+                  <a:t>Σ</a:t>
+                </a:r>
+                <a:r>
+                  <a:rPr lang="ar-AE" sz="1200" i="0" kern="1200">
+                    <a:solidFill>
+                      <a:schemeClr val="tx1"/>
+                    </a:solidFill>
+                    <a:latin typeface="+mn-lt"/>
+                    <a:ea typeface="+mn-ea"/>
+                    <a:cs typeface="+mn-cs"/>
+                  </a:rPr>
+                  <a:t>_𝑟</a:t>
+                </a:r>
+                <a:r>
+                  <a:rPr lang="ar-AE" dirty="0"/>
+                  <a:t>(</a:t>
+                </a:r>
+                <a:r>
+                  <a:rPr lang="de-AT" dirty="0"/>
+                  <a:t>Sigma-r) — </a:t>
+                </a:r>
+                <a:r>
+                  <a:rPr lang="de-AT" dirty="0" err="1"/>
+                  <a:t>the</a:t>
+                </a:r>
+                <a:r>
+                  <a:rPr lang="de-AT" dirty="0"/>
+                  <a:t> </a:t>
+                </a:r>
+                <a:r>
+                  <a:rPr lang="de-AT" b="1" dirty="0" err="1"/>
+                  <a:t>covariance</a:t>
+                </a:r>
+                <a:r>
+                  <a:rPr lang="de-AT" b="1" dirty="0"/>
+                  <a:t> </a:t>
+                </a:r>
+                <a:r>
+                  <a:rPr lang="de-AT" b="1" dirty="0" err="1"/>
+                  <a:t>matrix</a:t>
+                </a:r>
+                <a:r>
+                  <a:rPr lang="de-AT" b="1" dirty="0"/>
+                  <a:t> </a:t>
+                </a:r>
+                <a:r>
+                  <a:rPr lang="de-AT" b="1" dirty="0" err="1"/>
+                  <a:t>of</a:t>
+                </a:r>
+                <a:r>
+                  <a:rPr lang="de-AT" b="1" dirty="0"/>
+                  <a:t> </a:t>
+                </a:r>
+                <a:r>
+                  <a:rPr lang="de-AT" b="1" dirty="0" err="1"/>
+                  <a:t>the</a:t>
+                </a:r>
+                <a:r>
+                  <a:rPr lang="de-AT" b="1" dirty="0"/>
+                  <a:t> real</a:t>
+                </a:r>
+                <a:r>
+                  <a:rPr lang="de-AT" dirty="0"/>
+                  <a:t> </a:t>
+                </a:r>
+                <a:r>
+                  <a:rPr lang="de-AT" dirty="0" err="1"/>
+                  <a:t>data</a:t>
+                </a:r>
+                <a:r>
+                  <a:rPr lang="de-AT" dirty="0"/>
+                  <a:t>. A 176×176 </a:t>
+                </a:r>
+                <a:r>
+                  <a:rPr lang="de-AT" dirty="0" err="1"/>
+                  <a:t>matrix</a:t>
+                </a:r>
+                <a:r>
+                  <a:rPr lang="de-AT" dirty="0"/>
+                  <a:t> </a:t>
+                </a:r>
+                <a:r>
+                  <a:rPr lang="de-AT" dirty="0" err="1"/>
+                  <a:t>describing</a:t>
+                </a:r>
+                <a:r>
+                  <a:rPr lang="de-AT" dirty="0"/>
+                  <a:t> </a:t>
+                </a:r>
+                <a:r>
+                  <a:rPr lang="de-AT" dirty="0" err="1"/>
+                  <a:t>how</a:t>
+                </a:r>
+                <a:r>
+                  <a:rPr lang="de-AT" dirty="0"/>
+                  <a:t> </a:t>
+                </a:r>
+                <a:r>
+                  <a:rPr lang="de-AT" dirty="0" err="1"/>
+                  <a:t>the</a:t>
+                </a:r>
+                <a:r>
+                  <a:rPr lang="de-AT" dirty="0"/>
+                  <a:t> </a:t>
+                </a:r>
+                <a:r>
+                  <a:rPr lang="de-AT" dirty="0" err="1"/>
+                  <a:t>features</a:t>
+                </a:r>
+                <a:r>
+                  <a:rPr lang="de-AT" dirty="0"/>
+                  <a:t> </a:t>
+                </a:r>
+                <a:r>
+                  <a:rPr lang="de-AT" dirty="0" err="1"/>
+                  <a:t>spread</a:t>
+                </a:r>
+                <a:r>
+                  <a:rPr lang="de-AT" dirty="0"/>
+                  <a:t> out and </a:t>
+                </a:r>
+                <a:r>
+                  <a:rPr lang="de-AT" dirty="0" err="1"/>
+                  <a:t>how</a:t>
+                </a:r>
+                <a:r>
+                  <a:rPr lang="de-AT" dirty="0"/>
+                  <a:t> </a:t>
+                </a:r>
+                <a:r>
+                  <a:rPr lang="de-AT" dirty="0" err="1"/>
+                  <a:t>they</a:t>
+                </a:r>
+                <a:r>
+                  <a:rPr lang="de-AT" dirty="0"/>
+                  <a:t> </a:t>
+                </a:r>
+                <a:r>
+                  <a:rPr lang="de-AT" dirty="0" err="1"/>
+                  <a:t>relate</a:t>
+                </a:r>
+                <a:r>
+                  <a:rPr lang="de-AT" dirty="0"/>
+                  <a:t> </a:t>
+                </a:r>
+                <a:r>
+                  <a:rPr lang="de-AT" dirty="0" err="1"/>
+                  <a:t>to</a:t>
+                </a:r>
+                <a:r>
+                  <a:rPr lang="de-AT" dirty="0"/>
+                  <a:t> </a:t>
+                </a:r>
+                <a:r>
+                  <a:rPr lang="de-AT" dirty="0" err="1"/>
+                  <a:t>each</a:t>
+                </a:r>
+                <a:r>
+                  <a:rPr lang="de-AT" dirty="0"/>
+                  <a:t> </a:t>
+                </a:r>
+                <a:r>
+                  <a:rPr lang="de-AT" dirty="0" err="1"/>
+                  <a:t>other</a:t>
+                </a:r>
+                <a:r>
+                  <a:rPr lang="de-AT" dirty="0"/>
+                  <a:t> — </a:t>
+                </a:r>
+                <a:r>
+                  <a:rPr lang="de-AT" dirty="0" err="1"/>
+                  <a:t>the</a:t>
+                </a:r>
+                <a:r>
+                  <a:rPr lang="de-AT" dirty="0"/>
+                  <a:t> "</a:t>
+                </a:r>
+                <a:r>
+                  <a:rPr lang="de-AT" dirty="0" err="1"/>
+                  <a:t>shape</a:t>
+                </a:r>
+                <a:r>
+                  <a:rPr lang="de-AT" dirty="0"/>
+                  <a:t> and </a:t>
+                </a:r>
+                <a:r>
+                  <a:rPr lang="de-AT" dirty="0" err="1"/>
+                  <a:t>extent</a:t>
+                </a:r>
+                <a:r>
+                  <a:rPr lang="de-AT" dirty="0"/>
+                  <a:t>" </a:t>
+                </a:r>
+                <a:r>
+                  <a:rPr lang="de-AT" dirty="0" err="1"/>
+                  <a:t>of</a:t>
+                </a:r>
+                <a:r>
+                  <a:rPr lang="de-AT" dirty="0"/>
+                  <a:t> </a:t>
+                </a:r>
+                <a:r>
+                  <a:rPr lang="de-AT" dirty="0" err="1"/>
+                  <a:t>the</a:t>
+                </a:r>
+                <a:r>
+                  <a:rPr lang="de-AT" dirty="0"/>
+                  <a:t> real </a:t>
+                </a:r>
+                <a:r>
+                  <a:rPr lang="de-AT" dirty="0" err="1"/>
+                  <a:t>point</a:t>
+                </a:r>
+                <a:r>
+                  <a:rPr lang="de-AT" dirty="0"/>
+                  <a:t> </a:t>
+                </a:r>
+                <a:r>
+                  <a:rPr lang="de-AT" dirty="0" err="1"/>
+                  <a:t>cloud</a:t>
+                </a:r>
+                <a:r>
+                  <a:rPr lang="de-AT" dirty="0"/>
+                  <a:t>.</a:t>
+                </a:r>
+              </a:p>
+              <a:p>
+                <a:r>
+                  <a:rPr lang="el-GR" sz="1200" i="0" kern="1200">
+                    <a:solidFill>
+                      <a:schemeClr val="tx1"/>
+                    </a:solidFill>
+                    <a:latin typeface="+mn-lt"/>
+                    <a:ea typeface="+mn-ea"/>
+                    <a:cs typeface="+mn-cs"/>
+                  </a:rPr>
+                  <a:t>Σ</a:t>
+                </a:r>
+                <a:r>
+                  <a:rPr lang="ar-AE" sz="1200" i="0" kern="1200">
+                    <a:solidFill>
+                      <a:schemeClr val="tx1"/>
+                    </a:solidFill>
+                    <a:latin typeface="+mn-lt"/>
+                    <a:ea typeface="+mn-ea"/>
+                    <a:cs typeface="+mn-cs"/>
+                  </a:rPr>
+                  <a:t>_𝑔</a:t>
+                </a:r>
+                <a:r>
+                  <a:rPr lang="ar-AE" dirty="0"/>
+                  <a:t>(</a:t>
+                </a:r>
+                <a:r>
+                  <a:rPr lang="de-AT" dirty="0"/>
+                  <a:t>Sigma-g) — </a:t>
+                </a:r>
+                <a:r>
+                  <a:rPr lang="de-AT" dirty="0" err="1"/>
+                  <a:t>the</a:t>
+                </a:r>
+                <a:r>
+                  <a:rPr lang="de-AT" dirty="0"/>
+                  <a:t> </a:t>
+                </a:r>
+                <a:r>
+                  <a:rPr lang="de-AT" b="1" dirty="0" err="1"/>
+                  <a:t>covariance</a:t>
+                </a:r>
+                <a:r>
+                  <a:rPr lang="de-AT" b="1" dirty="0"/>
+                  <a:t> </a:t>
+                </a:r>
+                <a:r>
+                  <a:rPr lang="de-AT" b="1" dirty="0" err="1"/>
+                  <a:t>matrix</a:t>
+                </a:r>
+                <a:r>
+                  <a:rPr lang="de-AT" b="1" dirty="0"/>
+                  <a:t> </a:t>
+                </a:r>
+                <a:r>
+                  <a:rPr lang="de-AT" b="1" dirty="0" err="1"/>
+                  <a:t>of</a:t>
+                </a:r>
+                <a:r>
+                  <a:rPr lang="de-AT" b="1" dirty="0"/>
+                  <a:t> </a:t>
+                </a:r>
+                <a:r>
+                  <a:rPr lang="de-AT" b="1" dirty="0" err="1"/>
+                  <a:t>the</a:t>
+                </a:r>
+                <a:r>
+                  <a:rPr lang="de-AT" b="1" dirty="0"/>
+                  <a:t> </a:t>
+                </a:r>
+                <a:r>
+                  <a:rPr lang="de-AT" b="1" dirty="0" err="1"/>
+                  <a:t>generated</a:t>
+                </a:r>
+                <a:r>
+                  <a:rPr lang="de-AT" dirty="0"/>
+                  <a:t> </a:t>
+                </a:r>
+                <a:r>
+                  <a:rPr lang="de-AT" dirty="0" err="1"/>
+                  <a:t>data</a:t>
+                </a:r>
+                <a:r>
+                  <a:rPr lang="de-AT" dirty="0"/>
+                  <a:t>. The </a:t>
+                </a:r>
+                <a:r>
+                  <a:rPr lang="de-AT" dirty="0" err="1"/>
+                  <a:t>shape</a:t>
+                </a:r>
+                <a:r>
+                  <a:rPr lang="de-AT" dirty="0"/>
+                  <a:t>/</a:t>
+                </a:r>
+                <a:r>
+                  <a:rPr lang="de-AT" dirty="0" err="1"/>
+                  <a:t>extent</a:t>
+                </a:r>
+                <a:r>
+                  <a:rPr lang="de-AT" dirty="0"/>
+                  <a:t> </a:t>
+                </a:r>
+                <a:r>
+                  <a:rPr lang="de-AT" dirty="0" err="1"/>
+                  <a:t>of</a:t>
+                </a:r>
+                <a:r>
+                  <a:rPr lang="de-AT" dirty="0"/>
+                  <a:t> </a:t>
+                </a:r>
+                <a:r>
+                  <a:rPr lang="de-AT" dirty="0" err="1"/>
+                  <a:t>the</a:t>
+                </a:r>
+                <a:r>
+                  <a:rPr lang="de-AT" dirty="0"/>
+                  <a:t> </a:t>
+                </a:r>
+                <a:r>
+                  <a:rPr lang="de-AT" dirty="0" err="1"/>
+                  <a:t>generated</a:t>
+                </a:r>
+                <a:r>
+                  <a:rPr lang="de-AT" dirty="0"/>
+                  <a:t> </a:t>
+                </a:r>
+                <a:r>
+                  <a:rPr lang="de-AT" dirty="0" err="1"/>
+                  <a:t>cloud</a:t>
+                </a:r>
+                <a:r>
+                  <a:rPr lang="de-AT" dirty="0"/>
+                  <a:t>.</a:t>
+                </a:r>
+              </a:p>
+              <a:p>
+                <a:r>
+                  <a:rPr lang="el-GR" sz="1200" i="0" kern="1200">
+                    <a:solidFill>
+                      <a:schemeClr val="tx1"/>
+                    </a:solidFill>
+                    <a:latin typeface="+mn-lt"/>
+                    <a:ea typeface="+mn-ea"/>
+                    <a:cs typeface="+mn-cs"/>
+                  </a:rPr>
+                  <a:t>Σ</a:t>
+                </a:r>
+                <a:r>
+                  <a:rPr lang="ar-AE" sz="1200" i="0" kern="1200">
+                    <a:solidFill>
+                      <a:schemeClr val="tx1"/>
+                    </a:solidFill>
+                    <a:latin typeface="+mn-lt"/>
+                    <a:ea typeface="+mn-ea"/>
+                    <a:cs typeface="+mn-cs"/>
+                  </a:rPr>
+                  <a:t>_𝑟 </a:t>
+                </a:r>
+                <a:r>
+                  <a:rPr lang="el-GR" sz="1200" i="0" kern="1200">
+                    <a:solidFill>
+                      <a:schemeClr val="tx1"/>
+                    </a:solidFill>
+                    <a:latin typeface="+mn-lt"/>
+                    <a:ea typeface="+mn-ea"/>
+                    <a:cs typeface="+mn-cs"/>
+                  </a:rPr>
+                  <a:t>Σ</a:t>
+                </a:r>
+                <a:r>
+                  <a:rPr lang="ar-AE" sz="1200" i="0" kern="1200">
+                    <a:solidFill>
+                      <a:schemeClr val="tx1"/>
+                    </a:solidFill>
+                    <a:latin typeface="+mn-lt"/>
+                    <a:ea typeface="+mn-ea"/>
+                    <a:cs typeface="+mn-cs"/>
+                  </a:rPr>
+                  <a:t>_𝑔</a:t>
+                </a:r>
+                <a:r>
+                  <a:rPr lang="ar-AE" dirty="0"/>
+                  <a:t>— </a:t>
+                </a:r>
+                <a:r>
+                  <a:rPr lang="de-AT" dirty="0" err="1"/>
+                  <a:t>the</a:t>
+                </a:r>
+                <a:r>
+                  <a:rPr lang="de-AT" dirty="0"/>
+                  <a:t> </a:t>
+                </a:r>
+                <a:r>
+                  <a:rPr lang="de-AT" b="1" dirty="0" err="1"/>
+                  <a:t>matrix</a:t>
+                </a:r>
+                <a:r>
+                  <a:rPr lang="de-AT" b="1" dirty="0"/>
+                  <a:t> </a:t>
+                </a:r>
+                <a:r>
+                  <a:rPr lang="de-AT" b="1" dirty="0" err="1"/>
+                  <a:t>product</a:t>
+                </a:r>
+                <a:r>
+                  <a:rPr lang="de-AT" dirty="0"/>
+                  <a:t> </a:t>
+                </a:r>
+                <a:r>
+                  <a:rPr lang="de-AT" dirty="0" err="1"/>
+                  <a:t>of</a:t>
+                </a:r>
+                <a:r>
+                  <a:rPr lang="de-AT" dirty="0"/>
+                  <a:t> </a:t>
+                </a:r>
+                <a:r>
+                  <a:rPr lang="de-AT" dirty="0" err="1"/>
+                  <a:t>the</a:t>
+                </a:r>
+                <a:r>
+                  <a:rPr lang="de-AT" dirty="0"/>
+                  <a:t> </a:t>
+                </a:r>
+                <a:r>
+                  <a:rPr lang="de-AT" dirty="0" err="1"/>
+                  <a:t>two</a:t>
+                </a:r>
+                <a:r>
+                  <a:rPr lang="de-AT" dirty="0"/>
+                  <a:t> </a:t>
+                </a:r>
+                <a:r>
+                  <a:rPr lang="de-AT" dirty="0" err="1"/>
+                  <a:t>covariance</a:t>
+                </a:r>
+                <a:r>
+                  <a:rPr lang="de-AT" dirty="0"/>
+                  <a:t> </a:t>
+                </a:r>
+                <a:r>
+                  <a:rPr lang="de-AT" dirty="0" err="1"/>
+                  <a:t>matrices</a:t>
+                </a:r>
+                <a:r>
+                  <a:rPr lang="de-AT" dirty="0"/>
+                  <a:t>. An intermediate </a:t>
+                </a:r>
+                <a:r>
+                  <a:rPr lang="de-AT" dirty="0" err="1"/>
+                  <a:t>step</a:t>
+                </a:r>
+                <a:r>
+                  <a:rPr lang="de-AT" dirty="0"/>
+                  <a:t> </a:t>
+                </a:r>
+                <a:r>
+                  <a:rPr lang="de-AT" dirty="0" err="1"/>
+                  <a:t>for</a:t>
+                </a:r>
+                <a:r>
+                  <a:rPr lang="de-AT" dirty="0"/>
+                  <a:t> </a:t>
+                </a:r>
+                <a:r>
+                  <a:rPr lang="de-AT" dirty="0" err="1"/>
+                  <a:t>comparing</a:t>
+                </a:r>
+                <a:r>
+                  <a:rPr lang="de-AT" dirty="0"/>
+                  <a:t> </a:t>
+                </a:r>
+                <a:r>
+                  <a:rPr lang="de-AT" dirty="0" err="1"/>
+                  <a:t>the</a:t>
+                </a:r>
+                <a:r>
+                  <a:rPr lang="de-AT" dirty="0"/>
+                  <a:t> </a:t>
+                </a:r>
+                <a:r>
+                  <a:rPr lang="de-AT" dirty="0" err="1"/>
+                  <a:t>two</a:t>
+                </a:r>
+                <a:r>
+                  <a:rPr lang="de-AT" dirty="0"/>
+                  <a:t> </a:t>
+                </a:r>
+                <a:r>
+                  <a:rPr lang="de-AT" dirty="0" err="1"/>
+                  <a:t>shapes</a:t>
+                </a:r>
+                <a:r>
+                  <a:rPr lang="de-AT" dirty="0"/>
+                  <a:t>.</a:t>
+                </a:r>
+              </a:p>
+              <a:p>
+                <a:r>
+                  <a:rPr lang="ar-AE" sz="1200" i="0" kern="1200">
+                    <a:solidFill>
+                      <a:schemeClr val="tx1"/>
+                    </a:solidFill>
+                    <a:latin typeface="+mn-lt"/>
+                    <a:ea typeface="+mn-ea"/>
+                    <a:cs typeface="+mn-cs"/>
+                  </a:rPr>
+                  <a:t>√(</a:t>
+                </a:r>
+                <a:r>
+                  <a:rPr lang="el-GR" sz="1200" i="0" kern="1200">
+                    <a:solidFill>
+                      <a:schemeClr val="tx1"/>
+                    </a:solidFill>
+                    <a:latin typeface="+mn-lt"/>
+                    <a:ea typeface="+mn-ea"/>
+                    <a:cs typeface="+mn-cs"/>
+                  </a:rPr>
+                  <a:t>Σ</a:t>
+                </a:r>
+                <a:r>
+                  <a:rPr lang="ar-AE" sz="1200" i="0" kern="1200">
+                    <a:solidFill>
+                      <a:schemeClr val="tx1"/>
+                    </a:solidFill>
+                    <a:latin typeface="+mn-lt"/>
+                    <a:ea typeface="+mn-ea"/>
+                    <a:cs typeface="+mn-cs"/>
+                  </a:rPr>
+                  <a:t>_𝑟 </a:t>
+                </a:r>
+                <a:r>
+                  <a:rPr lang="el-GR" sz="1200" i="0" kern="1200">
+                    <a:solidFill>
+                      <a:schemeClr val="tx1"/>
+                    </a:solidFill>
+                    <a:latin typeface="+mn-lt"/>
+                    <a:ea typeface="+mn-ea"/>
+                    <a:cs typeface="+mn-cs"/>
+                  </a:rPr>
+                  <a:t>Σ</a:t>
+                </a:r>
+                <a:r>
+                  <a:rPr lang="ar-AE" sz="1200" i="0" kern="1200">
+                    <a:solidFill>
+                      <a:schemeClr val="tx1"/>
+                    </a:solidFill>
+                    <a:latin typeface="+mn-lt"/>
+                    <a:ea typeface="+mn-ea"/>
+                    <a:cs typeface="+mn-cs"/>
+                  </a:rPr>
+                  <a:t>_𝑔 )</a:t>
+                </a:r>
+                <a:r>
+                  <a:rPr lang="ar-AE" dirty="0"/>
+                  <a:t>— </a:t>
+                </a:r>
+                <a:r>
+                  <a:rPr lang="de-AT" dirty="0" err="1"/>
+                  <a:t>the</a:t>
+                </a:r>
+                <a:r>
+                  <a:rPr lang="de-AT" dirty="0"/>
+                  <a:t> </a:t>
+                </a:r>
+                <a:r>
+                  <a:rPr lang="de-AT" b="1" dirty="0" err="1"/>
+                  <a:t>matrix</a:t>
+                </a:r>
+                <a:r>
+                  <a:rPr lang="de-AT" b="1" dirty="0"/>
+                  <a:t> </a:t>
+                </a:r>
+                <a:r>
+                  <a:rPr lang="de-AT" b="1" dirty="0" err="1"/>
+                  <a:t>square</a:t>
+                </a:r>
+                <a:r>
+                  <a:rPr lang="de-AT" b="1" dirty="0"/>
+                  <a:t> root</a:t>
+                </a:r>
+                <a:r>
+                  <a:rPr lang="de-AT" dirty="0"/>
+                  <a:t> </a:t>
+                </a:r>
+                <a:r>
+                  <a:rPr lang="de-AT" dirty="0" err="1"/>
+                  <a:t>of</a:t>
+                </a:r>
+                <a:r>
+                  <a:rPr lang="de-AT" dirty="0"/>
+                  <a:t> </a:t>
+                </a:r>
+                <a:r>
+                  <a:rPr lang="de-AT" dirty="0" err="1"/>
+                  <a:t>that</a:t>
+                </a:r>
+                <a:r>
+                  <a:rPr lang="de-AT" dirty="0"/>
+                  <a:t> </a:t>
+                </a:r>
+                <a:r>
+                  <a:rPr lang="de-AT" dirty="0" err="1"/>
+                  <a:t>product</a:t>
+                </a:r>
+                <a:r>
+                  <a:rPr lang="de-AT" dirty="0"/>
+                  <a:t> (not element-</a:t>
+                </a:r>
+                <a:r>
+                  <a:rPr lang="de-AT" dirty="0" err="1"/>
+                  <a:t>wise</a:t>
+                </a:r>
+                <a:r>
+                  <a:rPr lang="de-AT" dirty="0"/>
+                  <a:t>! a </a:t>
+                </a:r>
+                <a:r>
+                  <a:rPr lang="de-AT" dirty="0" err="1"/>
+                  <a:t>matrix</a:t>
+                </a:r>
+                <a:r>
+                  <a:rPr lang="de-AT" dirty="0"/>
+                  <a:t> </a:t>
+                </a:r>
+                <a:r>
+                  <a:rPr lang="de-AT" sz="1200" i="0" kern="1200">
+                    <a:solidFill>
+                      <a:schemeClr val="tx1"/>
+                    </a:solidFill>
+                    <a:latin typeface="+mn-lt"/>
+                    <a:ea typeface="+mn-ea"/>
+                    <a:cs typeface="+mn-cs"/>
+                  </a:rPr>
+                  <a:t>𝑀</a:t>
+                </a:r>
+                <a:r>
+                  <a:rPr lang="de-AT" dirty="0" err="1"/>
+                  <a:t>with</a:t>
+                </a:r>
+                <a:r>
+                  <a:rPr lang="de-AT" dirty="0"/>
+                  <a:t> </a:t>
+                </a:r>
+                <a:r>
+                  <a:rPr lang="de-AT" sz="1200" i="0" kern="1200">
+                    <a:solidFill>
+                      <a:schemeClr val="tx1"/>
+                    </a:solidFill>
+                    <a:latin typeface="+mn-lt"/>
+                    <a:ea typeface="+mn-ea"/>
+                    <a:cs typeface="+mn-cs"/>
+                  </a:rPr>
+                  <a:t>𝑀⋅𝑀=</a:t>
+                </a:r>
+                <a:r>
+                  <a:rPr lang="el-GR" sz="1200" i="0" kern="1200">
+                    <a:solidFill>
+                      <a:schemeClr val="tx1"/>
+                    </a:solidFill>
+                    <a:latin typeface="+mn-lt"/>
+                    <a:ea typeface="+mn-ea"/>
+                    <a:cs typeface="+mn-cs"/>
+                  </a:rPr>
+                  <a:t>Σ</a:t>
+                </a:r>
+                <a:r>
+                  <a:rPr lang="ar-AE" sz="1200" i="0" kern="1200">
+                    <a:solidFill>
+                      <a:schemeClr val="tx1"/>
+                    </a:solidFill>
+                    <a:latin typeface="+mn-lt"/>
+                    <a:ea typeface="+mn-ea"/>
+                    <a:cs typeface="+mn-cs"/>
+                  </a:rPr>
+                  <a:t>_𝑟 </a:t>
+                </a:r>
+                <a:r>
+                  <a:rPr lang="el-GR" sz="1200" i="0" kern="1200">
+                    <a:solidFill>
+                      <a:schemeClr val="tx1"/>
+                    </a:solidFill>
+                    <a:latin typeface="+mn-lt"/>
+                    <a:ea typeface="+mn-ea"/>
+                    <a:cs typeface="+mn-cs"/>
+                  </a:rPr>
+                  <a:t>Σ</a:t>
+                </a:r>
+                <a:r>
+                  <a:rPr lang="ar-AE" sz="1200" i="0" kern="1200">
+                    <a:solidFill>
+                      <a:schemeClr val="tx1"/>
+                    </a:solidFill>
+                    <a:latin typeface="+mn-lt"/>
+                    <a:ea typeface="+mn-ea"/>
+                    <a:cs typeface="+mn-cs"/>
+                  </a:rPr>
+                  <a:t>_𝑔</a:t>
+                </a:r>
+                <a:r>
+                  <a:rPr lang="ar-AE" dirty="0"/>
+                  <a:t>). </a:t>
+                </a:r>
+                <a:r>
+                  <a:rPr lang="de-AT" dirty="0"/>
+                  <a:t>This </a:t>
+                </a:r>
+                <a:r>
+                  <a:rPr lang="de-AT" dirty="0" err="1"/>
+                  <a:t>is</a:t>
+                </a:r>
+                <a:r>
+                  <a:rPr lang="de-AT" dirty="0"/>
+                  <a:t> </a:t>
+                </a:r>
+                <a:r>
+                  <a:rPr lang="de-AT" dirty="0" err="1"/>
+                  <a:t>the</a:t>
+                </a:r>
+                <a:r>
+                  <a:rPr lang="de-AT" dirty="0"/>
+                  <a:t> </a:t>
+                </a:r>
+                <a:r>
+                  <a:rPr lang="de-AT" dirty="0" err="1"/>
+                  <a:t>computationally</a:t>
+                </a:r>
+                <a:r>
+                  <a:rPr lang="de-AT" dirty="0"/>
+                  <a:t> </a:t>
+                </a:r>
+                <a:r>
+                  <a:rPr lang="de-AT" dirty="0" err="1"/>
+                  <a:t>heaviest</a:t>
+                </a:r>
+                <a:r>
+                  <a:rPr lang="de-AT" dirty="0"/>
+                  <a:t> </a:t>
+                </a:r>
+                <a:r>
+                  <a:rPr lang="de-AT" dirty="0" err="1"/>
+                  <a:t>part</a:t>
+                </a:r>
+                <a:r>
+                  <a:rPr lang="de-AT" dirty="0"/>
+                  <a:t> — in </a:t>
+                </a:r>
+                <a:r>
+                  <a:rPr lang="de-AT" dirty="0" err="1"/>
+                  <a:t>your</a:t>
+                </a:r>
+                <a:r>
+                  <a:rPr lang="de-AT" dirty="0"/>
+                  <a:t> code </a:t>
+                </a:r>
+                <a:r>
+                  <a:rPr lang="de-AT" dirty="0" err="1"/>
+                  <a:t>done</a:t>
+                </a:r>
+                <a:r>
+                  <a:rPr lang="de-AT" dirty="0"/>
+                  <a:t> via </a:t>
+                </a:r>
+                <a:r>
+                  <a:rPr lang="de-AT" dirty="0" err="1"/>
+                  <a:t>eigendecomposition</a:t>
+                </a:r>
+                <a:r>
+                  <a:rPr lang="de-AT" dirty="0"/>
+                  <a:t>. </a:t>
+                </a:r>
+                <a:r>
+                  <a:rPr lang="de-AT" dirty="0" err="1"/>
+                  <a:t>It</a:t>
+                </a:r>
+                <a:r>
+                  <a:rPr lang="de-AT" dirty="0"/>
+                  <a:t> </a:t>
+                </a:r>
+                <a:r>
+                  <a:rPr lang="de-AT" dirty="0" err="1"/>
+                  <a:t>measures</a:t>
+                </a:r>
+                <a:r>
+                  <a:rPr lang="de-AT" dirty="0"/>
+                  <a:t> </a:t>
+                </a:r>
+                <a:r>
+                  <a:rPr lang="de-AT" dirty="0" err="1"/>
+                  <a:t>the</a:t>
+                </a:r>
+                <a:r>
+                  <a:rPr lang="de-AT" dirty="0"/>
+                  <a:t> "</a:t>
+                </a:r>
+                <a:r>
+                  <a:rPr lang="de-AT" dirty="0" err="1"/>
+                  <a:t>geometric</a:t>
+                </a:r>
+                <a:r>
+                  <a:rPr lang="de-AT" dirty="0"/>
+                  <a:t> </a:t>
+                </a:r>
+                <a:r>
+                  <a:rPr lang="de-AT" dirty="0" err="1"/>
+                  <a:t>overlap</a:t>
+                </a:r>
+                <a:r>
+                  <a:rPr lang="de-AT" dirty="0"/>
+                  <a:t>" </a:t>
+                </a:r>
+                <a:r>
+                  <a:rPr lang="de-AT" dirty="0" err="1"/>
+                  <a:t>of</a:t>
+                </a:r>
+                <a:r>
+                  <a:rPr lang="de-AT" dirty="0"/>
+                  <a:t> </a:t>
+                </a:r>
+                <a:r>
+                  <a:rPr lang="de-AT" dirty="0" err="1"/>
+                  <a:t>the</a:t>
+                </a:r>
+                <a:r>
+                  <a:rPr lang="de-AT" dirty="0"/>
+                  <a:t> </a:t>
+                </a:r>
+                <a:r>
+                  <a:rPr lang="de-AT" dirty="0" err="1"/>
+                  <a:t>two</a:t>
+                </a:r>
+                <a:r>
+                  <a:rPr lang="de-AT" dirty="0"/>
+                  <a:t> </a:t>
+                </a:r>
+                <a:r>
+                  <a:rPr lang="de-AT" dirty="0" err="1"/>
+                  <a:t>shapes</a:t>
+                </a:r>
+                <a:r>
+                  <a:rPr lang="de-AT" dirty="0"/>
+                  <a:t>.</a:t>
+                </a:r>
+              </a:p>
+              <a:p>
+                <a:r>
+                  <a:rPr lang="el-GR" sz="1200" i="0" kern="1200">
+                    <a:solidFill>
+                      <a:schemeClr val="tx1"/>
+                    </a:solidFill>
+                    <a:latin typeface="+mn-lt"/>
+                    <a:ea typeface="+mn-ea"/>
+                    <a:cs typeface="+mn-cs"/>
+                  </a:rPr>
+                  <a:t>Σ</a:t>
+                </a:r>
+                <a:r>
+                  <a:rPr lang="ar-AE" sz="1200" i="0" kern="1200">
+                    <a:solidFill>
+                      <a:schemeClr val="tx1"/>
+                    </a:solidFill>
+                    <a:latin typeface="+mn-lt"/>
+                    <a:ea typeface="+mn-ea"/>
+                    <a:cs typeface="+mn-cs"/>
+                  </a:rPr>
+                  <a:t>_𝑟+</a:t>
+                </a:r>
+                <a:r>
+                  <a:rPr lang="el-GR" sz="1200" i="0" kern="1200">
+                    <a:solidFill>
+                      <a:schemeClr val="tx1"/>
+                    </a:solidFill>
+                    <a:latin typeface="+mn-lt"/>
+                    <a:ea typeface="+mn-ea"/>
+                    <a:cs typeface="+mn-cs"/>
+                  </a:rPr>
+                  <a:t>Σ</a:t>
+                </a:r>
+                <a:r>
+                  <a:rPr lang="ar-AE" sz="1200" i="0" kern="1200">
+                    <a:solidFill>
+                      <a:schemeClr val="tx1"/>
+                    </a:solidFill>
+                    <a:latin typeface="+mn-lt"/>
+                    <a:ea typeface="+mn-ea"/>
+                    <a:cs typeface="+mn-cs"/>
+                  </a:rPr>
+                  <a:t>_𝑔−2√(</a:t>
+                </a:r>
+                <a:r>
+                  <a:rPr lang="el-GR" sz="1200" i="0" kern="1200">
+                    <a:solidFill>
+                      <a:schemeClr val="tx1"/>
+                    </a:solidFill>
+                    <a:latin typeface="+mn-lt"/>
+                    <a:ea typeface="+mn-ea"/>
+                    <a:cs typeface="+mn-cs"/>
+                  </a:rPr>
+                  <a:t>Σ</a:t>
+                </a:r>
+                <a:r>
+                  <a:rPr lang="ar-AE" sz="1200" i="0" kern="1200">
+                    <a:solidFill>
+                      <a:schemeClr val="tx1"/>
+                    </a:solidFill>
+                    <a:latin typeface="+mn-lt"/>
+                    <a:ea typeface="+mn-ea"/>
+                    <a:cs typeface="+mn-cs"/>
+                  </a:rPr>
+                  <a:t>_𝑟 </a:t>
+                </a:r>
+                <a:r>
+                  <a:rPr lang="el-GR" sz="1200" i="0" kern="1200">
+                    <a:solidFill>
+                      <a:schemeClr val="tx1"/>
+                    </a:solidFill>
+                    <a:latin typeface="+mn-lt"/>
+                    <a:ea typeface="+mn-ea"/>
+                    <a:cs typeface="+mn-cs"/>
+                  </a:rPr>
+                  <a:t>Σ</a:t>
+                </a:r>
+                <a:r>
+                  <a:rPr lang="ar-AE" sz="1200" i="0" kern="1200">
+                    <a:solidFill>
+                      <a:schemeClr val="tx1"/>
+                    </a:solidFill>
+                    <a:latin typeface="+mn-lt"/>
+                    <a:ea typeface="+mn-ea"/>
+                    <a:cs typeface="+mn-cs"/>
+                  </a:rPr>
+                  <a:t>_𝑔 )</a:t>
+                </a:r>
+                <a:r>
+                  <a:rPr lang="ar-AE" dirty="0"/>
+                  <a:t>— </a:t>
+                </a:r>
+                <a:r>
+                  <a:rPr lang="de-AT" dirty="0" err="1"/>
+                  <a:t>the</a:t>
+                </a:r>
+                <a:r>
+                  <a:rPr lang="de-AT" dirty="0"/>
+                  <a:t> </a:t>
+                </a:r>
+                <a:r>
+                  <a:rPr lang="de-AT" dirty="0" err="1"/>
+                  <a:t>whole</a:t>
+                </a:r>
+                <a:r>
+                  <a:rPr lang="de-AT" dirty="0"/>
+                  <a:t> bracket. </a:t>
+                </a:r>
+                <a:r>
+                  <a:rPr lang="de-AT" dirty="0" err="1"/>
+                  <a:t>It's</a:t>
+                </a:r>
+                <a:r>
+                  <a:rPr lang="de-AT" dirty="0"/>
+                  <a:t> large </a:t>
+                </a:r>
+                <a:r>
+                  <a:rPr lang="de-AT" dirty="0" err="1"/>
+                  <a:t>when</a:t>
+                </a:r>
+                <a:r>
+                  <a:rPr lang="de-AT" dirty="0"/>
+                  <a:t> </a:t>
+                </a:r>
+                <a:r>
+                  <a:rPr lang="de-AT" dirty="0" err="1"/>
+                  <a:t>the</a:t>
+                </a:r>
+                <a:r>
+                  <a:rPr lang="de-AT" dirty="0"/>
+                  <a:t> </a:t>
+                </a:r>
+                <a:r>
+                  <a:rPr lang="de-AT" dirty="0" err="1"/>
+                  <a:t>two</a:t>
+                </a:r>
+                <a:r>
+                  <a:rPr lang="de-AT" dirty="0"/>
+                  <a:t> </a:t>
+                </a:r>
+                <a:r>
+                  <a:rPr lang="de-AT" dirty="0" err="1"/>
+                  <a:t>clouds</a:t>
+                </a:r>
+                <a:r>
+                  <a:rPr lang="de-AT" dirty="0"/>
+                  <a:t> </a:t>
+                </a:r>
+                <a:r>
+                  <a:rPr lang="de-AT" dirty="0" err="1"/>
+                  <a:t>have</a:t>
+                </a:r>
+                <a:r>
+                  <a:rPr lang="de-AT" dirty="0"/>
+                  <a:t> different </a:t>
+                </a:r>
+                <a:r>
+                  <a:rPr lang="de-AT" dirty="0" err="1"/>
+                  <a:t>shape</a:t>
+                </a:r>
+                <a:r>
+                  <a:rPr lang="de-AT" dirty="0"/>
+                  <a:t>/</a:t>
+                </a:r>
+                <a:r>
+                  <a:rPr lang="de-AT" dirty="0" err="1"/>
+                  <a:t>extent</a:t>
+                </a:r>
+                <a:r>
+                  <a:rPr lang="de-AT" dirty="0"/>
+                  <a:t>, and </a:t>
+                </a:r>
+                <a:r>
+                  <a:rPr lang="de-AT" dirty="0" err="1"/>
+                  <a:t>zero</a:t>
+                </a:r>
+                <a:r>
+                  <a:rPr lang="de-AT" dirty="0"/>
+                  <a:t> </a:t>
+                </a:r>
+                <a:r>
+                  <a:rPr lang="de-AT" dirty="0" err="1"/>
+                  <a:t>when</a:t>
+                </a:r>
+                <a:r>
+                  <a:rPr lang="de-AT" dirty="0"/>
+                  <a:t> </a:t>
+                </a:r>
+                <a:r>
+                  <a:rPr lang="de-AT" dirty="0" err="1"/>
+                  <a:t>they're</a:t>
+                </a:r>
+                <a:r>
+                  <a:rPr lang="de-AT" dirty="0"/>
+                  <a:t> </a:t>
+                </a:r>
+                <a:r>
+                  <a:rPr lang="de-AT" dirty="0" err="1"/>
+                  <a:t>identical</a:t>
+                </a:r>
+                <a:r>
+                  <a:rPr lang="de-AT" dirty="0"/>
+                  <a:t>. </a:t>
+                </a:r>
+                <a:r>
+                  <a:rPr lang="de-AT" dirty="0" err="1"/>
+                  <a:t>Conceptually</a:t>
+                </a:r>
+                <a:r>
+                  <a:rPr lang="de-AT" dirty="0"/>
+                  <a:t> </a:t>
+                </a:r>
+                <a:r>
+                  <a:rPr lang="de-AT" dirty="0" err="1"/>
+                  <a:t>the</a:t>
+                </a:r>
+                <a:r>
+                  <a:rPr lang="de-AT" dirty="0"/>
+                  <a:t> </a:t>
+                </a:r>
+                <a:r>
+                  <a:rPr lang="de-AT" dirty="0" err="1"/>
+                  <a:t>matrix</a:t>
+                </a:r>
+                <a:r>
+                  <a:rPr lang="de-AT" dirty="0"/>
+                  <a:t> analog </a:t>
+                </a:r>
+                <a:r>
+                  <a:rPr lang="de-AT" dirty="0" err="1"/>
+                  <a:t>of</a:t>
+                </a:r>
+                <a:r>
+                  <a:rPr lang="de-AT" dirty="0"/>
+                  <a:t> </a:t>
+                </a:r>
+                <a:r>
+                  <a:rPr lang="ar-AE" sz="1200" i="0" kern="1200">
+                    <a:solidFill>
+                      <a:schemeClr val="tx1"/>
+                    </a:solidFill>
+                    <a:latin typeface="+mn-lt"/>
+                    <a:ea typeface="+mn-ea"/>
+                    <a:cs typeface="+mn-cs"/>
+                  </a:rPr>
+                  <a:t>(𝑎−𝑏)^2=𝑎+𝑏−2√𝑎𝑏</a:t>
+                </a:r>
+                <a:r>
+                  <a:rPr lang="ar-AE" dirty="0"/>
+                  <a:t>.</a:t>
+                </a:r>
+              </a:p>
+              <a:p>
+                <a:r>
+                  <a:rPr lang="de-AT" b="0" i="0">
+                    <a:latin typeface="Cambria Math" panose="02040503050406030204" pitchFamily="18" charset="0"/>
+                  </a:rPr>
+                  <a:t>"Tr</a:t>
+                </a:r>
+                <a:r>
+                  <a:rPr lang="ar-AE" sz="1200" b="0" i="0" kern="1200">
+                    <a:solidFill>
+                      <a:schemeClr val="tx1"/>
+                    </a:solidFill>
+                    <a:latin typeface="+mn-lt"/>
+                    <a:ea typeface="+mn-ea"/>
+                    <a:cs typeface="+mn-cs"/>
+                  </a:rPr>
+                  <a:t>" (⋯" " )</a:t>
+                </a:r>
+                <a:r>
+                  <a:rPr lang="ar-AE" dirty="0"/>
+                  <a:t>— </a:t>
+                </a:r>
+                <a:r>
+                  <a:rPr lang="de-AT" dirty="0" err="1"/>
+                  <a:t>the</a:t>
+                </a:r>
+                <a:r>
+                  <a:rPr lang="de-AT" dirty="0"/>
+                  <a:t> </a:t>
+                </a:r>
+                <a:r>
+                  <a:rPr lang="de-AT" b="1" dirty="0"/>
+                  <a:t>trace</a:t>
+                </a:r>
+                <a:r>
+                  <a:rPr lang="de-AT" dirty="0"/>
+                  <a:t> </a:t>
+                </a:r>
+                <a:r>
+                  <a:rPr lang="de-AT" dirty="0" err="1"/>
+                  <a:t>of</a:t>
+                </a:r>
+                <a:r>
+                  <a:rPr lang="de-AT" dirty="0"/>
+                  <a:t> </a:t>
+                </a:r>
+                <a:r>
+                  <a:rPr lang="de-AT" dirty="0" err="1"/>
+                  <a:t>the</a:t>
+                </a:r>
+                <a:r>
+                  <a:rPr lang="de-AT" dirty="0"/>
+                  <a:t> </a:t>
+                </a:r>
+                <a:r>
+                  <a:rPr lang="de-AT" dirty="0" err="1"/>
+                  <a:t>matrix</a:t>
+                </a:r>
+                <a:r>
+                  <a:rPr lang="de-AT" dirty="0"/>
+                  <a:t> in </a:t>
+                </a:r>
+                <a:r>
+                  <a:rPr lang="de-AT" dirty="0" err="1"/>
+                  <a:t>the</a:t>
+                </a:r>
+                <a:r>
+                  <a:rPr lang="de-AT" dirty="0"/>
+                  <a:t> bracket. The trace </a:t>
+                </a:r>
+                <a:r>
+                  <a:rPr lang="de-AT" dirty="0" err="1"/>
+                  <a:t>is</a:t>
+                </a:r>
+                <a:r>
+                  <a:rPr lang="de-AT" dirty="0"/>
+                  <a:t> </a:t>
+                </a:r>
+                <a:r>
+                  <a:rPr lang="de-AT" dirty="0" err="1"/>
+                  <a:t>simply</a:t>
+                </a:r>
+                <a:r>
+                  <a:rPr lang="de-AT" dirty="0"/>
+                  <a:t> </a:t>
+                </a:r>
+                <a:r>
+                  <a:rPr lang="de-AT" dirty="0" err="1"/>
+                  <a:t>the</a:t>
+                </a:r>
+                <a:r>
+                  <a:rPr lang="de-AT" dirty="0"/>
+                  <a:t> </a:t>
+                </a:r>
+                <a:r>
+                  <a:rPr lang="de-AT" b="1" dirty="0" err="1"/>
+                  <a:t>sum</a:t>
+                </a:r>
+                <a:r>
+                  <a:rPr lang="de-AT" b="1" dirty="0"/>
+                  <a:t> </a:t>
+                </a:r>
+                <a:r>
+                  <a:rPr lang="de-AT" b="1" dirty="0" err="1"/>
+                  <a:t>of</a:t>
+                </a:r>
+                <a:r>
+                  <a:rPr lang="de-AT" b="1" dirty="0"/>
+                  <a:t> </a:t>
+                </a:r>
+                <a:r>
+                  <a:rPr lang="de-AT" b="1" dirty="0" err="1"/>
+                  <a:t>the</a:t>
+                </a:r>
+                <a:r>
+                  <a:rPr lang="de-AT" b="1" dirty="0"/>
+                  <a:t> diagonal </a:t>
+                </a:r>
+                <a:r>
+                  <a:rPr lang="de-AT" b="1" dirty="0" err="1"/>
+                  <a:t>elements</a:t>
+                </a:r>
+                <a:r>
+                  <a:rPr lang="de-AT" dirty="0"/>
+                  <a:t> </a:t>
+                </a:r>
+                <a:r>
+                  <a:rPr lang="de-AT" dirty="0" err="1"/>
+                  <a:t>of</a:t>
+                </a:r>
+                <a:r>
+                  <a:rPr lang="de-AT" dirty="0"/>
+                  <a:t> a </a:t>
+                </a:r>
+                <a:r>
+                  <a:rPr lang="de-AT" dirty="0" err="1"/>
+                  <a:t>square</a:t>
+                </a:r>
+                <a:r>
+                  <a:rPr lang="de-AT" dirty="0"/>
+                  <a:t> </a:t>
+                </a:r>
+                <a:r>
+                  <a:rPr lang="de-AT" dirty="0" err="1"/>
+                  <a:t>matrix</a:t>
+                </a:r>
+                <a:r>
+                  <a:rPr lang="de-AT" dirty="0"/>
+                  <a:t>. </a:t>
+                </a:r>
+                <a:r>
+                  <a:rPr lang="de-AT" dirty="0" err="1"/>
+                  <a:t>It</a:t>
+                </a:r>
+                <a:r>
+                  <a:rPr lang="de-AT" dirty="0"/>
+                  <a:t> </a:t>
+                </a:r>
+                <a:r>
+                  <a:rPr lang="de-AT" dirty="0" err="1"/>
+                  <a:t>collapses</a:t>
+                </a:r>
+                <a:r>
+                  <a:rPr lang="de-AT" dirty="0"/>
+                  <a:t> </a:t>
+                </a:r>
+                <a:r>
+                  <a:rPr lang="de-AT" dirty="0" err="1"/>
+                  <a:t>the</a:t>
+                </a:r>
+                <a:r>
+                  <a:rPr lang="de-AT" dirty="0"/>
+                  <a:t> </a:t>
+                </a:r>
+                <a:r>
+                  <a:rPr lang="de-AT" dirty="0" err="1"/>
+                  <a:t>whole</a:t>
+                </a:r>
+                <a:r>
+                  <a:rPr lang="de-AT" dirty="0"/>
+                  <a:t> 176×176 </a:t>
+                </a:r>
+                <a:r>
+                  <a:rPr lang="de-AT" dirty="0" err="1"/>
+                  <a:t>matrix</a:t>
+                </a:r>
+                <a:r>
+                  <a:rPr lang="de-AT" dirty="0"/>
+                  <a:t> </a:t>
+                </a:r>
+                <a:r>
+                  <a:rPr lang="de-AT" dirty="0" err="1"/>
+                  <a:t>into</a:t>
+                </a:r>
+                <a:r>
+                  <a:rPr lang="de-AT" dirty="0"/>
+                  <a:t> a </a:t>
+                </a:r>
+                <a:r>
+                  <a:rPr lang="de-AT" dirty="0" err="1"/>
+                  <a:t>single</a:t>
+                </a:r>
+                <a:r>
+                  <a:rPr lang="de-AT" dirty="0"/>
+                  <a:t> </a:t>
+                </a:r>
+                <a:r>
+                  <a:rPr lang="de-AT" dirty="0" err="1"/>
+                  <a:t>number</a:t>
+                </a:r>
+                <a:r>
+                  <a:rPr lang="de-AT" dirty="0"/>
+                  <a:t>. This </a:t>
+                </a:r>
+                <a:r>
+                  <a:rPr lang="de-AT" dirty="0" err="1"/>
+                  <a:t>is</a:t>
+                </a:r>
+                <a:r>
+                  <a:rPr lang="de-AT" dirty="0"/>
+                  <a:t> </a:t>
+                </a:r>
+                <a:r>
+                  <a:rPr lang="de-AT" b="1" dirty="0"/>
+                  <a:t>Part 2: </a:t>
+                </a:r>
+                <a:r>
+                  <a:rPr lang="de-AT" b="1" dirty="0" err="1"/>
+                  <a:t>the</a:t>
+                </a:r>
+                <a:r>
+                  <a:rPr lang="de-AT" b="1" dirty="0"/>
+                  <a:t> </a:t>
+                </a:r>
+                <a:r>
+                  <a:rPr lang="de-AT" b="1" dirty="0" err="1"/>
+                  <a:t>covariance</a:t>
+                </a:r>
+                <a:r>
+                  <a:rPr lang="de-AT" b="1" dirty="0"/>
+                  <a:t> </a:t>
+                </a:r>
+                <a:r>
+                  <a:rPr lang="de-AT" b="1" dirty="0" err="1"/>
+                  <a:t>distance</a:t>
+                </a:r>
+                <a:r>
+                  <a:rPr lang="de-AT" b="1" dirty="0"/>
+                  <a:t>.</a:t>
+                </a:r>
+                <a:endParaRPr lang="de-AT" dirty="0"/>
+              </a:p>
+            </p:txBody>
+          </p:sp>
+        </mc:Fallback>
+      </mc:AlternateContent>
       <p:sp>
         <p:nvSpPr>
           <p:cNvPr id="4" name="Foliennummernplatzhalter 3"/>
@@ -3989,7 +8794,7 @@
             <a:pPr rtl="0"/>
             <a:fld id="{4C3B2649-7BD8-4005-A99E-30D13769A8BD}" type="slidenum">
               <a:rPr lang="en-US" smtClean="0"/>
-              <a:t>8</a:t>
+              <a:t>7</a:t>
             </a:fld>
             <a:endParaRPr lang="en-US" dirty="0"/>
           </a:p>
@@ -3998,7 +8803,7 @@
     </p:spTree>
     <p:extLst>
       <p:ext uri="{BB962C8B-B14F-4D97-AF65-F5344CB8AC3E}">
-        <p14:creationId xmlns:p14="http://schemas.microsoft.com/office/powerpoint/2010/main" val="2979920801"/>
+        <p14:creationId xmlns:p14="http://schemas.microsoft.com/office/powerpoint/2010/main" val="3358173585"/>
       </p:ext>
     </p:extLst>
   </p:cSld>
@@ -4054,19 +8859,11 @@
           <a:p>
             <a:r>
               <a:rPr lang="de-DE" dirty="0"/>
-              <a:t>A </a:t>
-            </a:r>
-            <a:r>
-              <a:rPr lang="de-DE" dirty="0" err="1"/>
-              <a:t>motivates</a:t>
-            </a:r>
-            <a:r>
-              <a:rPr lang="de-DE" dirty="0"/>
-              <a:t> B was </a:t>
-            </a:r>
-            <a:r>
-              <a:rPr lang="de-DE" dirty="0" err="1"/>
-              <a:t>my</a:t>
+              <a:t>This </a:t>
+            </a:r>
+            <a:r>
+              <a:rPr lang="de-DE" dirty="0" err="1"/>
+              <a:t>is</a:t>
             </a:r>
             <a:r>
               <a:rPr lang="de-DE" dirty="0"/>
@@ -4074,17 +8871,631 @@
             </a:r>
             <a:r>
               <a:rPr lang="de-DE" dirty="0" err="1"/>
-              <a:t>thought</a:t>
-            </a:r>
-            <a:r>
-              <a:rPr lang="de-DE" dirty="0"/>
-              <a:t> at </a:t>
-            </a:r>
-            <a:r>
-              <a:rPr lang="de-DE" b="1" dirty="0" err="1"/>
-              <a:t>first</a:t>
-            </a:r>
-            <a:endParaRPr lang="de-DE" b="1" dirty="0"/>
+              <a:t>how</a:t>
+            </a:r>
+            <a:r>
+              <a:rPr lang="de-DE" dirty="0"/>
+              <a:t> Brain FID </a:t>
+            </a:r>
+            <a:r>
+              <a:rPr lang="de-DE" dirty="0" err="1"/>
+              <a:t>works</a:t>
+            </a:r>
+            <a:r>
+              <a:rPr lang="de-DE" dirty="0"/>
+              <a:t> in 4 </a:t>
+            </a:r>
+            <a:r>
+              <a:rPr lang="de-DE" dirty="0" err="1"/>
+              <a:t>steps</a:t>
+            </a:r>
+            <a:r>
+              <a:rPr lang="de-DE" dirty="0"/>
+              <a:t>:</a:t>
+            </a:r>
+          </a:p>
+          <a:p>
+            <a:endParaRPr lang="de-DE" dirty="0"/>
+          </a:p>
+          <a:p>
+            <a:r>
+              <a:rPr lang="de-DE" dirty="0"/>
+              <a:t>Spikes: </a:t>
+            </a:r>
+            <a:r>
+              <a:rPr lang="de-DE" dirty="0" err="1"/>
+              <a:t>We</a:t>
+            </a:r>
+            <a:r>
+              <a:rPr lang="de-DE" dirty="0"/>
+              <a:t> </a:t>
+            </a:r>
+            <a:r>
+              <a:rPr lang="de-DE" dirty="0" err="1"/>
+              <a:t>start</a:t>
+            </a:r>
+            <a:r>
+              <a:rPr lang="de-DE" dirty="0"/>
+              <a:t> </a:t>
+            </a:r>
+            <a:r>
+              <a:rPr lang="de-DE" dirty="0" err="1"/>
+              <a:t>with</a:t>
+            </a:r>
+            <a:r>
+              <a:rPr lang="de-DE" dirty="0"/>
+              <a:t> </a:t>
+            </a:r>
+            <a:r>
+              <a:rPr lang="de-DE" dirty="0" err="1"/>
+              <a:t>two</a:t>
+            </a:r>
+            <a:r>
+              <a:rPr lang="de-DE" dirty="0"/>
+              <a:t> stets </a:t>
+            </a:r>
+            <a:r>
+              <a:rPr lang="de-DE" dirty="0" err="1"/>
+              <a:t>of</a:t>
+            </a:r>
+            <a:r>
+              <a:rPr lang="de-DE" dirty="0"/>
+              <a:t> </a:t>
+            </a:r>
+            <a:r>
+              <a:rPr lang="de-DE" dirty="0" err="1"/>
+              <a:t>spike</a:t>
+            </a:r>
+            <a:r>
+              <a:rPr lang="de-DE" dirty="0"/>
+              <a:t> </a:t>
+            </a:r>
+            <a:r>
+              <a:rPr lang="de-DE" dirty="0" err="1"/>
+              <a:t>rasters</a:t>
+            </a:r>
+            <a:r>
+              <a:rPr lang="de-DE" dirty="0"/>
+              <a:t>: real </a:t>
+            </a:r>
+            <a:r>
+              <a:rPr lang="de-DE" dirty="0" err="1"/>
+              <a:t>recordings</a:t>
+            </a:r>
+            <a:r>
+              <a:rPr lang="de-DE" dirty="0"/>
+              <a:t>, and </a:t>
+            </a:r>
+            <a:r>
+              <a:rPr lang="de-DE" dirty="0" err="1"/>
+              <a:t>sequences</a:t>
+            </a:r>
+            <a:r>
+              <a:rPr lang="de-DE" dirty="0"/>
+              <a:t> </a:t>
+            </a:r>
+            <a:r>
+              <a:rPr lang="de-DE" dirty="0" err="1"/>
+              <a:t>the</a:t>
+            </a:r>
+            <a:r>
+              <a:rPr lang="de-DE" dirty="0"/>
+              <a:t> </a:t>
+            </a:r>
+            <a:r>
+              <a:rPr lang="de-DE" dirty="0" err="1"/>
+              <a:t>model</a:t>
+            </a:r>
+            <a:r>
+              <a:rPr lang="de-DE" dirty="0"/>
+              <a:t> </a:t>
+            </a:r>
+            <a:r>
+              <a:rPr lang="de-DE" dirty="0" err="1"/>
+              <a:t>generated</a:t>
+            </a:r>
+            <a:r>
+              <a:rPr lang="de-DE" dirty="0"/>
+              <a:t> </a:t>
+            </a:r>
+            <a:r>
+              <a:rPr lang="de-DE" dirty="0" err="1"/>
+              <a:t>autoregressively</a:t>
+            </a:r>
+            <a:r>
+              <a:rPr lang="de-DE" dirty="0"/>
+              <a:t>. The </a:t>
+            </a:r>
+            <a:r>
+              <a:rPr lang="de-DE" dirty="0" err="1"/>
+              <a:t>question</a:t>
+            </a:r>
+            <a:r>
+              <a:rPr lang="de-DE" dirty="0"/>
+              <a:t> </a:t>
+            </a:r>
+            <a:r>
+              <a:rPr lang="de-DE" dirty="0" err="1"/>
+              <a:t>is</a:t>
+            </a:r>
+            <a:r>
+              <a:rPr lang="de-DE" dirty="0"/>
+              <a:t> </a:t>
+            </a:r>
+            <a:r>
+              <a:rPr lang="de-DE" dirty="0" err="1"/>
+              <a:t>whether</a:t>
+            </a:r>
+            <a:r>
+              <a:rPr lang="de-DE" dirty="0"/>
+              <a:t> </a:t>
+            </a:r>
+            <a:r>
+              <a:rPr lang="de-DE" dirty="0" err="1"/>
+              <a:t>these</a:t>
+            </a:r>
+            <a:r>
+              <a:rPr lang="de-DE" dirty="0"/>
+              <a:t> </a:t>
+            </a:r>
+            <a:r>
+              <a:rPr lang="de-DE" dirty="0" err="1"/>
+              <a:t>two</a:t>
+            </a:r>
+            <a:r>
+              <a:rPr lang="de-DE" dirty="0"/>
+              <a:t> </a:t>
+            </a:r>
+            <a:r>
+              <a:rPr lang="de-DE" dirty="0" err="1"/>
+              <a:t>look</a:t>
+            </a:r>
+            <a:r>
+              <a:rPr lang="de-DE" dirty="0"/>
+              <a:t> </a:t>
+            </a:r>
+            <a:r>
+              <a:rPr lang="de-DE" dirty="0" err="1"/>
+              <a:t>statistically</a:t>
+            </a:r>
+            <a:r>
+              <a:rPr lang="de-DE" dirty="0"/>
+              <a:t> </a:t>
+            </a:r>
+            <a:r>
+              <a:rPr lang="de-DE" dirty="0" err="1"/>
+              <a:t>the</a:t>
+            </a:r>
+            <a:r>
+              <a:rPr lang="de-DE" dirty="0"/>
+              <a:t> same?</a:t>
+            </a:r>
+          </a:p>
+          <a:p>
+            <a:endParaRPr lang="de-DE" dirty="0"/>
+          </a:p>
+          <a:p>
+            <a:r>
+              <a:rPr lang="de-DE" dirty="0"/>
+              <a:t>Pool </a:t>
+            </a:r>
+            <a:r>
+              <a:rPr lang="de-DE" dirty="0" err="1"/>
+              <a:t>by</a:t>
+            </a:r>
+            <a:r>
+              <a:rPr lang="de-DE" dirty="0"/>
+              <a:t> </a:t>
+            </a:r>
+            <a:r>
+              <a:rPr lang="de-DE" dirty="0" err="1"/>
+              <a:t>area</a:t>
+            </a:r>
+            <a:r>
+              <a:rPr lang="de-DE" dirty="0"/>
+              <a:t>: Individual </a:t>
+            </a:r>
+            <a:r>
+              <a:rPr lang="de-DE" dirty="0" err="1"/>
+              <a:t>neurons</a:t>
+            </a:r>
+            <a:r>
+              <a:rPr lang="de-DE" dirty="0"/>
+              <a:t> </a:t>
+            </a:r>
+            <a:r>
+              <a:rPr lang="de-DE" dirty="0" err="1"/>
+              <a:t>are</a:t>
+            </a:r>
+            <a:r>
+              <a:rPr lang="de-DE" dirty="0"/>
+              <a:t> </a:t>
+            </a:r>
+            <a:r>
+              <a:rPr lang="de-DE" dirty="0" err="1"/>
+              <a:t>too</a:t>
+            </a:r>
+            <a:r>
+              <a:rPr lang="de-DE" dirty="0"/>
+              <a:t> </a:t>
+            </a:r>
+            <a:r>
+              <a:rPr lang="de-DE" dirty="0" err="1"/>
+              <a:t>noisy</a:t>
+            </a:r>
+            <a:r>
+              <a:rPr lang="de-DE" dirty="0"/>
+              <a:t> </a:t>
+            </a:r>
+            <a:r>
+              <a:rPr lang="de-DE" dirty="0" err="1"/>
+              <a:t>to</a:t>
+            </a:r>
+            <a:r>
+              <a:rPr lang="de-DE" dirty="0"/>
+              <a:t> </a:t>
+            </a:r>
+            <a:r>
+              <a:rPr lang="de-DE" dirty="0" err="1"/>
+              <a:t>compare</a:t>
+            </a:r>
+            <a:r>
+              <a:rPr lang="de-DE" dirty="0"/>
+              <a:t> </a:t>
+            </a:r>
+            <a:r>
+              <a:rPr lang="de-DE" dirty="0" err="1"/>
+              <a:t>directly</a:t>
+            </a:r>
+            <a:r>
+              <a:rPr lang="de-DE" dirty="0"/>
+              <a:t>, so </a:t>
+            </a:r>
+            <a:r>
+              <a:rPr lang="de-DE" dirty="0" err="1"/>
+              <a:t>we</a:t>
+            </a:r>
+            <a:r>
+              <a:rPr lang="de-DE" dirty="0"/>
+              <a:t> </a:t>
+            </a:r>
+            <a:r>
+              <a:rPr lang="de-DE" dirty="0" err="1"/>
+              <a:t>have</a:t>
+            </a:r>
+            <a:r>
+              <a:rPr lang="de-DE" dirty="0"/>
+              <a:t> </a:t>
+            </a:r>
+            <a:r>
+              <a:rPr lang="de-DE" dirty="0" err="1"/>
+              <a:t>to</a:t>
+            </a:r>
+            <a:r>
+              <a:rPr lang="de-DE" dirty="0"/>
+              <a:t> </a:t>
+            </a:r>
+            <a:r>
+              <a:rPr lang="de-DE" dirty="0" err="1"/>
+              <a:t>average</a:t>
+            </a:r>
+            <a:r>
+              <a:rPr lang="de-DE" dirty="0"/>
+              <a:t> </a:t>
+            </a:r>
+            <a:r>
+              <a:rPr lang="de-DE" dirty="0" err="1"/>
+              <a:t>them</a:t>
+            </a:r>
+            <a:r>
+              <a:rPr lang="de-DE" dirty="0"/>
+              <a:t> per </a:t>
+            </a:r>
+            <a:r>
+              <a:rPr lang="de-DE" dirty="0" err="1"/>
+              <a:t>brain</a:t>
+            </a:r>
+            <a:r>
+              <a:rPr lang="de-DE" dirty="0"/>
+              <a:t> </a:t>
+            </a:r>
+            <a:r>
+              <a:rPr lang="de-DE" dirty="0" err="1"/>
+              <a:t>region</a:t>
+            </a:r>
+            <a:r>
+              <a:rPr lang="de-DE" dirty="0"/>
+              <a:t> (</a:t>
+            </a:r>
+            <a:r>
+              <a:rPr lang="de-DE" dirty="0" err="1"/>
+              <a:t>using</a:t>
+            </a:r>
+            <a:r>
+              <a:rPr lang="de-DE" dirty="0"/>
+              <a:t> </a:t>
+            </a:r>
+            <a:r>
+              <a:rPr lang="de-DE" dirty="0" err="1"/>
+              <a:t>the</a:t>
+            </a:r>
+            <a:r>
+              <a:rPr lang="de-DE" dirty="0"/>
+              <a:t> </a:t>
+            </a:r>
+            <a:r>
+              <a:rPr lang="de-DE" dirty="0" err="1"/>
+              <a:t>atlas</a:t>
+            </a:r>
+            <a:r>
+              <a:rPr lang="de-DE" dirty="0"/>
+              <a:t> </a:t>
+            </a:r>
+            <a:r>
+              <a:rPr lang="de-DE" dirty="0" err="1"/>
+              <a:t>labels</a:t>
+            </a:r>
+            <a:r>
+              <a:rPr lang="de-DE" dirty="0"/>
+              <a:t> </a:t>
+            </a:r>
+            <a:r>
+              <a:rPr lang="de-DE" dirty="0" err="1"/>
+              <a:t>from</a:t>
+            </a:r>
+            <a:r>
+              <a:rPr lang="de-DE" dirty="0"/>
+              <a:t> </a:t>
+            </a:r>
+            <a:r>
+              <a:rPr lang="de-DE" dirty="0" err="1"/>
+              <a:t>the</a:t>
+            </a:r>
+            <a:r>
+              <a:rPr lang="de-DE" dirty="0"/>
+              <a:t> Allen </a:t>
+            </a:r>
+            <a:r>
+              <a:rPr lang="de-DE" dirty="0" err="1"/>
+              <a:t>institute</a:t>
+            </a:r>
+            <a:r>
+              <a:rPr lang="de-DE" dirty="0"/>
+              <a:t>). This </a:t>
+            </a:r>
+            <a:r>
+              <a:rPr lang="de-DE" dirty="0" err="1"/>
+              <a:t>turns</a:t>
+            </a:r>
+            <a:r>
+              <a:rPr lang="de-DE" dirty="0"/>
+              <a:t> 100+ </a:t>
+            </a:r>
+            <a:r>
+              <a:rPr lang="de-DE" dirty="0" err="1"/>
+              <a:t>neurons</a:t>
+            </a:r>
+            <a:r>
+              <a:rPr lang="de-DE" dirty="0"/>
+              <a:t> </a:t>
+            </a:r>
+            <a:r>
+              <a:rPr lang="de-DE" dirty="0" err="1"/>
+              <a:t>into</a:t>
+            </a:r>
+            <a:r>
+              <a:rPr lang="de-DE" dirty="0"/>
+              <a:t> a </a:t>
+            </a:r>
+            <a:r>
+              <a:rPr lang="de-DE" dirty="0" err="1"/>
+              <a:t>handful</a:t>
+            </a:r>
+            <a:r>
+              <a:rPr lang="de-DE" dirty="0"/>
+              <a:t> </a:t>
+            </a:r>
+            <a:r>
+              <a:rPr lang="de-DE" dirty="0" err="1"/>
+              <a:t>of</a:t>
+            </a:r>
+            <a:r>
+              <a:rPr lang="de-DE" dirty="0"/>
+              <a:t> </a:t>
+            </a:r>
+            <a:r>
+              <a:rPr lang="de-DE" dirty="0" err="1"/>
+              <a:t>population</a:t>
+            </a:r>
+            <a:r>
+              <a:rPr lang="de-DE" dirty="0"/>
+              <a:t> </a:t>
+            </a:r>
+            <a:r>
+              <a:rPr lang="de-DE" dirty="0" err="1"/>
+              <a:t>signals</a:t>
+            </a:r>
+            <a:r>
+              <a:rPr lang="de-DE" dirty="0"/>
+              <a:t>.</a:t>
+            </a:r>
+          </a:p>
+          <a:p>
+            <a:endParaRPr lang="de-DE" dirty="0"/>
+          </a:p>
+          <a:p>
+            <a:r>
+              <a:rPr lang="de-DE" dirty="0" err="1"/>
+              <a:t>Frequency</a:t>
+            </a:r>
+            <a:r>
+              <a:rPr lang="de-DE" dirty="0"/>
+              <a:t> </a:t>
+            </a:r>
+            <a:r>
+              <a:rPr lang="de-DE" dirty="0" err="1"/>
+              <a:t>features</a:t>
+            </a:r>
+            <a:r>
+              <a:rPr lang="de-DE" dirty="0"/>
+              <a:t>: </a:t>
+            </a:r>
+            <a:r>
+              <a:rPr lang="de-DE" dirty="0" err="1"/>
+              <a:t>For</a:t>
+            </a:r>
+            <a:r>
+              <a:rPr lang="de-DE" dirty="0"/>
+              <a:t> </a:t>
+            </a:r>
+            <a:r>
+              <a:rPr lang="de-DE" dirty="0" err="1"/>
+              <a:t>each</a:t>
+            </a:r>
+            <a:r>
+              <a:rPr lang="de-DE" dirty="0"/>
+              <a:t> </a:t>
+            </a:r>
+            <a:r>
+              <a:rPr lang="de-DE" dirty="0" err="1"/>
+              <a:t>region</a:t>
+            </a:r>
+            <a:r>
+              <a:rPr lang="de-DE" dirty="0"/>
+              <a:t> </a:t>
+            </a:r>
+            <a:r>
+              <a:rPr lang="de-DE" dirty="0" err="1"/>
+              <a:t>then</a:t>
+            </a:r>
+            <a:r>
+              <a:rPr lang="de-DE" dirty="0"/>
+              <a:t> I </a:t>
+            </a:r>
+            <a:r>
+              <a:rPr lang="de-DE" dirty="0" err="1"/>
+              <a:t>extracted</a:t>
+            </a:r>
+            <a:r>
+              <a:rPr lang="de-DE" dirty="0"/>
+              <a:t> </a:t>
+            </a:r>
+            <a:r>
+              <a:rPr lang="de-DE" dirty="0" err="1"/>
+              <a:t>how</a:t>
+            </a:r>
+            <a:r>
+              <a:rPr lang="de-DE" dirty="0"/>
+              <a:t> </a:t>
+            </a:r>
+            <a:r>
+              <a:rPr lang="de-DE" dirty="0" err="1"/>
+              <a:t>much</a:t>
+            </a:r>
+            <a:r>
+              <a:rPr lang="de-DE" dirty="0"/>
+              <a:t> </a:t>
+            </a:r>
+            <a:r>
+              <a:rPr lang="de-DE" dirty="0" err="1"/>
+              <a:t>oscillation</a:t>
+            </a:r>
+            <a:r>
+              <a:rPr lang="de-DE" dirty="0"/>
+              <a:t> power </a:t>
+            </a:r>
+            <a:r>
+              <a:rPr lang="de-DE" dirty="0" err="1"/>
+              <a:t>sits</a:t>
+            </a:r>
+            <a:r>
+              <a:rPr lang="de-DE" dirty="0"/>
+              <a:t> in different </a:t>
+            </a:r>
+            <a:r>
+              <a:rPr lang="de-DE" dirty="0" err="1"/>
+              <a:t>frequency</a:t>
+            </a:r>
+            <a:r>
+              <a:rPr lang="de-DE" dirty="0"/>
+              <a:t> bands, </a:t>
+            </a:r>
+            <a:r>
+              <a:rPr lang="de-DE" dirty="0" err="1"/>
+              <a:t>from</a:t>
+            </a:r>
+            <a:r>
+              <a:rPr lang="de-DE" dirty="0"/>
+              <a:t> 2 </a:t>
+            </a:r>
+            <a:r>
+              <a:rPr lang="de-DE" dirty="0" err="1"/>
+              <a:t>to</a:t>
+            </a:r>
+            <a:r>
+              <a:rPr lang="de-DE" dirty="0"/>
+              <a:t> 30Hz. (2–30 Hz deckt die für kortikale Aktivität relevanten Rhythmen ab (</a:t>
+            </a:r>
+            <a:r>
+              <a:rPr lang="de-DE" dirty="0" err="1"/>
+              <a:t>theta</a:t>
+            </a:r>
+            <a:r>
+              <a:rPr lang="de-DE" dirty="0"/>
+              <a:t> ~4–8, </a:t>
+            </a:r>
+            <a:r>
+              <a:rPr lang="de-DE" dirty="0" err="1"/>
+              <a:t>alpha</a:t>
+            </a:r>
+            <a:r>
+              <a:rPr lang="de-DE" dirty="0"/>
+              <a:t> ~8–12, </a:t>
+            </a:r>
+            <a:r>
+              <a:rPr lang="de-DE" dirty="0" err="1"/>
+              <a:t>beta</a:t>
+            </a:r>
+            <a:r>
+              <a:rPr lang="de-DE" dirty="0"/>
+              <a:t> ~13–30 Hz). Unter 2 Hz ist quasi statisch, über 30 Hz brauchst du feinere Zeitauflösung als dein </a:t>
+            </a:r>
+            <a:r>
+              <a:rPr lang="de-DE" sz="1200" kern="1200" dirty="0" err="1">
+                <a:solidFill>
+                  <a:schemeClr val="tx1"/>
+                </a:solidFill>
+                <a:latin typeface="+mn-lt"/>
+                <a:ea typeface="+mn-ea"/>
+                <a:cs typeface="+mn-cs"/>
+              </a:rPr>
+              <a:t>dt</a:t>
+            </a:r>
+            <a:r>
+              <a:rPr lang="de-DE" sz="1200" kern="1200" dirty="0">
+                <a:solidFill>
+                  <a:schemeClr val="tx1"/>
+                </a:solidFill>
+                <a:latin typeface="+mn-lt"/>
+                <a:ea typeface="+mn-ea"/>
+                <a:cs typeface="+mn-cs"/>
+              </a:rPr>
+              <a:t>=0.02</a:t>
+            </a:r>
+            <a:r>
+              <a:rPr lang="de-DE" dirty="0"/>
+              <a:t> (Nyquist-Grenze = 25 Hz) überhaupt hergibt. </a:t>
+            </a:r>
+          </a:p>
+          <a:p>
+            <a:endParaRPr lang="de-DE" dirty="0"/>
+          </a:p>
+          <a:p>
+            <a:r>
+              <a:rPr lang="en-US" dirty="0"/>
+              <a:t>Fréchet distance — Finally I compare the feature distributions of real versus generated data. </a:t>
+            </a:r>
+            <a:endParaRPr lang="de-DE" dirty="0"/>
           </a:p>
         </p:txBody>
       </p:sp>
@@ -4106,7 +9517,7 @@
             <a:pPr rtl="0"/>
             <a:fld id="{4C3B2649-7BD8-4005-A99E-30D13769A8BD}" type="slidenum">
               <a:rPr lang="en-US" smtClean="0"/>
-              <a:t>10</a:t>
+              <a:t>8</a:t>
             </a:fld>
             <a:endParaRPr lang="en-US" dirty="0"/>
           </a:p>
@@ -4115,7 +9526,7 @@
     </p:spTree>
     <p:extLst>
       <p:ext uri="{BB962C8B-B14F-4D97-AF65-F5344CB8AC3E}">
-        <p14:creationId xmlns:p14="http://schemas.microsoft.com/office/powerpoint/2010/main" val="3154127366"/>
+        <p14:creationId xmlns:p14="http://schemas.microsoft.com/office/powerpoint/2010/main" val="2979920801"/>
       </p:ext>
     </p:extLst>
   </p:cSld>
@@ -4171,7 +9582,23 @@
           <a:p>
             <a:r>
               <a:rPr lang="de-DE" dirty="0"/>
-              <a:t>My </a:t>
+              <a:t>A </a:t>
+            </a:r>
+            <a:r>
+              <a:rPr lang="de-DE" dirty="0" err="1"/>
+              <a:t>motivates</a:t>
+            </a:r>
+            <a:r>
+              <a:rPr lang="de-DE" dirty="0"/>
+              <a:t> B was </a:t>
+            </a:r>
+            <a:r>
+              <a:rPr lang="de-DE" dirty="0" err="1"/>
+              <a:t>my</a:t>
+            </a:r>
+            <a:r>
+              <a:rPr lang="de-DE" dirty="0"/>
+              <a:t> </a:t>
             </a:r>
             <a:r>
               <a:rPr lang="de-DE" dirty="0" err="1"/>
@@ -4179,348 +9606,13 @@
             </a:r>
             <a:r>
               <a:rPr lang="de-DE" dirty="0"/>
-              <a:t> was: i </a:t>
-            </a:r>
-            <a:r>
-              <a:rPr lang="de-DE" dirty="0" err="1"/>
-              <a:t>dont</a:t>
-            </a:r>
-            <a:r>
-              <a:rPr lang="de-DE" dirty="0"/>
-              <a:t> </a:t>
-            </a:r>
-            <a:r>
-              <a:rPr lang="de-DE" dirty="0" err="1"/>
-              <a:t>neccessarily</a:t>
-            </a:r>
-            <a:r>
-              <a:rPr lang="de-DE" dirty="0"/>
-              <a:t> </a:t>
-            </a:r>
-            <a:r>
-              <a:rPr lang="de-DE" dirty="0" err="1"/>
-              <a:t>want</a:t>
-            </a:r>
-            <a:r>
-              <a:rPr lang="de-DE" dirty="0"/>
-              <a:t> </a:t>
-            </a:r>
-            <a:r>
-              <a:rPr lang="de-DE" dirty="0" err="1"/>
-              <a:t>to</a:t>
-            </a:r>
-            <a:r>
-              <a:rPr lang="de-DE" dirty="0"/>
-              <a:t> </a:t>
-            </a:r>
-            <a:r>
-              <a:rPr lang="de-DE" dirty="0" err="1"/>
-              <a:t>improve</a:t>
-            </a:r>
-            <a:r>
-              <a:rPr lang="de-DE" dirty="0"/>
-              <a:t> </a:t>
-            </a:r>
-            <a:r>
-              <a:rPr lang="de-DE" dirty="0" err="1"/>
-              <a:t>the</a:t>
-            </a:r>
-            <a:r>
-              <a:rPr lang="de-DE" dirty="0"/>
-              <a:t> </a:t>
-            </a:r>
-            <a:r>
-              <a:rPr lang="de-DE" dirty="0" err="1"/>
-              <a:t>training</a:t>
-            </a:r>
-            <a:r>
-              <a:rPr lang="de-DE" dirty="0"/>
-              <a:t> </a:t>
-            </a:r>
-            <a:r>
-              <a:rPr lang="de-DE" dirty="0" err="1"/>
-              <a:t>setup</a:t>
-            </a:r>
-            <a:r>
-              <a:rPr lang="de-DE" dirty="0"/>
-              <a:t> </a:t>
-            </a:r>
-            <a:r>
-              <a:rPr lang="de-DE" dirty="0" err="1"/>
-              <a:t>or</a:t>
-            </a:r>
-            <a:r>
-              <a:rPr lang="de-DE" dirty="0"/>
-              <a:t> </a:t>
-            </a:r>
-            <a:r>
-              <a:rPr lang="de-DE" dirty="0" err="1"/>
-              <a:t>the</a:t>
-            </a:r>
-            <a:r>
-              <a:rPr lang="de-DE" dirty="0"/>
-              <a:t> </a:t>
-            </a:r>
-            <a:r>
-              <a:rPr lang="de-DE" dirty="0" err="1"/>
-              <a:t>hyperparameters</a:t>
-            </a:r>
-            <a:r>
-              <a:rPr lang="de-DE" dirty="0"/>
-              <a:t> </a:t>
-            </a:r>
-            <a:r>
-              <a:rPr lang="de-DE" dirty="0" err="1"/>
-              <a:t>those</a:t>
-            </a:r>
-            <a:r>
-              <a:rPr lang="de-DE" dirty="0"/>
-              <a:t> </a:t>
-            </a:r>
-            <a:r>
-              <a:rPr lang="de-DE" dirty="0" err="1"/>
-              <a:t>should</a:t>
-            </a:r>
-            <a:r>
-              <a:rPr lang="de-DE" dirty="0"/>
-              <a:t> </a:t>
-            </a:r>
-            <a:r>
-              <a:rPr lang="de-DE" dirty="0" err="1"/>
-              <a:t>stay</a:t>
-            </a:r>
-            <a:r>
-              <a:rPr lang="de-DE" dirty="0"/>
-              <a:t> </a:t>
-            </a:r>
-            <a:r>
-              <a:rPr lang="de-DE" dirty="0" err="1"/>
-              <a:t>the</a:t>
-            </a:r>
-            <a:r>
-              <a:rPr lang="de-DE" dirty="0"/>
-              <a:t> same. Only </a:t>
-            </a:r>
-            <a:r>
-              <a:rPr lang="de-DE" dirty="0" err="1"/>
-              <a:t>the</a:t>
-            </a:r>
-            <a:r>
-              <a:rPr lang="de-DE" dirty="0"/>
-              <a:t> </a:t>
-            </a:r>
-            <a:r>
-              <a:rPr lang="de-DE" dirty="0" err="1"/>
-              <a:t>architecture</a:t>
-            </a:r>
-            <a:r>
-              <a:rPr lang="de-DE" dirty="0"/>
-              <a:t> </a:t>
-            </a:r>
-            <a:r>
-              <a:rPr lang="de-DE" dirty="0" err="1"/>
-              <a:t>differs</a:t>
-            </a:r>
-            <a:r>
-              <a:rPr lang="de-DE" dirty="0"/>
-              <a:t>. My </a:t>
-            </a:r>
-            <a:r>
-              <a:rPr lang="de-DE" dirty="0" err="1"/>
-              <a:t>baseline</a:t>
-            </a:r>
-            <a:r>
-              <a:rPr lang="de-DE" dirty="0"/>
-              <a:t> </a:t>
-            </a:r>
-            <a:r>
-              <a:rPr lang="de-DE" dirty="0" err="1"/>
-              <a:t>is</a:t>
-            </a:r>
-            <a:r>
-              <a:rPr lang="de-DE" dirty="0"/>
-              <a:t> a </a:t>
-            </a:r>
-            <a:r>
-              <a:rPr lang="de-DE" dirty="0" err="1"/>
-              <a:t>textbook</a:t>
-            </a:r>
-            <a:r>
-              <a:rPr lang="de-DE" dirty="0"/>
-              <a:t> GPT and </a:t>
-            </a:r>
-            <a:r>
-              <a:rPr lang="de-DE" dirty="0" err="1"/>
-              <a:t>the</a:t>
-            </a:r>
-            <a:r>
-              <a:rPr lang="de-DE" dirty="0"/>
-              <a:t> </a:t>
-            </a:r>
-            <a:r>
-              <a:rPr lang="de-DE" dirty="0" err="1"/>
-              <a:t>professor‘s</a:t>
-            </a:r>
-            <a:r>
-              <a:rPr lang="de-DE" dirty="0"/>
-              <a:t> </a:t>
-            </a:r>
-            <a:r>
-              <a:rPr lang="de-DE" dirty="0" err="1"/>
-              <a:t>SpikeGPT</a:t>
-            </a:r>
-            <a:r>
-              <a:rPr lang="de-DE" dirty="0"/>
-              <a:t> </a:t>
-            </a:r>
-            <a:r>
-              <a:rPr lang="de-DE" dirty="0" err="1"/>
-              <a:t>adds</a:t>
-            </a:r>
-            <a:r>
-              <a:rPr lang="de-DE" dirty="0"/>
-              <a:t> multiple </a:t>
-            </a:r>
-            <a:r>
-              <a:rPr lang="de-DE" dirty="0" err="1"/>
-              <a:t>refinements</a:t>
-            </a:r>
-            <a:r>
-              <a:rPr lang="de-DE" dirty="0"/>
-              <a:t>. </a:t>
-            </a:r>
-            <a:r>
-              <a:rPr lang="en-US" dirty="0"/>
-              <a:t>They of course all make sense and are SOTA choices — the question I also had then was how much do they actually matter? </a:t>
-            </a:r>
-          </a:p>
-          <a:p>
-            <a:endParaRPr lang="de-DE" dirty="0"/>
-          </a:p>
-          <a:p>
-            <a:r>
-              <a:rPr lang="en-US" b="1" dirty="0"/>
-              <a:t>Positional encoding</a:t>
-            </a:r>
-            <a:r>
-              <a:rPr lang="en-US" dirty="0"/>
-              <a:t> — "How the model knows the order of timesteps: I add a fixed sinusoidal signal once at the input; </a:t>
-            </a:r>
-            <a:r>
-              <a:rPr lang="en-US" dirty="0" err="1"/>
-              <a:t>SpikeGPT</a:t>
-            </a:r>
-            <a:r>
-              <a:rPr lang="en-US" dirty="0"/>
-              <a:t> rotates the representations inside every attention layer (</a:t>
-            </a:r>
-            <a:r>
-              <a:rPr lang="en-US" dirty="0" err="1"/>
-              <a:t>RoPE</a:t>
-            </a:r>
-            <a:r>
-              <a:rPr lang="en-US" dirty="0"/>
-              <a:t>), which generalizes better to position."</a:t>
-            </a:r>
-          </a:p>
-          <a:p>
-            <a:r>
-              <a:rPr lang="en-US" b="1" dirty="0"/>
-              <a:t>Attention</a:t>
-            </a:r>
-            <a:r>
-              <a:rPr lang="en-US" dirty="0"/>
-              <a:t> — "Both compute attention — mine the standard textbook way, </a:t>
-            </a:r>
-            <a:r>
-              <a:rPr lang="en-US" dirty="0" err="1"/>
-              <a:t>SpikeGPT</a:t>
-            </a:r>
-            <a:r>
-              <a:rPr lang="en-US" dirty="0"/>
-              <a:t> uses </a:t>
-            </a:r>
-            <a:r>
-              <a:rPr lang="en-US" dirty="0" err="1"/>
-              <a:t>FlexAttention</a:t>
-            </a:r>
-            <a:r>
-              <a:rPr lang="en-US" dirty="0"/>
-              <a:t>, an optimized GPU implementation."</a:t>
-            </a:r>
-          </a:p>
-          <a:p>
-            <a:r>
-              <a:rPr lang="en-US" b="1" dirty="0"/>
-              <a:t>Normalization</a:t>
-            </a:r>
-            <a:r>
-              <a:rPr lang="en-US" dirty="0"/>
-              <a:t> — "How activations are kept stable during training: I use </a:t>
-            </a:r>
-            <a:r>
-              <a:rPr lang="en-US" dirty="0" err="1"/>
-              <a:t>LayerNorm</a:t>
-            </a:r>
-            <a:r>
-              <a:rPr lang="en-US" dirty="0"/>
-              <a:t>, </a:t>
-            </a:r>
-            <a:r>
-              <a:rPr lang="en-US" dirty="0" err="1"/>
-              <a:t>SpikeGPT</a:t>
-            </a:r>
-            <a:r>
-              <a:rPr lang="en-US" dirty="0"/>
-              <a:t> uses </a:t>
-            </a:r>
-            <a:r>
-              <a:rPr lang="en-US" dirty="0" err="1"/>
-              <a:t>RMSNorm</a:t>
-            </a:r>
-            <a:r>
-              <a:rPr lang="en-US" dirty="0"/>
-              <a:t>, a slightly simpler and faster variant."</a:t>
-            </a:r>
-          </a:p>
-          <a:p>
-            <a:r>
-              <a:rPr lang="en-US" b="1" dirty="0"/>
-              <a:t>QK normalization</a:t>
-            </a:r>
-            <a:r>
-              <a:rPr lang="en-US" dirty="0"/>
-              <a:t> — "</a:t>
-            </a:r>
-            <a:r>
-              <a:rPr lang="en-US" dirty="0" err="1"/>
-              <a:t>SpikeGPT</a:t>
-            </a:r>
-            <a:r>
-              <a:rPr lang="en-US" dirty="0"/>
-              <a:t> additionally normalizes the queries and keys before attention for extra training stability — mine doesn't."</a:t>
-            </a:r>
-          </a:p>
-          <a:p>
-            <a:r>
-              <a:rPr lang="en-US" b="1" dirty="0"/>
-              <a:t>Output projection</a:t>
-            </a:r>
-            <a:r>
-              <a:rPr lang="en-US" dirty="0"/>
-              <a:t> — "A small initialization trick: </a:t>
-            </a:r>
-            <a:r>
-              <a:rPr lang="en-US" dirty="0" err="1"/>
-              <a:t>SpikeGPT</a:t>
-            </a:r>
-            <a:r>
-              <a:rPr lang="en-US" dirty="0"/>
-              <a:t> starts the attention output at zero so each layer begins as a no-op, which can stabilize early training."</a:t>
-            </a:r>
-          </a:p>
-          <a:p>
-            <a:endParaRPr lang="de-DE" dirty="0"/>
+              <a:t> at </a:t>
+            </a:r>
+            <a:r>
+              <a:rPr lang="de-DE" b="1" dirty="0" err="1"/>
+              <a:t>first</a:t>
+            </a:r>
+            <a:endParaRPr lang="de-DE" b="1" dirty="0"/>
           </a:p>
         </p:txBody>
       </p:sp>
@@ -4542,7 +9634,7 @@
             <a:pPr rtl="0"/>
             <a:fld id="{4C3B2649-7BD8-4005-A99E-30D13769A8BD}" type="slidenum">
               <a:rPr lang="en-US" smtClean="0"/>
-              <a:t>11</a:t>
+              <a:t>10</a:t>
             </a:fld>
             <a:endParaRPr lang="en-US" dirty="0"/>
           </a:p>
@@ -4551,7 +9643,7 @@
     </p:spTree>
     <p:extLst>
       <p:ext uri="{BB962C8B-B14F-4D97-AF65-F5344CB8AC3E}">
-        <p14:creationId xmlns:p14="http://schemas.microsoft.com/office/powerpoint/2010/main" val="1225185899"/>
+        <p14:creationId xmlns:p14="http://schemas.microsoft.com/office/powerpoint/2010/main" val="3154127366"/>
       </p:ext>
     </p:extLst>
   </p:cSld>
@@ -4606,64 +9698,341 @@
           <a:lstStyle/>
           <a:p>
             <a:r>
+              <a:rPr lang="de-DE" dirty="0"/>
+              <a:t>My </a:t>
+            </a:r>
+            <a:r>
+              <a:rPr lang="de-DE" dirty="0" err="1"/>
+              <a:t>thought</a:t>
+            </a:r>
+            <a:r>
+              <a:rPr lang="de-DE" dirty="0"/>
+              <a:t> was: i dont </a:t>
+            </a:r>
+            <a:r>
+              <a:rPr lang="de-DE" dirty="0" err="1"/>
+              <a:t>want</a:t>
+            </a:r>
+            <a:r>
+              <a:rPr lang="de-DE" dirty="0"/>
+              <a:t> </a:t>
+            </a:r>
+            <a:r>
+              <a:rPr lang="de-DE" dirty="0" err="1"/>
+              <a:t>to</a:t>
+            </a:r>
+            <a:r>
+              <a:rPr lang="de-DE" dirty="0"/>
+              <a:t> </a:t>
+            </a:r>
+            <a:r>
+              <a:rPr lang="de-DE" dirty="0" err="1"/>
+              <a:t>improve</a:t>
+            </a:r>
+            <a:r>
+              <a:rPr lang="de-DE" dirty="0"/>
+              <a:t> </a:t>
+            </a:r>
+            <a:r>
+              <a:rPr lang="de-DE" dirty="0" err="1"/>
+              <a:t>the</a:t>
+            </a:r>
+            <a:r>
+              <a:rPr lang="de-DE" dirty="0"/>
+              <a:t> </a:t>
+            </a:r>
+            <a:r>
+              <a:rPr lang="de-DE" dirty="0" err="1"/>
+              <a:t>training</a:t>
+            </a:r>
+            <a:r>
+              <a:rPr lang="de-DE" dirty="0"/>
+              <a:t> </a:t>
+            </a:r>
+            <a:r>
+              <a:rPr lang="de-DE" dirty="0" err="1"/>
+              <a:t>setup</a:t>
+            </a:r>
+            <a:r>
+              <a:rPr lang="de-DE" dirty="0"/>
+              <a:t> </a:t>
+            </a:r>
+            <a:r>
+              <a:rPr lang="de-DE" dirty="0" err="1"/>
+              <a:t>or</a:t>
+            </a:r>
+            <a:r>
+              <a:rPr lang="de-DE" dirty="0"/>
+              <a:t> </a:t>
+            </a:r>
+            <a:r>
+              <a:rPr lang="de-DE" dirty="0" err="1"/>
+              <a:t>the</a:t>
+            </a:r>
+            <a:r>
+              <a:rPr lang="de-DE" dirty="0"/>
+              <a:t> </a:t>
+            </a:r>
+            <a:r>
+              <a:rPr lang="de-DE" dirty="0" err="1"/>
+              <a:t>hyperparameters</a:t>
+            </a:r>
+            <a:r>
+              <a:rPr lang="de-DE" dirty="0"/>
+              <a:t> </a:t>
+            </a:r>
+            <a:r>
+              <a:rPr lang="de-DE" dirty="0" err="1"/>
+              <a:t>those</a:t>
+            </a:r>
+            <a:r>
+              <a:rPr lang="de-DE" dirty="0"/>
+              <a:t> </a:t>
+            </a:r>
+            <a:r>
+              <a:rPr lang="de-DE" dirty="0" err="1"/>
+              <a:t>should</a:t>
+            </a:r>
+            <a:r>
+              <a:rPr lang="de-DE" dirty="0"/>
+              <a:t> </a:t>
+            </a:r>
+            <a:r>
+              <a:rPr lang="de-DE" dirty="0" err="1"/>
+              <a:t>stay</a:t>
+            </a:r>
+            <a:r>
+              <a:rPr lang="de-DE" dirty="0"/>
+              <a:t> </a:t>
+            </a:r>
+            <a:r>
+              <a:rPr lang="de-DE" dirty="0" err="1"/>
+              <a:t>the</a:t>
+            </a:r>
+            <a:r>
+              <a:rPr lang="de-DE" dirty="0"/>
+              <a:t> same. Only </a:t>
+            </a:r>
+            <a:r>
+              <a:rPr lang="de-DE" dirty="0" err="1"/>
+              <a:t>the</a:t>
+            </a:r>
+            <a:r>
+              <a:rPr lang="de-DE" dirty="0"/>
+              <a:t> </a:t>
+            </a:r>
+            <a:r>
+              <a:rPr lang="de-DE" dirty="0" err="1"/>
+              <a:t>architecture</a:t>
+            </a:r>
+            <a:r>
+              <a:rPr lang="de-DE" dirty="0"/>
+              <a:t> </a:t>
+            </a:r>
+            <a:r>
+              <a:rPr lang="de-DE" dirty="0" err="1"/>
+              <a:t>differs</a:t>
+            </a:r>
+            <a:r>
+              <a:rPr lang="de-DE" dirty="0"/>
+              <a:t>. My </a:t>
+            </a:r>
+            <a:r>
+              <a:rPr lang="de-DE" dirty="0" err="1"/>
+              <a:t>baseline</a:t>
+            </a:r>
+            <a:r>
+              <a:rPr lang="de-DE" dirty="0"/>
+              <a:t> </a:t>
+            </a:r>
+            <a:r>
+              <a:rPr lang="de-DE" dirty="0" err="1"/>
+              <a:t>is</a:t>
+            </a:r>
+            <a:r>
+              <a:rPr lang="de-DE" dirty="0"/>
+              <a:t> a </a:t>
+            </a:r>
+            <a:r>
+              <a:rPr lang="de-DE" dirty="0" err="1"/>
+              <a:t>textbook</a:t>
+            </a:r>
+            <a:r>
+              <a:rPr lang="de-DE" dirty="0"/>
+              <a:t> GPT and </a:t>
+            </a:r>
+            <a:r>
+              <a:rPr lang="de-DE" dirty="0" err="1"/>
+              <a:t>the</a:t>
+            </a:r>
+            <a:r>
+              <a:rPr lang="de-DE" dirty="0"/>
+              <a:t> </a:t>
+            </a:r>
+            <a:r>
+              <a:rPr lang="de-DE" dirty="0" err="1"/>
+              <a:t>professor‘s</a:t>
+            </a:r>
+            <a:r>
+              <a:rPr lang="de-DE" dirty="0"/>
+              <a:t> </a:t>
+            </a:r>
+            <a:r>
+              <a:rPr lang="de-DE" dirty="0" err="1"/>
+              <a:t>SpikeGPT</a:t>
+            </a:r>
+            <a:r>
+              <a:rPr lang="de-DE" dirty="0"/>
+              <a:t> </a:t>
+            </a:r>
+            <a:r>
+              <a:rPr lang="de-DE" dirty="0" err="1"/>
+              <a:t>adds</a:t>
+            </a:r>
+            <a:r>
+              <a:rPr lang="de-DE" dirty="0"/>
+              <a:t> multiple </a:t>
+            </a:r>
+            <a:r>
+              <a:rPr lang="de-DE" dirty="0" err="1"/>
+              <a:t>refinements</a:t>
+            </a:r>
+            <a:r>
+              <a:rPr lang="de-DE" dirty="0"/>
+              <a:t>. </a:t>
+            </a:r>
+            <a:r>
+              <a:rPr lang="en-US" dirty="0"/>
+              <a:t>They of course all make sense and are SOTA choices — the question I also had then was how much do they actually matter? </a:t>
+            </a:r>
+          </a:p>
+          <a:p>
+            <a:endParaRPr lang="de-DE" dirty="0"/>
+          </a:p>
+          <a:p>
+            <a:r>
               <a:rPr lang="en-US" b="1" dirty="0"/>
-              <a:t>two reasons:</a:t>
-            </a:r>
-            <a:endParaRPr lang="en-US" dirty="0"/>
+              <a:t>Positional encoding</a:t>
+            </a:r>
+            <a:r>
+              <a:rPr lang="en-US" dirty="0"/>
+              <a:t> — "How the model knows the order of timesteps: I add a fixed sinusoidal signal once at the input; </a:t>
+            </a:r>
+            <a:r>
+              <a:rPr lang="en-US" dirty="0" err="1"/>
+              <a:t>SpikeGPT</a:t>
+            </a:r>
+            <a:r>
+              <a:rPr lang="en-US" dirty="0"/>
+              <a:t> rotates the representations inside every attention layer (</a:t>
+            </a:r>
+            <a:r>
+              <a:rPr lang="en-US" dirty="0" err="1"/>
+              <a:t>RoPE</a:t>
+            </a:r>
+            <a:r>
+              <a:rPr lang="en-US" dirty="0"/>
+              <a:t>), which generalizes better to position."</a:t>
+            </a:r>
           </a:p>
           <a:p>
             <a:r>
               <a:rPr lang="en-US" b="1" dirty="0"/>
-              <a:t>Reason 1:</a:t>
+              <a:t>Attention</a:t>
             </a:r>
             <a:r>
               <a:rPr lang="en-US" dirty="0"/>
-              <a:t> One of the features is just the average firing rate over time. If you shuffle the time order, the average doesn't change at all — so this feature can't tell the difference.</a:t>
+              <a:t> — "Both compute attention — mine the standard textbook way, </a:t>
+            </a:r>
+            <a:r>
+              <a:rPr lang="en-US" dirty="0" err="1"/>
+              <a:t>SpikeGPT</a:t>
+            </a:r>
+            <a:r>
+              <a:rPr lang="en-US" dirty="0"/>
+              <a:t> uses </a:t>
+            </a:r>
+            <a:r>
+              <a:rPr lang="en-US" dirty="0" err="1"/>
+              <a:t>FlexAttention</a:t>
+            </a:r>
+            <a:r>
+              <a:rPr lang="en-US" dirty="0"/>
+              <a:t>, an optimized GPU implementation."</a:t>
             </a:r>
           </a:p>
           <a:p>
             <a:r>
               <a:rPr lang="en-US" b="1" dirty="0"/>
-              <a:t>Reason 2:</a:t>
+              <a:t>Normalization</a:t>
             </a:r>
             <a:r>
               <a:rPr lang="en-US" dirty="0"/>
-              <a:t> When you average a whole brain region together, the signal becomes slow and smooth. The features mostly capture this slow part — and shuffling time barely changes slow signals. It's the fast, moment-to-moment detail that shuffling destroys, and that's exactly what these features ignore.</a:t>
-            </a:r>
-          </a:p>
-          <a:p>
-            <a:endParaRPr lang="en-US" dirty="0"/>
-          </a:p>
-          <a:p>
+              <a:t> — "How activations are kept stable during training: I use </a:t>
+            </a:r>
+            <a:r>
+              <a:rPr lang="en-US" dirty="0" err="1"/>
+              <a:t>LayerNorm</a:t>
+            </a:r>
             <a:r>
               <a:rPr lang="en-US" dirty="0"/>
-              <a:t>"The features mostly capture </a:t>
-            </a:r>
-            <a:r>
-              <a:rPr lang="en-US" i="1" dirty="0"/>
-              <a:t>how much</a:t>
+              <a:t>, </a:t>
+            </a:r>
+            <a:r>
+              <a:rPr lang="en-US" dirty="0" err="1"/>
+              <a:t>SpikeGPT</a:t>
             </a:r>
             <a:r>
               <a:rPr lang="en-US" dirty="0"/>
-              <a:t> and </a:t>
-            </a:r>
-            <a:r>
-              <a:rPr lang="en-US" i="1" dirty="0"/>
-              <a:t>how slow</a:t>
+              <a:t> uses </a:t>
+            </a:r>
+            <a:r>
+              <a:rPr lang="en-US" dirty="0" err="1"/>
+              <a:t>RMSNorm</a:t>
             </a:r>
             <a:r>
               <a:rPr lang="en-US" dirty="0"/>
-              <a:t> each region fires — not the fine temporal order — so shuffling time barely moves them.“</a:t>
-            </a:r>
-          </a:p>
-          <a:p>
-            <a:endParaRPr lang="en-US" dirty="0"/>
-          </a:p>
-          <a:p>
+              <a:t>, a slightly simpler and faster variant."</a:t>
+            </a:r>
+          </a:p>
+          <a:p>
+            <a:r>
+              <a:rPr lang="en-US" b="1" dirty="0"/>
+              <a:t>QK normalization</a:t>
+            </a:r>
             <a:r>
               <a:rPr lang="en-US" dirty="0"/>
-              <a:t>Potential fix: Instead of only looking at rhythm, it splits the sequence into time blocks and keeps each block as its own feature — so shuffling the time order scrambles the blocks and the score finally reacts.</a:t>
-            </a:r>
+              <a:t> — "</a:t>
+            </a:r>
+            <a:r>
+              <a:rPr lang="en-US" dirty="0" err="1"/>
+              <a:t>SpikeGPT</a:t>
+            </a:r>
+            <a:r>
+              <a:rPr lang="en-US" dirty="0"/>
+              <a:t> additionally normalizes the queries and keys before attention for extra training stability — mine doesn't."</a:t>
+            </a:r>
+          </a:p>
+          <a:p>
+            <a:r>
+              <a:rPr lang="en-US" b="1" dirty="0"/>
+              <a:t>Output projection</a:t>
+            </a:r>
+            <a:r>
+              <a:rPr lang="en-US" dirty="0"/>
+              <a:t> — "A small initialization trick: </a:t>
+            </a:r>
+            <a:r>
+              <a:rPr lang="en-US" dirty="0" err="1"/>
+              <a:t>SpikeGPT</a:t>
+            </a:r>
+            <a:r>
+              <a:rPr lang="en-US" dirty="0"/>
+              <a:t> starts the attention output at zero so each layer begins as a no-op, which can stabilize early training."</a:t>
+            </a:r>
+          </a:p>
+          <a:p>
+            <a:endParaRPr lang="de-DE" dirty="0"/>
           </a:p>
         </p:txBody>
       </p:sp>
@@ -4685,7 +10054,7 @@
             <a:pPr rtl="0"/>
             <a:fld id="{4C3B2649-7BD8-4005-A99E-30D13769A8BD}" type="slidenum">
               <a:rPr lang="en-US" smtClean="0"/>
-              <a:t>15</a:t>
+              <a:t>11</a:t>
             </a:fld>
             <a:endParaRPr lang="en-US" dirty="0"/>
           </a:p>
@@ -4694,7 +10063,7 @@
     </p:spTree>
     <p:extLst>
       <p:ext uri="{BB962C8B-B14F-4D97-AF65-F5344CB8AC3E}">
-        <p14:creationId xmlns:p14="http://schemas.microsoft.com/office/powerpoint/2010/main" val="1973885232"/>
+        <p14:creationId xmlns:p14="http://schemas.microsoft.com/office/powerpoint/2010/main" val="1225185899"/>
       </p:ext>
     </p:extLst>
   </p:cSld>
@@ -4749,214 +10118,54 @@
           <a:lstStyle/>
           <a:p>
             <a:r>
-              <a:rPr lang="de-DE" dirty="0"/>
-              <a:t>PCA: </a:t>
-            </a:r>
-            <a:r>
-              <a:rPr lang="de-DE" dirty="0" err="1"/>
-              <a:t>Finds</a:t>
-            </a:r>
-            <a:r>
-              <a:rPr lang="de-DE" dirty="0"/>
-              <a:t> </a:t>
-            </a:r>
-            <a:r>
-              <a:rPr lang="de-DE" dirty="0" err="1"/>
-              <a:t>the</a:t>
-            </a:r>
-            <a:r>
-              <a:rPr lang="de-DE" dirty="0"/>
-              <a:t> </a:t>
-            </a:r>
-            <a:r>
-              <a:rPr lang="de-DE" dirty="0" err="1"/>
-              <a:t>directions</a:t>
-            </a:r>
-            <a:r>
-              <a:rPr lang="de-DE" dirty="0"/>
-              <a:t> </a:t>
-            </a:r>
-            <a:r>
-              <a:rPr lang="de-DE" dirty="0" err="1"/>
-              <a:t>of</a:t>
-            </a:r>
-            <a:r>
-              <a:rPr lang="de-DE" dirty="0"/>
-              <a:t> </a:t>
-            </a:r>
-            <a:r>
-              <a:rPr lang="de-DE" dirty="0" err="1"/>
-              <a:t>the</a:t>
-            </a:r>
-            <a:r>
-              <a:rPr lang="de-DE" dirty="0"/>
-              <a:t> </a:t>
-            </a:r>
-            <a:r>
-              <a:rPr lang="de-DE" dirty="0" err="1"/>
-              <a:t>biggest</a:t>
-            </a:r>
-            <a:r>
-              <a:rPr lang="de-DE" dirty="0"/>
-              <a:t> </a:t>
-            </a:r>
-            <a:r>
-              <a:rPr lang="de-DE" dirty="0" err="1"/>
-              <a:t>variation</a:t>
-            </a:r>
-            <a:r>
-              <a:rPr lang="de-DE" dirty="0"/>
+              <a:rPr lang="en-US" b="1" dirty="0"/>
+              <a:t>two reasons:</a:t>
+            </a:r>
+            <a:endParaRPr lang="en-US" dirty="0"/>
+          </a:p>
+          <a:p>
+            <a:r>
+              <a:rPr lang="en-US" b="1" dirty="0"/>
+              <a:t>Reason 1:</a:t>
+            </a:r>
+            <a:r>
+              <a:rPr lang="en-US" dirty="0"/>
+              <a:t> One of the features is just the average firing rate over time. If you shuffle the time order, the average doesn't change at all — so this feature can't tell the difference.</a:t>
+            </a:r>
+          </a:p>
+          <a:p>
+            <a:r>
+              <a:rPr lang="en-US" b="1" dirty="0"/>
+              <a:t>Reason 2:</a:t>
+            </a:r>
+            <a:r>
+              <a:rPr lang="en-US" dirty="0"/>
+              <a:t> When you average a whole brain region together, the signal becomes slow and smooth. The features mostly capture this slow part — and shuffling time barely changes slow signals. It's the fast, moment-to-moment detail that shuffling destroys, and that's exactly what these features ignore.</a:t>
+            </a:r>
+          </a:p>
+          <a:p>
+            <a:endParaRPr lang="en-US" dirty="0"/>
+          </a:p>
+          <a:p>
+            <a:r>
+              <a:rPr lang="en-US" dirty="0"/>
+              <a:t>"The features mostly capture </a:t>
+            </a:r>
+            <a:r>
+              <a:rPr lang="en-US" i="1" dirty="0"/>
+              <a:t>how much</a:t>
+            </a:r>
+            <a:r>
+              <a:rPr lang="en-US" dirty="0"/>
               <a:t> and </a:t>
             </a:r>
             <a:r>
-              <a:rPr lang="de-DE" dirty="0" err="1"/>
-              <a:t>flattens</a:t>
-            </a:r>
-            <a:r>
-              <a:rPr lang="de-DE" dirty="0"/>
-              <a:t> </a:t>
-            </a:r>
-            <a:r>
-              <a:rPr lang="de-DE" dirty="0" err="1"/>
-              <a:t>everything</a:t>
-            </a:r>
-            <a:r>
-              <a:rPr lang="de-DE" dirty="0"/>
-              <a:t> </a:t>
-            </a:r>
-            <a:r>
-              <a:rPr lang="de-DE" dirty="0" err="1"/>
-              <a:t>into</a:t>
-            </a:r>
-            <a:r>
-              <a:rPr lang="de-DE" dirty="0"/>
-              <a:t> 2D </a:t>
-            </a:r>
-            <a:r>
-              <a:rPr lang="de-DE" dirty="0" err="1"/>
-              <a:t>linearly</a:t>
-            </a:r>
-            <a:r>
-              <a:rPr lang="de-DE" dirty="0"/>
-              <a:t>. Strength: </a:t>
-            </a:r>
-            <a:r>
-              <a:rPr lang="de-DE" dirty="0" err="1"/>
-              <a:t>does</a:t>
-            </a:r>
-            <a:r>
-              <a:rPr lang="de-DE" dirty="0"/>
-              <a:t> not </a:t>
-            </a:r>
-            <a:r>
-              <a:rPr lang="de-DE" dirty="0" err="1"/>
-              <a:t>distort</a:t>
-            </a:r>
-            <a:r>
-              <a:rPr lang="de-DE" dirty="0"/>
-              <a:t> </a:t>
-            </a:r>
-            <a:r>
-              <a:rPr lang="de-DE" dirty="0" err="1"/>
-              <a:t>distances</a:t>
-            </a:r>
-            <a:r>
-              <a:rPr lang="de-DE" dirty="0"/>
-              <a:t> </a:t>
-            </a:r>
-            <a:r>
-              <a:rPr lang="de-DE" dirty="0">
-                <a:sym typeface="Wingdings" panose="05000000000000000000" pitchFamily="2" charset="2"/>
-              </a:rPr>
-              <a:t> </a:t>
-            </a:r>
-            <a:r>
-              <a:rPr lang="de-DE" dirty="0" err="1">
-                <a:sym typeface="Wingdings" panose="05000000000000000000" pitchFamily="2" charset="2"/>
-              </a:rPr>
-              <a:t>if</a:t>
-            </a:r>
-            <a:r>
-              <a:rPr lang="de-DE" dirty="0">
-                <a:sym typeface="Wingdings" panose="05000000000000000000" pitchFamily="2" charset="2"/>
-              </a:rPr>
-              <a:t> real/</a:t>
-            </a:r>
-            <a:r>
-              <a:rPr lang="de-DE" dirty="0" err="1">
-                <a:sym typeface="Wingdings" panose="05000000000000000000" pitchFamily="2" charset="2"/>
-              </a:rPr>
-              <a:t>generated</a:t>
-            </a:r>
-            <a:r>
-              <a:rPr lang="de-DE" dirty="0">
-                <a:sym typeface="Wingdings" panose="05000000000000000000" pitchFamily="2" charset="2"/>
-              </a:rPr>
-              <a:t> </a:t>
-            </a:r>
-            <a:r>
-              <a:rPr lang="de-DE" dirty="0" err="1">
-                <a:sym typeface="Wingdings" panose="05000000000000000000" pitchFamily="2" charset="2"/>
-              </a:rPr>
-              <a:t>overlap</a:t>
-            </a:r>
-            <a:r>
-              <a:rPr lang="de-DE" dirty="0">
-                <a:sym typeface="Wingdings" panose="05000000000000000000" pitchFamily="2" charset="2"/>
-              </a:rPr>
-              <a:t> </a:t>
-            </a:r>
-            <a:r>
-              <a:rPr lang="de-DE" dirty="0" err="1">
-                <a:sym typeface="Wingdings" panose="05000000000000000000" pitchFamily="2" charset="2"/>
-              </a:rPr>
-              <a:t>the</a:t>
-            </a:r>
-            <a:r>
-              <a:rPr lang="de-DE" dirty="0">
-                <a:sym typeface="Wingdings" panose="05000000000000000000" pitchFamily="2" charset="2"/>
-              </a:rPr>
-              <a:t> </a:t>
-            </a:r>
-            <a:r>
-              <a:rPr lang="de-DE" dirty="0" err="1">
-                <a:sym typeface="Wingdings" panose="05000000000000000000" pitchFamily="2" charset="2"/>
-              </a:rPr>
-              <a:t>overlap</a:t>
-            </a:r>
-            <a:r>
-              <a:rPr lang="de-DE" dirty="0">
-                <a:sym typeface="Wingdings" panose="05000000000000000000" pitchFamily="2" charset="2"/>
-              </a:rPr>
-              <a:t> </a:t>
-            </a:r>
-            <a:r>
-              <a:rPr lang="de-DE" dirty="0" err="1">
-                <a:sym typeface="Wingdings" panose="05000000000000000000" pitchFamily="2" charset="2"/>
-              </a:rPr>
-              <a:t>is</a:t>
-            </a:r>
-            <a:r>
-              <a:rPr lang="de-DE" dirty="0">
-                <a:sym typeface="Wingdings" panose="05000000000000000000" pitchFamily="2" charset="2"/>
-              </a:rPr>
-              <a:t> real. </a:t>
-            </a:r>
-            <a:r>
-              <a:rPr lang="de-DE" dirty="0" err="1">
-                <a:sym typeface="Wingdings" panose="05000000000000000000" pitchFamily="2" charset="2"/>
-              </a:rPr>
-              <a:t>Weakness</a:t>
-            </a:r>
-            <a:r>
-              <a:rPr lang="de-DE" dirty="0">
-                <a:sym typeface="Wingdings" panose="05000000000000000000" pitchFamily="2" charset="2"/>
-              </a:rPr>
-              <a:t>: </a:t>
+              <a:rPr lang="en-US" i="1" dirty="0"/>
+              <a:t>how slow</a:t>
             </a:r>
             <a:r>
               <a:rPr lang="en-US" dirty="0"/>
-              <a:t>if the data has curved or complex structure, PCA can squash it into a blob and hide it.</a:t>
+              <a:t> each region fires — not the fine temporal order — so shuffling time barely moves them.“</a:t>
             </a:r>
           </a:p>
           <a:p>
@@ -4965,40 +10174,8 @@
           <a:p>
             <a:r>
               <a:rPr lang="en-US" dirty="0"/>
-              <a:t>UMAP: nonlinear projection. It tries to preserve which points are neighbors </a:t>
-            </a:r>
-            <a:r>
-              <a:rPr lang="en-US" dirty="0">
-                <a:sym typeface="Wingdings" panose="05000000000000000000" pitchFamily="2" charset="2"/>
-              </a:rPr>
-              <a:t> good at revealing clusters or sub-structures. </a:t>
-            </a:r>
-            <a:r>
-              <a:rPr lang="en-US" dirty="0"/>
-              <a:t>— for example if real activity falls into several distinct states (different behaviors), UMAP tends to show them as separate groups. Its weakness: it can </a:t>
-            </a:r>
-            <a:r>
-              <a:rPr lang="en-US" i="1" dirty="0"/>
-              <a:t>invent</a:t>
-            </a:r>
-            <a:r>
-              <a:rPr lang="en-US" dirty="0"/>
-              <a:t> structure that isn't really there, and distances between clusters aren't meaningful.</a:t>
-            </a:r>
-          </a:p>
-          <a:p>
-            <a:endParaRPr lang="en-US" dirty="0"/>
-          </a:p>
-          <a:p>
-            <a:r>
-              <a:rPr lang="en-US" b="1" dirty="0"/>
-              <a:t>Why both:</a:t>
-            </a:r>
-            <a:r>
-              <a:rPr lang="en-US" dirty="0"/>
-              <a:t> they cross-check each other — PCA for spread, UMAP for structure.</a:t>
-            </a:r>
-            <a:endParaRPr lang="de-DE" dirty="0"/>
+              <a:t>Potential fix: Instead of only looking at rhythm, it splits the sequence into time blocks and keeps each block as its own feature — so shuffling the time order scrambles the blocks and the score finally reacts.</a:t>
+            </a:r>
           </a:p>
         </p:txBody>
       </p:sp>
@@ -5020,7 +10197,7 @@
             <a:pPr rtl="0"/>
             <a:fld id="{4C3B2649-7BD8-4005-A99E-30D13769A8BD}" type="slidenum">
               <a:rPr lang="en-US" smtClean="0"/>
-              <a:t>16</a:t>
+              <a:t>15</a:t>
             </a:fld>
             <a:endParaRPr lang="en-US" dirty="0"/>
           </a:p>
@@ -5029,7 +10206,7 @@
     </p:spTree>
     <p:extLst>
       <p:ext uri="{BB962C8B-B14F-4D97-AF65-F5344CB8AC3E}">
-        <p14:creationId xmlns:p14="http://schemas.microsoft.com/office/powerpoint/2010/main" val="1243690433"/>
+        <p14:creationId xmlns:p14="http://schemas.microsoft.com/office/powerpoint/2010/main" val="1973885232"/>
       </p:ext>
     </p:extLst>
   </p:cSld>
@@ -5085,11 +10262,11 @@
           <a:p>
             <a:r>
               <a:rPr lang="de-DE" dirty="0"/>
-              <a:t>I </a:t>
-            </a:r>
-            <a:r>
-              <a:rPr lang="de-DE" dirty="0" err="1"/>
-              <a:t>don‘t</a:t>
+              <a:t>PCA: </a:t>
+            </a:r>
+            <a:r>
+              <a:rPr lang="de-DE" dirty="0" err="1"/>
+              <a:t>Finds</a:t>
             </a:r>
             <a:r>
               <a:rPr lang="de-DE" dirty="0"/>
@@ -5097,7 +10274,7 @@
             </a:r>
             <a:r>
               <a:rPr lang="de-DE" dirty="0" err="1"/>
-              <a:t>really</a:t>
+              <a:t>the</a:t>
             </a:r>
             <a:r>
               <a:rPr lang="de-DE" dirty="0"/>
@@ -5105,7 +10282,7 @@
             </a:r>
             <a:r>
               <a:rPr lang="de-DE" dirty="0" err="1"/>
-              <a:t>see</a:t>
+              <a:t>directions</a:t>
             </a:r>
             <a:r>
               <a:rPr lang="de-DE" dirty="0"/>
@@ -5113,7 +10290,7 @@
             </a:r>
             <a:r>
               <a:rPr lang="de-DE" dirty="0" err="1"/>
-              <a:t>this</a:t>
+              <a:t>of</a:t>
             </a:r>
             <a:r>
               <a:rPr lang="de-DE" dirty="0"/>
@@ -5121,7 +10298,7 @@
             </a:r>
             <a:r>
               <a:rPr lang="de-DE" dirty="0" err="1"/>
-              <a:t>as</a:t>
+              <a:t>the</a:t>
             </a:r>
             <a:r>
               <a:rPr lang="de-DE" dirty="0"/>
@@ -5129,84 +10306,211 @@
             </a:r>
             <a:r>
               <a:rPr lang="de-DE" dirty="0" err="1"/>
+              <a:t>biggest</a:t>
+            </a:r>
+            <a:r>
+              <a:rPr lang="de-DE" dirty="0"/>
+              <a:t> </a:t>
+            </a:r>
+            <a:r>
+              <a:rPr lang="de-DE" dirty="0" err="1"/>
+              <a:t>variation</a:t>
+            </a:r>
+            <a:r>
+              <a:rPr lang="de-DE" dirty="0"/>
+              <a:t> and </a:t>
+            </a:r>
+            <a:r>
+              <a:rPr lang="de-DE" dirty="0" err="1"/>
+              <a:t>flattens</a:t>
+            </a:r>
+            <a:r>
+              <a:rPr lang="de-DE" dirty="0"/>
+              <a:t> </a:t>
+            </a:r>
+            <a:r>
+              <a:rPr lang="de-DE" dirty="0" err="1"/>
+              <a:t>everything</a:t>
+            </a:r>
+            <a:r>
+              <a:rPr lang="de-DE" dirty="0"/>
+              <a:t> </a:t>
+            </a:r>
+            <a:r>
+              <a:rPr lang="de-DE" dirty="0" err="1"/>
+              <a:t>into</a:t>
+            </a:r>
+            <a:r>
+              <a:rPr lang="de-DE" dirty="0"/>
+              <a:t> 2D </a:t>
+            </a:r>
+            <a:r>
+              <a:rPr lang="de-DE" dirty="0" err="1"/>
+              <a:t>linearly</a:t>
+            </a:r>
+            <a:r>
+              <a:rPr lang="de-DE" dirty="0"/>
+              <a:t>. Strength: </a:t>
+            </a:r>
+            <a:r>
+              <a:rPr lang="de-DE" dirty="0" err="1"/>
+              <a:t>does</a:t>
+            </a:r>
+            <a:r>
+              <a:rPr lang="de-DE" dirty="0"/>
+              <a:t> not </a:t>
+            </a:r>
+            <a:r>
+              <a:rPr lang="de-DE" dirty="0" err="1"/>
+              <a:t>distort</a:t>
+            </a:r>
+            <a:r>
+              <a:rPr lang="de-DE" dirty="0"/>
+              <a:t> </a:t>
+            </a:r>
+            <a:r>
+              <a:rPr lang="de-DE" dirty="0" err="1"/>
+              <a:t>distances</a:t>
+            </a:r>
+            <a:r>
+              <a:rPr lang="de-DE" dirty="0"/>
+              <a:t> </a:t>
+            </a:r>
+            <a:r>
+              <a:rPr lang="de-DE" dirty="0">
+                <a:sym typeface="Wingdings" panose="05000000000000000000" pitchFamily="2" charset="2"/>
+              </a:rPr>
+              <a:t> </a:t>
+            </a:r>
+            <a:r>
+              <a:rPr lang="de-DE" dirty="0" err="1">
+                <a:sym typeface="Wingdings" panose="05000000000000000000" pitchFamily="2" charset="2"/>
+              </a:rPr>
+              <a:t>if</a:t>
+            </a:r>
+            <a:r>
+              <a:rPr lang="de-DE" dirty="0">
+                <a:sym typeface="Wingdings" panose="05000000000000000000" pitchFamily="2" charset="2"/>
+              </a:rPr>
+              <a:t> real/</a:t>
+            </a:r>
+            <a:r>
+              <a:rPr lang="de-DE" dirty="0" err="1">
+                <a:sym typeface="Wingdings" panose="05000000000000000000" pitchFamily="2" charset="2"/>
+              </a:rPr>
+              <a:t>generated</a:t>
+            </a:r>
+            <a:r>
+              <a:rPr lang="de-DE" dirty="0">
+                <a:sym typeface="Wingdings" panose="05000000000000000000" pitchFamily="2" charset="2"/>
+              </a:rPr>
+              <a:t> </a:t>
+            </a:r>
+            <a:r>
+              <a:rPr lang="de-DE" dirty="0" err="1">
+                <a:sym typeface="Wingdings" panose="05000000000000000000" pitchFamily="2" charset="2"/>
+              </a:rPr>
+              <a:t>overlap</a:t>
+            </a:r>
+            <a:r>
+              <a:rPr lang="de-DE" dirty="0">
+                <a:sym typeface="Wingdings" panose="05000000000000000000" pitchFamily="2" charset="2"/>
+              </a:rPr>
+              <a:t> </a:t>
+            </a:r>
+            <a:r>
+              <a:rPr lang="de-DE" dirty="0" err="1">
+                <a:sym typeface="Wingdings" panose="05000000000000000000" pitchFamily="2" charset="2"/>
+              </a:rPr>
               <a:t>the</a:t>
             </a:r>
             <a:r>
-              <a:rPr lang="de-DE" dirty="0"/>
+              <a:rPr lang="de-DE" dirty="0">
+                <a:sym typeface="Wingdings" panose="05000000000000000000" pitchFamily="2" charset="2"/>
+              </a:rPr>
               <a:t> </a:t>
             </a:r>
             <a:r>
-              <a:rPr lang="de-DE" dirty="0" err="1"/>
-              <a:t>metrics</a:t>
-            </a:r>
-            <a:r>
-              <a:rPr lang="de-DE" dirty="0"/>
-              <a:t> fault. </a:t>
-            </a:r>
-            <a:r>
-              <a:rPr lang="de-DE" dirty="0" err="1"/>
-              <a:t>There</a:t>
-            </a:r>
-            <a:r>
-              <a:rPr lang="de-DE" dirty="0"/>
+              <a:rPr lang="de-DE" dirty="0" err="1">
+                <a:sym typeface="Wingdings" panose="05000000000000000000" pitchFamily="2" charset="2"/>
+              </a:rPr>
+              <a:t>overlap</a:t>
+            </a:r>
+            <a:r>
+              <a:rPr lang="de-DE" dirty="0">
+                <a:sym typeface="Wingdings" panose="05000000000000000000" pitchFamily="2" charset="2"/>
+              </a:rPr>
               <a:t> </a:t>
             </a:r>
             <a:r>
-              <a:rPr lang="de-DE" dirty="0" err="1"/>
+              <a:rPr lang="de-DE" dirty="0" err="1">
+                <a:sym typeface="Wingdings" panose="05000000000000000000" pitchFamily="2" charset="2"/>
+              </a:rPr>
               <a:t>is</a:t>
             </a:r>
             <a:r>
-              <a:rPr lang="de-DE" dirty="0"/>
-              <a:t> just </a:t>
-            </a:r>
-            <a:r>
-              <a:rPr lang="de-DE" dirty="0" err="1"/>
-              <a:t>to</a:t>
-            </a:r>
-            <a:r>
-              <a:rPr lang="de-DE" dirty="0"/>
-              <a:t> </a:t>
-            </a:r>
-            <a:r>
-              <a:rPr lang="de-DE" dirty="0" err="1"/>
-              <a:t>little</a:t>
-            </a:r>
-            <a:r>
-              <a:rPr lang="de-DE" dirty="0"/>
-              <a:t> </a:t>
-            </a:r>
-            <a:r>
-              <a:rPr lang="de-DE" dirty="0" err="1"/>
-              <a:t>data</a:t>
-            </a:r>
-            <a:r>
-              <a:rPr lang="de-DE" dirty="0"/>
-              <a:t> per </a:t>
-            </a:r>
-            <a:r>
-              <a:rPr lang="de-DE" dirty="0" err="1"/>
-              <a:t>session</a:t>
-            </a:r>
-            <a:r>
-              <a:rPr lang="de-DE" dirty="0"/>
-              <a:t> (~50 Samples </a:t>
-            </a:r>
-            <a:r>
-              <a:rPr lang="de-DE" dirty="0" err="1"/>
-              <a:t>vs</a:t>
-            </a:r>
-            <a:r>
-              <a:rPr lang="de-DE" dirty="0"/>
-              <a:t> 1000 Samples </a:t>
-            </a:r>
-            <a:r>
-              <a:rPr lang="de-DE" dirty="0" err="1"/>
-              <a:t>globally</a:t>
-            </a:r>
-            <a:r>
-              <a:rPr lang="de-DE" dirty="0"/>
-              <a:t>).</a:t>
-            </a:r>
+              <a:rPr lang="de-DE" dirty="0">
+                <a:sym typeface="Wingdings" panose="05000000000000000000" pitchFamily="2" charset="2"/>
+              </a:rPr>
+              <a:t> real. </a:t>
+            </a:r>
+            <a:r>
+              <a:rPr lang="de-DE" dirty="0" err="1">
+                <a:sym typeface="Wingdings" panose="05000000000000000000" pitchFamily="2" charset="2"/>
+              </a:rPr>
+              <a:t>Weakness</a:t>
+            </a:r>
+            <a:r>
+              <a:rPr lang="de-DE" dirty="0">
+                <a:sym typeface="Wingdings" panose="05000000000000000000" pitchFamily="2" charset="2"/>
+              </a:rPr>
+              <a:t>: </a:t>
+            </a:r>
+            <a:r>
+              <a:rPr lang="en-US" dirty="0"/>
+              <a:t>if the data has curved or complex structure, PCA can squash it into a blob and hide it.</a:t>
+            </a:r>
+          </a:p>
+          <a:p>
+            <a:endParaRPr lang="en-US" dirty="0"/>
+          </a:p>
+          <a:p>
+            <a:r>
+              <a:rPr lang="en-US" dirty="0"/>
+              <a:t>UMAP: nonlinear projection. It tries to preserve which points are neighbors </a:t>
+            </a:r>
+            <a:r>
+              <a:rPr lang="en-US" dirty="0">
+                <a:sym typeface="Wingdings" panose="05000000000000000000" pitchFamily="2" charset="2"/>
+              </a:rPr>
+              <a:t> good at revealing clusters or sub-structures. </a:t>
+            </a:r>
+            <a:r>
+              <a:rPr lang="en-US" dirty="0"/>
+              <a:t>— for example if real activity falls into several distinct states (different behaviors), UMAP tends to show them as separate groups. Its weakness: it can </a:t>
+            </a:r>
+            <a:r>
+              <a:rPr lang="en-US" i="1" dirty="0"/>
+              <a:t>invent</a:t>
+            </a:r>
+            <a:r>
+              <a:rPr lang="en-US" dirty="0"/>
+              <a:t> structure that isn't really there, and distances between clusters aren't meaningful.</a:t>
+            </a:r>
+          </a:p>
+          <a:p>
+            <a:endParaRPr lang="en-US" dirty="0"/>
+          </a:p>
+          <a:p>
+            <a:r>
+              <a:rPr lang="en-US" b="1" dirty="0"/>
+              <a:t>Why both:</a:t>
+            </a:r>
+            <a:r>
+              <a:rPr lang="en-US" dirty="0"/>
+              <a:t> they cross-check each other — PCA for spread, UMAP for structure.</a:t>
+            </a:r>
+            <a:endParaRPr lang="de-DE" dirty="0"/>
           </a:p>
         </p:txBody>
       </p:sp>
@@ -5228,7 +10532,7 @@
             <a:pPr rtl="0"/>
             <a:fld id="{4C3B2649-7BD8-4005-A99E-30D13769A8BD}" type="slidenum">
               <a:rPr lang="en-US" smtClean="0"/>
-              <a:t>17</a:t>
+              <a:t>16</a:t>
             </a:fld>
             <a:endParaRPr lang="en-US" dirty="0"/>
           </a:p>
@@ -5237,7 +10541,7 @@
     </p:spTree>
     <p:extLst>
       <p:ext uri="{BB962C8B-B14F-4D97-AF65-F5344CB8AC3E}">
-        <p14:creationId xmlns:p14="http://schemas.microsoft.com/office/powerpoint/2010/main" val="3646035373"/>
+        <p14:creationId xmlns:p14="http://schemas.microsoft.com/office/powerpoint/2010/main" val="1243690433"/>
       </p:ext>
     </p:extLst>
   </p:cSld>
@@ -11800,15 +17104,7 @@
           <a:p>
             <a:r>
               <a:rPr lang="en-GB" noProof="0" dirty="0"/>
-              <a:t>Big </a:t>
-            </a:r>
-            <a:r>
-              <a:rPr lang="en-GB" noProof="0" dirty="0" err="1"/>
-              <a:t>variaity</a:t>
-            </a:r>
-            <a:r>
-              <a:rPr lang="en-GB" noProof="0" dirty="0"/>
-              <a:t> between sessions</a:t>
+              <a:t>Big variety between sessions</a:t>
             </a:r>
             <a:br>
               <a:rPr lang="en-GB" noProof="0" dirty="0"/>
@@ -12289,15 +17585,7 @@
             <a:pPr lvl="1"/>
             <a:r>
               <a:rPr lang="en-GB" noProof="0" dirty="0"/>
-              <a:t>Add optimal-transport  metric (</a:t>
-            </a:r>
-            <a:r>
-              <a:rPr lang="en-GB" noProof="0" dirty="0" err="1"/>
-              <a:t>Sourmpis</a:t>
-            </a:r>
-            <a:r>
-              <a:rPr lang="en-GB" noProof="0" dirty="0"/>
-              <a:t> et al. 2023) to eval metric</a:t>
+              <a:t>Add optimal-transport metric to eval metric</a:t>
             </a:r>
           </a:p>
         </p:txBody>
@@ -12770,7 +18058,7 @@
         </p:spPr>
         <p:txBody>
           <a:bodyPr>
-            <a:normAutofit fontScale="47500" lnSpcReduction="20000"/>
+            <a:normAutofit fontScale="55000" lnSpcReduction="20000"/>
           </a:bodyPr>
           <a:lstStyle/>
           <a:p>
@@ -12857,28 +18145,6 @@
             <a:r>
               <a:rPr lang="en-GB" noProof="0" dirty="0"/>
               <a:t>, X. Ma, A. Smoulder, H. Mao, G. H. Blumenthal, et al., "A generalist intracortical motor decoder (NDT3)," International Conference on Learning Representations (ICLR), 2025.</a:t>
-            </a:r>
-          </a:p>
-          <a:p>
-            <a:r>
-              <a:rPr lang="en-GB" noProof="0" dirty="0"/>
-              <a:t>M. Heusel, H. Ramsauer, T. </a:t>
-            </a:r>
-            <a:r>
-              <a:rPr lang="en-GB" noProof="0" dirty="0" err="1"/>
-              <a:t>Unterthiner</a:t>
-            </a:r>
-            <a:r>
-              <a:rPr lang="en-GB" noProof="0" dirty="0"/>
-              <a:t>, B. Nessler, and S. Hochreiter, "GANs trained by a two time-scale update rule converge to a local Nash equilibrium," Advances in Neural Information Processing Systems (</a:t>
-            </a:r>
-            <a:r>
-              <a:rPr lang="en-GB" noProof="0" dirty="0" err="1"/>
-              <a:t>NeurIPS</a:t>
-            </a:r>
-            <a:r>
-              <a:rPr lang="en-GB" noProof="0" dirty="0"/>
-              <a:t>), vol. 30, 2017.</a:t>
             </a:r>
           </a:p>
           <a:p>
@@ -15898,7 +21164,7 @@
                 <a:avLst/>
               </a:prstGeom>
               <a:blipFill>
-                <a:blip r:embed="rId2"/>
+                <a:blip r:embed="rId3"/>
                 <a:stretch>
                   <a:fillRect/>
                 </a:stretch>
@@ -17869,26 +23135,6 @@
 </file>
 
 <file path=customXml/item2.xml><?xml version="1.0" encoding="utf-8"?>
-<p:properties xmlns:p="http://schemas.microsoft.com/office/2006/metadata/properties" xmlns:xsi="http://www.w3.org/2001/XMLSchema-instance" xmlns:pc="http://schemas.microsoft.com/office/infopath/2007/PartnerControls">
-  <documentManagement>
-    <Status xmlns="71af3243-3dd4-4a8d-8c0d-dd76da1f02a5">Not started</Status>
-    <_ip_UnifiedCompliancePolicyUIAction xmlns="http://schemas.microsoft.com/sharepoint/v3" xsi:nil="true"/>
-    <Image xmlns="71af3243-3dd4-4a8d-8c0d-dd76da1f02a5">
-      <Url xsi:nil="true"/>
-      <Description xsi:nil="true"/>
-    </Image>
-    <_ip_UnifiedCompliancePolicyProperties xmlns="http://schemas.microsoft.com/sharepoint/v3" xsi:nil="true"/>
-    <TaxCatchAll xmlns="230e9df3-be65-4c73-a93b-d1236ebd677e" xsi:nil="true"/>
-    <MediaServiceKeyPoints xmlns="71af3243-3dd4-4a8d-8c0d-dd76da1f02a5" xsi:nil="true"/>
-    <Background xmlns="71af3243-3dd4-4a8d-8c0d-dd76da1f02a5">false</Background>
-    <ImageTagsTaxHTField xmlns="71af3243-3dd4-4a8d-8c0d-dd76da1f02a5">
-      <Terms xmlns="http://schemas.microsoft.com/office/infopath/2007/PartnerControls"/>
-    </ImageTagsTaxHTField>
-  </documentManagement>
-</p:properties>
-</file>
-
-<file path=customXml/item3.xml><?xml version="1.0" encoding="utf-8"?>
 <ct:contentTypeSchema xmlns:ct="http://schemas.microsoft.com/office/2006/metadata/contentType" xmlns:ma="http://schemas.microsoft.com/office/2006/metadata/properties/metaAttributes" ct:_="" ma:_="" ma:contentTypeName="Document" ma:contentTypeID="0x01010079F111ED35F8CC479449609E8A0923A6" ma:contentTypeVersion="28" ma:contentTypeDescription="Create a new document." ma:contentTypeScope="" ma:versionID="60f5a4f2d2b0abadcf532d48ebf9cb71">
   <xsd:schema xmlns:xsd="http://www.w3.org/2001/XMLSchema" xmlns:xs="http://www.w3.org/2001/XMLSchema" xmlns:p="http://schemas.microsoft.com/office/2006/metadata/properties" xmlns:ns1="http://schemas.microsoft.com/sharepoint/v3" xmlns:ns2="71af3243-3dd4-4a8d-8c0d-dd76da1f02a5" xmlns:ns3="16c05727-aa75-4e4a-9b5f-8a80a1165891" xmlns:ns4="230e9df3-be65-4c73-a93b-d1236ebd677e" targetNamespace="http://schemas.microsoft.com/office/2006/metadata/properties" ma:root="true" ma:fieldsID="7dd78129e6a1811f84807ad11c651531" ns1:_="" ns2:_="" ns3:_="" ns4:_="">
     <xsd:import namespace="http://schemas.microsoft.com/sharepoint/v3"/>
@@ -18200,6 +23446,26 @@
 </ct:contentTypeSchema>
 </file>
 
+<file path=customXml/item3.xml><?xml version="1.0" encoding="utf-8"?>
+<p:properties xmlns:p="http://schemas.microsoft.com/office/2006/metadata/properties" xmlns:xsi="http://www.w3.org/2001/XMLSchema-instance" xmlns:pc="http://schemas.microsoft.com/office/infopath/2007/PartnerControls">
+  <documentManagement>
+    <Status xmlns="71af3243-3dd4-4a8d-8c0d-dd76da1f02a5">Not started</Status>
+    <_ip_UnifiedCompliancePolicyUIAction xmlns="http://schemas.microsoft.com/sharepoint/v3" xsi:nil="true"/>
+    <Image xmlns="71af3243-3dd4-4a8d-8c0d-dd76da1f02a5">
+      <Url xsi:nil="true"/>
+      <Description xsi:nil="true"/>
+    </Image>
+    <_ip_UnifiedCompliancePolicyProperties xmlns="http://schemas.microsoft.com/sharepoint/v3" xsi:nil="true"/>
+    <TaxCatchAll xmlns="230e9df3-be65-4c73-a93b-d1236ebd677e" xsi:nil="true"/>
+    <MediaServiceKeyPoints xmlns="71af3243-3dd4-4a8d-8c0d-dd76da1f02a5" xsi:nil="true"/>
+    <Background xmlns="71af3243-3dd4-4a8d-8c0d-dd76da1f02a5">false</Background>
+    <ImageTagsTaxHTField xmlns="71af3243-3dd4-4a8d-8c0d-dd76da1f02a5">
+      <Terms xmlns="http://schemas.microsoft.com/office/infopath/2007/PartnerControls"/>
+    </ImageTagsTaxHTField>
+  </documentManagement>
+</p:properties>
+</file>
+
 <file path=customXml/itemProps1.xml><?xml version="1.0" encoding="utf-8"?>
 <ds:datastoreItem xmlns:ds="http://schemas.openxmlformats.org/officeDocument/2006/customXml" ds:itemID="{16D4D9BD-AE11-4F3A-9185-74D1F42CA599}">
   <ds:schemaRefs>
@@ -18209,18 +23475,6 @@
 </file>
 
 <file path=customXml/itemProps2.xml><?xml version="1.0" encoding="utf-8"?>
-<ds:datastoreItem xmlns:ds="http://schemas.openxmlformats.org/officeDocument/2006/customXml" ds:itemID="{B2B7AAFC-BA46-4192-9EDD-FC31D26BDA5D}">
-  <ds:schemaRefs>
-    <ds:schemaRef ds:uri="http://schemas.microsoft.com/office/2006/metadata/properties"/>
-    <ds:schemaRef ds:uri="http://schemas.microsoft.com/office/infopath/2007/PartnerControls"/>
-    <ds:schemaRef ds:uri="71af3243-3dd4-4a8d-8c0d-dd76da1f02a5"/>
-    <ds:schemaRef ds:uri="http://schemas.microsoft.com/sharepoint/v3"/>
-    <ds:schemaRef ds:uri="230e9df3-be65-4c73-a93b-d1236ebd677e"/>
-  </ds:schemaRefs>
-</ds:datastoreItem>
-</file>
-
-<file path=customXml/itemProps3.xml><?xml version="1.0" encoding="utf-8"?>
 <ds:datastoreItem xmlns:ds="http://schemas.openxmlformats.org/officeDocument/2006/customXml" ds:itemID="{4CA8F0A8-0272-4870-9FED-50919032B813}">
   <ds:schemaRefs>
     <ds:schemaRef ds:uri="http://schemas.microsoft.com/office/2006/metadata/contentType"/>
@@ -18241,6 +23495,18 @@
 </ds:datastoreItem>
 </file>
 
+<file path=customXml/itemProps3.xml><?xml version="1.0" encoding="utf-8"?>
+<ds:datastoreItem xmlns:ds="http://schemas.openxmlformats.org/officeDocument/2006/customXml" ds:itemID="{B2B7AAFC-BA46-4192-9EDD-FC31D26BDA5D}">
+  <ds:schemaRefs>
+    <ds:schemaRef ds:uri="http://schemas.microsoft.com/office/2006/metadata/properties"/>
+    <ds:schemaRef ds:uri="http://schemas.microsoft.com/office/infopath/2007/PartnerControls"/>
+    <ds:schemaRef ds:uri="71af3243-3dd4-4a8d-8c0d-dd76da1f02a5"/>
+    <ds:schemaRef ds:uri="http://schemas.microsoft.com/sharepoint/v3"/>
+    <ds:schemaRef ds:uri="230e9df3-be65-4c73-a93b-d1236ebd677e"/>
+  </ds:schemaRefs>
+</ds:datastoreItem>
+</file>
+
 <file path=docMetadata/LabelInfo.xml><?xml version="1.0" encoding="utf-8"?>
 <clbl:labelList xmlns:clbl="http://schemas.microsoft.com/office/2020/mipLabelMetadata"/>
 </file>